--- a/presentation/taskflow-ek1.pptx
+++ b/presentation/taskflow-ek1.pptx
@@ -2,21 +2,21 @@
 <file path=ppt/presentation.xml><?xml version="1.0" encoding="utf-8"?>
 <p:presentation xmlns:p="http://schemas.openxmlformats.org/presentationml/2006/main">
   <p:sldMasterIdLst>
-    <p:sldMasterId xmlns:r="http://schemas.openxmlformats.org/officeDocument/2006/relationships" id="2147483648" r:id="Rf7f0282807184a22"/>
+    <p:sldMasterId xmlns:r="http://schemas.openxmlformats.org/officeDocument/2006/relationships" id="2147483648" r:id="Rfd2becc5ef064e6b"/>
   </p:sldMasterIdLst>
   <p:notesMasterIdLst>
-    <p:notesMasterId xmlns:r="http://schemas.openxmlformats.org/officeDocument/2006/relationships" r:id="Ra31c55d44baa4b1e"/>
+    <p:notesMasterId xmlns:r="http://schemas.openxmlformats.org/officeDocument/2006/relationships" r:id="Rf387fef931e1493b"/>
   </p:notesMasterIdLst>
   <p:sldIdLst>
-    <p:sldId xmlns:r="http://schemas.openxmlformats.org/officeDocument/2006/relationships" id="256" r:id="R88d475ab05c34349"/>
-    <p:sldId xmlns:r="http://schemas.openxmlformats.org/officeDocument/2006/relationships" id="257" r:id="R6fa87d75782e4b4d"/>
-    <p:sldId xmlns:r="http://schemas.openxmlformats.org/officeDocument/2006/relationships" id="258" r:id="Reb54495f9d714661"/>
-    <p:sldId xmlns:r="http://schemas.openxmlformats.org/officeDocument/2006/relationships" id="259" r:id="Rd12fb16f725e4ac7"/>
-    <p:sldId xmlns:r="http://schemas.openxmlformats.org/officeDocument/2006/relationships" id="260" r:id="Rc65dd73efa0b4a5c"/>
-    <p:sldId xmlns:r="http://schemas.openxmlformats.org/officeDocument/2006/relationships" id="261" r:id="Re795814e2f774ce4"/>
-    <p:sldId xmlns:r="http://schemas.openxmlformats.org/officeDocument/2006/relationships" id="262" r:id="R3f9a9f25083146f7"/>
-    <p:sldId xmlns:r="http://schemas.openxmlformats.org/officeDocument/2006/relationships" id="263" r:id="Rb3dcbf1a53da4b8d"/>
-    <p:sldId xmlns:r="http://schemas.openxmlformats.org/officeDocument/2006/relationships" id="264" r:id="R56cf156a48644b78"/>
+    <p:sldId xmlns:r="http://schemas.openxmlformats.org/officeDocument/2006/relationships" id="256" r:id="R55becc7d521a4a47"/>
+    <p:sldId xmlns:r="http://schemas.openxmlformats.org/officeDocument/2006/relationships" id="257" r:id="Rf92fcb5e00874b2b"/>
+    <p:sldId xmlns:r="http://schemas.openxmlformats.org/officeDocument/2006/relationships" id="258" r:id="R2ce952b0d59f45fe"/>
+    <p:sldId xmlns:r="http://schemas.openxmlformats.org/officeDocument/2006/relationships" id="259" r:id="Rb9a6b305661749c9"/>
+    <p:sldId xmlns:r="http://schemas.openxmlformats.org/officeDocument/2006/relationships" id="260" r:id="Re36c2f71c4824165"/>
+    <p:sldId xmlns:r="http://schemas.openxmlformats.org/officeDocument/2006/relationships" id="261" r:id="R80b40d06d7134cc8"/>
+    <p:sldId xmlns:r="http://schemas.openxmlformats.org/officeDocument/2006/relationships" id="262" r:id="R52477179437448c2"/>
+    <p:sldId xmlns:r="http://schemas.openxmlformats.org/officeDocument/2006/relationships" id="263" r:id="R7d14030a01fd4c1c"/>
+    <p:sldId xmlns:r="http://schemas.openxmlformats.org/officeDocument/2006/relationships" id="264" r:id="R9d94c29bc5f548a0"/>
   </p:sldIdLst>
   <p:sldSz cx="12192000" cy="6858000"/>
   <p:notesSz cx="6858000" cy="9144000"/>
@@ -450,12 +450,12 @@
           <a:lstStyle xmlns:a="http://schemas.openxmlformats.org/drawingml/2006/main"/>
           <a:p xmlns:a="http://schemas.openxmlformats.org/drawingml/2006/main">
             <a:r>
-              <a:t>Основная часть: 15 секунд.</a:t>
-            </a:r>
-          </a:p>
-          <a:p xmlns:a="http://schemas.openxmlformats.org/drawingml/2006/main">
-            <a:r>
-              <a:t>Мы представляем TaskFlow — локальный трекер задач для учебной команды. Наша цель — связать конкретные права пользователей с проверками кода и понятными условиями выпуска. Покажем выбранную основу, реальный разрыв и план работы пары.</a:t>
+              <a:t>Основная часть: 15 секунд. Роман.</a:t>
+            </a:r>
+          </a:p>
+          <a:p xmlns:a="http://schemas.openxmlformats.org/drawingml/2006/main">
+            <a:r>
+              <a:t>Мы делаем TaskFlow, трекер задач для небольшой команды. На первой защите показываем, как будем разрабатывать его безопасно: какие правила выбрали, что уже проверено и что делает каждый участник.</a:t>
             </a:r>
           </a:p>
           <a:p xmlns:a="http://schemas.openxmlformats.org/drawingml/2006/main">
@@ -480,7 +480,7 @@
           </a:p>
           <a:p xmlns:a="http://schemas.openxmlformats.org/drawingml/2006/main">
             <a:r>
-              <a:t>Обложка: иллюстрация OpenAI ImageGen, создана для этой презентации.</a:t>
+              <a:t>Обложка: иллюстрация OpenAI ImageGen.</a:t>
             </a:r>
           </a:p>
         </p:txBody>
@@ -550,12 +550,27 @@
           <a:lstStyle xmlns:a="http://schemas.openxmlformats.org/drawingml/2006/main"/>
           <a:p xmlns:a="http://schemas.openxmlformats.org/drawingml/2006/main">
             <a:r>
-              <a:t>Основная часть: 35 секунд.</a:t>
-            </a:r>
-          </a:p>
-          <a:p xmlns:a="http://schemas.openxmlformats.org/drawingml/2006/main">
-            <a:r>
-              <a:t>Владелец управляет проектом, участниками и удалением. Редактор создаёт и меняет задачи, пишет комментарии. Наблюдатель только читает. Посторонний не видит чужой проект. Роль действует внутри проекта, поэтому один человек может иметь разные права в разных проектах. Проверяем Django и SQLite на localhost с синтетическими данными. Публичный хостинг, вложения и реальные данные в область не входят. Исследуем baseline-mvp, планируемый продуктовый выпуск — v1.0.0.</a:t>
+              <a:t>Основная часть: 25 секунд. Роман.</a:t>
+            </a:r>
+          </a:p>
+          <a:p xmlns:a="http://schemas.openxmlformats.org/drawingml/2006/main">
+            <a:r>
+              <a:t>Владелец управляет задачами и участниками. Редактор меняет задачи и пишет комментарии. Наблюдатель только читает. Посторонний не видит чужой проект. Права действуют отдельно в каждом проекте. Приложение работает локально на Django и SQLite, данные учебные. Исходная версия для исследования называется baseline-mvp, будущий выпуск — v1.0.0.</a:t>
+            </a:r>
+          </a:p>
+          <a:p xmlns:a="http://schemas.openxmlformats.org/drawingml/2006/main">
+            <a:r>
+              <a:t/>
+            </a:r>
+          </a:p>
+          <a:p xmlns:a="http://schemas.openxmlformats.org/drawingml/2006/main">
+            <a:r>
+              <a:t>Для вопросов:</a:t>
+            </a:r>
+          </a:p>
+          <a:p xmlns:a="http://schemas.openxmlformats.org/drawingml/2006/main">
+            <a:r>
+              <a:t>Публичный хостинг, вложения и реальные пользовательские данные не входят в область проекта. Один пользователь может иметь разные роли в разных проектах.</a:t>
             </a:r>
           </a:p>
           <a:p xmlns:a="http://schemas.openxmlformats.org/drawingml/2006/main">
@@ -650,12 +665,12 @@
           <a:lstStyle xmlns:a="http://schemas.openxmlformats.org/drawingml/2006/main"/>
           <a:p xmlns:a="http://schemas.openxmlformats.org/drawingml/2006/main">
             <a:r>
-              <a:t>Основная часть: 45 секунд.</a:t>
-            </a:r>
-          </a:p>
-          <a:p xmlns:a="http://schemas.openxmlformats.org/drawingml/2006/main">
-            <a:r>
-              <a:t>Мы выбрали вариант A: основная рамка SSDF 1.1, дополнительный источник ASVS 5.0.0. SSDF охватывает жизненный цикл и позволяет превратить семь положений в действия двух участников без отдельного отдела безопасности. Источник открыт. SAMM больше помогает оценивать и развивать устойчивые практики; у нашего проекта пока короткая история. ГОСТ также применим, но не даёт отдельного преимущества для выбранной учебной области. ASVS уточняет техническую часть веб-проверок. Мы не заявляем полное соответствие стандартам или уровень ASVS.</a:t>
+              <a:t>Основная часть: 45 секунд. Роман.</a:t>
+            </a:r>
+          </a:p>
+          <a:p xmlns:a="http://schemas.openxmlformats.org/drawingml/2006/main">
+            <a:r>
+              <a:t>SSDF отвечает на вопрос, как организовать безопасную разработку. Он охватывает путь от требований до выпуска и исправлений, а способы выполнения мы подбираем под двух человек. Полный текст открыт. Из него мы выбрали семь правил, например проверку кода партнёром и сохранение результатов тестов. ASVS отвечает на вопрос, что именно проверять в веб-приложении: доступ, вход и обработку текста. Вместе получаем и порядок работы, и технические требования. Один SSDF не даёт подробного списка веб-проверок, а ASVS не описывает весь процесс команды.</a:t>
             </a:r>
           </a:p>
           <a:p xmlns:a="http://schemas.openxmlformats.org/drawingml/2006/main">
@@ -665,6 +680,21 @@
           </a:p>
           <a:p xmlns:a="http://schemas.openxmlformats.org/drawingml/2006/main">
             <a:r>
+              <a:t>Для вопросов:</a:t>
+            </a:r>
+          </a:p>
+          <a:p xmlns:a="http://schemas.openxmlformats.org/drawingml/2006/main">
+            <a:r>
+              <a:t>Семь правил в §2 паспорта: PO.1.2, PO.2.1, PS.1.1, PW.7.1–7.2, PW.8.1–8.2, PS.3.1, RV.2.1–2.2. Их действия, роли, результаты и условия принятия описаны отдельно. Полное соответствие SSDF или уровень ASVS не заявляем. ASVS содержит требования, а конкретные тесты команда проектирует сама.</a:t>
+            </a:r>
+          </a:p>
+          <a:p xmlns:a="http://schemas.openxmlformats.org/drawingml/2006/main">
+            <a:r>
+              <a:t/>
+            </a:r>
+          </a:p>
+          <a:p xmlns:a="http://schemas.openxmlformats.org/drawingml/2006/main">
+            <a:r>
               <a:t>Источники:</a:t>
             </a:r>
           </a:p>
@@ -680,22 +710,12 @@
           </a:p>
           <a:p xmlns:a="http://schemas.openxmlformats.org/drawingml/2006/main">
             <a:r>
-              <a:t>https://owaspsamm.org/model/</a:t>
-            </a:r>
-          </a:p>
-          <a:p xmlns:a="http://schemas.openxmlformats.org/drawingml/2006/main">
-            <a:r>
-              <a:t>https://protect.gost.ru/gost/details/f3818925-a96f-4f55-96e9-46b44720ee64</a:t>
-            </a:r>
-          </a:p>
-          <a:p xmlns:a="http://schemas.openxmlformats.org/drawingml/2006/main">
-            <a:r>
               <a:t>https://github.com/hse-rbpo-master-2026/course/blob/5ce5fdf4ba4bb32ac62d1b9c6728f3a6d8fa6884/lectures/L03.pdf</a:t>
             </a:r>
           </a:p>
           <a:p xmlns:a="http://schemas.openxmlformats.org/drawingml/2006/main">
             <a:r>
-              <a:t>https://github.com/rbeketov/rbpo-yavkaib/blob/main/docs/methodology-options.md</a:t>
+              <a:t>https://github.com/rbeketov/rbpo-yavkaib/blob/main/project.md</a:t>
             </a:r>
           </a:p>
         </p:txBody>
@@ -765,12 +785,12 @@
           <a:lstStyle xmlns:a="http://schemas.openxmlformats.org/drawingml/2006/main"/>
           <a:p xmlns:a="http://schemas.openxmlformats.org/drawingml/2006/main">
             <a:r>
-              <a:t>Основная часть: 35 секунд.</a:t>
-            </a:r>
-          </a:p>
-          <a:p xmlns:a="http://schemas.openxmlformats.org/drawingml/2006/main">
-            <a:r>
-              <a:t>Пример адаптации SSDF — проверка работающего кода PW.8. Требование продукта: наблюдатель не меняет задачу. Роман отправляет запрос от viewer и допустимый запрос от editor. В первом случае должны быть отказ и неизменная база, во втором — разрешённое изменение. Ярослав независимо повторяет запрет и читает проверку прав. Сохраняем версию, условия и результат. Если поведение не соответствует требованию, изменение не включаем. Это наша адаптация SSDF к паре, а не дословное требование стандарта.</a:t>
+              <a:t>Основная часть: 35 секунд. Роман.</a:t>
+            </a:r>
+          </a:p>
+          <a:p xmlns:a="http://schemas.openxmlformats.org/drawingml/2006/main">
+            <a:r>
+              <a:t>SAMM рассмотрели, потому что он помогает оценивать и улучшать практики команды. Но TaskFlow только начат, истории проверок мало. Сейчас нам важнее установить правила работы. ГОСТ рассмотрели как полноценную основу безопасной разработки. Задание курса разрешает выбрать основу и не требует именно ГОСТ. Мы взяли SSDF: его полный текст открыт, а выбранных практик достаточно для нашей области. Это выбор под задачу, а не утверждение, что SAMM или ГОСТ хуже.</a:t>
             </a:r>
           </a:p>
           <a:p xmlns:a="http://schemas.openxmlformats.org/drawingml/2006/main">
@@ -780,27 +800,57 @@
           </a:p>
           <a:p xmlns:a="http://schemas.openxmlformats.org/drawingml/2006/main">
             <a:r>
+              <a:t>Для вопросов:</a:t>
+            </a:r>
+          </a:p>
+          <a:p xmlns:a="http://schemas.openxmlformats.org/drawingml/2006/main">
+            <a:r>
+              <a:t>SAMM применим и к маленькой команде. Его можно использовать позже для оценки того, насколько устойчиво выполняются правила. ГОСТ не ограничен государственными или сертифицируемыми проектами. Обязательность по закону или договору устанавливается отдельно. Официальная карточка ГОСТ подтверждает сведения о стандарте, но не заменяет полный текст требований. Для альтернативного выбора потребовались бы назначенные положения из ЭИОС или другой законный доступ.</a:t>
+            </a:r>
+          </a:p>
+          <a:p xmlns:a="http://schemas.openxmlformats.org/drawingml/2006/main">
+            <a:r>
+              <a:t/>
+            </a:r>
+          </a:p>
+          <a:p xmlns:a="http://schemas.openxmlformats.org/drawingml/2006/main">
+            <a:r>
               <a:t>Источники:</a:t>
             </a:r>
           </a:p>
           <a:p xmlns:a="http://schemas.openxmlformats.org/drawingml/2006/main">
             <a:r>
+              <a:t>https://owaspsamm.org/model/</a:t>
+            </a:r>
+          </a:p>
+          <a:p xmlns:a="http://schemas.openxmlformats.org/drawingml/2006/main">
+            <a:r>
+              <a:t>https://owaspsamm.org/assessment/</a:t>
+            </a:r>
+          </a:p>
+          <a:p xmlns:a="http://schemas.openxmlformats.org/drawingml/2006/main">
+            <a:r>
+              <a:t>https://protect.gost.ru/gost/details/f3818925-a96f-4f55-96e9-46b44720ee64</a:t>
+            </a:r>
+          </a:p>
+          <a:p xmlns:a="http://schemas.openxmlformats.org/drawingml/2006/main">
+            <a:r>
               <a:t>https://csrc.nist.gov/pubs/sp/800/218/final</a:t>
             </a:r>
           </a:p>
           <a:p xmlns:a="http://schemas.openxmlformats.org/drawingml/2006/main">
             <a:r>
-              <a:t>https://github.com/rbeketov/rbpo-yavkaib/blob/main/project.md</a:t>
-            </a:r>
-          </a:p>
-          <a:p xmlns:a="http://schemas.openxmlformats.org/drawingml/2006/main">
-            <a:r>
-              <a:t>https://github.com/rbeketov/rbpo-yavkaib/blob/main/tracker/permissions.py</a:t>
-            </a:r>
-          </a:p>
-          <a:p xmlns:a="http://schemas.openxmlformats.org/drawingml/2006/main">
-            <a:r>
-              <a:t>https://github.com/rbeketov/rbpo-yavkaib/blob/main/tracker/tests.py</a:t>
+              <a:t>https://github.com/hse-rbpo-master-2026/course/blob/5ce5fdf4ba4bb32ac62d1b9c6728f3a6d8fa6884/seminars/S02.md</a:t>
+            </a:r>
+          </a:p>
+          <a:p xmlns:a="http://schemas.openxmlformats.org/drawingml/2006/main">
+            <a:r>
+              <a:t>https://github.com/hse-rbpo-master-2026/course/blob/5ce5fdf4ba4bb32ac62d1b9c6728f3a6d8fa6884/lectures/L03.pdf</a:t>
+            </a:r>
+          </a:p>
+          <a:p xmlns:a="http://schemas.openxmlformats.org/drawingml/2006/main">
+            <a:r>
+              <a:t>https://github.com/hse-rbpo-master-2026/course/blob/5ce5fdf4ba4bb32ac62d1b9c6728f3a6d8fa6884/lectures/L04.pdf</a:t>
             </a:r>
           </a:p>
         </p:txBody>
@@ -870,12 +920,12 @@
           <a:lstStyle xmlns:a="http://schemas.openxmlformats.org/drawingml/2006/main"/>
           <a:p xmlns:a="http://schemas.openxmlformats.org/drawingml/2006/main">
             <a:r>
-              <a:t>Основная часть: 35 секунд.</a:t>
-            </a:r>
-          </a:p>
-          <a:p xmlns:a="http://schemas.openxmlformats.org/drawingml/2006/main">
-            <a:r>
-              <a:t>В baseline прошли 27 тестов и пять инженерных проверок. Сохранены версии и хеши; код приложения с тех пор не изменялся. В срезе публичного API есть четыре успешных CI-запуска и ноль PR. Это не доказывает отсутствие устных обсуждений, но независимый review в репозитории не подтверждён. Поэтому G1 имеет высокий приоритет: код и тест могут содержать общую ошибку. Отдельные средние разрывы — отсутствие CVE-триажа и независимого запуска архива. Они ограничивают основание выпуска, но сами по себе не доказывают уязвимость.</a:t>
+              <a:t>Основная часть: 30 секунд. Ярослав.</a:t>
+            </a:r>
+          </a:p>
+          <a:p xmlns:a="http://schemas.openxmlformats.org/drawingml/2006/main">
+            <a:r>
+              <a:t>В исходной версии прошли 27 тестов. Результаты и версия кода сохранены. Но на дату исследования, четвёртое октября, в репозитории не было подтверждения независимой проверки вторым участником. Код и тест могут повторять одну ошибку. Поэтому первый шаг — взаимная проверка прав пользователей. Также нужно проверить библиотеки на известные уязвимости и повторить установку из архива.</a:t>
             </a:r>
           </a:p>
           <a:p xmlns:a="http://schemas.openxmlformats.org/drawingml/2006/main">
@@ -885,6 +935,21 @@
           </a:p>
           <a:p xmlns:a="http://schemas.openxmlformats.org/drawingml/2006/main">
             <a:r>
+              <a:t>Для вопросов:</a:t>
+            </a:r>
+          </a:p>
+          <a:p xmlns:a="http://schemas.openxmlformats.org/drawingml/2006/main">
+            <a:r>
+              <a:t>Это срез на 04.10.2026, а не утверждение о состоянии истории в любой будущий момент. G1 имеет высокий приоритет, G2 и G3 — средний. Пять инженерных проверок baseline прошли. Успех тестов не доказывает отсутствие всех уязвимостей. pip check проверяет согласованность зависимостей, но не заменяет аудит известных CVE.</a:t>
+            </a:r>
+          </a:p>
+          <a:p xmlns:a="http://schemas.openxmlformats.org/drawingml/2006/main">
+            <a:r>
+              <a:t/>
+            </a:r>
+          </a:p>
+          <a:p xmlns:a="http://schemas.openxmlformats.org/drawingml/2006/main">
+            <a:r>
               <a:t>Источники:</a:t>
             </a:r>
           </a:p>
@@ -900,7 +965,7 @@
           </a:p>
           <a:p xmlns:a="http://schemas.openxmlformats.org/drawingml/2006/main">
             <a:r>
-              <a:t>https://github.com/hse-rbpo-master-2026/course/blob/5ce5fdf4ba4bb32ac62d1b9c6728f3a6d8fa6884/lectures/L04.pdf</a:t>
+              <a:t>https://github.com/rbeketov/rbpo-yavkaib/blob/main/project.md</a:t>
             </a:r>
           </a:p>
         </p:txBody>
@@ -970,12 +1035,12 @@
           <a:lstStyle xmlns:a="http://schemas.openxmlformats.org/drawingml/2006/main"/>
           <a:p xmlns:a="http://schemas.openxmlformats.org/drawingml/2006/main">
             <a:r>
-              <a:t>Основная часть: 40 секунд.</a:t>
-            </a:r>
-          </a:p>
-          <a:p xmlns:a="http://schemas.openxmlformats.org/drawingml/2006/main">
-            <a:r>
-              <a:t>Перед реализацией автор фиксирует роль, объект и негативный сценарий. Перед merge должны пройти проверки, а другой участник читает код и повторяет существенный случай. Автор себя не одобряет, ИИ проверяющего не заменяет. Перед продуктовым выпуском Роман собирает результаты и архив, Ярослав воспроизводит установку, оба принимают решение. Без проверяющего, при нарушении прав или неразобранном существенном результате переход откладываем. Некритическое исключение оформляем со сроком до семи дней и согласием обоих. При споре сохраняем позиции, обращаемся к преподавателю и откладываем выпуск. Обязательность статуса GitHub технически не подтверждена, поэтому это правило пары.</a:t>
+              <a:t>Основная часть: 50 секунд. Ярослав.</a:t>
+            </a:r>
+          </a:p>
+          <a:p xmlns:a="http://schemas.openxmlformats.org/drawingml/2006/main">
+            <a:r>
+              <a:t>Перед изменением автор описывает ожидаемое поведение, затем меняет код и запускает тесты. Партнёр читает код и независимо повторяет важный сценарий. Например, наблюдатель отправляет прямой запрос на изменение задачи. Сервер должен отказать, а данные остаться прежними. Такой же запрос от редактора должен сработать. Сохраняем версию кода, условия и результат проверки. Так мы применяем правило SSDF PW.8. Если права нарушены или партнёр не проверил изменение, откладываем его. Перед выпуском Ярослав повторяет установку из архива, Роман собирает результаты. Решение о выпуске принимаем вместе.</a:t>
             </a:r>
           </a:p>
           <a:p xmlns:a="http://schemas.openxmlformats.org/drawingml/2006/main">
@@ -985,11 +1050,31 @@
           </a:p>
           <a:p xmlns:a="http://schemas.openxmlformats.org/drawingml/2006/main">
             <a:r>
+              <a:t>Для вопросов:</a:t>
+            </a:r>
+          </a:p>
+          <a:p xmlns:a="http://schemas.openxmlformats.org/drawingml/2006/main">
+            <a:r>
+              <a:t>PW.8.1–8.2 задаёт тестирование исполняемого кода. Сценарий, независимый повтор и правило приёмки являются нашей адаптацией. Нужен контрольный разрешённый запрос от editor, чтобы отличить проверку прав от общей поломки функции. Для версии сохраняем результат CI, отчёт и комментарий проверяющего. Автор не одобряет собственную работу. Некритическое исключение требует записи, срока до семи дней и согласия обоих. Нарушение прав исключением не допускается. При споре откладываем выпуск и обращаемся к преподавателю.</a:t>
+            </a:r>
+          </a:p>
+          <a:p xmlns:a="http://schemas.openxmlformats.org/drawingml/2006/main">
+            <a:r>
+              <a:t/>
+            </a:r>
+          </a:p>
+          <a:p xmlns:a="http://schemas.openxmlformats.org/drawingml/2006/main">
+            <a:r>
               <a:t>Источники:</a:t>
             </a:r>
           </a:p>
           <a:p xmlns:a="http://schemas.openxmlformats.org/drawingml/2006/main">
             <a:r>
+              <a:t>https://csrc.nist.gov/pubs/sp/800/218/final</a:t>
+            </a:r>
+          </a:p>
+          <a:p xmlns:a="http://schemas.openxmlformats.org/drawingml/2006/main">
+            <a:r>
               <a:t>https://github.com/rbeketov/rbpo-yavkaib/blob/main/project.md</a:t>
             </a:r>
           </a:p>
@@ -1000,7 +1085,7 @@
           </a:p>
           <a:p xmlns:a="http://schemas.openxmlformats.org/drawingml/2006/main">
             <a:r>
-              <a:t>https://github.com/hse-rbpo-master-2026/course/blob/5ce5fdf4ba4bb32ac62d1b9c6728f3a6d8fa6884/lectures/L05.pdf</a:t>
+              <a:t>https://github.com/rbeketov/rbpo-yavkaib/blob/main/tracker/tests.py</a:t>
             </a:r>
           </a:p>
         </p:txBody>
@@ -1070,12 +1155,12 @@
           <a:lstStyle xmlns:a="http://schemas.openxmlformats.org/drawingml/2006/main"/>
           <a:p xmlns:a="http://schemas.openxmlformats.org/drawingml/2006/main">
             <a:r>
-              <a:t>Основная часть: 35 секунд.</a:t>
-            </a:r>
-          </a:p>
-          <a:p xmlns:a="http://schemas.openxmlformats.org/drawingml/2006/main">
-            <a:r>
-              <a:t>Роман ведёт проверки прав и изоляции, а также зависимостей и конфигурации. Ярослав ведёт ввод, вывод и CSRF, независимо устанавливает архив. Каждый проверяет существенный результат партнёра. Личные задания оформляем в GitHub Issues, отчёты и изменения — через PR. Затем обсуждаем факты на общем созвоне и выбираем улучшение по результатам. Для ЭК1 это предварительный технологический профиль: апробацию и окончательный набор средств уточняем после лекций шесть–восемь.</a:t>
+              <a:t>Основная часть: 40 секунд. Ярослав.</a:t>
+            </a:r>
+          </a:p>
+          <a:p xmlns:a="http://schemas.openxmlformats.org/drawingml/2006/main">
+            <a:r>
+              <a:t>Роман проверяет права трёх ролей, изоляцию проектов, библиотеки и настройки. Ярослав проверяет ввод и вывод текста, защиту запросов от подделки и установку из архива в чистом окружении. Для каждого уже есть отдельное задание в GitHub. Сначала каждый сохраняет отчёт со своими результатами, затем проверяет работу партнёра. После этого созваниваемся, обсуждаем найденные проблемы и выбираем следующее улучшение. План технических проверок на первой защите предварительный, его уточняем после профильных лекций.</a:t>
             </a:r>
           </a:p>
           <a:p xmlns:a="http://schemas.openxmlformats.org/drawingml/2006/main">
@@ -1085,6 +1170,21 @@
           </a:p>
           <a:p xmlns:a="http://schemas.openxmlformats.org/drawingml/2006/main">
             <a:r>
+              <a:t>Для вопросов:</a:t>
+            </a:r>
+          </a:p>
+          <a:p xmlns:a="http://schemas.openxmlformats.org/drawingml/2006/main">
+            <a:r>
+              <a:t>М1: права и изоляция, ведущий Роман, проверяющий Ярослав. М2: ввод, вывод и CSRF, ведущий Ярослав, проверяющий Роман. М3: зависимости и воспроизводимость, Роман ведёт аудит и конфигурацию, Ярослав независимо устанавливает архив. CSRF — подделка запроса от имени вошедшего пользователя. Issue Ярослава пока без назначения аккаунту по договорённости.</a:t>
+            </a:r>
+          </a:p>
+          <a:p xmlns:a="http://schemas.openxmlformats.org/drawingml/2006/main">
+            <a:r>
+              <a:t/>
+            </a:r>
+          </a:p>
+          <a:p xmlns:a="http://schemas.openxmlformats.org/drawingml/2006/main">
+            <a:r>
               <a:t>Источники:</a:t>
             </a:r>
           </a:p>
@@ -1095,7 +1195,12 @@
           </a:p>
           <a:p xmlns:a="http://schemas.openxmlformats.org/drawingml/2006/main">
             <a:r>
-              <a:t>https://github.com/rbeketov/rbpo-yavkaib/issues</a:t>
+              <a:t>https://github.com/rbeketov/rbpo-yavkaib/issues/1</a:t>
+            </a:r>
+          </a:p>
+          <a:p xmlns:a="http://schemas.openxmlformats.org/drawingml/2006/main">
+            <a:r>
+              <a:t>https://github.com/rbeketov/rbpo-yavkaib/issues/2</a:t>
             </a:r>
           </a:p>
           <a:p xmlns:a="http://schemas.openxmlformats.org/drawingml/2006/main">
@@ -1175,7 +1280,7 @@
           </a:p>
           <a:p xmlns:a="http://schemas.openxmlformats.org/drawingml/2006/main">
             <a:r>
-              <a:t>Это выборка задач SSDF, адаптированная к области проекта. Полная таблица применимости, действий, ролей и критериев находится в разделе два паспорта. Частичная применимость означает ограничения локального учебного продукта, а не выполненную сертификацию. ASVS является дополнительным источником для технических сценариев.</a:t>
+              <a:t>ISO/IEC 27034-1 рассмотрели из-за управления безопасностью приложений на уровне организации. В нашей паре нет отдельной организационной задачи, ради которой стоит брать его основой. IEC 62443-4-1 связан с промышленной автоматизацией, TaskFlow находится вне этой области. BSIMM описывает наблюдаемые практики организаций. Сравнение с ними сейчас не является целью проекта.</a:t>
             </a:r>
           </a:p>
           <a:p xmlns:a="http://schemas.openxmlformats.org/drawingml/2006/main">
@@ -1185,22 +1290,47 @@
           </a:p>
           <a:p xmlns:a="http://schemas.openxmlformats.org/drawingml/2006/main">
             <a:r>
+              <a:t>Для вопросов:</a:t>
+            </a:r>
+          </a:p>
+          <a:p xmlns:a="http://schemas.openxmlformats.org/drawingml/2006/main">
+            <a:r>
+              <a:t>ISO и IEC сопоставлены по назначению и области, а не по полному постатейному аудиту. Карточки стандартов не заменяют их полные тексты. На Л04 BSIMM сопоставляется с SAMM как описательная модель с предписывающей. Размер команды сам по себе не делает ISO/IEC 27034 неприменимым.</a:t>
+            </a:r>
+          </a:p>
+          <a:p xmlns:a="http://schemas.openxmlformats.org/drawingml/2006/main">
+            <a:r>
+              <a:t/>
+            </a:r>
+          </a:p>
+          <a:p xmlns:a="http://schemas.openxmlformats.org/drawingml/2006/main">
+            <a:r>
               <a:t>Источники:</a:t>
             </a:r>
           </a:p>
           <a:p xmlns:a="http://schemas.openxmlformats.org/drawingml/2006/main">
             <a:r>
-              <a:t>https://csrc.nist.gov/pubs/sp/800/218/final</a:t>
-            </a:r>
-          </a:p>
-          <a:p xmlns:a="http://schemas.openxmlformats.org/drawingml/2006/main">
-            <a:r>
-              <a:t>https://github.com/OWASP/ASVS/tree/v5.0.0</a:t>
-            </a:r>
-          </a:p>
-          <a:p xmlns:a="http://schemas.openxmlformats.org/drawingml/2006/main">
-            <a:r>
-              <a:t>https://github.com/rbeketov/rbpo-yavkaib/blob/main/project.md</a:t>
+              <a:t>https://www.iso.org/standard/44378.html</a:t>
+            </a:r>
+          </a:p>
+          <a:p xmlns:a="http://schemas.openxmlformats.org/drawingml/2006/main">
+            <a:r>
+              <a:t>https://webstore.iec.ch/en/publication/33615</a:t>
+            </a:r>
+          </a:p>
+          <a:p xmlns:a="http://schemas.openxmlformats.org/drawingml/2006/main">
+            <a:r>
+              <a:t>https://github.com/hse-rbpo-master-2026/course/blob/5ce5fdf4ba4bb32ac62d1b9c6728f3a6d8fa6884/lectures/L03.pdf</a:t>
+            </a:r>
+          </a:p>
+          <a:p xmlns:a="http://schemas.openxmlformats.org/drawingml/2006/main">
+            <a:r>
+              <a:t>https://github.com/hse-rbpo-master-2026/course/blob/5ce5fdf4ba4bb32ac62d1b9c6728f3a6d8fa6884/lectures/L04.pdf</a:t>
+            </a:r>
+          </a:p>
+          <a:p xmlns:a="http://schemas.openxmlformats.org/drawingml/2006/main">
+            <a:r>
+              <a:t>https://github.com/rbeketov/rbpo-yavkaib/blob/main/docs/methodology-options.md</a:t>
             </a:r>
           </a:p>
         </p:txBody>
@@ -1275,7 +1405,22 @@
           </a:p>
           <a:p xmlns:a="http://schemas.openxmlformats.org/drawingml/2006/main">
             <a:r>
-              <a:t>Использовали Codex для автоматизации подготовки текстов, кода, тестов и оформления, а также для вариантов методологии и плана. Выбор TaskFlow и варианта A сделан участником команды. Ответственность за решения и их объяснение остаётся у участников. Проверки средствами Codex сохранены отдельно и не выдаются за независимое человеческое review. Источники — публичный курс и учебный проект, данные для приложения синтетические. Подробности в разделе двенадцать паспорта.</a:t>
+              <a:t>Использовали Codex для подготовки текста, кода, тестов и слайдов, а также для предложений по методологии и плану. Выбор продукта и варианта A сделал участник команды. Ответственность за решения остаётся у участников. Проверки с помощью ИИ не выдаём за независимую проверку человеком.</a:t>
+            </a:r>
+          </a:p>
+          <a:p xmlns:a="http://schemas.openxmlformats.org/drawingml/2006/main">
+            <a:r>
+              <a:t/>
+            </a:r>
+          </a:p>
+          <a:p xmlns:a="http://schemas.openxmlformats.org/drawingml/2006/main">
+            <a:r>
+              <a:t>Для вопросов:</a:t>
+            </a:r>
+          </a:p>
+          <a:p xmlns:a="http://schemas.openxmlformats.org/drawingml/2006/main">
+            <a:r>
+              <a:t>Подробное раскрытие применения ИИ находится в §12 паспорта. Изображение обложки сгенерировано OpenAI ImageGen. Проверка партнёром и совместное решение о выпуске на слайде описывают целевой порядок работы, а не утверждение о уже завершённых действиях.</a:t>
             </a:r>
           </a:p>
           <a:p xmlns:a="http://schemas.openxmlformats.org/drawingml/2006/main">
@@ -1363,7 +1508,7 @@
   </p:cSld>
   <p:clrMap bg1="lt1" tx1="dk1" bg2="lt2" tx2="dk2" accent1="accent1" accent2="accent2" accent3="accent3" accent4="accent4" accent5="accent5" accent6="accent6" hlink="hlink" folHlink="folHlink"/>
   <p:sldLayoutIdLst>
-    <p:sldLayoutId xmlns:r="http://schemas.openxmlformats.org/officeDocument/2006/relationships" id="2147483649" r:id="R105b5748b7dd45be"/>
+    <p:sldLayoutId xmlns:r="http://schemas.openxmlformats.org/officeDocument/2006/relationships" id="2147483649" r:id="R6e5b5d390bfd49d7"/>
   </p:sldLayoutIdLst>
   <p:txStyles>
     <p:titleStyle>
@@ -1911,14 +2056,14 @@
       </p:grpSpPr>
       <p:pic>
         <p:nvPicPr>
-          <p:cNvPr id="7" name=""/>
+          <p:cNvPr id="8" name=""/>
           <p:cNvPicPr>
             <a:picLocks xmlns:a="http://schemas.openxmlformats.org/drawingml/2006/main" noChangeAspect="1"/>
           </p:cNvPicPr>
           <p:nvPr/>
         </p:nvPicPr>
         <p:blipFill>
-          <a:blip xmlns:r="http://schemas.openxmlformats.org/officeDocument/2006/relationships" xmlns:a="http://schemas.openxmlformats.org/drawingml/2006/main" r:embed="R5b8ee9f25b5449b2"/>
+          <a:blip xmlns:r="http://schemas.openxmlformats.org/officeDocument/2006/relationships" xmlns:a="http://schemas.openxmlformats.org/drawingml/2006/main" r:embed="R45c287352e9a4218"/>
           <a:srcRect xmlns:a="http://schemas.openxmlformats.org/drawingml/2006/main" l="0" t="27" r="0" b="27"/>
           <a:stretch xmlns:a="http://schemas.openxmlformats.org/drawingml/2006/main">
             <a:fillRect l="0" t="0" r="0" b="0"/>
@@ -1968,6 +2113,7 @@
           <a:lstStyle xmlns:a="http://schemas.openxmlformats.org/drawingml/2006/main"/>
           <a:p xmlns:a="http://schemas.openxmlformats.org/drawingml/2006/main">
             <a:pPr>
+              <a:buNone/>
               <a:defRPr sz="1425" b="1">
                 <a:solidFill>
                   <a:srgbClr val="A9DBCB"/>
@@ -2025,6 +2171,7 @@
           <a:lstStyle xmlns:a="http://schemas.openxmlformats.org/drawingml/2006/main"/>
           <a:p xmlns:a="http://schemas.openxmlformats.org/drawingml/2006/main">
             <a:pPr>
+              <a:buNone/>
               <a:defRPr sz="5700" b="1">
                 <a:solidFill>
                   <a:srgbClr val="FFFFFF"/>
@@ -2082,6 +2229,7 @@
           <a:lstStyle xmlns:a="http://schemas.openxmlformats.org/drawingml/2006/main"/>
           <a:p xmlns:a="http://schemas.openxmlformats.org/drawingml/2006/main">
             <a:pPr>
+              <a:buNone/>
               <a:defRPr sz="2850" b="0">
                 <a:solidFill>
                   <a:srgbClr val="F2F5F0"/>
@@ -2100,34 +2248,12 @@
                 <a:ea typeface="Helvetica Neue"/>
                 <a:cs typeface="Helvetica Neue"/>
               </a:rPr>
-              <a:t>Концепция безопасной</a:t>
-            </a:r>
-          </a:p>
-          <a:p xmlns:a="http://schemas.openxmlformats.org/drawingml/2006/main">
-            <a:pPr>
-              <a:defRPr sz="2850" b="0">
-                <a:solidFill>
-                  <a:srgbClr val="F2F5F0"/>
-                </a:solidFill>
-                <a:latin typeface="Helvetica Neue"/>
-                <a:ea typeface="Helvetica Neue"/>
-                <a:cs typeface="Helvetica Neue"/>
-              </a:defRPr>
-            </a:pPr>
-            <a:r>
-              <a:rPr sz="2850" b="0">
-                <a:solidFill>
-                  <a:srgbClr val="F2F5F0"/>
-                </a:solidFill>
-                <a:latin typeface="Helvetica Neue"/>
-                <a:ea typeface="Helvetica Neue"/>
-                <a:cs typeface="Helvetica Neue"/>
-              </a:rPr>
-              <a:t>разработки локального</a:t>
-            </a:r>
-          </a:p>
-          <a:p xmlns:a="http://schemas.openxmlformats.org/drawingml/2006/main">
-            <a:pPr>
+              <a:t>Безопасная разработка</a:t>
+            </a:r>
+          </a:p>
+          <a:p xmlns:a="http://schemas.openxmlformats.org/drawingml/2006/main">
+            <a:pPr>
+              <a:buNone/>
               <a:defRPr sz="2850" b="0">
                 <a:solidFill>
                   <a:srgbClr val="F2F5F0"/>
@@ -2185,6 +2311,7 @@
           <a:lstStyle xmlns:a="http://schemas.openxmlformats.org/drawingml/2006/main"/>
           <a:p xmlns:a="http://schemas.openxmlformats.org/drawingml/2006/main">
             <a:pPr>
+              <a:buNone/>
               <a:defRPr sz="1875" b="0">
                 <a:solidFill>
                   <a:srgbClr val="E0ECE7"/>
@@ -2208,6 +2335,7 @@
           </a:p>
           <a:p xmlns:a="http://schemas.openxmlformats.org/drawingml/2006/main">
             <a:pPr>
+              <a:buNone/>
               <a:defRPr sz="1875" b="0">
                 <a:solidFill>
                   <a:srgbClr val="E0ECE7"/>
@@ -2265,6 +2393,7 @@
           <a:lstStyle xmlns:a="http://schemas.openxmlformats.org/drawingml/2006/main"/>
           <a:p xmlns:a="http://schemas.openxmlformats.org/drawingml/2006/main">
             <a:pPr>
+              <a:buNone/>
               <a:defRPr sz="1350" b="0">
                 <a:solidFill>
                   <a:srgbClr val="A9DBCB"/>
@@ -2351,6 +2480,7 @@
           <a:lstStyle xmlns:a="http://schemas.openxmlformats.org/drawingml/2006/main"/>
           <a:p xmlns:a="http://schemas.openxmlformats.org/drawingml/2006/main">
             <a:pPr>
+              <a:buNone/>
               <a:defRPr sz="1350" b="1">
                 <a:solidFill>
                   <a:srgbClr val="26756C"/>
@@ -2408,6 +2538,7 @@
           <a:lstStyle xmlns:a="http://schemas.openxmlformats.org/drawingml/2006/main"/>
           <a:p xmlns:a="http://schemas.openxmlformats.org/drawingml/2006/main">
             <a:pPr>
+              <a:buNone/>
               <a:defRPr sz="3300" b="1">
                 <a:solidFill>
                   <a:srgbClr val="102A30"/>
@@ -2426,7 +2557,7 @@
                 <a:ea typeface="Helvetica Neue"/>
                 <a:cs typeface="Helvetica Neue"/>
               </a:rPr>
-              <a:t>Продукт и границы</a:t>
+              <a:t>TaskFlow и три роли</a:t>
             </a:r>
           </a:p>
         </p:txBody>
@@ -2465,6 +2596,7 @@
           <a:lstStyle xmlns:a="http://schemas.openxmlformats.org/drawingml/2006/main"/>
           <a:p xmlns:a="http://schemas.openxmlformats.org/drawingml/2006/main">
             <a:pPr>
+              <a:buNone/>
               <a:defRPr sz="1350" b="0">
                 <a:solidFill>
                   <a:srgbClr val="59686B"/>
@@ -2522,6 +2654,7 @@
           <a:lstStyle xmlns:a="http://schemas.openxmlformats.org/drawingml/2006/main"/>
           <a:p xmlns:a="http://schemas.openxmlformats.org/drawingml/2006/main">
             <a:pPr>
+              <a:buNone/>
               <a:defRPr sz="1800" b="1">
                 <a:solidFill>
                   <a:srgbClr val="26756C"/>
@@ -2547,14 +2680,14 @@
       </p:sp>
       <p:pic>
         <p:nvPicPr>
-          <p:cNvPr id="18" name=""/>
+          <p:cNvPr id="20" name=""/>
           <p:cNvPicPr>
             <a:picLocks xmlns:a="http://schemas.openxmlformats.org/drawingml/2006/main" noChangeAspect="1"/>
           </p:cNvPicPr>
           <p:nvPr/>
         </p:nvPicPr>
         <p:blipFill>
-          <a:blip xmlns:r="http://schemas.openxmlformats.org/officeDocument/2006/relationships" xmlns:a="http://schemas.openxmlformats.org/drawingml/2006/main" r:embed="Rb148d344015d472c"/>
+          <a:blip xmlns:r="http://schemas.openxmlformats.org/officeDocument/2006/relationships" xmlns:a="http://schemas.openxmlformats.org/drawingml/2006/main" r:embed="R00259ca12bd84432"/>
           <a:stretch xmlns:a="http://schemas.openxmlformats.org/drawingml/2006/main"/>
         </p:blipFill>
         <p:spPr>
@@ -2601,6 +2734,7 @@
           <a:lstStyle xmlns:a="http://schemas.openxmlformats.org/drawingml/2006/main"/>
           <a:p xmlns:a="http://schemas.openxmlformats.org/drawingml/2006/main">
             <a:pPr>
+              <a:buNone/>
               <a:defRPr sz="2100" b="1">
                 <a:solidFill>
                   <a:srgbClr val="26756C"/>
@@ -2658,6 +2792,7 @@
           <a:lstStyle xmlns:a="http://schemas.openxmlformats.org/drawingml/2006/main"/>
           <a:p xmlns:a="http://schemas.openxmlformats.org/drawingml/2006/main">
             <a:pPr>
+              <a:buNone/>
               <a:defRPr sz="1950" b="0">
                 <a:solidFill>
                   <a:srgbClr val="102A30"/>
@@ -2715,6 +2850,7 @@
           <a:lstStyle xmlns:a="http://schemas.openxmlformats.org/drawingml/2006/main"/>
           <a:p xmlns:a="http://schemas.openxmlformats.org/drawingml/2006/main">
             <a:pPr>
+              <a:buNone/>
               <a:defRPr sz="2100" b="1">
                 <a:solidFill>
                   <a:srgbClr val="26756C"/>
@@ -2772,6 +2908,7 @@
           <a:lstStyle xmlns:a="http://schemas.openxmlformats.org/drawingml/2006/main"/>
           <a:p xmlns:a="http://schemas.openxmlformats.org/drawingml/2006/main">
             <a:pPr>
+              <a:buNone/>
               <a:defRPr sz="1950" b="0">
                 <a:solidFill>
                   <a:srgbClr val="102A30"/>
@@ -2829,6 +2966,7 @@
           <a:lstStyle xmlns:a="http://schemas.openxmlformats.org/drawingml/2006/main"/>
           <a:p xmlns:a="http://schemas.openxmlformats.org/drawingml/2006/main">
             <a:pPr>
+              <a:buNone/>
               <a:defRPr sz="2100" b="1">
                 <a:solidFill>
                   <a:srgbClr val="26756C"/>
@@ -2886,6 +3024,7 @@
           <a:lstStyle xmlns:a="http://schemas.openxmlformats.org/drawingml/2006/main"/>
           <a:p xmlns:a="http://schemas.openxmlformats.org/drawingml/2006/main">
             <a:pPr>
+              <a:buNone/>
               <a:defRPr sz="1950" b="0">
                 <a:solidFill>
                   <a:srgbClr val="102A30"/>
@@ -2943,6 +3082,7 @@
           <a:lstStyle xmlns:a="http://schemas.openxmlformats.org/drawingml/2006/main"/>
           <a:p xmlns:a="http://schemas.openxmlformats.org/drawingml/2006/main">
             <a:pPr>
+              <a:buNone/>
               <a:defRPr sz="1725" b="0">
                 <a:solidFill>
                   <a:srgbClr val="59686B"/>
@@ -2966,6 +3106,7 @@
           </a:p>
           <a:p xmlns:a="http://schemas.openxmlformats.org/drawingml/2006/main">
             <a:pPr>
+              <a:buNone/>
               <a:defRPr sz="1725" b="0">
                 <a:solidFill>
                   <a:srgbClr val="59686B"/>
@@ -2984,7 +3125,7 @@
                 <a:ea typeface="Helvetica Neue"/>
                 <a:cs typeface="Helvetica Neue"/>
               </a:rPr>
-              <a:t>localhost, синтетические данные</a:t>
+              <a:t>Локально, учебные данные</a:t>
             </a:r>
           </a:p>
         </p:txBody>
@@ -3023,6 +3164,7 @@
           <a:lstStyle xmlns:a="http://schemas.openxmlformats.org/drawingml/2006/main"/>
           <a:p xmlns:a="http://schemas.openxmlformats.org/drawingml/2006/main">
             <a:pPr>
+              <a:buNone/>
               <a:defRPr sz="1725" b="0">
                 <a:solidFill>
                   <a:srgbClr val="59686B"/>
@@ -3109,6 +3251,7 @@
           <a:lstStyle xmlns:a="http://schemas.openxmlformats.org/drawingml/2006/main"/>
           <a:p xmlns:a="http://schemas.openxmlformats.org/drawingml/2006/main">
             <a:pPr>
+              <a:buNone/>
               <a:defRPr sz="1350" b="1">
                 <a:solidFill>
                   <a:srgbClr val="26756C"/>
@@ -3166,6 +3309,7 @@
           <a:lstStyle xmlns:a="http://schemas.openxmlformats.org/drawingml/2006/main"/>
           <a:p xmlns:a="http://schemas.openxmlformats.org/drawingml/2006/main">
             <a:pPr>
+              <a:buNone/>
               <a:defRPr sz="3300" b="1">
                 <a:solidFill>
                   <a:srgbClr val="102A30"/>
@@ -3223,6 +3367,7 @@
           <a:lstStyle xmlns:a="http://schemas.openxmlformats.org/drawingml/2006/main"/>
           <a:p xmlns:a="http://schemas.openxmlformats.org/drawingml/2006/main">
             <a:pPr>
+              <a:buNone/>
               <a:defRPr sz="1350" b="0">
                 <a:solidFill>
                   <a:srgbClr val="59686B"/>
@@ -3280,6 +3425,7 @@
           <a:lstStyle xmlns:a="http://schemas.openxmlformats.org/drawingml/2006/main"/>
           <a:p xmlns:a="http://schemas.openxmlformats.org/drawingml/2006/main">
             <a:pPr>
+              <a:buNone/>
               <a:defRPr sz="1800" b="1">
                 <a:solidFill>
                   <a:srgbClr val="26756C"/>
@@ -3305,10 +3451,10 @@
       </p:sp>
       <p:sp>
         <p:nvSpPr>
-          <p:cNvPr id="5" name="">
+          <p:cNvPr id="9" name="">
             <a:extLst xmlns:a="http://schemas.openxmlformats.org/drawingml/2006/main">
               <a:ext uri="{FF2B5EF4-FFF2-40B4-BE49-F238E27FC236}">
-                <a16:creationId xmlns:a16="http://schemas.microsoft.com/office/drawing/2014/main" id="{ACE9C80F-CB2E-4C90-9CAF-DDE05F6EA728}"/>
+                <a16:creationId xmlns:a16="http://schemas.microsoft.com/office/drawing/2014/main" id="{91E82C49-F9B7-4AB0-A775-E3C5577B16CD}"/>
               </a:ext>
             </a:extLst>
           </p:cNvPr>
@@ -3319,8 +3465,8 @@
         </p:nvSpPr>
         <p:spPr>
           <a:xfrm xmlns:a="http://schemas.openxmlformats.org/drawingml/2006/main">
-            <a:off x="609600" y="1809750"/>
-            <a:ext cx="10972800" cy="723900"/>
+            <a:off x="609600" y="1952625"/>
+            <a:ext cx="5095875" cy="495300"/>
           </a:xfrm>
           <a:prstGeom xmlns:a="http://schemas.openxmlformats.org/drawingml/2006/main" prst="rect">
             <a:avLst/>
@@ -3337,7 +3483,7 @@
           <a:lstStyle xmlns:a="http://schemas.openxmlformats.org/drawingml/2006/main"/>
           <a:p xmlns:a="http://schemas.openxmlformats.org/drawingml/2006/main">
             <a:pPr>
-              <a:defRPr sz="2250" b="1">
+              <a:defRPr sz="2850" b="1">
                 <a:solidFill>
                   <a:srgbClr val="26756C"/>
                 </a:solidFill>
@@ -3347,7 +3493,7 @@
               </a:defRPr>
             </a:pPr>
             <a:r>
-              <a:rPr sz="2250" b="1">
+              <a:rPr sz="2850" b="1">
                 <a:solidFill>
                   <a:srgbClr val="26756C"/>
                 </a:solidFill>
@@ -3355,360 +3501,17 @@
                 <a:ea typeface="Helvetica Neue"/>
                 <a:cs typeface="Helvetica Neue"/>
               </a:rPr>
-              <a:t>SSDF 1.1 задаёт процесс. ASVS 5.0.0 уточняет свойства веб-приложения.</a:t>
-            </a:r>
-          </a:p>
-        </p:txBody>
-      </p:sp>
-      <p:graphicFrame>
-        <p:nvGraphicFramePr>
-          <p:cNvPr id="13" name=""/>
-          <p:cNvGraphicFramePr/>
-          <p:nvPr/>
-        </p:nvGraphicFramePr>
-        <p:xfrm>
-          <a:off xmlns:a="http://schemas.openxmlformats.org/drawingml/2006/main" x="609600" y="2790825"/>
-          <a:ext xmlns:a="http://schemas.openxmlformats.org/drawingml/2006/main" cx="10972800" cy="2552700"/>
-        </p:xfrm>
-        <a:graphic xmlns:a="http://schemas.openxmlformats.org/drawingml/2006/main">
-          <a:graphicData uri="http://schemas.openxmlformats.org/drawingml/2006/table">
-            <a:tbl>
-              <a:tblPr/>
-              <a:tblGrid>
-                <a:gridCol w="2781300"/>
-                <a:gridCol w="4819650"/>
-                <a:gridCol w="3371850"/>
-              </a:tblGrid>
-              <a:tr h="638175">
-                <a:tc>
-                  <a:txBody>
-                    <a:bodyPr>
-                      <a:noAutofit/>
-                    </a:bodyPr>
-                    <a:lstStyle/>
-                    <a:p>
-                      <a:r>
-                        <a:rPr sz="1875" b="1">
-                          <a:solidFill>
-                            <a:srgbClr val="FFFFFF"/>
-                          </a:solidFill>
-                          <a:latin typeface="Helvetica Neue"/>
-                          <a:ea typeface="Helvetica Neue"/>
-                          <a:cs typeface="Helvetica Neue"/>
-                        </a:rPr>
-                        <a:t>Основа</a:t>
-                      </a:r>
-                    </a:p>
-                  </a:txBody>
-                  <a:tcPr marL="91440" marR="91440" marT="45720" marB="45720">
-                    <a:solidFill>
-                      <a:srgbClr val="102A30"/>
-                    </a:solidFill>
-                  </a:tcPr>
-                </a:tc>
-                <a:tc>
-                  <a:txBody>
-                    <a:bodyPr>
-                      <a:noAutofit/>
-                    </a:bodyPr>
-                    <a:lstStyle/>
-                    <a:p>
-                      <a:r>
-                        <a:rPr sz="1875" b="1">
-                          <a:solidFill>
-                            <a:srgbClr val="FFFFFF"/>
-                          </a:solidFill>
-                          <a:latin typeface="Helvetica Neue"/>
-                          <a:ea typeface="Helvetica Neue"/>
-                          <a:cs typeface="Helvetica Neue"/>
-                        </a:rPr>
-                        <a:t>Польза для TaskFlow</a:t>
-                      </a:r>
-                    </a:p>
-                  </a:txBody>
-                  <a:tcPr marL="91440" marR="91440" marT="45720" marB="45720">
-                    <a:solidFill>
-                      <a:srgbClr val="102A30"/>
-                    </a:solidFill>
-                  </a:tcPr>
-                </a:tc>
-                <a:tc>
-                  <a:txBody>
-                    <a:bodyPr>
-                      <a:noAutofit/>
-                    </a:bodyPr>
-                    <a:lstStyle/>
-                    <a:p>
-                      <a:r>
-                        <a:rPr sz="1875" b="1">
-                          <a:solidFill>
-                            <a:srgbClr val="FFFFFF"/>
-                          </a:solidFill>
-                          <a:latin typeface="Helvetica Neue"/>
-                          <a:ea typeface="Helvetica Neue"/>
-                          <a:cs typeface="Helvetica Neue"/>
-                        </a:rPr>
-                        <a:t>Решение</a:t>
-                      </a:r>
-                    </a:p>
-                  </a:txBody>
-                  <a:tcPr marL="91440" marR="91440" marT="45720" marB="45720">
-                    <a:solidFill>
-                      <a:srgbClr val="102A30"/>
-                    </a:solidFill>
-                  </a:tcPr>
-                </a:tc>
-              </a:tr>
-              <a:tr h="638175">
-                <a:tc>
-                  <a:txBody>
-                    <a:bodyPr>
-                      <a:noAutofit/>
-                    </a:bodyPr>
-                    <a:lstStyle/>
-                    <a:p>
-                      <a:r>
-                        <a:rPr sz="1875" b="0">
-                          <a:solidFill>
-                            <a:srgbClr val="102A30"/>
-                          </a:solidFill>
-                          <a:latin typeface="Helvetica Neue"/>
-                          <a:ea typeface="Helvetica Neue"/>
-                          <a:cs typeface="Helvetica Neue"/>
-                        </a:rPr>
-                        <a:t>NIST SSDF 1.1</a:t>
-                      </a:r>
-                    </a:p>
-                  </a:txBody>
-                  <a:tcPr marL="91440" marR="91440" marT="45720" marB="45720">
-                    <a:solidFill>
-                      <a:srgbClr val="FFFFFF"/>
-                    </a:solidFill>
-                  </a:tcPr>
-                </a:tc>
-                <a:tc>
-                  <a:txBody>
-                    <a:bodyPr>
-                      <a:noAutofit/>
-                    </a:bodyPr>
-                    <a:lstStyle/>
-                    <a:p>
-                      <a:r>
-                        <a:rPr sz="1875" b="0">
-                          <a:solidFill>
-                            <a:srgbClr val="102A30"/>
-                          </a:solidFill>
-                          <a:latin typeface="Helvetica Neue"/>
-                          <a:ea typeface="Helvetica Neue"/>
-                          <a:cs typeface="Helvetica Neue"/>
-                        </a:rPr>
-                        <a:t>Требования, review, тесты, выпуск</a:t>
-                      </a:r>
-                    </a:p>
-                  </a:txBody>
-                  <a:tcPr marL="91440" marR="91440" marT="45720" marB="45720">
-                    <a:solidFill>
-                      <a:srgbClr val="FFFFFF"/>
-                    </a:solidFill>
-                  </a:tcPr>
-                </a:tc>
-                <a:tc>
-                  <a:txBody>
-                    <a:bodyPr>
-                      <a:noAutofit/>
-                    </a:bodyPr>
-                    <a:lstStyle/>
-                    <a:p>
-                      <a:r>
-                        <a:rPr sz="1875" b="0">
-                          <a:solidFill>
-                            <a:srgbClr val="102A30"/>
-                          </a:solidFill>
-                          <a:latin typeface="Helvetica Neue"/>
-                          <a:ea typeface="Helvetica Neue"/>
-                          <a:cs typeface="Helvetica Neue"/>
-                        </a:rPr>
-                        <a:t>Основная рамка</a:t>
-                      </a:r>
-                    </a:p>
-                  </a:txBody>
-                  <a:tcPr marL="91440" marR="91440" marT="45720" marB="45720">
-                    <a:solidFill>
-                      <a:srgbClr val="FFFFFF"/>
-                    </a:solidFill>
-                  </a:tcPr>
-                </a:tc>
-              </a:tr>
-              <a:tr h="638175">
-                <a:tc>
-                  <a:txBody>
-                    <a:bodyPr>
-                      <a:noAutofit/>
-                    </a:bodyPr>
-                    <a:lstStyle/>
-                    <a:p>
-                      <a:r>
-                        <a:rPr sz="1875" b="0">
-                          <a:solidFill>
-                            <a:srgbClr val="102A30"/>
-                          </a:solidFill>
-                          <a:latin typeface="Helvetica Neue"/>
-                          <a:ea typeface="Helvetica Neue"/>
-                          <a:cs typeface="Helvetica Neue"/>
-                        </a:rPr>
-                        <a:t>OWASP SAMM 2</a:t>
-                      </a:r>
-                    </a:p>
-                  </a:txBody>
-                  <a:tcPr marL="91440" marR="91440" marT="45720" marB="45720">
-                    <a:solidFill>
-                      <a:srgbClr val="F7F6F1"/>
-                    </a:solidFill>
-                  </a:tcPr>
-                </a:tc>
-                <a:tc>
-                  <a:txBody>
-                    <a:bodyPr>
-                      <a:noAutofit/>
-                    </a:bodyPr>
-                    <a:lstStyle/>
-                    <a:p>
-                      <a:r>
-                        <a:rPr sz="1875" b="0">
-                          <a:solidFill>
-                            <a:srgbClr val="102A30"/>
-                          </a:solidFill>
-                          <a:latin typeface="Helvetica Neue"/>
-                          <a:ea typeface="Helvetica Neue"/>
-                          <a:cs typeface="Helvetica Neue"/>
-                        </a:rPr>
-                        <a:t>Оценка устойчивости практик</a:t>
-                      </a:r>
-                    </a:p>
-                  </a:txBody>
-                  <a:tcPr marL="91440" marR="91440" marT="45720" marB="45720">
-                    <a:solidFill>
-                      <a:srgbClr val="F7F6F1"/>
-                    </a:solidFill>
-                  </a:tcPr>
-                </a:tc>
-                <a:tc>
-                  <a:txBody>
-                    <a:bodyPr>
-                      <a:noAutofit/>
-                    </a:bodyPr>
-                    <a:lstStyle/>
-                    <a:p>
-                      <a:r>
-                        <a:rPr sz="1875" b="0">
-                          <a:solidFill>
-                            <a:srgbClr val="102A30"/>
-                          </a:solidFill>
-                          <a:latin typeface="Helvetica Neue"/>
-                          <a:ea typeface="Helvetica Neue"/>
-                          <a:cs typeface="Helvetica Neue"/>
-                        </a:rPr>
-                        <a:t>Мало истории для оценки</a:t>
-                      </a:r>
-                    </a:p>
-                  </a:txBody>
-                  <a:tcPr marL="91440" marR="91440" marT="45720" marB="45720">
-                    <a:solidFill>
-                      <a:srgbClr val="F7F6F1"/>
-                    </a:solidFill>
-                  </a:tcPr>
-                </a:tc>
-              </a:tr>
-              <a:tr h="638175">
-                <a:tc>
-                  <a:txBody>
-                    <a:bodyPr>
-                      <a:noAutofit/>
-                    </a:bodyPr>
-                    <a:lstStyle/>
-                    <a:p>
-                      <a:r>
-                        <a:rPr sz="1875" b="0">
-                          <a:solidFill>
-                            <a:srgbClr val="102A30"/>
-                          </a:solidFill>
-                          <a:latin typeface="Helvetica Neue"/>
-                          <a:ea typeface="Helvetica Neue"/>
-                          <a:cs typeface="Helvetica Neue"/>
-                        </a:rPr>
-                        <a:t>ГОСТ Р 56939-2024</a:t>
-                      </a:r>
-                    </a:p>
-                  </a:txBody>
-                  <a:tcPr marL="91440" marR="91440" marT="45720" marB="45720">
-                    <a:solidFill>
-                      <a:srgbClr val="FFFFFF"/>
-                    </a:solidFill>
-                  </a:tcPr>
-                </a:tc>
-                <a:tc>
-                  <a:txBody>
-                    <a:bodyPr>
-                      <a:noAutofit/>
-                    </a:bodyPr>
-                    <a:lstStyle/>
-                    <a:p>
-                      <a:r>
-                        <a:rPr sz="1875" b="0">
-                          <a:solidFill>
-                            <a:srgbClr val="102A30"/>
-                          </a:solidFill>
-                          <a:latin typeface="Helvetica Neue"/>
-                          <a:ea typeface="Helvetica Neue"/>
-                          <a:cs typeface="Helvetica Neue"/>
-                        </a:rPr>
-                        <a:t>Требования к работам разработки</a:t>
-                      </a:r>
-                    </a:p>
-                  </a:txBody>
-                  <a:tcPr marL="91440" marR="91440" marT="45720" marB="45720">
-                    <a:solidFill>
-                      <a:srgbClr val="FFFFFF"/>
-                    </a:solidFill>
-                  </a:tcPr>
-                </a:tc>
-                <a:tc>
-                  <a:txBody>
-                    <a:bodyPr>
-                      <a:noAutofit/>
-                    </a:bodyPr>
-                    <a:lstStyle/>
-                    <a:p>
-                      <a:r>
-                        <a:rPr sz="1875" b="0">
-                          <a:solidFill>
-                            <a:srgbClr val="102A30"/>
-                          </a:solidFill>
-                          <a:latin typeface="Helvetica Neue"/>
-                          <a:ea typeface="Helvetica Neue"/>
-                          <a:cs typeface="Helvetica Neue"/>
-                        </a:rPr>
-                        <a:t>Применимая альтернатива</a:t>
-                      </a:r>
-                    </a:p>
-                  </a:txBody>
-                  <a:tcPr marL="91440" marR="91440" marT="45720" marB="45720">
-                    <a:solidFill>
-                      <a:srgbClr val="FFFFFF"/>
-                    </a:solidFill>
-                  </a:tcPr>
-                </a:tc>
-              </a:tr>
-            </a:tbl>
-          </a:graphicData>
-        </a:graphic>
-      </p:graphicFrame>
-      <p:sp>
-        <p:nvSpPr>
-          <p:cNvPr id="7" name="">
+              <a:t>SSDF 1.1</a:t>
+            </a:r>
+          </a:p>
+        </p:txBody>
+      </p:sp>
+      <p:sp>
+        <p:nvSpPr>
+          <p:cNvPr id="10" name="">
             <a:extLst xmlns:a="http://schemas.openxmlformats.org/drawingml/2006/main">
               <a:ext uri="{FF2B5EF4-FFF2-40B4-BE49-F238E27FC236}">
-                <a16:creationId xmlns:a16="http://schemas.microsoft.com/office/drawing/2014/main" id="{E84E6F0E-8655-43FF-974B-6E4533BEC21F}"/>
+                <a16:creationId xmlns:a16="http://schemas.microsoft.com/office/drawing/2014/main" id="{CFE112CA-F979-42F0-98F4-79CB90858A78}"/>
               </a:ext>
             </a:extLst>
           </p:cNvPr>
@@ -3719,8 +3522,8 @@
         </p:nvSpPr>
         <p:spPr>
           <a:xfrm xmlns:a="http://schemas.openxmlformats.org/drawingml/2006/main">
-            <a:off x="609600" y="5572125"/>
-            <a:ext cx="10972800" cy="647700"/>
+            <a:off x="609600" y="2600325"/>
+            <a:ext cx="5143500" cy="762000"/>
           </a:xfrm>
           <a:prstGeom xmlns:a="http://schemas.openxmlformats.org/drawingml/2006/main" prst="rect">
             <a:avLst/>
@@ -3737,48 +3540,458 @@
           <a:lstStyle xmlns:a="http://schemas.openxmlformats.org/drawingml/2006/main"/>
           <a:p xmlns:a="http://schemas.openxmlformats.org/drawingml/2006/main">
             <a:pPr>
-              <a:defRPr sz="1875" b="0">
-                <a:solidFill>
-                  <a:srgbClr val="102A30"/>
-                </a:solidFill>
-                <a:latin typeface="Helvetica Neue"/>
-                <a:ea typeface="Helvetica Neue"/>
-                <a:cs typeface="Helvetica Neue"/>
-              </a:defRPr>
-            </a:pPr>
-            <a:r>
-              <a:rPr sz="1875" b="0">
-                <a:solidFill>
-                  <a:srgbClr val="102A30"/>
-                </a:solidFill>
-                <a:latin typeface="Helvetica Neue"/>
-                <a:ea typeface="Helvetica Neue"/>
-                <a:cs typeface="Helvetica Neue"/>
-              </a:rPr>
-              <a:t>Семь правил для двух участников и открытый первоисточник.</a:t>
-            </a:r>
-          </a:p>
-          <a:p xmlns:a="http://schemas.openxmlformats.org/drawingml/2006/main">
-            <a:pPr>
-              <a:defRPr sz="1875" b="0">
-                <a:solidFill>
-                  <a:srgbClr val="102A30"/>
-                </a:solidFill>
-                <a:latin typeface="Helvetica Neue"/>
-                <a:ea typeface="Helvetica Neue"/>
-                <a:cs typeface="Helvetica Neue"/>
-              </a:defRPr>
-            </a:pPr>
-            <a:r>
-              <a:rPr sz="1875" b="0">
-                <a:solidFill>
-                  <a:srgbClr val="102A30"/>
-                </a:solidFill>
-                <a:latin typeface="Helvetica Neue"/>
-                <a:ea typeface="Helvetica Neue"/>
-                <a:cs typeface="Helvetica Neue"/>
-              </a:rPr>
-              <a:t>ASVS дополняет технические проверки доступа, сессий и ввода.</a:t>
+              <a:defRPr sz="2400" b="1">
+                <a:solidFill>
+                  <a:srgbClr val="102A30"/>
+                </a:solidFill>
+                <a:latin typeface="Helvetica Neue"/>
+                <a:ea typeface="Helvetica Neue"/>
+                <a:cs typeface="Helvetica Neue"/>
+              </a:defRPr>
+            </a:pPr>
+            <a:r>
+              <a:rPr sz="2400" b="1">
+                <a:solidFill>
+                  <a:srgbClr val="102A30"/>
+                </a:solidFill>
+                <a:latin typeface="Helvetica Neue"/>
+                <a:ea typeface="Helvetica Neue"/>
+                <a:cs typeface="Helvetica Neue"/>
+              </a:rPr>
+              <a:t>Как организуем разработку</a:t>
+            </a:r>
+          </a:p>
+        </p:txBody>
+      </p:sp>
+      <p:sp>
+        <p:nvSpPr>
+          <p:cNvPr id="11" name="">
+            <a:extLst xmlns:a="http://schemas.openxmlformats.org/drawingml/2006/main">
+              <a:ext uri="{FF2B5EF4-FFF2-40B4-BE49-F238E27FC236}">
+                <a16:creationId xmlns:a16="http://schemas.microsoft.com/office/drawing/2014/main" id="{EC210CF2-132F-4AD7-8627-43A481324872}"/>
+              </a:ext>
+            </a:extLst>
+          </p:cNvPr>
+          <p:cNvSpPr>
+            <a:spLocks xmlns:a="http://schemas.openxmlformats.org/drawingml/2006/main" noGrp="1"/>
+          </p:cNvSpPr>
+          <p:nvPr/>
+        </p:nvSpPr>
+        <p:spPr>
+          <a:xfrm xmlns:a="http://schemas.openxmlformats.org/drawingml/2006/main">
+            <a:off x="609600" y="3448050"/>
+            <a:ext cx="5162550" cy="1857375"/>
+          </a:xfrm>
+          <a:prstGeom xmlns:a="http://schemas.openxmlformats.org/drawingml/2006/main" prst="rect">
+            <a:avLst/>
+          </a:prstGeom>
+          <a:noFill xmlns:a="http://schemas.openxmlformats.org/drawingml/2006/main"/>
+          <a:ln xmlns:a="http://schemas.openxmlformats.org/drawingml/2006/main" w="0">
+            <a:noFill/>
+          </a:ln>
+        </p:spPr>
+        <p:txBody>
+          <a:bodyPr xmlns:a="http://schemas.openxmlformats.org/drawingml/2006/main">
+            <a:noAutofit/>
+          </a:bodyPr>
+          <a:lstStyle xmlns:a="http://schemas.openxmlformats.org/drawingml/2006/main"/>
+          <a:p xmlns:a="http://schemas.openxmlformats.org/drawingml/2006/main">
+            <a:pPr>
+              <a:defRPr sz="2100" b="0">
+                <a:solidFill>
+                  <a:srgbClr val="102A30"/>
+                </a:solidFill>
+                <a:latin typeface="Helvetica Neue"/>
+                <a:ea typeface="Helvetica Neue"/>
+                <a:cs typeface="Helvetica Neue"/>
+              </a:defRPr>
+            </a:pPr>
+            <a:r>
+              <a:rPr sz="2100" b="0">
+                <a:solidFill>
+                  <a:srgbClr val="102A30"/>
+                </a:solidFill>
+                <a:latin typeface="Helvetica Neue"/>
+                <a:ea typeface="Helvetica Neue"/>
+                <a:cs typeface="Helvetica Neue"/>
+              </a:rPr>
+              <a:t>Охватывает работу от требований</a:t>
+            </a:r>
+          </a:p>
+          <a:p xmlns:a="http://schemas.openxmlformats.org/drawingml/2006/main">
+            <a:pPr>
+              <a:defRPr sz="2100" b="0">
+                <a:solidFill>
+                  <a:srgbClr val="102A30"/>
+                </a:solidFill>
+                <a:latin typeface="Helvetica Neue"/>
+                <a:ea typeface="Helvetica Neue"/>
+                <a:cs typeface="Helvetica Neue"/>
+              </a:defRPr>
+            </a:pPr>
+            <a:r>
+              <a:rPr sz="2100" b="0">
+                <a:solidFill>
+                  <a:srgbClr val="102A30"/>
+                </a:solidFill>
+                <a:latin typeface="Helvetica Neue"/>
+                <a:ea typeface="Helvetica Neue"/>
+                <a:cs typeface="Helvetica Neue"/>
+              </a:rPr>
+              <a:t>до выпуска и исправлений.</a:t>
+            </a:r>
+          </a:p>
+          <a:p xmlns:a="http://schemas.openxmlformats.org/drawingml/2006/main">
+            <a:r>
+              <a:t/>
+            </a:r>
+          </a:p>
+          <a:p xmlns:a="http://schemas.openxmlformats.org/drawingml/2006/main">
+            <a:pPr>
+              <a:defRPr sz="2100" b="0">
+                <a:solidFill>
+                  <a:srgbClr val="102A30"/>
+                </a:solidFill>
+                <a:latin typeface="Helvetica Neue"/>
+                <a:ea typeface="Helvetica Neue"/>
+                <a:cs typeface="Helvetica Neue"/>
+              </a:defRPr>
+            </a:pPr>
+            <a:r>
+              <a:rPr sz="2100" b="0">
+                <a:solidFill>
+                  <a:srgbClr val="102A30"/>
+                </a:solidFill>
+                <a:latin typeface="Helvetica Neue"/>
+                <a:ea typeface="Helvetica Neue"/>
+                <a:cs typeface="Helvetica Neue"/>
+              </a:rPr>
+              <a:t>Выбрали 7 правил для двух человек.</a:t>
+            </a:r>
+          </a:p>
+          <a:p xmlns:a="http://schemas.openxmlformats.org/drawingml/2006/main">
+            <a:pPr>
+              <a:defRPr sz="2100" b="0">
+                <a:solidFill>
+                  <a:srgbClr val="102A30"/>
+                </a:solidFill>
+                <a:latin typeface="Helvetica Neue"/>
+                <a:ea typeface="Helvetica Neue"/>
+                <a:cs typeface="Helvetica Neue"/>
+              </a:defRPr>
+            </a:pPr>
+            <a:r>
+              <a:rPr sz="2100" b="0">
+                <a:solidFill>
+                  <a:srgbClr val="102A30"/>
+                </a:solidFill>
+                <a:latin typeface="Helvetica Neue"/>
+                <a:ea typeface="Helvetica Neue"/>
+                <a:cs typeface="Helvetica Neue"/>
+              </a:rPr>
+              <a:t>Полный текст доступен открыто.</a:t>
+            </a:r>
+          </a:p>
+        </p:txBody>
+      </p:sp>
+      <p:sp>
+        <p:nvSpPr>
+          <p:cNvPr id="12" name="">
+            <a:extLst xmlns:a="http://schemas.openxmlformats.org/drawingml/2006/main">
+              <a:ext uri="{FF2B5EF4-FFF2-40B4-BE49-F238E27FC236}">
+                <a16:creationId xmlns:a16="http://schemas.microsoft.com/office/drawing/2014/main" id="{F31D05F6-E9E3-4F14-8A81-6C09014D2DF4}"/>
+              </a:ext>
+            </a:extLst>
+          </p:cNvPr>
+          <p:cNvSpPr>
+            <a:spLocks xmlns:a="http://schemas.openxmlformats.org/drawingml/2006/main" noGrp="1"/>
+          </p:cNvSpPr>
+          <p:nvPr/>
+        </p:nvSpPr>
+        <p:spPr>
+          <a:xfrm xmlns:a="http://schemas.openxmlformats.org/drawingml/2006/main">
+            <a:off x="6324600" y="1952625"/>
+            <a:ext cx="5238750" cy="495300"/>
+          </a:xfrm>
+          <a:prstGeom xmlns:a="http://schemas.openxmlformats.org/drawingml/2006/main" prst="rect">
+            <a:avLst/>
+          </a:prstGeom>
+          <a:noFill xmlns:a="http://schemas.openxmlformats.org/drawingml/2006/main"/>
+          <a:ln xmlns:a="http://schemas.openxmlformats.org/drawingml/2006/main" w="0">
+            <a:noFill/>
+          </a:ln>
+        </p:spPr>
+        <p:txBody>
+          <a:bodyPr xmlns:a="http://schemas.openxmlformats.org/drawingml/2006/main">
+            <a:noAutofit/>
+          </a:bodyPr>
+          <a:lstStyle xmlns:a="http://schemas.openxmlformats.org/drawingml/2006/main"/>
+          <a:p xmlns:a="http://schemas.openxmlformats.org/drawingml/2006/main">
+            <a:pPr>
+              <a:defRPr sz="2850" b="1">
+                <a:solidFill>
+                  <a:srgbClr val="26756C"/>
+                </a:solidFill>
+                <a:latin typeface="Helvetica Neue"/>
+                <a:ea typeface="Helvetica Neue"/>
+                <a:cs typeface="Helvetica Neue"/>
+              </a:defRPr>
+            </a:pPr>
+            <a:r>
+              <a:rPr sz="2850" b="1">
+                <a:solidFill>
+                  <a:srgbClr val="26756C"/>
+                </a:solidFill>
+                <a:latin typeface="Helvetica Neue"/>
+                <a:ea typeface="Helvetica Neue"/>
+                <a:cs typeface="Helvetica Neue"/>
+              </a:rPr>
+              <a:t>ASVS 5.0.0</a:t>
+            </a:r>
+          </a:p>
+        </p:txBody>
+      </p:sp>
+      <p:sp>
+        <p:nvSpPr>
+          <p:cNvPr id="13" name="">
+            <a:extLst xmlns:a="http://schemas.openxmlformats.org/drawingml/2006/main">
+              <a:ext uri="{FF2B5EF4-FFF2-40B4-BE49-F238E27FC236}">
+                <a16:creationId xmlns:a16="http://schemas.microsoft.com/office/drawing/2014/main" id="{6BE650CD-1C1C-495E-9968-F63818679045}"/>
+              </a:ext>
+            </a:extLst>
+          </p:cNvPr>
+          <p:cNvSpPr>
+            <a:spLocks xmlns:a="http://schemas.openxmlformats.org/drawingml/2006/main" noGrp="1"/>
+          </p:cNvSpPr>
+          <p:nvPr/>
+        </p:nvSpPr>
+        <p:spPr>
+          <a:xfrm xmlns:a="http://schemas.openxmlformats.org/drawingml/2006/main">
+            <a:off x="6324600" y="2600325"/>
+            <a:ext cx="5238750" cy="762000"/>
+          </a:xfrm>
+          <a:prstGeom xmlns:a="http://schemas.openxmlformats.org/drawingml/2006/main" prst="rect">
+            <a:avLst/>
+          </a:prstGeom>
+          <a:noFill xmlns:a="http://schemas.openxmlformats.org/drawingml/2006/main"/>
+          <a:ln xmlns:a="http://schemas.openxmlformats.org/drawingml/2006/main" w="0">
+            <a:noFill/>
+          </a:ln>
+        </p:spPr>
+        <p:txBody>
+          <a:bodyPr xmlns:a="http://schemas.openxmlformats.org/drawingml/2006/main">
+            <a:noAutofit/>
+          </a:bodyPr>
+          <a:lstStyle xmlns:a="http://schemas.openxmlformats.org/drawingml/2006/main"/>
+          <a:p xmlns:a="http://schemas.openxmlformats.org/drawingml/2006/main">
+            <a:pPr>
+              <a:defRPr sz="2400" b="1">
+                <a:solidFill>
+                  <a:srgbClr val="102A30"/>
+                </a:solidFill>
+                <a:latin typeface="Helvetica Neue"/>
+                <a:ea typeface="Helvetica Neue"/>
+                <a:cs typeface="Helvetica Neue"/>
+              </a:defRPr>
+            </a:pPr>
+            <a:r>
+              <a:rPr sz="2400" b="1">
+                <a:solidFill>
+                  <a:srgbClr val="102A30"/>
+                </a:solidFill>
+                <a:latin typeface="Helvetica Neue"/>
+                <a:ea typeface="Helvetica Neue"/>
+                <a:cs typeface="Helvetica Neue"/>
+              </a:rPr>
+              <a:t>Что проверяем в приложении</a:t>
+            </a:r>
+          </a:p>
+        </p:txBody>
+      </p:sp>
+      <p:sp>
+        <p:nvSpPr>
+          <p:cNvPr id="14" name="">
+            <a:extLst xmlns:a="http://schemas.openxmlformats.org/drawingml/2006/main">
+              <a:ext uri="{FF2B5EF4-FFF2-40B4-BE49-F238E27FC236}">
+                <a16:creationId xmlns:a16="http://schemas.microsoft.com/office/drawing/2014/main" id="{C8A611CC-FA83-44E1-BDCD-7921A27C1606}"/>
+              </a:ext>
+            </a:extLst>
+          </p:cNvPr>
+          <p:cNvSpPr>
+            <a:spLocks xmlns:a="http://schemas.openxmlformats.org/drawingml/2006/main" noGrp="1"/>
+          </p:cNvSpPr>
+          <p:nvPr/>
+        </p:nvSpPr>
+        <p:spPr>
+          <a:xfrm xmlns:a="http://schemas.openxmlformats.org/drawingml/2006/main">
+            <a:off x="6324600" y="3448050"/>
+            <a:ext cx="5238750" cy="1857375"/>
+          </a:xfrm>
+          <a:prstGeom xmlns:a="http://schemas.openxmlformats.org/drawingml/2006/main" prst="rect">
+            <a:avLst/>
+          </a:prstGeom>
+          <a:noFill xmlns:a="http://schemas.openxmlformats.org/drawingml/2006/main"/>
+          <a:ln xmlns:a="http://schemas.openxmlformats.org/drawingml/2006/main" w="0">
+            <a:noFill/>
+          </a:ln>
+        </p:spPr>
+        <p:txBody>
+          <a:bodyPr xmlns:a="http://schemas.openxmlformats.org/drawingml/2006/main">
+            <a:noAutofit/>
+          </a:bodyPr>
+          <a:lstStyle xmlns:a="http://schemas.openxmlformats.org/drawingml/2006/main"/>
+          <a:p xmlns:a="http://schemas.openxmlformats.org/drawingml/2006/main">
+            <a:pPr>
+              <a:defRPr sz="2100" b="0">
+                <a:solidFill>
+                  <a:srgbClr val="102A30"/>
+                </a:solidFill>
+                <a:latin typeface="Helvetica Neue"/>
+                <a:ea typeface="Helvetica Neue"/>
+                <a:cs typeface="Helvetica Neue"/>
+              </a:defRPr>
+            </a:pPr>
+            <a:r>
+              <a:rPr sz="2100" b="0">
+                <a:solidFill>
+                  <a:srgbClr val="102A30"/>
+                </a:solidFill>
+                <a:latin typeface="Helvetica Neue"/>
+                <a:ea typeface="Helvetica Neue"/>
+                <a:cs typeface="Helvetica Neue"/>
+              </a:rPr>
+              <a:t>Даёт конкретные требования</a:t>
+            </a:r>
+          </a:p>
+          <a:p xmlns:a="http://schemas.openxmlformats.org/drawingml/2006/main">
+            <a:pPr>
+              <a:defRPr sz="2100" b="0">
+                <a:solidFill>
+                  <a:srgbClr val="102A30"/>
+                </a:solidFill>
+                <a:latin typeface="Helvetica Neue"/>
+                <a:ea typeface="Helvetica Neue"/>
+                <a:cs typeface="Helvetica Neue"/>
+              </a:defRPr>
+            </a:pPr>
+            <a:r>
+              <a:rPr sz="2100" b="0">
+                <a:solidFill>
+                  <a:srgbClr val="102A30"/>
+                </a:solidFill>
+                <a:latin typeface="Helvetica Neue"/>
+                <a:ea typeface="Helvetica Neue"/>
+                <a:cs typeface="Helvetica Neue"/>
+              </a:rPr>
+              <a:t>к безопасности веб-приложений.</a:t>
+            </a:r>
+          </a:p>
+          <a:p xmlns:a="http://schemas.openxmlformats.org/drawingml/2006/main">
+            <a:r>
+              <a:t/>
+            </a:r>
+          </a:p>
+          <a:p xmlns:a="http://schemas.openxmlformats.org/drawingml/2006/main">
+            <a:pPr>
+              <a:defRPr sz="2100" b="0">
+                <a:solidFill>
+                  <a:srgbClr val="102A30"/>
+                </a:solidFill>
+                <a:latin typeface="Helvetica Neue"/>
+                <a:ea typeface="Helvetica Neue"/>
+                <a:cs typeface="Helvetica Neue"/>
+              </a:defRPr>
+            </a:pPr>
+            <a:r>
+              <a:rPr sz="2100" b="0">
+                <a:solidFill>
+                  <a:srgbClr val="102A30"/>
+                </a:solidFill>
+                <a:latin typeface="Helvetica Neue"/>
+                <a:ea typeface="Helvetica Neue"/>
+                <a:cs typeface="Helvetica Neue"/>
+              </a:rPr>
+              <a:t>Уточняет проверки прав доступа,</a:t>
+            </a:r>
+          </a:p>
+          <a:p xmlns:a="http://schemas.openxmlformats.org/drawingml/2006/main">
+            <a:pPr>
+              <a:defRPr sz="2100" b="0">
+                <a:solidFill>
+                  <a:srgbClr val="102A30"/>
+                </a:solidFill>
+                <a:latin typeface="Helvetica Neue"/>
+                <a:ea typeface="Helvetica Neue"/>
+                <a:cs typeface="Helvetica Neue"/>
+              </a:defRPr>
+            </a:pPr>
+            <a:r>
+              <a:rPr sz="2100" b="0">
+                <a:solidFill>
+                  <a:srgbClr val="102A30"/>
+                </a:solidFill>
+                <a:latin typeface="Helvetica Neue"/>
+                <a:ea typeface="Helvetica Neue"/>
+                <a:cs typeface="Helvetica Neue"/>
+              </a:rPr>
+              <a:t>входа и обработки текста.</a:t>
+            </a:r>
+          </a:p>
+        </p:txBody>
+      </p:sp>
+      <p:sp>
+        <p:nvSpPr>
+          <p:cNvPr id="15" name="">
+            <a:extLst xmlns:a="http://schemas.openxmlformats.org/drawingml/2006/main">
+              <a:ext uri="{FF2B5EF4-FFF2-40B4-BE49-F238E27FC236}">
+                <a16:creationId xmlns:a16="http://schemas.microsoft.com/office/drawing/2014/main" id="{6CF7E8AF-0587-4A51-A141-FF6EAE8A5F21}"/>
+              </a:ext>
+            </a:extLst>
+          </p:cNvPr>
+          <p:cNvSpPr>
+            <a:spLocks xmlns:a="http://schemas.openxmlformats.org/drawingml/2006/main" noGrp="1"/>
+          </p:cNvSpPr>
+          <p:nvPr/>
+        </p:nvSpPr>
+        <p:spPr>
+          <a:xfrm xmlns:a="http://schemas.openxmlformats.org/drawingml/2006/main">
+            <a:off x="609600" y="5629275"/>
+            <a:ext cx="10972800" cy="628650"/>
+          </a:xfrm>
+          <a:prstGeom xmlns:a="http://schemas.openxmlformats.org/drawingml/2006/main" prst="rect">
+            <a:avLst/>
+          </a:prstGeom>
+          <a:noFill xmlns:a="http://schemas.openxmlformats.org/drawingml/2006/main"/>
+          <a:ln xmlns:a="http://schemas.openxmlformats.org/drawingml/2006/main" w="0">
+            <a:noFill/>
+          </a:ln>
+        </p:spPr>
+        <p:txBody>
+          <a:bodyPr xmlns:a="http://schemas.openxmlformats.org/drawingml/2006/main">
+            <a:noAutofit/>
+          </a:bodyPr>
+          <a:lstStyle xmlns:a="http://schemas.openxmlformats.org/drawingml/2006/main"/>
+          <a:p xmlns:a="http://schemas.openxmlformats.org/drawingml/2006/main">
+            <a:pPr>
+              <a:defRPr sz="2100" b="1">
+                <a:solidFill>
+                  <a:srgbClr val="26756C"/>
+                </a:solidFill>
+                <a:latin typeface="Helvetica Neue"/>
+                <a:ea typeface="Helvetica Neue"/>
+                <a:cs typeface="Helvetica Neue"/>
+              </a:defRPr>
+            </a:pPr>
+            <a:r>
+              <a:rPr sz="2100" b="1">
+                <a:solidFill>
+                  <a:srgbClr val="26756C"/>
+                </a:solidFill>
+                <a:latin typeface="Helvetica Neue"/>
+                <a:ea typeface="Helvetica Neue"/>
+                <a:cs typeface="Helvetica Neue"/>
+              </a:rPr>
+              <a:t>SSDF задаёт порядок работы. ASVS уточняет технические требования.</a:t>
             </a:r>
           </a:p>
         </p:txBody>
@@ -3846,6 +4059,7 @@
           <a:lstStyle xmlns:a="http://schemas.openxmlformats.org/drawingml/2006/main"/>
           <a:p xmlns:a="http://schemas.openxmlformats.org/drawingml/2006/main">
             <a:pPr>
+              <a:buNone/>
               <a:defRPr sz="1350" b="1">
                 <a:solidFill>
                   <a:srgbClr val="26756C"/>
@@ -3903,6 +4117,7 @@
           <a:lstStyle xmlns:a="http://schemas.openxmlformats.org/drawingml/2006/main"/>
           <a:p xmlns:a="http://schemas.openxmlformats.org/drawingml/2006/main">
             <a:pPr>
+              <a:buNone/>
               <a:defRPr sz="3300" b="1">
                 <a:solidFill>
                   <a:srgbClr val="102A30"/>
@@ -3921,7 +4136,7 @@
                 <a:ea typeface="Helvetica Neue"/>
                 <a:cs typeface="Helvetica Neue"/>
               </a:rPr>
-              <a:t>Одно правило в действии</a:t>
+              <a:t>Почему не выбрали SAMM и ГОСТ</a:t>
             </a:r>
           </a:p>
         </p:txBody>
@@ -3960,6 +4175,7 @@
           <a:lstStyle xmlns:a="http://schemas.openxmlformats.org/drawingml/2006/main"/>
           <a:p xmlns:a="http://schemas.openxmlformats.org/drawingml/2006/main">
             <a:pPr>
+              <a:buNone/>
               <a:defRPr sz="1350" b="0">
                 <a:solidFill>
                   <a:srgbClr val="59686B"/>
@@ -4017,6 +4233,7 @@
           <a:lstStyle xmlns:a="http://schemas.openxmlformats.org/drawingml/2006/main"/>
           <a:p xmlns:a="http://schemas.openxmlformats.org/drawingml/2006/main">
             <a:pPr>
+              <a:buNone/>
               <a:defRPr sz="1800" b="1">
                 <a:solidFill>
                   <a:srgbClr val="26756C"/>
@@ -4036,86 +4253,30 @@
                 <a:cs typeface="Helvetica Neue"/>
               </a:rPr>
               <a:t>04</a:t>
-            </a:r>
-          </a:p>
-        </p:txBody>
-      </p:sp>
-      <p:sp>
-        <p:nvSpPr>
-          <p:cNvPr id="5" name="">
-            <a:extLst xmlns:a="http://schemas.openxmlformats.org/drawingml/2006/main">
-              <a:ext uri="{FF2B5EF4-FFF2-40B4-BE49-F238E27FC236}">
-                <a16:creationId xmlns:a16="http://schemas.microsoft.com/office/drawing/2014/main" id="{2EBFEF88-8900-49AA-857B-B98B094AFE0B}"/>
-              </a:ext>
-            </a:extLst>
-          </p:cNvPr>
-          <p:cNvSpPr>
-            <a:spLocks xmlns:a="http://schemas.openxmlformats.org/drawingml/2006/main" noGrp="1"/>
-          </p:cNvSpPr>
-          <p:nvPr/>
-        </p:nvSpPr>
-        <p:spPr>
-          <a:xfrm xmlns:a="http://schemas.openxmlformats.org/drawingml/2006/main">
-            <a:off x="609600" y="1809750"/>
-            <a:ext cx="10972800" cy="447675"/>
-          </a:xfrm>
-          <a:prstGeom xmlns:a="http://schemas.openxmlformats.org/drawingml/2006/main" prst="rect">
-            <a:avLst/>
-          </a:prstGeom>
-          <a:noFill xmlns:a="http://schemas.openxmlformats.org/drawingml/2006/main"/>
-          <a:ln xmlns:a="http://schemas.openxmlformats.org/drawingml/2006/main" w="0">
-            <a:noFill/>
-          </a:ln>
-        </p:spPr>
-        <p:txBody>
-          <a:bodyPr xmlns:a="http://schemas.openxmlformats.org/drawingml/2006/main">
-            <a:noAutofit/>
-          </a:bodyPr>
-          <a:lstStyle xmlns:a="http://schemas.openxmlformats.org/drawingml/2006/main"/>
-          <a:p xmlns:a="http://schemas.openxmlformats.org/drawingml/2006/main">
-            <a:pPr>
-              <a:defRPr sz="2250" b="1">
-                <a:solidFill>
-                  <a:srgbClr val="26756C"/>
-                </a:solidFill>
-                <a:latin typeface="Helvetica Neue"/>
-                <a:ea typeface="Helvetica Neue"/>
-                <a:cs typeface="Helvetica Neue"/>
-              </a:defRPr>
-            </a:pPr>
-            <a:r>
-              <a:rPr sz="2250" b="1">
-                <a:solidFill>
-                  <a:srgbClr val="26756C"/>
-                </a:solidFill>
-                <a:latin typeface="Helvetica Neue"/>
-                <a:ea typeface="Helvetica Neue"/>
-                <a:cs typeface="Helvetica Neue"/>
-              </a:rPr>
-              <a:t>PW.8.1–8.2: проверка работающего кода</a:t>
             </a:r>
           </a:p>
         </p:txBody>
       </p:sp>
       <p:graphicFrame>
         <p:nvGraphicFramePr>
-          <p:cNvPr id="13" name=""/>
+          <p:cNvPr id="15" name=""/>
           <p:cNvGraphicFramePr/>
           <p:nvPr/>
         </p:nvGraphicFramePr>
         <p:xfrm>
-          <a:off xmlns:a="http://schemas.openxmlformats.org/drawingml/2006/main" x="609600" y="2476500"/>
-          <a:ext xmlns:a="http://schemas.openxmlformats.org/drawingml/2006/main" cx="10972800" cy="3171825"/>
+          <a:off xmlns:a="http://schemas.openxmlformats.org/drawingml/2006/main" x="609600" y="2047875"/>
+          <a:ext xmlns:a="http://schemas.openxmlformats.org/drawingml/2006/main" cx="10972800" cy="3143250"/>
         </p:xfrm>
         <a:graphic xmlns:a="http://schemas.openxmlformats.org/drawingml/2006/main">
           <a:graphicData uri="http://schemas.openxmlformats.org/drawingml/2006/table">
             <a:tbl>
               <a:tblPr/>
               <a:tblGrid>
-                <a:gridCol w="2667000"/>
-                <a:gridCol w="8305800"/>
+                <a:gridCol w="2333625"/>
+                <a:gridCol w="3495675"/>
+                <a:gridCol w="5143500"/>
               </a:tblGrid>
-              <a:tr h="528638">
+              <a:tr h="571500">
                 <a:tc>
                   <a:txBody>
                     <a:bodyPr>
@@ -4124,7 +4285,7 @@
                     <a:lstStyle/>
                     <a:p>
                       <a:r>
-                        <a:rPr sz="1875" b="1">
+                        <a:rPr sz="1950" b="1">
                           <a:solidFill>
                             <a:srgbClr val="FFFFFF"/>
                           </a:solidFill>
@@ -4132,7 +4293,7 @@
                           <a:ea typeface="Helvetica Neue"/>
                           <a:cs typeface="Helvetica Neue"/>
                         </a:rPr>
-                        <a:t>Шаг</a:t>
+                        <a:t>Источник</a:t>
                       </a:r>
                     </a:p>
                   </a:txBody>
@@ -4150,7 +4311,7 @@
                     <a:lstStyle/>
                     <a:p>
                       <a:r>
-                        <a:rPr sz="1875" b="1">
+                        <a:rPr sz="1950" b="1">
                           <a:solidFill>
                             <a:srgbClr val="FFFFFF"/>
                           </a:solidFill>
@@ -4158,7 +4319,33 @@
                           <a:ea typeface="Helvetica Neue"/>
                           <a:cs typeface="Helvetica Neue"/>
                         </a:rPr>
-                        <a:t>Пример для прав доступа</a:t>
+                        <a:t>Зачем рассмотрели</a:t>
+                      </a:r>
+                    </a:p>
+                  </a:txBody>
+                  <a:tcPr marL="91440" marR="91440" marT="45720" marB="45720">
+                    <a:solidFill>
+                      <a:srgbClr val="102A30"/>
+                    </a:solidFill>
+                  </a:tcPr>
+                </a:tc>
+                <a:tc>
+                  <a:txBody>
+                    <a:bodyPr>
+                      <a:noAutofit/>
+                    </a:bodyPr>
+                    <a:lstStyle/>
+                    <a:p>
+                      <a:r>
+                        <a:rPr sz="1950" b="1">
+                          <a:solidFill>
+                            <a:srgbClr val="FFFFFF"/>
+                          </a:solidFill>
+                          <a:latin typeface="Helvetica Neue"/>
+                          <a:ea typeface="Helvetica Neue"/>
+                          <a:cs typeface="Helvetica Neue"/>
+                        </a:rPr>
+                        <a:t>Почему не взяли за основу</a:t>
                       </a:r>
                     </a:p>
                   </a:txBody>
@@ -4169,7 +4356,7 @@
                   </a:tcPr>
                 </a:tc>
               </a:tr>
-              <a:tr h="528638">
+              <a:tr h="1285875">
                 <a:tc>
                   <a:txBody>
                     <a:bodyPr>
@@ -4178,7 +4365,7 @@
                     <a:lstStyle/>
                     <a:p>
                       <a:r>
-                        <a:rPr sz="1875" b="0">
+                        <a:rPr sz="1950" b="0">
                           <a:solidFill>
                             <a:srgbClr val="102A30"/>
                           </a:solidFill>
@@ -4186,7 +4373,7 @@
                           <a:ea typeface="Helvetica Neue"/>
                           <a:cs typeface="Helvetica Neue"/>
                         </a:rPr>
-                        <a:t>Требование</a:t>
+                        <a:t>OWASP SAMM 2</a:t>
                       </a:r>
                     </a:p>
                   </a:txBody>
@@ -4204,7 +4391,7 @@
                     <a:lstStyle/>
                     <a:p>
                       <a:r>
-                        <a:rPr sz="1875" b="0">
+                        <a:rPr sz="1950" b="0">
                           <a:solidFill>
                             <a:srgbClr val="102A30"/>
                           </a:solidFill>
@@ -4212,7 +4399,85 @@
                           <a:ea typeface="Helvetica Neue"/>
                           <a:cs typeface="Helvetica Neue"/>
                         </a:rPr>
-                        <a:t>Наблюдатель не изменяет задачу</a:t>
+                        <a:t>Помогает оценивать</a:t>
+                      </a:r>
+                    </a:p>
+                    <a:p>
+                      <a:r>
+                        <a:rPr sz="1950" b="0">
+                          <a:solidFill>
+                            <a:srgbClr val="102A30"/>
+                          </a:solidFill>
+                          <a:latin typeface="Helvetica Neue"/>
+                          <a:ea typeface="Helvetica Neue"/>
+                          <a:cs typeface="Helvetica Neue"/>
+                        </a:rPr>
+                        <a:t>и улучшать практики</a:t>
+                      </a:r>
+                    </a:p>
+                    <a:p>
+                      <a:r>
+                        <a:rPr sz="1950" b="0">
+                          <a:solidFill>
+                            <a:srgbClr val="102A30"/>
+                          </a:solidFill>
+                          <a:latin typeface="Helvetica Neue"/>
+                          <a:ea typeface="Helvetica Neue"/>
+                          <a:cs typeface="Helvetica Neue"/>
+                        </a:rPr>
+                        <a:t>команды</a:t>
+                      </a:r>
+                    </a:p>
+                  </a:txBody>
+                  <a:tcPr marL="91440" marR="91440" marT="45720" marB="45720">
+                    <a:solidFill>
+                      <a:srgbClr val="FFFFFF"/>
+                    </a:solidFill>
+                  </a:tcPr>
+                </a:tc>
+                <a:tc>
+                  <a:txBody>
+                    <a:bodyPr>
+                      <a:noAutofit/>
+                    </a:bodyPr>
+                    <a:lstStyle/>
+                    <a:p>
+                      <a:r>
+                        <a:rPr sz="1950" b="0">
+                          <a:solidFill>
+                            <a:srgbClr val="102A30"/>
+                          </a:solidFill>
+                          <a:latin typeface="Helvetica Neue"/>
+                          <a:ea typeface="Helvetica Neue"/>
+                          <a:cs typeface="Helvetica Neue"/>
+                        </a:rPr>
+                        <a:t>Проект только начат. Мало истории</a:t>
+                      </a:r>
+                    </a:p>
+                    <a:p>
+                      <a:r>
+                        <a:rPr sz="1950" b="0">
+                          <a:solidFill>
+                            <a:srgbClr val="102A30"/>
+                          </a:solidFill>
+                          <a:latin typeface="Helvetica Neue"/>
+                          <a:ea typeface="Helvetica Neue"/>
+                          <a:cs typeface="Helvetica Neue"/>
+                        </a:rPr>
+                        <a:t>для оценки устойчивости практик.</a:t>
+                      </a:r>
+                    </a:p>
+                    <a:p>
+                      <a:r>
+                        <a:rPr sz="1950" b="0">
+                          <a:solidFill>
+                            <a:srgbClr val="102A30"/>
+                          </a:solidFill>
+                          <a:latin typeface="Helvetica Neue"/>
+                          <a:ea typeface="Helvetica Neue"/>
+                          <a:cs typeface="Helvetica Neue"/>
+                        </a:rPr>
+                        <a:t>Сначала устанавливаем правила.</a:t>
                       </a:r>
                     </a:p>
                   </a:txBody>
@@ -4223,7 +4488,7 @@
                   </a:tcPr>
                 </a:tc>
               </a:tr>
-              <a:tr h="528638">
+              <a:tr h="1285875">
                 <a:tc>
                   <a:txBody>
                     <a:bodyPr>
@@ -4232,7 +4497,7 @@
                     <a:lstStyle/>
                     <a:p>
                       <a:r>
-                        <a:rPr sz="1875" b="0">
+                        <a:rPr sz="1950" b="0">
                           <a:solidFill>
                             <a:srgbClr val="102A30"/>
                           </a:solidFill>
@@ -4240,7 +4505,20 @@
                           <a:ea typeface="Helvetica Neue"/>
                           <a:cs typeface="Helvetica Neue"/>
                         </a:rPr>
-                        <a:t>Действие Романа</a:t>
+                        <a:t>ГОСТ Р</a:t>
+                      </a:r>
+                    </a:p>
+                    <a:p>
+                      <a:r>
+                        <a:rPr sz="1950" b="0">
+                          <a:solidFill>
+                            <a:srgbClr val="102A30"/>
+                          </a:solidFill>
+                          <a:latin typeface="Helvetica Neue"/>
+                          <a:ea typeface="Helvetica Neue"/>
+                          <a:cs typeface="Helvetica Neue"/>
+                        </a:rPr>
+                        <a:t>56939-2024</a:t>
                       </a:r>
                     </a:p>
                   </a:txBody>
@@ -4258,7 +4536,7 @@
                     <a:lstStyle/>
                     <a:p>
                       <a:r>
-                        <a:rPr sz="1875" b="0">
+                        <a:rPr sz="1950" b="0">
                           <a:solidFill>
                             <a:srgbClr val="102A30"/>
                           </a:solidFill>
@@ -4266,27 +4544,12 @@
                           <a:ea typeface="Helvetica Neue"/>
                           <a:cs typeface="Helvetica Neue"/>
                         </a:rPr>
-                        <a:t>POST от viewer и такой же POST от editor</a:t>
+                        <a:t>Задаёт требования</a:t>
                       </a:r>
                     </a:p>
-                  </a:txBody>
-                  <a:tcPr marL="91440" marR="91440" marT="45720" marB="45720">
-                    <a:solidFill>
-                      <a:srgbClr val="F7F6F1"/>
-                    </a:solidFill>
-                  </a:tcPr>
-                </a:tc>
-              </a:tr>
-              <a:tr h="528638">
-                <a:tc>
-                  <a:txBody>
-                    <a:bodyPr>
-                      <a:noAutofit/>
-                    </a:bodyPr>
-                    <a:lstStyle/>
                     <a:p>
                       <a:r>
-                        <a:rPr sz="1875" b="0">
+                        <a:rPr sz="1950" b="0">
                           <a:solidFill>
                             <a:srgbClr val="102A30"/>
                           </a:solidFill>
@@ -4294,25 +4557,12 @@
                           <a:ea typeface="Helvetica Neue"/>
                           <a:cs typeface="Helvetica Neue"/>
                         </a:rPr>
-                        <a:t>Результат</a:t>
+                        <a:t>к работам безопасной</a:t>
                       </a:r>
                     </a:p>
-                  </a:txBody>
-                  <a:tcPr marL="91440" marR="91440" marT="45720" marB="45720">
-                    <a:solidFill>
-                      <a:srgbClr val="FFFFFF"/>
-                    </a:solidFill>
-                  </a:tcPr>
-                </a:tc>
-                <a:tc>
-                  <a:txBody>
-                    <a:bodyPr>
-                      <a:noAutofit/>
-                    </a:bodyPr>
-                    <a:lstStyle/>
                     <a:p>
                       <a:r>
-                        <a:rPr sz="1875" b="0">
+                        <a:rPr sz="1950" b="0">
                           <a:solidFill>
                             <a:srgbClr val="102A30"/>
                           </a:solidFill>
@@ -4320,35 +4570,7 @@
                           <a:ea typeface="Helvetica Neue"/>
                           <a:cs typeface="Helvetica Neue"/>
                         </a:rPr>
-                        <a:t>Viewer: отказ, БД без изменений. Editor: запись</a:t>
-                      </a:r>
-                    </a:p>
-                  </a:txBody>
-                  <a:tcPr marL="91440" marR="91440" marT="45720" marB="45720">
-                    <a:solidFill>
-                      <a:srgbClr val="FFFFFF"/>
-                    </a:solidFill>
-                  </a:tcPr>
-                </a:tc>
-              </a:tr>
-              <a:tr h="528638">
-                <a:tc>
-                  <a:txBody>
-                    <a:bodyPr>
-                      <a:noAutofit/>
-                    </a:bodyPr>
-                    <a:lstStyle/>
-                    <a:p>
-                      <a:r>
-                        <a:rPr sz="1875" b="0">
-                          <a:solidFill>
-                            <a:srgbClr val="102A30"/>
-                          </a:solidFill>
-                          <a:latin typeface="Helvetica Neue"/>
-                          <a:ea typeface="Helvetica Neue"/>
-                          <a:cs typeface="Helvetica Neue"/>
-                        </a:rPr>
-                        <a:t>Проверка Ярослава</a:t>
+                        <a:t>разработки</a:t>
                       </a:r>
                     </a:p>
                   </a:txBody>
@@ -4366,7 +4588,7 @@
                     <a:lstStyle/>
                     <a:p>
                       <a:r>
-                        <a:rPr sz="1875" b="0">
+                        <a:rPr sz="1950" b="0">
                           <a:solidFill>
                             <a:srgbClr val="102A30"/>
                           </a:solidFill>
@@ -4374,7 +4596,33 @@
                           <a:ea typeface="Helvetica Neue"/>
                           <a:cs typeface="Helvetica Neue"/>
                         </a:rPr>
-                        <a:t>Самостоятельно повторить запрет и прочитать код</a:t>
+                        <a:t>В задании нет требования брать ГОСТ.</a:t>
+                      </a:r>
+                    </a:p>
+                    <a:p>
+                      <a:r>
+                        <a:rPr sz="1950" b="0">
+                          <a:solidFill>
+                            <a:srgbClr val="102A30"/>
+                          </a:solidFill>
+                          <a:latin typeface="Helvetica Neue"/>
+                          <a:ea typeface="Helvetica Neue"/>
+                          <a:cs typeface="Helvetica Neue"/>
+                        </a:rPr>
+                        <a:t>Для нашей области достаточно SSDF,</a:t>
+                      </a:r>
+                    </a:p>
+                    <a:p>
+                      <a:r>
+                        <a:rPr sz="1950" b="0">
+                          <a:solidFill>
+                            <a:srgbClr val="102A30"/>
+                          </a:solidFill>
+                          <a:latin typeface="Helvetica Neue"/>
+                          <a:ea typeface="Helvetica Neue"/>
+                          <a:cs typeface="Helvetica Neue"/>
+                        </a:rPr>
+                        <a:t>полный текст которого открыт.</a:t>
                       </a:r>
                     </a:p>
                   </a:txBody>
@@ -4385,70 +4633,16 @@
                   </a:tcPr>
                 </a:tc>
               </a:tr>
-              <a:tr h="528638">
-                <a:tc>
-                  <a:txBody>
-                    <a:bodyPr>
-                      <a:noAutofit/>
-                    </a:bodyPr>
-                    <a:lstStyle/>
-                    <a:p>
-                      <a:r>
-                        <a:rPr sz="1875" b="0">
-                          <a:solidFill>
-                            <a:srgbClr val="102A30"/>
-                          </a:solidFill>
-                          <a:latin typeface="Helvetica Neue"/>
-                          <a:ea typeface="Helvetica Neue"/>
-                          <a:cs typeface="Helvetica Neue"/>
-                        </a:rPr>
-                        <a:t>Решение</a:t>
-                      </a:r>
-                    </a:p>
-                  </a:txBody>
-                  <a:tcPr marL="91440" marR="91440" marT="45720" marB="45720">
-                    <a:solidFill>
-                      <a:srgbClr val="FFFFFF"/>
-                    </a:solidFill>
-                  </a:tcPr>
-                </a:tc>
-                <a:tc>
-                  <a:txBody>
-                    <a:bodyPr>
-                      <a:noAutofit/>
-                    </a:bodyPr>
-                    <a:lstStyle/>
-                    <a:p>
-                      <a:r>
-                        <a:rPr sz="1875" b="0">
-                          <a:solidFill>
-                            <a:srgbClr val="102A30"/>
-                          </a:solidFill>
-                          <a:latin typeface="Helvetica Neue"/>
-                          <a:ea typeface="Helvetica Neue"/>
-                          <a:cs typeface="Helvetica Neue"/>
-                        </a:rPr>
-                        <a:t>Несовпадение с требованием блокирует merge</a:t>
-                      </a:r>
-                    </a:p>
-                  </a:txBody>
-                  <a:tcPr marL="91440" marR="91440" marT="45720" marB="45720">
-                    <a:solidFill>
-                      <a:srgbClr val="FFFFFF"/>
-                    </a:solidFill>
-                  </a:tcPr>
-                </a:tc>
-              </a:tr>
             </a:tbl>
           </a:graphicData>
         </a:graphic>
       </p:graphicFrame>
       <p:sp>
         <p:nvSpPr>
-          <p:cNvPr id="7" name="">
+          <p:cNvPr id="10" name="">
             <a:extLst xmlns:a="http://schemas.openxmlformats.org/drawingml/2006/main">
               <a:ext uri="{FF2B5EF4-FFF2-40B4-BE49-F238E27FC236}">
-                <a16:creationId xmlns:a16="http://schemas.microsoft.com/office/drawing/2014/main" id="{A3883D5E-1612-4E94-8323-4D4E117E15C5}"/>
+                <a16:creationId xmlns:a16="http://schemas.microsoft.com/office/drawing/2014/main" id="{0F1252E7-C4FB-417C-9CC7-9E7D2F833BF8}"/>
               </a:ext>
             </a:extLst>
           </p:cNvPr>
@@ -4459,8 +4653,8 @@
         </p:nvSpPr>
         <p:spPr>
           <a:xfrm xmlns:a="http://schemas.openxmlformats.org/drawingml/2006/main">
-            <a:off x="609600" y="5876925"/>
-            <a:ext cx="10972800" cy="381000"/>
+            <a:off x="609600" y="5457825"/>
+            <a:ext cx="10972800" cy="733425"/>
           </a:xfrm>
           <a:prstGeom xmlns:a="http://schemas.openxmlformats.org/drawingml/2006/main" prst="rect">
             <a:avLst/>
@@ -4477,25 +4671,25 @@
           <a:lstStyle xmlns:a="http://schemas.openxmlformats.org/drawingml/2006/main"/>
           <a:p xmlns:a="http://schemas.openxmlformats.org/drawingml/2006/main">
             <a:pPr>
-              <a:defRPr sz="1875" b="0">
-                <a:solidFill>
-                  <a:srgbClr val="102A30"/>
-                </a:solidFill>
-                <a:latin typeface="Helvetica Neue"/>
-                <a:ea typeface="Helvetica Neue"/>
-                <a:cs typeface="Helvetica Neue"/>
-              </a:defRPr>
-            </a:pPr>
-            <a:r>
-              <a:rPr sz="1875" b="0">
-                <a:solidFill>
-                  <a:srgbClr val="102A30"/>
-                </a:solidFill>
-                <a:latin typeface="Helvetica Neue"/>
-                <a:ea typeface="Helvetica Neue"/>
-                <a:cs typeface="Helvetica Neue"/>
-              </a:rPr>
-              <a:t>Сохраняем commit, условия, команду, фактический результат и review.</a:t>
+              <a:defRPr sz="2100" b="1">
+                <a:solidFill>
+                  <a:srgbClr val="26756C"/>
+                </a:solidFill>
+                <a:latin typeface="Helvetica Neue"/>
+                <a:ea typeface="Helvetica Neue"/>
+                <a:cs typeface="Helvetica Neue"/>
+              </a:defRPr>
+            </a:pPr>
+            <a:r>
+              <a:rPr sz="2100" b="1">
+                <a:solidFill>
+                  <a:srgbClr val="26756C"/>
+                </a:solidFill>
+                <a:latin typeface="Helvetica Neue"/>
+                <a:ea typeface="Helvetica Neue"/>
+                <a:cs typeface="Helvetica Neue"/>
+              </a:rPr>
+              <a:t>Оба подхода применимы. Выбор зависит от цели проекта и требований.</a:t>
             </a:r>
           </a:p>
         </p:txBody>
@@ -4563,6 +4757,7 @@
           <a:lstStyle xmlns:a="http://schemas.openxmlformats.org/drawingml/2006/main"/>
           <a:p xmlns:a="http://schemas.openxmlformats.org/drawingml/2006/main">
             <a:pPr>
+              <a:buNone/>
               <a:defRPr sz="1350" b="1">
                 <a:solidFill>
                   <a:srgbClr val="26756C"/>
@@ -4620,6 +4815,7 @@
           <a:lstStyle xmlns:a="http://schemas.openxmlformats.org/drawingml/2006/main"/>
           <a:p xmlns:a="http://schemas.openxmlformats.org/drawingml/2006/main">
             <a:pPr>
+              <a:buNone/>
               <a:defRPr sz="3300" b="1">
                 <a:solidFill>
                   <a:srgbClr val="102A30"/>
@@ -4638,7 +4834,7 @@
                 <a:ea typeface="Helvetica Neue"/>
                 <a:cs typeface="Helvetica Neue"/>
               </a:rPr>
-              <a:t>Текущее состояние и существенный разрыв</a:t>
+              <a:t>Что уже есть и чего не хватает</a:t>
             </a:r>
           </a:p>
         </p:txBody>
@@ -4677,6 +4873,7 @@
           <a:lstStyle xmlns:a="http://schemas.openxmlformats.org/drawingml/2006/main"/>
           <a:p xmlns:a="http://schemas.openxmlformats.org/drawingml/2006/main">
             <a:pPr>
+              <a:buNone/>
               <a:defRPr sz="1350" b="0">
                 <a:solidFill>
                   <a:srgbClr val="59686B"/>
@@ -4734,6 +4931,7 @@
           <a:lstStyle xmlns:a="http://schemas.openxmlformats.org/drawingml/2006/main"/>
           <a:p xmlns:a="http://schemas.openxmlformats.org/drawingml/2006/main">
             <a:pPr>
+              <a:buNone/>
               <a:defRPr sz="1800" b="1">
                 <a:solidFill>
                   <a:srgbClr val="26756C"/>
@@ -4759,10 +4957,10 @@
       </p:sp>
       <p:sp>
         <p:nvSpPr>
-          <p:cNvPr id="5" name="">
+          <p:cNvPr id="12" name="">
             <a:extLst xmlns:a="http://schemas.openxmlformats.org/drawingml/2006/main">
               <a:ext uri="{FF2B5EF4-FFF2-40B4-BE49-F238E27FC236}">
-                <a16:creationId xmlns:a16="http://schemas.microsoft.com/office/drawing/2014/main" id="{6948F4B4-8575-46C0-A782-EEE17DEB4A3E}"/>
+                <a16:creationId xmlns:a16="http://schemas.microsoft.com/office/drawing/2014/main" id="{0C045A3E-C67B-4BBE-B374-55C62D799643}"/>
               </a:ext>
             </a:extLst>
           </p:cNvPr>
@@ -4773,8 +4971,8 @@
         </p:nvSpPr>
         <p:spPr>
           <a:xfrm xmlns:a="http://schemas.openxmlformats.org/drawingml/2006/main">
-            <a:off x="609600" y="1971675"/>
-            <a:ext cx="4238625" cy="781050"/>
+            <a:off x="609600" y="2028825"/>
+            <a:ext cx="5095875" cy="762000"/>
           </a:xfrm>
           <a:prstGeom xmlns:a="http://schemas.openxmlformats.org/drawingml/2006/main" prst="rect">
             <a:avLst/>
@@ -4791,7 +4989,7 @@
           <a:lstStyle xmlns:a="http://schemas.openxmlformats.org/drawingml/2006/main"/>
           <a:p xmlns:a="http://schemas.openxmlformats.org/drawingml/2006/main">
             <a:pPr>
-              <a:defRPr sz="4950" b="1">
+              <a:defRPr sz="3600" b="1">
                 <a:solidFill>
                   <a:srgbClr val="26756C"/>
                 </a:solidFill>
@@ -4801,7 +4999,7 @@
               </a:defRPr>
             </a:pPr>
             <a:r>
-              <a:rPr sz="4950" b="1">
+              <a:rPr sz="3600" b="1">
                 <a:solidFill>
                   <a:srgbClr val="26756C"/>
                 </a:solidFill>
@@ -4809,17 +5007,17 @@
                 <a:ea typeface="Helvetica Neue"/>
                 <a:cs typeface="Helvetica Neue"/>
               </a:rPr>
-              <a:t>27 тестов</a:t>
-            </a:r>
-          </a:p>
-        </p:txBody>
-      </p:sp>
-      <p:sp>
-        <p:nvSpPr>
-          <p:cNvPr id="6" name="">
+              <a:t>27 тестов прошли</a:t>
+            </a:r>
+          </a:p>
+        </p:txBody>
+      </p:sp>
+      <p:sp>
+        <p:nvSpPr>
+          <p:cNvPr id="13" name="">
             <a:extLst xmlns:a="http://schemas.openxmlformats.org/drawingml/2006/main">
               <a:ext uri="{FF2B5EF4-FFF2-40B4-BE49-F238E27FC236}">
-                <a16:creationId xmlns:a16="http://schemas.microsoft.com/office/drawing/2014/main" id="{DB0DD727-F875-4A96-84D8-36442A5F0E18}"/>
+                <a16:creationId xmlns:a16="http://schemas.microsoft.com/office/drawing/2014/main" id="{99F8A746-BEBB-4ED2-BFDF-F310063523A6}"/>
               </a:ext>
             </a:extLst>
           </p:cNvPr>
@@ -4830,8 +5028,8 @@
         </p:nvSpPr>
         <p:spPr>
           <a:xfrm xmlns:a="http://schemas.openxmlformats.org/drawingml/2006/main">
-            <a:off x="609600" y="3028950"/>
-            <a:ext cx="4381500" cy="1266825"/>
+            <a:off x="609600" y="3057525"/>
+            <a:ext cx="4857750" cy="1657350"/>
           </a:xfrm>
           <a:prstGeom xmlns:a="http://schemas.openxmlformats.org/drawingml/2006/main" prst="rect">
             <a:avLst/>
@@ -4866,7 +5064,7 @@
                 <a:ea typeface="Helvetica Neue"/>
                 <a:cs typeface="Helvetica Neue"/>
               </a:rPr>
-              <a:t>5 инженерных проверок прошли.</a:t>
+              <a:t>Результаты и версия кода</a:t>
             </a:r>
           </a:p>
           <a:p xmlns:a="http://schemas.openxmlformats.org/drawingml/2006/main">
@@ -4889,7 +5087,12 @@
                 <a:ea typeface="Helvetica Neue"/>
                 <a:cs typeface="Helvetica Neue"/>
               </a:rPr>
-              <a:t>Версии и хеши кода сохранены.</a:t>
+              <a:t>сохранены в репозитории.</a:t>
+            </a:r>
+          </a:p>
+          <a:p xmlns:a="http://schemas.openxmlformats.org/drawingml/2006/main">
+            <a:r>
+              <a:t/>
             </a:r>
           </a:p>
           <a:p xmlns:a="http://schemas.openxmlformats.org/drawingml/2006/main">
@@ -4912,17 +5115,17 @@
                 <a:ea typeface="Helvetica Neue"/>
                 <a:cs typeface="Helvetica Neue"/>
               </a:rPr>
-              <a:t>Есть успешные запуски CI.</a:t>
-            </a:r>
-          </a:p>
-        </p:txBody>
-      </p:sp>
-      <p:sp>
-        <p:nvSpPr>
-          <p:cNvPr id="7" name="">
+              <a:t>Срез проверки: 04.10.2026</a:t>
+            </a:r>
+          </a:p>
+        </p:txBody>
+      </p:sp>
+      <p:sp>
+        <p:nvSpPr>
+          <p:cNvPr id="14" name="">
             <a:extLst xmlns:a="http://schemas.openxmlformats.org/drawingml/2006/main">
               <a:ext uri="{FF2B5EF4-FFF2-40B4-BE49-F238E27FC236}">
-                <a16:creationId xmlns:a16="http://schemas.microsoft.com/office/drawing/2014/main" id="{8BDD8E09-772E-46B6-BBD2-1A5FC025A657}"/>
+                <a16:creationId xmlns:a16="http://schemas.microsoft.com/office/drawing/2014/main" id="{452308AF-18C7-4A31-BE20-1C5DD28A1318}"/>
               </a:ext>
             </a:extLst>
           </p:cNvPr>
@@ -4933,8 +5136,8 @@
         </p:nvSpPr>
         <p:spPr>
           <a:xfrm xmlns:a="http://schemas.openxmlformats.org/drawingml/2006/main">
-            <a:off x="5562600" y="2076450"/>
-            <a:ext cx="5981700" cy="800100"/>
+            <a:off x="6191250" y="2009775"/>
+            <a:ext cx="5410200" cy="952500"/>
           </a:xfrm>
           <a:prstGeom xmlns:a="http://schemas.openxmlformats.org/drawingml/2006/main" prst="rect">
             <a:avLst/>
@@ -4969,17 +5172,40 @@
                 <a:ea typeface="Helvetica Neue"/>
                 <a:cs typeface="Helvetica Neue"/>
               </a:rPr>
-              <a:t>G1: нет независимого review</a:t>
-            </a:r>
-          </a:p>
-        </p:txBody>
-      </p:sp>
-      <p:sp>
-        <p:nvSpPr>
-          <p:cNvPr id="8" name="">
+              <a:t>Нет сохранённой</a:t>
+            </a:r>
+          </a:p>
+          <a:p xmlns:a="http://schemas.openxmlformats.org/drawingml/2006/main">
+            <a:pPr>
+              <a:defRPr sz="2700" b="1">
+                <a:solidFill>
+                  <a:srgbClr val="102A30"/>
+                </a:solidFill>
+                <a:latin typeface="Helvetica Neue"/>
+                <a:ea typeface="Helvetica Neue"/>
+                <a:cs typeface="Helvetica Neue"/>
+              </a:defRPr>
+            </a:pPr>
+            <a:r>
+              <a:rPr sz="2700" b="1">
+                <a:solidFill>
+                  <a:srgbClr val="102A30"/>
+                </a:solidFill>
+                <a:latin typeface="Helvetica Neue"/>
+                <a:ea typeface="Helvetica Neue"/>
+                <a:cs typeface="Helvetica Neue"/>
+              </a:rPr>
+              <a:t>проверки партнёром</a:t>
+            </a:r>
+          </a:p>
+        </p:txBody>
+      </p:sp>
+      <p:sp>
+        <p:nvSpPr>
+          <p:cNvPr id="15" name="">
             <a:extLst xmlns:a="http://schemas.openxmlformats.org/drawingml/2006/main">
               <a:ext uri="{FF2B5EF4-FFF2-40B4-BE49-F238E27FC236}">
-                <a16:creationId xmlns:a16="http://schemas.microsoft.com/office/drawing/2014/main" id="{58FA0FA6-B78F-406A-B1B3-7D5645F89CCE}"/>
+                <a16:creationId xmlns:a16="http://schemas.microsoft.com/office/drawing/2014/main" id="{D9C2119C-3533-4180-9019-ACC86707BC3C}"/>
               </a:ext>
             </a:extLst>
           </p:cNvPr>
@@ -4990,8 +5216,8 @@
         </p:nvSpPr>
         <p:spPr>
           <a:xfrm xmlns:a="http://schemas.openxmlformats.org/drawingml/2006/main">
-            <a:off x="5562600" y="3143250"/>
-            <a:ext cx="5981700" cy="1447800"/>
+            <a:off x="6191250" y="3162300"/>
+            <a:ext cx="5381625" cy="1714500"/>
           </a:xfrm>
           <a:prstGeom xmlns:a="http://schemas.openxmlformats.org/drawingml/2006/main" prst="rect">
             <a:avLst/>
@@ -5026,7 +5252,7 @@
                 <a:ea typeface="Helvetica Neue"/>
                 <a:cs typeface="Helvetica Neue"/>
               </a:rPr>
-              <a:t>Код и тесты могут повторять</a:t>
+              <a:t>Код и тест могут повторять</a:t>
             </a:r>
           </a:p>
           <a:p xmlns:a="http://schemas.openxmlformats.org/drawingml/2006/main">
@@ -5053,6 +5279,11 @@
             </a:r>
           </a:p>
           <a:p xmlns:a="http://schemas.openxmlformats.org/drawingml/2006/main">
+            <a:r>
+              <a:t/>
+            </a:r>
+          </a:p>
+          <a:p xmlns:a="http://schemas.openxmlformats.org/drawingml/2006/main">
             <a:pPr>
               <a:defRPr sz="2100" b="0">
                 <a:solidFill>
@@ -5072,7 +5303,7 @@
                 <a:ea typeface="Helvetica Neue"/>
                 <a:cs typeface="Helvetica Neue"/>
               </a:rPr>
-              <a:t>В исследованной истории нет PR</a:t>
+              <a:t>Нужно независимо проверить</a:t>
             </a:r>
           </a:p>
           <a:p xmlns:a="http://schemas.openxmlformats.org/drawingml/2006/main">
@@ -5095,17 +5326,17 @@
                 <a:ea typeface="Helvetica Neue"/>
                 <a:cs typeface="Helvetica Neue"/>
               </a:rPr>
-              <a:t>с проверкой вторым участником.</a:t>
-            </a:r>
-          </a:p>
-        </p:txBody>
-      </p:sp>
-      <p:sp>
-        <p:nvSpPr>
-          <p:cNvPr id="9" name="">
+              <a:t>права пользователей.</a:t>
+            </a:r>
+          </a:p>
+        </p:txBody>
+      </p:sp>
+      <p:sp>
+        <p:nvSpPr>
+          <p:cNvPr id="16" name="">
             <a:extLst xmlns:a="http://schemas.openxmlformats.org/drawingml/2006/main">
               <a:ext uri="{FF2B5EF4-FFF2-40B4-BE49-F238E27FC236}">
-                <a16:creationId xmlns:a16="http://schemas.microsoft.com/office/drawing/2014/main" id="{7D052799-A702-4358-A173-6C648B14F291}"/>
+                <a16:creationId xmlns:a16="http://schemas.microsoft.com/office/drawing/2014/main" id="{2D232191-E767-431C-9E30-B38E784F1AE3}"/>
               </a:ext>
             </a:extLst>
           </p:cNvPr>
@@ -5116,8 +5347,8 @@
         </p:nvSpPr>
         <p:spPr>
           <a:xfrm xmlns:a="http://schemas.openxmlformats.org/drawingml/2006/main">
-            <a:off x="609600" y="5133975"/>
-            <a:ext cx="10972800" cy="619125"/>
+            <a:off x="609600" y="5276850"/>
+            <a:ext cx="10972800" cy="600075"/>
           </a:xfrm>
           <a:prstGeom xmlns:a="http://schemas.openxmlformats.org/drawingml/2006/main" prst="rect">
             <a:avLst/>
@@ -5152,17 +5383,17 @@
                 <a:ea typeface="Helvetica Neue"/>
                 <a:cs typeface="Helvetica Neue"/>
               </a:rPr>
-              <a:t>Приоритет: проверка прав партнёром перед включением изменений.</a:t>
-            </a:r>
-          </a:p>
-        </p:txBody>
-      </p:sp>
-      <p:sp>
-        <p:nvSpPr>
-          <p:cNvPr id="10" name="">
+              <a:t>Первый шаг: каждый проверяет важный результат другого.</a:t>
+            </a:r>
+          </a:p>
+        </p:txBody>
+      </p:sp>
+      <p:sp>
+        <p:nvSpPr>
+          <p:cNvPr id="17" name="">
             <a:extLst xmlns:a="http://schemas.openxmlformats.org/drawingml/2006/main">
               <a:ext uri="{FF2B5EF4-FFF2-40B4-BE49-F238E27FC236}">
-                <a16:creationId xmlns:a16="http://schemas.microsoft.com/office/drawing/2014/main" id="{1EF29582-37BA-49FC-BB78-C6D14D9B395C}"/>
+                <a16:creationId xmlns:a16="http://schemas.microsoft.com/office/drawing/2014/main" id="{7AD3F8C9-BE81-437B-BFDF-F86277668C61}"/>
               </a:ext>
             </a:extLst>
           </p:cNvPr>
@@ -5173,8 +5404,8 @@
         </p:nvSpPr>
         <p:spPr>
           <a:xfrm xmlns:a="http://schemas.openxmlformats.org/drawingml/2006/main">
-            <a:off x="609600" y="5886450"/>
-            <a:ext cx="10972800" cy="381000"/>
+            <a:off x="609600" y="5953125"/>
+            <a:ext cx="10972800" cy="333375"/>
           </a:xfrm>
           <a:prstGeom xmlns:a="http://schemas.openxmlformats.org/drawingml/2006/main" prst="rect">
             <a:avLst/>
@@ -5209,7 +5440,7 @@
                 <a:ea typeface="Helvetica Neue"/>
                 <a:cs typeface="Helvetica Neue"/>
               </a:rPr>
-              <a:t>G2: анализ CVE зависимостей. G3: независимый запуск из архива.</a:t>
+              <a:t>Также в плане: проверка библиотек и установка из архива.</a:t>
             </a:r>
           </a:p>
         </p:txBody>
@@ -5277,6 +5508,7 @@
           <a:lstStyle xmlns:a="http://schemas.openxmlformats.org/drawingml/2006/main"/>
           <a:p xmlns:a="http://schemas.openxmlformats.org/drawingml/2006/main">
             <a:pPr>
+              <a:buNone/>
               <a:defRPr sz="1350" b="1">
                 <a:solidFill>
                   <a:srgbClr val="26756C"/>
@@ -5334,6 +5566,7 @@
           <a:lstStyle xmlns:a="http://schemas.openxmlformats.org/drawingml/2006/main"/>
           <a:p xmlns:a="http://schemas.openxmlformats.org/drawingml/2006/main">
             <a:pPr>
+              <a:buNone/>
               <a:defRPr sz="3300" b="1">
                 <a:solidFill>
                   <a:srgbClr val="102A30"/>
@@ -5352,7 +5585,7 @@
                 <a:ea typeface="Helvetica Neue"/>
                 <a:cs typeface="Helvetica Neue"/>
               </a:rPr>
-              <a:t>Контрольные точки и ответственность</a:t>
+              <a:t>Как проверяем изменения</a:t>
             </a:r>
           </a:p>
         </p:txBody>
@@ -5391,6 +5624,7 @@
           <a:lstStyle xmlns:a="http://schemas.openxmlformats.org/drawingml/2006/main"/>
           <a:p xmlns:a="http://schemas.openxmlformats.org/drawingml/2006/main">
             <a:pPr>
+              <a:buNone/>
               <a:defRPr sz="1350" b="0">
                 <a:solidFill>
                   <a:srgbClr val="59686B"/>
@@ -5448,6 +5682,7 @@
           <a:lstStyle xmlns:a="http://schemas.openxmlformats.org/drawingml/2006/main"/>
           <a:p xmlns:a="http://schemas.openxmlformats.org/drawingml/2006/main">
             <a:pPr>
+              <a:buNone/>
               <a:defRPr sz="1800" b="1">
                 <a:solidFill>
                   <a:srgbClr val="26756C"/>
@@ -5473,10 +5708,10 @@
       </p:sp>
       <p:sp>
         <p:nvSpPr>
-          <p:cNvPr id="5" name="">
+          <p:cNvPr id="12" name="">
             <a:extLst xmlns:a="http://schemas.openxmlformats.org/drawingml/2006/main">
               <a:ext uri="{FF2B5EF4-FFF2-40B4-BE49-F238E27FC236}">
-                <a16:creationId xmlns:a16="http://schemas.microsoft.com/office/drawing/2014/main" id="{C72402D9-A02D-479A-B420-BE8D791756FE}"/>
+                <a16:creationId xmlns:a16="http://schemas.microsoft.com/office/drawing/2014/main" id="{76AA19FD-CB8B-4010-A65D-F881CC0AF7E4}"/>
               </a:ext>
             </a:extLst>
           </p:cNvPr>
@@ -5487,8 +5722,8 @@
         </p:nvSpPr>
         <p:spPr>
           <a:xfrm xmlns:a="http://schemas.openxmlformats.org/drawingml/2006/main">
-            <a:off x="609600" y="1981200"/>
-            <a:ext cx="5095875" cy="485775"/>
+            <a:off x="609600" y="2009775"/>
+            <a:ext cx="5048250" cy="485775"/>
           </a:xfrm>
           <a:prstGeom xmlns:a="http://schemas.openxmlformats.org/drawingml/2006/main" prst="rect">
             <a:avLst/>
@@ -5523,17 +5758,17 @@
                 <a:ea typeface="Helvetica Neue"/>
                 <a:cs typeface="Helvetica Neue"/>
               </a:rPr>
-              <a:t>Включение изменения</a:t>
-            </a:r>
-          </a:p>
-        </p:txBody>
-      </p:sp>
-      <p:sp>
-        <p:nvSpPr>
-          <p:cNvPr id="6" name="">
+              <a:t>Порядок работы</a:t>
+            </a:r>
+          </a:p>
+        </p:txBody>
+      </p:sp>
+      <p:sp>
+        <p:nvSpPr>
+          <p:cNvPr id="13" name="">
             <a:extLst xmlns:a="http://schemas.openxmlformats.org/drawingml/2006/main">
               <a:ext uri="{FF2B5EF4-FFF2-40B4-BE49-F238E27FC236}">
-                <a16:creationId xmlns:a16="http://schemas.microsoft.com/office/drawing/2014/main" id="{85516324-16D2-406D-BFE4-239E5DAF2B66}"/>
+                <a16:creationId xmlns:a16="http://schemas.microsoft.com/office/drawing/2014/main" id="{E23F74E6-030A-48DB-9B21-EE4AD77241E4}"/>
               </a:ext>
             </a:extLst>
           </p:cNvPr>
@@ -5544,8 +5779,8 @@
         </p:nvSpPr>
         <p:spPr>
           <a:xfrm xmlns:a="http://schemas.openxmlformats.org/drawingml/2006/main">
-            <a:off x="609600" y="2638425"/>
-            <a:ext cx="5038725" cy="2276475"/>
+            <a:off x="609600" y="2724150"/>
+            <a:ext cx="5381625" cy="2209800"/>
           </a:xfrm>
           <a:prstGeom xmlns:a="http://schemas.openxmlformats.org/drawingml/2006/main" prst="rect">
             <a:avLst/>
@@ -5580,7 +5815,7 @@
                 <a:ea typeface="Helvetica Neue"/>
                 <a:cs typeface="Helvetica Neue"/>
               </a:rPr>
-              <a:t>Автор: ветка, изменение, тесты.</a:t>
+              <a:t>1. Автор описывает нужное поведение.</a:t>
             </a:r>
           </a:p>
           <a:p xmlns:a="http://schemas.openxmlformats.org/drawingml/2006/main">
@@ -5603,7 +5838,7 @@
                 <a:ea typeface="Helvetica Neue"/>
                 <a:cs typeface="Helvetica Neue"/>
               </a:rPr>
-              <a:t>Партнёр: чтение кода и повтор</a:t>
+              <a:t>2. Меняет код и запускает тесты.</a:t>
             </a:r>
           </a:p>
           <a:p xmlns:a="http://schemas.openxmlformats.org/drawingml/2006/main">
@@ -5626,12 +5861,7 @@
                 <a:ea typeface="Helvetica Neue"/>
                 <a:cs typeface="Helvetica Neue"/>
               </a:rPr>
-              <a:t>существенного сценария.</a:t>
-            </a:r>
-          </a:p>
-          <a:p xmlns:a="http://schemas.openxmlformats.org/drawingml/2006/main">
-            <a:r>
-              <a:t/>
+              <a:t>3. Партнёр читает код и повторяет</a:t>
             </a:r>
           </a:p>
           <a:p xmlns:a="http://schemas.openxmlformats.org/drawingml/2006/main">
@@ -5654,7 +5884,7 @@
                 <a:ea typeface="Helvetica Neue"/>
                 <a:cs typeface="Helvetica Neue"/>
               </a:rPr>
-              <a:t>Основание: CI для commit</a:t>
+              <a:t>    важную проверку.</a:t>
             </a:r>
           </a:p>
           <a:p xmlns:a="http://schemas.openxmlformats.org/drawingml/2006/main">
@@ -5677,17 +5907,17 @@
                 <a:ea typeface="Helvetica Neue"/>
                 <a:cs typeface="Helvetica Neue"/>
               </a:rPr>
-              <a:t>и сохранённое review.</a:t>
-            </a:r>
-          </a:p>
-        </p:txBody>
-      </p:sp>
-      <p:sp>
-        <p:nvSpPr>
-          <p:cNvPr id="7" name="">
+              <a:t>4. Сохраняем результат для версии.</a:t>
+            </a:r>
+          </a:p>
+        </p:txBody>
+      </p:sp>
+      <p:sp>
+        <p:nvSpPr>
+          <p:cNvPr id="14" name="">
             <a:extLst xmlns:a="http://schemas.openxmlformats.org/drawingml/2006/main">
               <a:ext uri="{FF2B5EF4-FFF2-40B4-BE49-F238E27FC236}">
-                <a16:creationId xmlns:a16="http://schemas.microsoft.com/office/drawing/2014/main" id="{AE3396E6-D76B-4509-BF47-24CD09FF8FDD}"/>
+                <a16:creationId xmlns:a16="http://schemas.microsoft.com/office/drawing/2014/main" id="{529B33DD-76D7-4B46-A4AA-1C6AE0591145}"/>
               </a:ext>
             </a:extLst>
           </p:cNvPr>
@@ -5698,8 +5928,8 @@
         </p:nvSpPr>
         <p:spPr>
           <a:xfrm xmlns:a="http://schemas.openxmlformats.org/drawingml/2006/main">
-            <a:off x="6324600" y="1981200"/>
-            <a:ext cx="5238750" cy="485775"/>
+            <a:off x="6419850" y="2009775"/>
+            <a:ext cx="5143500" cy="485775"/>
           </a:xfrm>
           <a:prstGeom xmlns:a="http://schemas.openxmlformats.org/drawingml/2006/main" prst="rect">
             <a:avLst/>
@@ -5734,17 +5964,17 @@
                 <a:ea typeface="Helvetica Neue"/>
                 <a:cs typeface="Helvetica Neue"/>
               </a:rPr>
-              <a:t>Продуктовый выпуск</a:t>
-            </a:r>
-          </a:p>
-        </p:txBody>
-      </p:sp>
-      <p:sp>
-        <p:nvSpPr>
-          <p:cNvPr id="8" name="">
+              <a:t>Пример: наблюдатель</a:t>
+            </a:r>
+          </a:p>
+        </p:txBody>
+      </p:sp>
+      <p:sp>
+        <p:nvSpPr>
+          <p:cNvPr id="15" name="">
             <a:extLst xmlns:a="http://schemas.openxmlformats.org/drawingml/2006/main">
               <a:ext uri="{FF2B5EF4-FFF2-40B4-BE49-F238E27FC236}">
-                <a16:creationId xmlns:a16="http://schemas.microsoft.com/office/drawing/2014/main" id="{B5F8EF49-D7BD-4A62-9B1D-EC1E3D0AF08C}"/>
+                <a16:creationId xmlns:a16="http://schemas.microsoft.com/office/drawing/2014/main" id="{F10CB677-5CD1-430F-BE1C-23CA6155F44C}"/>
               </a:ext>
             </a:extLst>
           </p:cNvPr>
@@ -5755,8 +5985,8 @@
         </p:nvSpPr>
         <p:spPr>
           <a:xfrm xmlns:a="http://schemas.openxmlformats.org/drawingml/2006/main">
-            <a:off x="6324600" y="2638425"/>
-            <a:ext cx="5238750" cy="2276475"/>
+            <a:off x="6419850" y="2724150"/>
+            <a:ext cx="5143500" cy="2095500"/>
           </a:xfrm>
           <a:prstGeom xmlns:a="http://schemas.openxmlformats.org/drawingml/2006/main" prst="rect">
             <a:avLst/>
@@ -5791,7 +6021,7 @@
                 <a:ea typeface="Helvetica Neue"/>
                 <a:cs typeface="Helvetica Neue"/>
               </a:rPr>
-              <a:t>Роман: зависимости и комплект.</a:t>
+              <a:t>Пробуем изменить задачу</a:t>
             </a:r>
           </a:p>
           <a:p xmlns:a="http://schemas.openxmlformats.org/drawingml/2006/main">
@@ -5814,7 +6044,12 @@
                 <a:ea typeface="Helvetica Neue"/>
                 <a:cs typeface="Helvetica Neue"/>
               </a:rPr>
-              <a:t>Ярослав: установка из архива.</a:t>
+              <a:t>прямым запросом к серверу.</a:t>
+            </a:r>
+          </a:p>
+          <a:p xmlns:a="http://schemas.openxmlformats.org/drawingml/2006/main">
+            <a:r>
+              <a:t/>
             </a:r>
           </a:p>
           <a:p xmlns:a="http://schemas.openxmlformats.org/drawingml/2006/main">
@@ -5837,12 +6072,7 @@
                 <a:ea typeface="Helvetica Neue"/>
                 <a:cs typeface="Helvetica Neue"/>
               </a:rPr>
-              <a:t>Оба: решение по результатам.</a:t>
-            </a:r>
-          </a:p>
-          <a:p xmlns:a="http://schemas.openxmlformats.org/drawingml/2006/main">
-            <a:r>
-              <a:t/>
+              <a:t>Ожидаем отказ.</a:t>
             </a:r>
           </a:p>
           <a:p xmlns:a="http://schemas.openxmlformats.org/drawingml/2006/main">
@@ -5865,40 +6095,17 @@
                 <a:ea typeface="Helvetica Neue"/>
                 <a:cs typeface="Helvetica Neue"/>
               </a:rPr>
-              <a:t>Основание: отчёты, триаж,</a:t>
-            </a:r>
-          </a:p>
-          <a:p xmlns:a="http://schemas.openxmlformats.org/drawingml/2006/main">
-            <a:pPr>
-              <a:defRPr sz="2100" b="0">
-                <a:solidFill>
-                  <a:srgbClr val="102A30"/>
-                </a:solidFill>
-                <a:latin typeface="Helvetica Neue"/>
-                <a:ea typeface="Helvetica Neue"/>
-                <a:cs typeface="Helvetica Neue"/>
-              </a:defRPr>
-            </a:pPr>
-            <a:r>
-              <a:rPr sz="2100" b="0">
-                <a:solidFill>
-                  <a:srgbClr val="102A30"/>
-                </a:solidFill>
-                <a:latin typeface="Helvetica Neue"/>
-                <a:ea typeface="Helvetica Neue"/>
-                <a:cs typeface="Helvetica Neue"/>
-              </a:rPr>
-              <a:t>commit, тег и SHA-256.</a:t>
-            </a:r>
-          </a:p>
-        </p:txBody>
-      </p:sp>
-      <p:sp>
-        <p:nvSpPr>
-          <p:cNvPr id="9" name="">
+              <a:t>Данные остаются прежними.</a:t>
+            </a:r>
+          </a:p>
+        </p:txBody>
+      </p:sp>
+      <p:sp>
+        <p:nvSpPr>
+          <p:cNvPr id="16" name="">
             <a:extLst xmlns:a="http://schemas.openxmlformats.org/drawingml/2006/main">
               <a:ext uri="{FF2B5EF4-FFF2-40B4-BE49-F238E27FC236}">
-                <a16:creationId xmlns:a16="http://schemas.microsoft.com/office/drawing/2014/main" id="{0E2F82F7-3D2E-4DFE-B106-2BE97AD6EF3A}"/>
+                <a16:creationId xmlns:a16="http://schemas.microsoft.com/office/drawing/2014/main" id="{F46AC114-CF0D-4E8C-A63F-A9FEA51CE709}"/>
               </a:ext>
             </a:extLst>
           </p:cNvPr>
@@ -5909,8 +6116,8 @@
         </p:nvSpPr>
         <p:spPr>
           <a:xfrm xmlns:a="http://schemas.openxmlformats.org/drawingml/2006/main">
-            <a:off x="609600" y="5334000"/>
-            <a:ext cx="10972800" cy="571500"/>
+            <a:off x="609600" y="5286375"/>
+            <a:ext cx="10972800" cy="600075"/>
           </a:xfrm>
           <a:prstGeom xmlns:a="http://schemas.openxmlformats.org/drawingml/2006/main" prst="rect">
             <a:avLst/>
@@ -5929,7 +6136,7 @@
             <a:pPr>
               <a:defRPr sz="2175" b="1">
                 <a:solidFill>
-                  <a:srgbClr val="102A30"/>
+                  <a:srgbClr val="26756C"/>
                 </a:solidFill>
                 <a:latin typeface="Helvetica Neue"/>
                 <a:ea typeface="Helvetica Neue"/>
@@ -5939,23 +6146,23 @@
             <a:r>
               <a:rPr sz="2175" b="1">
                 <a:solidFill>
-                  <a:srgbClr val="102A30"/>
-                </a:solidFill>
-                <a:latin typeface="Helvetica Neue"/>
-                <a:ea typeface="Helvetica Neue"/>
-                <a:cs typeface="Helvetica Neue"/>
-              </a:rPr>
-              <a:t>Без проверяющего или при нарушении прав откладываем переход.</a:t>
-            </a:r>
-          </a:p>
-        </p:txBody>
-      </p:sp>
-      <p:sp>
-        <p:nvSpPr>
-          <p:cNvPr id="10" name="">
+                  <a:srgbClr val="26756C"/>
+                </a:solidFill>
+                <a:latin typeface="Helvetica Neue"/>
+                <a:ea typeface="Helvetica Neue"/>
+                <a:cs typeface="Helvetica Neue"/>
+              </a:rPr>
+              <a:t>При нарушении прав или без проверки партнёра изменение ждёт.</a:t>
+            </a:r>
+          </a:p>
+        </p:txBody>
+      </p:sp>
+      <p:sp>
+        <p:nvSpPr>
+          <p:cNvPr id="17" name="">
             <a:extLst xmlns:a="http://schemas.openxmlformats.org/drawingml/2006/main">
               <a:ext uri="{FF2B5EF4-FFF2-40B4-BE49-F238E27FC236}">
-                <a16:creationId xmlns:a16="http://schemas.microsoft.com/office/drawing/2014/main" id="{F0533CA4-DD94-47F6-8BA5-4BF9CA847AE2}"/>
+                <a16:creationId xmlns:a16="http://schemas.microsoft.com/office/drawing/2014/main" id="{3421A573-B973-44F3-AE0F-0E0657EEA533}"/>
               </a:ext>
             </a:extLst>
           </p:cNvPr>
@@ -5966,8 +6173,8 @@
         </p:nvSpPr>
         <p:spPr>
           <a:xfrm xmlns:a="http://schemas.openxmlformats.org/drawingml/2006/main">
-            <a:off x="609600" y="5886450"/>
-            <a:ext cx="10972800" cy="333375"/>
+            <a:off x="609600" y="5943600"/>
+            <a:ext cx="10972800" cy="352425"/>
           </a:xfrm>
           <a:prstGeom xmlns:a="http://schemas.openxmlformats.org/drawingml/2006/main" prst="rect">
             <a:avLst/>
@@ -6002,7 +6209,7 @@
                 <a:ea typeface="Helvetica Neue"/>
                 <a:cs typeface="Helvetica Neue"/>
               </a:rPr>
-              <a:t>Некритическое исключение: карточка, срок до 7 дней и согласие обоих.</a:t>
+              <a:t>Перед выпуском: запуск из архива и общее решение по отчётам.</a:t>
             </a:r>
           </a:p>
         </p:txBody>
@@ -6070,6 +6277,7 @@
           <a:lstStyle xmlns:a="http://schemas.openxmlformats.org/drawingml/2006/main"/>
           <a:p xmlns:a="http://schemas.openxmlformats.org/drawingml/2006/main">
             <a:pPr>
+              <a:buNone/>
               <a:defRPr sz="1350" b="1">
                 <a:solidFill>
                   <a:srgbClr val="26756C"/>
@@ -6127,6 +6335,7 @@
           <a:lstStyle xmlns:a="http://schemas.openxmlformats.org/drawingml/2006/main"/>
           <a:p xmlns:a="http://schemas.openxmlformats.org/drawingml/2006/main">
             <a:pPr>
+              <a:buNone/>
               <a:defRPr sz="3300" b="1">
                 <a:solidFill>
                   <a:srgbClr val="102A30"/>
@@ -6145,7 +6354,7 @@
                 <a:ea typeface="Helvetica Neue"/>
                 <a:cs typeface="Helvetica Neue"/>
               </a:rPr>
-              <a:t>План проверок Романа и Ярослава</a:t>
+              <a:t>Что делает каждый участник</a:t>
             </a:r>
           </a:p>
         </p:txBody>
@@ -6184,6 +6393,7 @@
           <a:lstStyle xmlns:a="http://schemas.openxmlformats.org/drawingml/2006/main"/>
           <a:p xmlns:a="http://schemas.openxmlformats.org/drawingml/2006/main">
             <a:pPr>
+              <a:buNone/>
               <a:defRPr sz="1350" b="0">
                 <a:solidFill>
                   <a:srgbClr val="59686B"/>
@@ -6241,6 +6451,7 @@
           <a:lstStyle xmlns:a="http://schemas.openxmlformats.org/drawingml/2006/main"/>
           <a:p xmlns:a="http://schemas.openxmlformats.org/drawingml/2006/main">
             <a:pPr>
+              <a:buNone/>
               <a:defRPr sz="1800" b="1">
                 <a:solidFill>
                   <a:srgbClr val="26756C"/>
@@ -6264,368 +6475,12 @@
           </a:p>
         </p:txBody>
       </p:sp>
-      <p:graphicFrame>
-        <p:nvGraphicFramePr>
-          <p:cNvPr id="12" name=""/>
-          <p:cNvGraphicFramePr/>
-          <p:nvPr/>
-        </p:nvGraphicFramePr>
-        <p:xfrm>
-          <a:off xmlns:a="http://schemas.openxmlformats.org/drawingml/2006/main" x="609600" y="2057400"/>
-          <a:ext xmlns:a="http://schemas.openxmlformats.org/drawingml/2006/main" cx="10972800" cy="2990850"/>
-        </p:xfrm>
-        <a:graphic xmlns:a="http://schemas.openxmlformats.org/drawingml/2006/main">
-          <a:graphicData uri="http://schemas.openxmlformats.org/drawingml/2006/table">
-            <a:tbl>
-              <a:tblPr/>
-              <a:tblGrid>
-                <a:gridCol w="3524250"/>
-                <a:gridCol w="2190750"/>
-                <a:gridCol w="5257800"/>
-              </a:tblGrid>
-              <a:tr h="747713">
-                <a:tc>
-                  <a:txBody>
-                    <a:bodyPr>
-                      <a:noAutofit/>
-                    </a:bodyPr>
-                    <a:lstStyle/>
-                    <a:p>
-                      <a:r>
-                        <a:rPr sz="1950" b="1">
-                          <a:solidFill>
-                            <a:srgbClr val="FFFFFF"/>
-                          </a:solidFill>
-                          <a:latin typeface="Helvetica Neue"/>
-                          <a:ea typeface="Helvetica Neue"/>
-                          <a:cs typeface="Helvetica Neue"/>
-                        </a:rPr>
-                        <a:t>Метод</a:t>
-                      </a:r>
-                    </a:p>
-                  </a:txBody>
-                  <a:tcPr marL="91440" marR="91440" marT="45720" marB="45720">
-                    <a:solidFill>
-                      <a:srgbClr val="102A30"/>
-                    </a:solidFill>
-                  </a:tcPr>
-                </a:tc>
-                <a:tc>
-                  <a:txBody>
-                    <a:bodyPr>
-                      <a:noAutofit/>
-                    </a:bodyPr>
-                    <a:lstStyle/>
-                    <a:p>
-                      <a:r>
-                        <a:rPr sz="1950" b="1">
-                          <a:solidFill>
-                            <a:srgbClr val="FFFFFF"/>
-                          </a:solidFill>
-                          <a:latin typeface="Helvetica Neue"/>
-                          <a:ea typeface="Helvetica Neue"/>
-                          <a:cs typeface="Helvetica Neue"/>
-                        </a:rPr>
-                        <a:t>Исполнитель</a:t>
-                      </a:r>
-                    </a:p>
-                  </a:txBody>
-                  <a:tcPr marL="91440" marR="91440" marT="45720" marB="45720">
-                    <a:solidFill>
-                      <a:srgbClr val="102A30"/>
-                    </a:solidFill>
-                  </a:tcPr>
-                </a:tc>
-                <a:tc>
-                  <a:txBody>
-                    <a:bodyPr>
-                      <a:noAutofit/>
-                    </a:bodyPr>
-                    <a:lstStyle/>
-                    <a:p>
-                      <a:r>
-                        <a:rPr sz="1950" b="1">
-                          <a:solidFill>
-                            <a:srgbClr val="FFFFFF"/>
-                          </a:solidFill>
-                          <a:latin typeface="Helvetica Neue"/>
-                          <a:ea typeface="Helvetica Neue"/>
-                          <a:cs typeface="Helvetica Neue"/>
-                        </a:rPr>
-                        <a:t>Проверяющий и свидетельство</a:t>
-                      </a:r>
-                    </a:p>
-                  </a:txBody>
-                  <a:tcPr marL="91440" marR="91440" marT="45720" marB="45720">
-                    <a:solidFill>
-                      <a:srgbClr val="102A30"/>
-                    </a:solidFill>
-                  </a:tcPr>
-                </a:tc>
-              </a:tr>
-              <a:tr h="747713">
-                <a:tc>
-                  <a:txBody>
-                    <a:bodyPr>
-                      <a:noAutofit/>
-                    </a:bodyPr>
-                    <a:lstStyle/>
-                    <a:p>
-                      <a:r>
-                        <a:rPr sz="1950" b="0">
-                          <a:solidFill>
-                            <a:srgbClr val="102A30"/>
-                          </a:solidFill>
-                          <a:latin typeface="Helvetica Neue"/>
-                          <a:ea typeface="Helvetica Neue"/>
-                          <a:cs typeface="Helvetica Neue"/>
-                        </a:rPr>
-                        <a:t>М1: права и изоляция</a:t>
-                      </a:r>
-                    </a:p>
-                  </a:txBody>
-                  <a:tcPr marL="91440" marR="91440" marT="45720" marB="45720">
-                    <a:solidFill>
-                      <a:srgbClr val="FFFFFF"/>
-                    </a:solidFill>
-                  </a:tcPr>
-                </a:tc>
-                <a:tc>
-                  <a:txBody>
-                    <a:bodyPr>
-                      <a:noAutofit/>
-                    </a:bodyPr>
-                    <a:lstStyle/>
-                    <a:p>
-                      <a:r>
-                        <a:rPr sz="1950" b="0">
-                          <a:solidFill>
-                            <a:srgbClr val="102A30"/>
-                          </a:solidFill>
-                          <a:latin typeface="Helvetica Neue"/>
-                          <a:ea typeface="Helvetica Neue"/>
-                          <a:cs typeface="Helvetica Neue"/>
-                        </a:rPr>
-                        <a:t>Роман</a:t>
-                      </a:r>
-                    </a:p>
-                  </a:txBody>
-                  <a:tcPr marL="91440" marR="91440" marT="45720" marB="45720">
-                    <a:solidFill>
-                      <a:srgbClr val="FFFFFF"/>
-                    </a:solidFill>
-                  </a:tcPr>
-                </a:tc>
-                <a:tc>
-                  <a:txBody>
-                    <a:bodyPr>
-                      <a:noAutofit/>
-                    </a:bodyPr>
-                    <a:lstStyle/>
-                    <a:p>
-                      <a:r>
-                        <a:rPr sz="1950" b="0">
-                          <a:solidFill>
-                            <a:srgbClr val="102A30"/>
-                          </a:solidFill>
-                          <a:latin typeface="Helvetica Neue"/>
-                          <a:ea typeface="Helvetica Neue"/>
-                          <a:cs typeface="Helvetica Neue"/>
-                        </a:rPr>
-                        <a:t>Ярослав: повтор запрета, матрица и review</a:t>
-                      </a:r>
-                    </a:p>
-                  </a:txBody>
-                  <a:tcPr marL="91440" marR="91440" marT="45720" marB="45720">
-                    <a:solidFill>
-                      <a:srgbClr val="FFFFFF"/>
-                    </a:solidFill>
-                  </a:tcPr>
-                </a:tc>
-              </a:tr>
-              <a:tr h="747713">
-                <a:tc>
-                  <a:txBody>
-                    <a:bodyPr>
-                      <a:noAutofit/>
-                    </a:bodyPr>
-                    <a:lstStyle/>
-                    <a:p>
-                      <a:r>
-                        <a:rPr sz="1950" b="0">
-                          <a:solidFill>
-                            <a:srgbClr val="102A30"/>
-                          </a:solidFill>
-                          <a:latin typeface="Helvetica Neue"/>
-                          <a:ea typeface="Helvetica Neue"/>
-                          <a:cs typeface="Helvetica Neue"/>
-                        </a:rPr>
-                        <a:t>М2: ввод и CSRF</a:t>
-                      </a:r>
-                    </a:p>
-                  </a:txBody>
-                  <a:tcPr marL="91440" marR="91440" marT="45720" marB="45720">
-                    <a:solidFill>
-                      <a:srgbClr val="F7F6F1"/>
-                    </a:solidFill>
-                  </a:tcPr>
-                </a:tc>
-                <a:tc>
-                  <a:txBody>
-                    <a:bodyPr>
-                      <a:noAutofit/>
-                    </a:bodyPr>
-                    <a:lstStyle/>
-                    <a:p>
-                      <a:r>
-                        <a:rPr sz="1950" b="0">
-                          <a:solidFill>
-                            <a:srgbClr val="102A30"/>
-                          </a:solidFill>
-                          <a:latin typeface="Helvetica Neue"/>
-                          <a:ea typeface="Helvetica Neue"/>
-                          <a:cs typeface="Helvetica Neue"/>
-                        </a:rPr>
-                        <a:t>Ярослав</a:t>
-                      </a:r>
-                    </a:p>
-                  </a:txBody>
-                  <a:tcPr marL="91440" marR="91440" marT="45720" marB="45720">
-                    <a:solidFill>
-                      <a:srgbClr val="F7F6F1"/>
-                    </a:solidFill>
-                  </a:tcPr>
-                </a:tc>
-                <a:tc>
-                  <a:txBody>
-                    <a:bodyPr>
-                      <a:noAutofit/>
-                    </a:bodyPr>
-                    <a:lstStyle/>
-                    <a:p>
-                      <a:r>
-                        <a:rPr sz="1950" b="0">
-                          <a:solidFill>
-                            <a:srgbClr val="102A30"/>
-                          </a:solidFill>
-                          <a:latin typeface="Helvetica Neue"/>
-                          <a:ea typeface="Helvetica Neue"/>
-                          <a:cs typeface="Helvetica Neue"/>
-                        </a:rPr>
-                        <a:t>Роман: POST и экранирование, отчёт и review</a:t>
-                      </a:r>
-                    </a:p>
-                  </a:txBody>
-                  <a:tcPr marL="91440" marR="91440" marT="45720" marB="45720">
-                    <a:solidFill>
-                      <a:srgbClr val="F7F6F1"/>
-                    </a:solidFill>
-                  </a:tcPr>
-                </a:tc>
-              </a:tr>
-              <a:tr h="747713">
-                <a:tc>
-                  <a:txBody>
-                    <a:bodyPr>
-                      <a:noAutofit/>
-                    </a:bodyPr>
-                    <a:lstStyle/>
-                    <a:p>
-                      <a:r>
-                        <a:rPr sz="1950" b="0">
-                          <a:solidFill>
-                            <a:srgbClr val="102A30"/>
-                          </a:solidFill>
-                          <a:latin typeface="Helvetica Neue"/>
-                          <a:ea typeface="Helvetica Neue"/>
-                          <a:cs typeface="Helvetica Neue"/>
-                        </a:rPr>
-                        <a:t>М3: зависимости</a:t>
-                      </a:r>
-                    </a:p>
-                    <a:p>
-                      <a:r>
-                        <a:rPr sz="1950" b="0">
-                          <a:solidFill>
-                            <a:srgbClr val="102A30"/>
-                          </a:solidFill>
-                          <a:latin typeface="Helvetica Neue"/>
-                          <a:ea typeface="Helvetica Neue"/>
-                          <a:cs typeface="Helvetica Neue"/>
-                        </a:rPr>
-                        <a:t>и воспроизводимость</a:t>
-                      </a:r>
-                    </a:p>
-                  </a:txBody>
-                  <a:tcPr marL="91440" marR="91440" marT="45720" marB="45720">
-                    <a:solidFill>
-                      <a:srgbClr val="FFFFFF"/>
-                    </a:solidFill>
-                  </a:tcPr>
-                </a:tc>
-                <a:tc>
-                  <a:txBody>
-                    <a:bodyPr>
-                      <a:noAutofit/>
-                    </a:bodyPr>
-                    <a:lstStyle/>
-                    <a:p>
-                      <a:r>
-                        <a:rPr sz="1950" b="0">
-                          <a:solidFill>
-                            <a:srgbClr val="102A30"/>
-                          </a:solidFill>
-                          <a:latin typeface="Helvetica Neue"/>
-                          <a:ea typeface="Helvetica Neue"/>
-                          <a:cs typeface="Helvetica Neue"/>
-                        </a:rPr>
-                        <a:t>Роман</a:t>
-                      </a:r>
-                    </a:p>
-                  </a:txBody>
-                  <a:tcPr marL="91440" marR="91440" marT="45720" marB="45720">
-                    <a:solidFill>
-                      <a:srgbClr val="FFFFFF"/>
-                    </a:solidFill>
-                  </a:tcPr>
-                </a:tc>
-                <a:tc>
-                  <a:txBody>
-                    <a:bodyPr>
-                      <a:noAutofit/>
-                    </a:bodyPr>
-                    <a:lstStyle/>
-                    <a:p>
-                      <a:r>
-                        <a:rPr sz="1950" b="0">
-                          <a:solidFill>
-                            <a:srgbClr val="102A30"/>
-                          </a:solidFill>
-                          <a:latin typeface="Helvetica Neue"/>
-                          <a:ea typeface="Helvetica Neue"/>
-                          <a:cs typeface="Helvetica Neue"/>
-                        </a:rPr>
-                        <a:t>Ярослав: чистая установка, аудит и триаж</a:t>
-                      </a:r>
-                    </a:p>
-                  </a:txBody>
-                  <a:tcPr marL="91440" marR="91440" marT="45720" marB="45720">
-                    <a:solidFill>
-                      <a:srgbClr val="FFFFFF"/>
-                    </a:solidFill>
-                  </a:tcPr>
-                </a:tc>
-              </a:tr>
-            </a:tbl>
-          </a:graphicData>
-        </a:graphic>
-      </p:graphicFrame>
-      <p:sp>
-        <p:nvSpPr>
-          <p:cNvPr id="6" name="">
+      <p:sp>
+        <p:nvSpPr>
+          <p:cNvPr id="9" name="">
             <a:extLst xmlns:a="http://schemas.openxmlformats.org/drawingml/2006/main">
               <a:ext uri="{FF2B5EF4-FFF2-40B4-BE49-F238E27FC236}">
-                <a16:creationId xmlns:a16="http://schemas.microsoft.com/office/drawing/2014/main" id="{D52DE8F3-9552-45CC-8F1D-EBB679041ECA}"/>
+                <a16:creationId xmlns:a16="http://schemas.microsoft.com/office/drawing/2014/main" id="{608E8E3E-A544-4FE5-B1A3-EDCDF8F83F72}"/>
               </a:ext>
             </a:extLst>
           </p:cNvPr>
@@ -6636,8 +6491,8 @@
         </p:nvSpPr>
         <p:spPr>
           <a:xfrm xmlns:a="http://schemas.openxmlformats.org/drawingml/2006/main">
-            <a:off x="609600" y="5334000"/>
-            <a:ext cx="10972800" cy="685800"/>
+            <a:off x="609600" y="2009775"/>
+            <a:ext cx="5095875" cy="485775"/>
           </a:xfrm>
           <a:prstGeom xmlns:a="http://schemas.openxmlformats.org/drawingml/2006/main" prst="rect">
             <a:avLst/>
@@ -6654,7 +6509,7 @@
           <a:lstStyle xmlns:a="http://schemas.openxmlformats.org/drawingml/2006/main"/>
           <a:p xmlns:a="http://schemas.openxmlformats.org/drawingml/2006/main">
             <a:pPr>
-              <a:defRPr sz="2250" b="1">
+              <a:defRPr sz="2550" b="1">
                 <a:solidFill>
                   <a:srgbClr val="26756C"/>
                 </a:solidFill>
@@ -6664,7 +6519,7 @@
               </a:defRPr>
             </a:pPr>
             <a:r>
-              <a:rPr sz="2250" b="1">
+              <a:rPr sz="2550" b="1">
                 <a:solidFill>
                   <a:srgbClr val="26756C"/>
                 </a:solidFill>
@@ -6672,17 +6527,17 @@
                 <a:ea typeface="Helvetica Neue"/>
                 <a:cs typeface="Helvetica Neue"/>
               </a:rPr>
-              <a:t>Сначала личные отчёты и PR, затем взаимная проверка и созвон.</a:t>
-            </a:r>
-          </a:p>
-        </p:txBody>
-      </p:sp>
-      <p:sp>
-        <p:nvSpPr>
-          <p:cNvPr id="7" name="">
+              <a:t>Роман / Issue #1</a:t>
+            </a:r>
+          </a:p>
+        </p:txBody>
+      </p:sp>
+      <p:sp>
+        <p:nvSpPr>
+          <p:cNvPr id="10" name="">
             <a:extLst xmlns:a="http://schemas.openxmlformats.org/drawingml/2006/main">
               <a:ext uri="{FF2B5EF4-FFF2-40B4-BE49-F238E27FC236}">
-                <a16:creationId xmlns:a16="http://schemas.microsoft.com/office/drawing/2014/main" id="{7E60ADA1-6CB0-4EA4-8C94-0D3A52A8F577}"/>
+                <a16:creationId xmlns:a16="http://schemas.microsoft.com/office/drawing/2014/main" id="{7A336C38-F9AF-4585-A5A1-A87103A5E579}"/>
               </a:ext>
             </a:extLst>
           </p:cNvPr>
@@ -6693,8 +6548,8 @@
         </p:nvSpPr>
         <p:spPr>
           <a:xfrm xmlns:a="http://schemas.openxmlformats.org/drawingml/2006/main">
-            <a:off x="609600" y="5943600"/>
-            <a:ext cx="10972800" cy="333375"/>
+            <a:off x="609600" y="2724150"/>
+            <a:ext cx="5143500" cy="2000250"/>
           </a:xfrm>
           <a:prstGeom xmlns:a="http://schemas.openxmlformats.org/drawingml/2006/main" prst="rect">
             <a:avLst/>
@@ -6711,6 +6566,382 @@
           <a:lstStyle xmlns:a="http://schemas.openxmlformats.org/drawingml/2006/main"/>
           <a:p xmlns:a="http://schemas.openxmlformats.org/drawingml/2006/main">
             <a:pPr>
+              <a:defRPr sz="2100" b="0">
+                <a:solidFill>
+                  <a:srgbClr val="102A30"/>
+                </a:solidFill>
+                <a:latin typeface="Helvetica Neue"/>
+                <a:ea typeface="Helvetica Neue"/>
+                <a:cs typeface="Helvetica Neue"/>
+              </a:defRPr>
+            </a:pPr>
+            <a:r>
+              <a:rPr sz="2100" b="0">
+                <a:solidFill>
+                  <a:srgbClr val="102A30"/>
+                </a:solidFill>
+                <a:latin typeface="Helvetica Neue"/>
+                <a:ea typeface="Helvetica Neue"/>
+                <a:cs typeface="Helvetica Neue"/>
+              </a:rPr>
+              <a:t>Проверяет права трёх ролей</a:t>
+            </a:r>
+          </a:p>
+          <a:p xmlns:a="http://schemas.openxmlformats.org/drawingml/2006/main">
+            <a:pPr>
+              <a:defRPr sz="2100" b="0">
+                <a:solidFill>
+                  <a:srgbClr val="102A30"/>
+                </a:solidFill>
+                <a:latin typeface="Helvetica Neue"/>
+                <a:ea typeface="Helvetica Neue"/>
+                <a:cs typeface="Helvetica Neue"/>
+              </a:defRPr>
+            </a:pPr>
+            <a:r>
+              <a:rPr sz="2100" b="0">
+                <a:solidFill>
+                  <a:srgbClr val="102A30"/>
+                </a:solidFill>
+                <a:latin typeface="Helvetica Neue"/>
+                <a:ea typeface="Helvetica Neue"/>
+                <a:cs typeface="Helvetica Neue"/>
+              </a:rPr>
+              <a:t>и изоляцию проектов.</a:t>
+            </a:r>
+          </a:p>
+          <a:p xmlns:a="http://schemas.openxmlformats.org/drawingml/2006/main">
+            <a:r>
+              <a:t/>
+            </a:r>
+          </a:p>
+          <a:p xmlns:a="http://schemas.openxmlformats.org/drawingml/2006/main">
+            <a:pPr>
+              <a:defRPr sz="2100" b="0">
+                <a:solidFill>
+                  <a:srgbClr val="102A30"/>
+                </a:solidFill>
+                <a:latin typeface="Helvetica Neue"/>
+                <a:ea typeface="Helvetica Neue"/>
+                <a:cs typeface="Helvetica Neue"/>
+              </a:defRPr>
+            </a:pPr>
+            <a:r>
+              <a:rPr sz="2100" b="0">
+                <a:solidFill>
+                  <a:srgbClr val="102A30"/>
+                </a:solidFill>
+                <a:latin typeface="Helvetica Neue"/>
+                <a:ea typeface="Helvetica Neue"/>
+                <a:cs typeface="Helvetica Neue"/>
+              </a:rPr>
+              <a:t>Проверяет библиотеки</a:t>
+            </a:r>
+          </a:p>
+          <a:p xmlns:a="http://schemas.openxmlformats.org/drawingml/2006/main">
+            <a:pPr>
+              <a:defRPr sz="2100" b="0">
+                <a:solidFill>
+                  <a:srgbClr val="102A30"/>
+                </a:solidFill>
+                <a:latin typeface="Helvetica Neue"/>
+                <a:ea typeface="Helvetica Neue"/>
+                <a:cs typeface="Helvetica Neue"/>
+              </a:defRPr>
+            </a:pPr>
+            <a:r>
+              <a:rPr sz="2100" b="0">
+                <a:solidFill>
+                  <a:srgbClr val="102A30"/>
+                </a:solidFill>
+                <a:latin typeface="Helvetica Neue"/>
+                <a:ea typeface="Helvetica Neue"/>
+                <a:cs typeface="Helvetica Neue"/>
+              </a:rPr>
+              <a:t>и настройки приложения.</a:t>
+            </a:r>
+          </a:p>
+        </p:txBody>
+      </p:sp>
+      <p:sp>
+        <p:nvSpPr>
+          <p:cNvPr id="11" name="">
+            <a:extLst xmlns:a="http://schemas.openxmlformats.org/drawingml/2006/main">
+              <a:ext uri="{FF2B5EF4-FFF2-40B4-BE49-F238E27FC236}">
+                <a16:creationId xmlns:a16="http://schemas.microsoft.com/office/drawing/2014/main" id="{EE97B6B7-67DC-48C3-8CA4-54B161BB877F}"/>
+              </a:ext>
+            </a:extLst>
+          </p:cNvPr>
+          <p:cNvSpPr>
+            <a:spLocks xmlns:a="http://schemas.openxmlformats.org/drawingml/2006/main" noGrp="1"/>
+          </p:cNvSpPr>
+          <p:nvPr/>
+        </p:nvSpPr>
+        <p:spPr>
+          <a:xfrm xmlns:a="http://schemas.openxmlformats.org/drawingml/2006/main">
+            <a:off x="6419850" y="2009775"/>
+            <a:ext cx="5143500" cy="485775"/>
+          </a:xfrm>
+          <a:prstGeom xmlns:a="http://schemas.openxmlformats.org/drawingml/2006/main" prst="rect">
+            <a:avLst/>
+          </a:prstGeom>
+          <a:noFill xmlns:a="http://schemas.openxmlformats.org/drawingml/2006/main"/>
+          <a:ln xmlns:a="http://schemas.openxmlformats.org/drawingml/2006/main" w="0">
+            <a:noFill/>
+          </a:ln>
+        </p:spPr>
+        <p:txBody>
+          <a:bodyPr xmlns:a="http://schemas.openxmlformats.org/drawingml/2006/main">
+            <a:noAutofit/>
+          </a:bodyPr>
+          <a:lstStyle xmlns:a="http://schemas.openxmlformats.org/drawingml/2006/main"/>
+          <a:p xmlns:a="http://schemas.openxmlformats.org/drawingml/2006/main">
+            <a:pPr>
+              <a:defRPr sz="2550" b="1">
+                <a:solidFill>
+                  <a:srgbClr val="26756C"/>
+                </a:solidFill>
+                <a:latin typeface="Helvetica Neue"/>
+                <a:ea typeface="Helvetica Neue"/>
+                <a:cs typeface="Helvetica Neue"/>
+              </a:defRPr>
+            </a:pPr>
+            <a:r>
+              <a:rPr sz="2550" b="1">
+                <a:solidFill>
+                  <a:srgbClr val="26756C"/>
+                </a:solidFill>
+                <a:latin typeface="Helvetica Neue"/>
+                <a:ea typeface="Helvetica Neue"/>
+                <a:cs typeface="Helvetica Neue"/>
+              </a:rPr>
+              <a:t>Ярослав / Issue #2</a:t>
+            </a:r>
+          </a:p>
+        </p:txBody>
+      </p:sp>
+      <p:sp>
+        <p:nvSpPr>
+          <p:cNvPr id="12" name="">
+            <a:extLst xmlns:a="http://schemas.openxmlformats.org/drawingml/2006/main">
+              <a:ext uri="{FF2B5EF4-FFF2-40B4-BE49-F238E27FC236}">
+                <a16:creationId xmlns:a16="http://schemas.microsoft.com/office/drawing/2014/main" id="{6F935AD2-0E1C-4FBE-B97B-EC48D93685C2}"/>
+              </a:ext>
+            </a:extLst>
+          </p:cNvPr>
+          <p:cNvSpPr>
+            <a:spLocks xmlns:a="http://schemas.openxmlformats.org/drawingml/2006/main" noGrp="1"/>
+          </p:cNvSpPr>
+          <p:nvPr/>
+        </p:nvSpPr>
+        <p:spPr>
+          <a:xfrm xmlns:a="http://schemas.openxmlformats.org/drawingml/2006/main">
+            <a:off x="6419850" y="2724150"/>
+            <a:ext cx="5143500" cy="2000250"/>
+          </a:xfrm>
+          <a:prstGeom xmlns:a="http://schemas.openxmlformats.org/drawingml/2006/main" prst="rect">
+            <a:avLst/>
+          </a:prstGeom>
+          <a:noFill xmlns:a="http://schemas.openxmlformats.org/drawingml/2006/main"/>
+          <a:ln xmlns:a="http://schemas.openxmlformats.org/drawingml/2006/main" w="0">
+            <a:noFill/>
+          </a:ln>
+        </p:spPr>
+        <p:txBody>
+          <a:bodyPr xmlns:a="http://schemas.openxmlformats.org/drawingml/2006/main">
+            <a:noAutofit/>
+          </a:bodyPr>
+          <a:lstStyle xmlns:a="http://schemas.openxmlformats.org/drawingml/2006/main"/>
+          <a:p xmlns:a="http://schemas.openxmlformats.org/drawingml/2006/main">
+            <a:pPr>
+              <a:defRPr sz="2100" b="0">
+                <a:solidFill>
+                  <a:srgbClr val="102A30"/>
+                </a:solidFill>
+                <a:latin typeface="Helvetica Neue"/>
+                <a:ea typeface="Helvetica Neue"/>
+                <a:cs typeface="Helvetica Neue"/>
+              </a:defRPr>
+            </a:pPr>
+            <a:r>
+              <a:rPr sz="2100" b="0">
+                <a:solidFill>
+                  <a:srgbClr val="102A30"/>
+                </a:solidFill>
+                <a:latin typeface="Helvetica Neue"/>
+                <a:ea typeface="Helvetica Neue"/>
+                <a:cs typeface="Helvetica Neue"/>
+              </a:rPr>
+              <a:t>Проверяет ввод текста</a:t>
+            </a:r>
+          </a:p>
+          <a:p xmlns:a="http://schemas.openxmlformats.org/drawingml/2006/main">
+            <a:pPr>
+              <a:defRPr sz="2100" b="0">
+                <a:solidFill>
+                  <a:srgbClr val="102A30"/>
+                </a:solidFill>
+                <a:latin typeface="Helvetica Neue"/>
+                <a:ea typeface="Helvetica Neue"/>
+                <a:cs typeface="Helvetica Neue"/>
+              </a:defRPr>
+            </a:pPr>
+            <a:r>
+              <a:rPr sz="2100" b="0">
+                <a:solidFill>
+                  <a:srgbClr val="102A30"/>
+                </a:solidFill>
+                <a:latin typeface="Helvetica Neue"/>
+                <a:ea typeface="Helvetica Neue"/>
+                <a:cs typeface="Helvetica Neue"/>
+              </a:rPr>
+              <a:t>и защиту запросов от подделки.</a:t>
+            </a:r>
+          </a:p>
+          <a:p xmlns:a="http://schemas.openxmlformats.org/drawingml/2006/main">
+            <a:r>
+              <a:t/>
+            </a:r>
+          </a:p>
+          <a:p xmlns:a="http://schemas.openxmlformats.org/drawingml/2006/main">
+            <a:pPr>
+              <a:defRPr sz="2100" b="0">
+                <a:solidFill>
+                  <a:srgbClr val="102A30"/>
+                </a:solidFill>
+                <a:latin typeface="Helvetica Neue"/>
+                <a:ea typeface="Helvetica Neue"/>
+                <a:cs typeface="Helvetica Neue"/>
+              </a:defRPr>
+            </a:pPr>
+            <a:r>
+              <a:rPr sz="2100" b="0">
+                <a:solidFill>
+                  <a:srgbClr val="102A30"/>
+                </a:solidFill>
+                <a:latin typeface="Helvetica Neue"/>
+                <a:ea typeface="Helvetica Neue"/>
+                <a:cs typeface="Helvetica Neue"/>
+              </a:rPr>
+              <a:t>Повторяет установку</a:t>
+            </a:r>
+          </a:p>
+          <a:p xmlns:a="http://schemas.openxmlformats.org/drawingml/2006/main">
+            <a:pPr>
+              <a:defRPr sz="2100" b="0">
+                <a:solidFill>
+                  <a:srgbClr val="102A30"/>
+                </a:solidFill>
+                <a:latin typeface="Helvetica Neue"/>
+                <a:ea typeface="Helvetica Neue"/>
+                <a:cs typeface="Helvetica Neue"/>
+              </a:defRPr>
+            </a:pPr>
+            <a:r>
+              <a:rPr sz="2100" b="0">
+                <a:solidFill>
+                  <a:srgbClr val="102A30"/>
+                </a:solidFill>
+                <a:latin typeface="Helvetica Neue"/>
+                <a:ea typeface="Helvetica Neue"/>
+                <a:cs typeface="Helvetica Neue"/>
+              </a:rPr>
+              <a:t>из архива на чистом окружении.</a:t>
+            </a:r>
+          </a:p>
+        </p:txBody>
+      </p:sp>
+      <p:sp>
+        <p:nvSpPr>
+          <p:cNvPr id="13" name="">
+            <a:extLst xmlns:a="http://schemas.openxmlformats.org/drawingml/2006/main">
+              <a:ext uri="{FF2B5EF4-FFF2-40B4-BE49-F238E27FC236}">
+                <a16:creationId xmlns:a16="http://schemas.microsoft.com/office/drawing/2014/main" id="{A7E17ABD-3AA4-4B0B-B4F3-817BAB58B23C}"/>
+              </a:ext>
+            </a:extLst>
+          </p:cNvPr>
+          <p:cNvSpPr>
+            <a:spLocks xmlns:a="http://schemas.openxmlformats.org/drawingml/2006/main" noGrp="1"/>
+          </p:cNvSpPr>
+          <p:nvPr/>
+        </p:nvSpPr>
+        <p:spPr>
+          <a:xfrm xmlns:a="http://schemas.openxmlformats.org/drawingml/2006/main">
+            <a:off x="609600" y="5181600"/>
+            <a:ext cx="10972800" cy="628650"/>
+          </a:xfrm>
+          <a:prstGeom xmlns:a="http://schemas.openxmlformats.org/drawingml/2006/main" prst="rect">
+            <a:avLst/>
+          </a:prstGeom>
+          <a:noFill xmlns:a="http://schemas.openxmlformats.org/drawingml/2006/main"/>
+          <a:ln xmlns:a="http://schemas.openxmlformats.org/drawingml/2006/main" w="0">
+            <a:noFill/>
+          </a:ln>
+        </p:spPr>
+        <p:txBody>
+          <a:bodyPr xmlns:a="http://schemas.openxmlformats.org/drawingml/2006/main">
+            <a:noAutofit/>
+          </a:bodyPr>
+          <a:lstStyle xmlns:a="http://schemas.openxmlformats.org/drawingml/2006/main"/>
+          <a:p xmlns:a="http://schemas.openxmlformats.org/drawingml/2006/main">
+            <a:pPr>
+              <a:defRPr sz="2250" b="1">
+                <a:solidFill>
+                  <a:srgbClr val="26756C"/>
+                </a:solidFill>
+                <a:latin typeface="Helvetica Neue"/>
+                <a:ea typeface="Helvetica Neue"/>
+                <a:cs typeface="Helvetica Neue"/>
+              </a:defRPr>
+            </a:pPr>
+            <a:r>
+              <a:rPr sz="2250" b="1">
+                <a:solidFill>
+                  <a:srgbClr val="26756C"/>
+                </a:solidFill>
+                <a:latin typeface="Helvetica Neue"/>
+                <a:ea typeface="Helvetica Neue"/>
+                <a:cs typeface="Helvetica Neue"/>
+              </a:rPr>
+              <a:t>Каждый сохраняет отчёт и проверяет результат партнёра.</a:t>
+            </a:r>
+          </a:p>
+        </p:txBody>
+      </p:sp>
+      <p:sp>
+        <p:nvSpPr>
+          <p:cNvPr id="14" name="">
+            <a:extLst xmlns:a="http://schemas.openxmlformats.org/drawingml/2006/main">
+              <a:ext uri="{FF2B5EF4-FFF2-40B4-BE49-F238E27FC236}">
+                <a16:creationId xmlns:a16="http://schemas.microsoft.com/office/drawing/2014/main" id="{49267C2F-5D98-4E1B-86F5-A6365AC37E03}"/>
+              </a:ext>
+            </a:extLst>
+          </p:cNvPr>
+          <p:cNvSpPr>
+            <a:spLocks xmlns:a="http://schemas.openxmlformats.org/drawingml/2006/main" noGrp="1"/>
+          </p:cNvSpPr>
+          <p:nvPr/>
+        </p:nvSpPr>
+        <p:spPr>
+          <a:xfrm xmlns:a="http://schemas.openxmlformats.org/drawingml/2006/main">
+            <a:off x="609600" y="5915025"/>
+            <a:ext cx="10972800" cy="381000"/>
+          </a:xfrm>
+          <a:prstGeom xmlns:a="http://schemas.openxmlformats.org/drawingml/2006/main" prst="rect">
+            <a:avLst/>
+          </a:prstGeom>
+          <a:noFill xmlns:a="http://schemas.openxmlformats.org/drawingml/2006/main"/>
+          <a:ln xmlns:a="http://schemas.openxmlformats.org/drawingml/2006/main" w="0">
+            <a:noFill/>
+          </a:ln>
+        </p:spPr>
+        <p:txBody>
+          <a:bodyPr xmlns:a="http://schemas.openxmlformats.org/drawingml/2006/main">
+            <a:noAutofit/>
+          </a:bodyPr>
+          <a:lstStyle xmlns:a="http://schemas.openxmlformats.org/drawingml/2006/main"/>
+          <a:p xmlns:a="http://schemas.openxmlformats.org/drawingml/2006/main">
+            <a:pPr>
               <a:defRPr sz="1875" b="0">
                 <a:solidFill>
                   <a:srgbClr val="59686B"/>
@@ -6729,7 +6960,7 @@
                 <a:ea typeface="Helvetica Neue"/>
                 <a:cs typeface="Helvetica Neue"/>
               </a:rPr>
-              <a:t>Технический профиль ЭК1 уточняем после Л6–Л8.</a:t>
+              <a:t>После взаимной проверки созваниваемся и обсуждаем результаты.</a:t>
             </a:r>
           </a:p>
         </p:txBody>
@@ -6797,6 +7028,7 @@
           <a:lstStyle xmlns:a="http://schemas.openxmlformats.org/drawingml/2006/main"/>
           <a:p xmlns:a="http://schemas.openxmlformats.org/drawingml/2006/main">
             <a:pPr>
+              <a:buNone/>
               <a:defRPr sz="1350" b="1">
                 <a:solidFill>
                   <a:srgbClr val="26756C"/>
@@ -6854,6 +7086,7 @@
           <a:lstStyle xmlns:a="http://schemas.openxmlformats.org/drawingml/2006/main"/>
           <a:p xmlns:a="http://schemas.openxmlformats.org/drawingml/2006/main">
             <a:pPr>
+              <a:buNone/>
               <a:defRPr sz="3300" b="1">
                 <a:solidFill>
                   <a:srgbClr val="102A30"/>
@@ -6872,7 +7105,7 @@
                 <a:ea typeface="Helvetica Neue"/>
                 <a:cs typeface="Helvetica Neue"/>
               </a:rPr>
-              <a:t>Семь адаптированных правил SSDF</a:t>
+              <a:t>Другие источники из лекций</a:t>
             </a:r>
           </a:p>
         </p:txBody>
@@ -6911,6 +7144,7 @@
           <a:lstStyle xmlns:a="http://schemas.openxmlformats.org/drawingml/2006/main"/>
           <a:p xmlns:a="http://schemas.openxmlformats.org/drawingml/2006/main">
             <a:pPr>
+              <a:buNone/>
               <a:defRPr sz="1350" b="0">
                 <a:solidFill>
                   <a:srgbClr val="59686B"/>
@@ -6968,6 +7202,7 @@
           <a:lstStyle xmlns:a="http://schemas.openxmlformats.org/drawingml/2006/main"/>
           <a:p xmlns:a="http://schemas.openxmlformats.org/drawingml/2006/main">
             <a:pPr>
+              <a:buNone/>
               <a:defRPr sz="1800" b="1">
                 <a:solidFill>
                   <a:srgbClr val="26756C"/>
@@ -6993,23 +7228,24 @@
       </p:sp>
       <p:graphicFrame>
         <p:nvGraphicFramePr>
-          <p:cNvPr id="10" name=""/>
+          <p:cNvPr id="12" name=""/>
           <p:cNvGraphicFramePr/>
           <p:nvPr/>
         </p:nvGraphicFramePr>
         <p:xfrm>
-          <a:off xmlns:a="http://schemas.openxmlformats.org/drawingml/2006/main" x="609600" y="1990725"/>
-          <a:ext xmlns:a="http://schemas.openxmlformats.org/drawingml/2006/main" cx="10972800" cy="4105275"/>
+          <a:off xmlns:a="http://schemas.openxmlformats.org/drawingml/2006/main" x="609600" y="2028825"/>
+          <a:ext xmlns:a="http://schemas.openxmlformats.org/drawingml/2006/main" cx="10972800" cy="3857625"/>
         </p:xfrm>
         <a:graphic xmlns:a="http://schemas.openxmlformats.org/drawingml/2006/main">
           <a:graphicData uri="http://schemas.openxmlformats.org/drawingml/2006/table">
             <a:tbl>
               <a:tblPr/>
               <a:tblGrid>
-                <a:gridCol w="3333750"/>
-                <a:gridCol w="7639050"/>
+                <a:gridCol w="2190750"/>
+                <a:gridCol w="3810000"/>
+                <a:gridCol w="4972050"/>
               </a:tblGrid>
-              <a:tr h="513159">
+              <a:tr h="542925">
                 <a:tc>
                   <a:txBody>
                     <a:bodyPr>
@@ -7018,7 +7254,7 @@
                     <a:lstStyle/>
                     <a:p>
                       <a:r>
-                        <a:rPr sz="1800" b="1">
+                        <a:rPr sz="1875" b="1">
                           <a:solidFill>
                             <a:srgbClr val="FFFFFF"/>
                           </a:solidFill>
@@ -7026,7 +7262,7 @@
                           <a:ea typeface="Helvetica Neue"/>
                           <a:cs typeface="Helvetica Neue"/>
                         </a:rPr>
-                        <a:t>Положение SSDF 1.1</a:t>
+                        <a:t>Источник</a:t>
                       </a:r>
                     </a:p>
                   </a:txBody>
@@ -7044,7 +7280,7 @@
                     <a:lstStyle/>
                     <a:p>
                       <a:r>
-                        <a:rPr sz="1800" b="1">
+                        <a:rPr sz="1875" b="1">
                           <a:solidFill>
                             <a:srgbClr val="FFFFFF"/>
                           </a:solidFill>
@@ -7052,7 +7288,33 @@
                           <a:ea typeface="Helvetica Neue"/>
                           <a:cs typeface="Helvetica Neue"/>
                         </a:rPr>
-                        <a:t>Правило TaskFlow</a:t>
+                        <a:t>Зачем рассмотрели</a:t>
+                      </a:r>
+                    </a:p>
+                  </a:txBody>
+                  <a:tcPr marL="91440" marR="91440" marT="45720" marB="45720">
+                    <a:solidFill>
+                      <a:srgbClr val="102A30"/>
+                    </a:solidFill>
+                  </a:tcPr>
+                </a:tc>
+                <a:tc>
+                  <a:txBody>
+                    <a:bodyPr>
+                      <a:noAutofit/>
+                    </a:bodyPr>
+                    <a:lstStyle/>
+                    <a:p>
+                      <a:r>
+                        <a:rPr sz="1875" b="1">
+                          <a:solidFill>
+                            <a:srgbClr val="FFFFFF"/>
+                          </a:solidFill>
+                          <a:latin typeface="Helvetica Neue"/>
+                          <a:ea typeface="Helvetica Neue"/>
+                          <a:cs typeface="Helvetica Neue"/>
+                        </a:rPr>
+                        <a:t>Почему не взяли за основу</a:t>
                       </a:r>
                     </a:p>
                   </a:txBody>
@@ -7063,7 +7325,7 @@
                   </a:tcPr>
                 </a:tc>
               </a:tr>
-              <a:tr h="513159">
+              <a:tr h="1104900">
                 <a:tc>
                   <a:txBody>
                     <a:bodyPr>
@@ -7072,7 +7334,7 @@
                     <a:lstStyle/>
                     <a:p>
                       <a:r>
-                        <a:rPr sz="1800" b="0">
+                        <a:rPr sz="1875" b="0">
                           <a:solidFill>
                             <a:srgbClr val="102A30"/>
                           </a:solidFill>
@@ -7080,7 +7342,20 @@
                           <a:ea typeface="Helvetica Neue"/>
                           <a:cs typeface="Helvetica Neue"/>
                         </a:rPr>
-                        <a:t>PO.1.2</a:t>
+                        <a:t>ISO/IEC</a:t>
+                      </a:r>
+                    </a:p>
+                    <a:p>
+                      <a:r>
+                        <a:rPr sz="1875" b="0">
+                          <a:solidFill>
+                            <a:srgbClr val="102A30"/>
+                          </a:solidFill>
+                          <a:latin typeface="Helvetica Neue"/>
+                          <a:ea typeface="Helvetica Neue"/>
+                          <a:cs typeface="Helvetica Neue"/>
+                        </a:rPr>
+                        <a:t>27034-1</a:t>
                       </a:r>
                     </a:p>
                   </a:txBody>
@@ -7098,7 +7373,7 @@
                     <a:lstStyle/>
                     <a:p>
                       <a:r>
-                        <a:rPr sz="1800" b="0">
+                        <a:rPr sz="1875" b="0">
                           <a:solidFill>
                             <a:srgbClr val="102A30"/>
                           </a:solidFill>
@@ -7106,7 +7381,72 @@
                           <a:ea typeface="Helvetica Neue"/>
                           <a:cs typeface="Helvetica Neue"/>
                         </a:rPr>
-                        <a:t>Явные права и запрещённые сценарии</a:t>
+                        <a:t>Управление безопасностью</a:t>
+                      </a:r>
+                    </a:p>
+                    <a:p>
+                      <a:r>
+                        <a:rPr sz="1875" b="0">
+                          <a:solidFill>
+                            <a:srgbClr val="102A30"/>
+                          </a:solidFill>
+                          <a:latin typeface="Helvetica Neue"/>
+                          <a:ea typeface="Helvetica Neue"/>
+                          <a:cs typeface="Helvetica Neue"/>
+                        </a:rPr>
+                        <a:t>приложений в организации</a:t>
+                      </a:r>
+                    </a:p>
+                  </a:txBody>
+                  <a:tcPr marL="91440" marR="91440" marT="45720" marB="45720">
+                    <a:solidFill>
+                      <a:srgbClr val="FFFFFF"/>
+                    </a:solidFill>
+                  </a:tcPr>
+                </a:tc>
+                <a:tc>
+                  <a:txBody>
+                    <a:bodyPr>
+                      <a:noAutofit/>
+                    </a:bodyPr>
+                    <a:lstStyle/>
+                    <a:p>
+                      <a:r>
+                        <a:rPr sz="1875" b="0">
+                          <a:solidFill>
+                            <a:srgbClr val="102A30"/>
+                          </a:solidFill>
+                          <a:latin typeface="Helvetica Neue"/>
+                          <a:ea typeface="Helvetica Neue"/>
+                          <a:cs typeface="Helvetica Neue"/>
+                        </a:rPr>
+                        <a:t>В нашей паре нет отдельной</a:t>
+                      </a:r>
+                    </a:p>
+                    <a:p>
+                      <a:r>
+                        <a:rPr sz="1875" b="0">
+                          <a:solidFill>
+                            <a:srgbClr val="102A30"/>
+                          </a:solidFill>
+                          <a:latin typeface="Helvetica Neue"/>
+                          <a:ea typeface="Helvetica Neue"/>
+                          <a:cs typeface="Helvetica Neue"/>
+                        </a:rPr>
+                        <a:t>задачи управления безопасностью</a:t>
+                      </a:r>
+                    </a:p>
+                    <a:p>
+                      <a:r>
+                        <a:rPr sz="1875" b="0">
+                          <a:solidFill>
+                            <a:srgbClr val="102A30"/>
+                          </a:solidFill>
+                          <a:latin typeface="Helvetica Neue"/>
+                          <a:ea typeface="Helvetica Neue"/>
+                          <a:cs typeface="Helvetica Neue"/>
+                        </a:rPr>
+                        <a:t>на уровне организации.</a:t>
                       </a:r>
                     </a:p>
                   </a:txBody>
@@ -7117,7 +7457,7 @@
                   </a:tcPr>
                 </a:tc>
               </a:tr>
-              <a:tr h="513159">
+              <a:tr h="1104900">
                 <a:tc>
                   <a:txBody>
                     <a:bodyPr>
@@ -7126,7 +7466,7 @@
                     <a:lstStyle/>
                     <a:p>
                       <a:r>
-                        <a:rPr sz="1800" b="0">
+                        <a:rPr sz="1875" b="0">
                           <a:solidFill>
                             <a:srgbClr val="102A30"/>
                           </a:solidFill>
@@ -7134,7 +7474,20 @@
                           <a:ea typeface="Helvetica Neue"/>
                           <a:cs typeface="Helvetica Neue"/>
                         </a:rPr>
-                        <a:t>PO.2.1</a:t>
+                        <a:t>IEC</a:t>
+                      </a:r>
+                    </a:p>
+                    <a:p>
+                      <a:r>
+                        <a:rPr sz="1875" b="0">
+                          <a:solidFill>
+                            <a:srgbClr val="102A30"/>
+                          </a:solidFill>
+                          <a:latin typeface="Helvetica Neue"/>
+                          <a:ea typeface="Helvetica Neue"/>
+                          <a:cs typeface="Helvetica Neue"/>
+                        </a:rPr>
+                        <a:t>62443-4-1</a:t>
                       </a:r>
                     </a:p>
                   </a:txBody>
@@ -7152,7 +7505,7 @@
                     <a:lstStyle/>
                     <a:p>
                       <a:r>
-                        <a:rPr sz="1800" b="0">
+                        <a:rPr sz="1875" b="0">
                           <a:solidFill>
                             <a:srgbClr val="102A30"/>
                           </a:solidFill>
@@ -7160,7 +7513,59 @@
                           <a:ea typeface="Helvetica Neue"/>
                           <a:cs typeface="Helvetica Neue"/>
                         </a:rPr>
-                        <a:t>Разные автор и проверяющий</a:t>
+                        <a:t>Безопасная разработка</a:t>
+                      </a:r>
+                    </a:p>
+                    <a:p>
+                      <a:r>
+                        <a:rPr sz="1875" b="0">
+                          <a:solidFill>
+                            <a:srgbClr val="102A30"/>
+                          </a:solidFill>
+                          <a:latin typeface="Helvetica Neue"/>
+                          <a:ea typeface="Helvetica Neue"/>
+                          <a:cs typeface="Helvetica Neue"/>
+                        </a:rPr>
+                        <a:t>промышленных продуктов</a:t>
+                      </a:r>
+                    </a:p>
+                  </a:txBody>
+                  <a:tcPr marL="91440" marR="91440" marT="45720" marB="45720">
+                    <a:solidFill>
+                      <a:srgbClr val="F7F6F1"/>
+                    </a:solidFill>
+                  </a:tcPr>
+                </a:tc>
+                <a:tc>
+                  <a:txBody>
+                    <a:bodyPr>
+                      <a:noAutofit/>
+                    </a:bodyPr>
+                    <a:lstStyle/>
+                    <a:p>
+                      <a:r>
+                        <a:rPr sz="1875" b="0">
+                          <a:solidFill>
+                            <a:srgbClr val="102A30"/>
+                          </a:solidFill>
+                          <a:latin typeface="Helvetica Neue"/>
+                          <a:ea typeface="Helvetica Neue"/>
+                          <a:cs typeface="Helvetica Neue"/>
+                        </a:rPr>
+                        <a:t>TaskFlow не относится</a:t>
+                      </a:r>
+                    </a:p>
+                    <a:p>
+                      <a:r>
+                        <a:rPr sz="1875" b="0">
+                          <a:solidFill>
+                            <a:srgbClr val="102A30"/>
+                          </a:solidFill>
+                          <a:latin typeface="Helvetica Neue"/>
+                          <a:ea typeface="Helvetica Neue"/>
+                          <a:cs typeface="Helvetica Neue"/>
+                        </a:rPr>
+                        <a:t>к промышленной автоматизации.</a:t>
                       </a:r>
                     </a:p>
                   </a:txBody>
@@ -7171,7 +7576,7 @@
                   </a:tcPr>
                 </a:tc>
               </a:tr>
-              <a:tr h="513159">
+              <a:tr h="1104900">
                 <a:tc>
                   <a:txBody>
                     <a:bodyPr>
@@ -7180,7 +7585,7 @@
                     <a:lstStyle/>
                     <a:p>
                       <a:r>
-                        <a:rPr sz="1800" b="0">
+                        <a:rPr sz="1875" b="0">
                           <a:solidFill>
                             <a:srgbClr val="102A30"/>
                           </a:solidFill>
@@ -7188,7 +7593,7 @@
                           <a:ea typeface="Helvetica Neue"/>
                           <a:cs typeface="Helvetica Neue"/>
                         </a:rPr>
-                        <a:t>PS.1.1</a:t>
+                        <a:t>BSIMM</a:t>
                       </a:r>
                     </a:p>
                   </a:txBody>
@@ -7206,7 +7611,7 @@
                     <a:lstStyle/>
                     <a:p>
                       <a:r>
-                        <a:rPr sz="1800" b="0">
+                        <a:rPr sz="1875" b="0">
                           <a:solidFill>
                             <a:srgbClr val="102A30"/>
                           </a:solidFill>
@@ -7214,27 +7619,12 @@
                           <a:ea typeface="Helvetica Neue"/>
                           <a:cs typeface="Helvetica Neue"/>
                         </a:rPr>
-                        <a:t>Минимальные права, отсутствие секретов в поставке</a:t>
+                        <a:t>Практики безопасности,</a:t>
                       </a:r>
                     </a:p>
-                  </a:txBody>
-                  <a:tcPr marL="91440" marR="91440" marT="45720" marB="45720">
-                    <a:solidFill>
-                      <a:srgbClr val="FFFFFF"/>
-                    </a:solidFill>
-                  </a:tcPr>
-                </a:tc>
-              </a:tr>
-              <a:tr h="513159">
-                <a:tc>
-                  <a:txBody>
-                    <a:bodyPr>
-                      <a:noAutofit/>
-                    </a:bodyPr>
-                    <a:lstStyle/>
                     <a:p>
                       <a:r>
-                        <a:rPr sz="1800" b="0">
+                        <a:rPr sz="1875" b="0">
                           <a:solidFill>
                             <a:srgbClr val="102A30"/>
                           </a:solidFill>
@@ -7242,61 +7632,7 @@
                           <a:ea typeface="Helvetica Neue"/>
                           <a:cs typeface="Helvetica Neue"/>
                         </a:rPr>
-                        <a:t>PW.7.1–7.2</a:t>
-                      </a:r>
-                    </a:p>
-                  </a:txBody>
-                  <a:tcPr marL="91440" marR="91440" marT="45720" marB="45720">
-                    <a:solidFill>
-                      <a:srgbClr val="F7F6F1"/>
-                    </a:solidFill>
-                  </a:tcPr>
-                </a:tc>
-                <a:tc>
-                  <a:txBody>
-                    <a:bodyPr>
-                      <a:noAutofit/>
-                    </a:bodyPr>
-                    <a:lstStyle/>
-                    <a:p>
-                      <a:r>
-                        <a:rPr sz="1800" b="0">
-                          <a:solidFill>
-                            <a:srgbClr val="102A30"/>
-                          </a:solidFill>
-                          <a:latin typeface="Helvetica Neue"/>
-                          <a:ea typeface="Helvetica Neue"/>
-                          <a:cs typeface="Helvetica Neue"/>
-                        </a:rPr>
-                        <a:t>Независимое чтение значимого кода</a:t>
-                      </a:r>
-                    </a:p>
-                  </a:txBody>
-                  <a:tcPr marL="91440" marR="91440" marT="45720" marB="45720">
-                    <a:solidFill>
-                      <a:srgbClr val="F7F6F1"/>
-                    </a:solidFill>
-                  </a:tcPr>
-                </a:tc>
-              </a:tr>
-              <a:tr h="513159">
-                <a:tc>
-                  <a:txBody>
-                    <a:bodyPr>
-                      <a:noAutofit/>
-                    </a:bodyPr>
-                    <a:lstStyle/>
-                    <a:p>
-                      <a:r>
-                        <a:rPr sz="1800" b="0">
-                          <a:solidFill>
-                            <a:srgbClr val="102A30"/>
-                          </a:solidFill>
-                          <a:latin typeface="Helvetica Neue"/>
-                          <a:ea typeface="Helvetica Neue"/>
-                          <a:cs typeface="Helvetica Neue"/>
-                        </a:rPr>
-                        <a:t>PW.8.1–8.2</a:t>
+                        <a:t>наблюдаемые в организациях</a:t>
                       </a:r>
                     </a:p>
                   </a:txBody>
@@ -7314,7 +7650,7 @@
                     <a:lstStyle/>
                     <a:p>
                       <a:r>
-                        <a:rPr sz="1800" b="0">
+                        <a:rPr sz="1875" b="0">
                           <a:solidFill>
                             <a:srgbClr val="102A30"/>
                           </a:solidFill>
@@ -7322,27 +7658,12 @@
                           <a:ea typeface="Helvetica Neue"/>
                           <a:cs typeface="Helvetica Neue"/>
                         </a:rPr>
-                        <a:t>Положительные и отрицательные проверки</a:t>
+                        <a:t>Сравнение с другими</a:t>
                       </a:r>
                     </a:p>
-                  </a:txBody>
-                  <a:tcPr marL="91440" marR="91440" marT="45720" marB="45720">
-                    <a:solidFill>
-                      <a:srgbClr val="FFFFFF"/>
-                    </a:solidFill>
-                  </a:tcPr>
-                </a:tc>
-              </a:tr>
-              <a:tr h="513159">
-                <a:tc>
-                  <a:txBody>
-                    <a:bodyPr>
-                      <a:noAutofit/>
-                    </a:bodyPr>
-                    <a:lstStyle/>
                     <a:p>
                       <a:r>
-                        <a:rPr sz="1800" b="0">
+                        <a:rPr sz="1875" b="0">
                           <a:solidFill>
                             <a:srgbClr val="102A30"/>
                           </a:solidFill>
@@ -7350,25 +7671,12 @@
                           <a:ea typeface="Helvetica Neue"/>
                           <a:cs typeface="Helvetica Neue"/>
                         </a:rPr>
-                        <a:t>PS.3.1</a:t>
+                        <a:t>организациями не является</a:t>
                       </a:r>
                     </a:p>
-                  </a:txBody>
-                  <a:tcPr marL="91440" marR="91440" marT="45720" marB="45720">
-                    <a:solidFill>
-                      <a:srgbClr val="F7F6F1"/>
-                    </a:solidFill>
-                  </a:tcPr>
-                </a:tc>
-                <a:tc>
-                  <a:txBody>
-                    <a:bodyPr>
-                      <a:noAutofit/>
-                    </a:bodyPr>
-                    <a:lstStyle/>
                     <a:p>
                       <a:r>
-                        <a:rPr sz="1800" b="0">
+                        <a:rPr sz="1875" b="0">
                           <a:solidFill>
                             <a:srgbClr val="102A30"/>
                           </a:solidFill>
@@ -7376,61 +7684,7 @@
                           <a:ea typeface="Helvetica Neue"/>
                           <a:cs typeface="Helvetica Neue"/>
                         </a:rPr>
-                        <a:t>Версия, архив, SHA-256 и повтор установки</a:t>
-                      </a:r>
-                    </a:p>
-                  </a:txBody>
-                  <a:tcPr marL="91440" marR="91440" marT="45720" marB="45720">
-                    <a:solidFill>
-                      <a:srgbClr val="F7F6F1"/>
-                    </a:solidFill>
-                  </a:tcPr>
-                </a:tc>
-              </a:tr>
-              <a:tr h="513159">
-                <a:tc>
-                  <a:txBody>
-                    <a:bodyPr>
-                      <a:noAutofit/>
-                    </a:bodyPr>
-                    <a:lstStyle/>
-                    <a:p>
-                      <a:r>
-                        <a:rPr sz="1800" b="0">
-                          <a:solidFill>
-                            <a:srgbClr val="102A30"/>
-                          </a:solidFill>
-                          <a:latin typeface="Helvetica Neue"/>
-                          <a:ea typeface="Helvetica Neue"/>
-                          <a:cs typeface="Helvetica Neue"/>
-                        </a:rPr>
-                        <a:t>RV.2.1–2.2</a:t>
-                      </a:r>
-                    </a:p>
-                  </a:txBody>
-                  <a:tcPr marL="91440" marR="91440" marT="45720" marB="45720">
-                    <a:solidFill>
-                      <a:srgbClr val="FFFFFF"/>
-                    </a:solidFill>
-                  </a:tcPr>
-                </a:tc>
-                <a:tc>
-                  <a:txBody>
-                    <a:bodyPr>
-                      <a:noAutofit/>
-                    </a:bodyPr>
-                    <a:lstStyle/>
-                    <a:p>
-                      <a:r>
-                        <a:rPr sz="1800" b="0">
-                          <a:solidFill>
-                            <a:srgbClr val="102A30"/>
-                          </a:solidFill>
-                          <a:latin typeface="Helvetica Neue"/>
-                          <a:ea typeface="Helvetica Neue"/>
-                          <a:cs typeface="Helvetica Neue"/>
-                        </a:rPr>
-                        <a:t>Применимость дефекта, исправление и повтор проверки</a:t>
+                        <a:t>целью нашего проекта.</a:t>
                       </a:r>
                     </a:p>
                   </a:txBody>
@@ -7508,6 +7762,7 @@
           <a:lstStyle xmlns:a="http://schemas.openxmlformats.org/drawingml/2006/main"/>
           <a:p xmlns:a="http://schemas.openxmlformats.org/drawingml/2006/main">
             <a:pPr>
+              <a:buNone/>
               <a:defRPr sz="1350" b="1">
                 <a:solidFill>
                   <a:srgbClr val="26756C"/>
@@ -7565,6 +7820,7 @@
           <a:lstStyle xmlns:a="http://schemas.openxmlformats.org/drawingml/2006/main"/>
           <a:p xmlns:a="http://schemas.openxmlformats.org/drawingml/2006/main">
             <a:pPr>
+              <a:buNone/>
               <a:defRPr sz="3300" b="1">
                 <a:solidFill>
                   <a:srgbClr val="102A30"/>
@@ -7583,7 +7839,7 @@
                 <a:ea typeface="Helvetica Neue"/>
                 <a:cs typeface="Helvetica Neue"/>
               </a:rPr>
-              <a:t>Использование генеративного ИИ</a:t>
+              <a:t>Как использовали ИИ</a:t>
             </a:r>
           </a:p>
         </p:txBody>
@@ -7622,6 +7878,7 @@
           <a:lstStyle xmlns:a="http://schemas.openxmlformats.org/drawingml/2006/main"/>
           <a:p xmlns:a="http://schemas.openxmlformats.org/drawingml/2006/main">
             <a:pPr>
+              <a:buNone/>
               <a:defRPr sz="1350" b="0">
                 <a:solidFill>
                   <a:srgbClr val="59686B"/>
@@ -7679,6 +7936,7 @@
           <a:lstStyle xmlns:a="http://schemas.openxmlformats.org/drawingml/2006/main"/>
           <a:p xmlns:a="http://schemas.openxmlformats.org/drawingml/2006/main">
             <a:pPr>
+              <a:buNone/>
               <a:defRPr sz="1800" b="1">
                 <a:solidFill>
                   <a:srgbClr val="26756C"/>
@@ -7736,6 +7994,7 @@
           <a:lstStyle xmlns:a="http://schemas.openxmlformats.org/drawingml/2006/main"/>
           <a:p xmlns:a="http://schemas.openxmlformats.org/drawingml/2006/main">
             <a:pPr>
+              <a:buNone/>
               <a:defRPr sz="2550" b="1">
                 <a:solidFill>
                   <a:srgbClr val="26756C"/>
@@ -7793,6 +8052,7 @@
           <a:lstStyle xmlns:a="http://schemas.openxmlformats.org/drawingml/2006/main"/>
           <a:p xmlns:a="http://schemas.openxmlformats.org/drawingml/2006/main">
             <a:pPr>
+              <a:buNone/>
               <a:defRPr sz="2175" b="0">
                 <a:solidFill>
                   <a:srgbClr val="102A30"/>
@@ -7811,11 +8071,12 @@
                 <a:ea typeface="Helvetica Neue"/>
                 <a:cs typeface="Helvetica Neue"/>
               </a:rPr>
-              <a:t>Автоматизация текста, кода MVP, тестов и оформления.</a:t>
-            </a:r>
-          </a:p>
-          <a:p xmlns:a="http://schemas.openxmlformats.org/drawingml/2006/main">
-            <a:pPr>
+              <a:t>Помощь с текстом, кодом приложения, тестами и слайдами.</a:t>
+            </a:r>
+          </a:p>
+          <a:p xmlns:a="http://schemas.openxmlformats.org/drawingml/2006/main">
+            <a:pPr>
+              <a:buNone/>
               <a:defRPr sz="2175" b="0">
                 <a:solidFill>
                   <a:srgbClr val="102A30"/>
@@ -7834,11 +8095,12 @@
                 <a:ea typeface="Helvetica Neue"/>
                 <a:cs typeface="Helvetica Neue"/>
               </a:rPr>
-              <a:t>Предложения по структуре, методологии и плану проверок.</a:t>
-            </a:r>
-          </a:p>
-          <a:p xmlns:a="http://schemas.openxmlformats.org/drawingml/2006/main">
-            <a:pPr>
+              <a:t>Предложения по методологии и плану проверок.</a:t>
+            </a:r>
+          </a:p>
+          <a:p xmlns:a="http://schemas.openxmlformats.org/drawingml/2006/main">
+            <a:pPr>
+              <a:buNone/>
               <a:defRPr sz="2175" b="0">
                 <a:solidFill>
                   <a:srgbClr val="102A30"/>
@@ -7857,7 +8119,7 @@
                 <a:ea typeface="Helvetica Neue"/>
                 <a:cs typeface="Helvetica Neue"/>
               </a:rPr>
-              <a:t>Обложка презентации: иллюстрация OpenAI.</a:t>
+              <a:t>Обложка: иллюстрация OpenAI.</a:t>
             </a:r>
           </a:p>
         </p:txBody>
@@ -7896,6 +8158,7 @@
           <a:lstStyle xmlns:a="http://schemas.openxmlformats.org/drawingml/2006/main"/>
           <a:p xmlns:a="http://schemas.openxmlformats.org/drawingml/2006/main">
             <a:pPr>
+              <a:buNone/>
               <a:defRPr sz="2550" b="1">
                 <a:solidFill>
                   <a:srgbClr val="26756C"/>
@@ -7953,6 +8216,7 @@
           <a:lstStyle xmlns:a="http://schemas.openxmlformats.org/drawingml/2006/main"/>
           <a:p xmlns:a="http://schemas.openxmlformats.org/drawingml/2006/main">
             <a:pPr>
+              <a:buNone/>
               <a:defRPr sz="2175" b="0">
                 <a:solidFill>
                   <a:srgbClr val="102A30"/>
@@ -7971,11 +8235,12 @@
                 <a:ea typeface="Helvetica Neue"/>
                 <a:cs typeface="Helvetica Neue"/>
               </a:rPr>
-              <a:t>Участники выбирают и обосновывают проектные решения.</a:t>
-            </a:r>
-          </a:p>
-          <a:p xmlns:a="http://schemas.openxmlformats.org/drawingml/2006/main">
-            <a:pPr>
+              <a:t>Участники выбирают решения и отвечают за них.</a:t>
+            </a:r>
+          </a:p>
+          <a:p xmlns:a="http://schemas.openxmlformats.org/drawingml/2006/main">
+            <a:pPr>
+              <a:buNone/>
               <a:defRPr sz="2175" b="0">
                 <a:solidFill>
                   <a:srgbClr val="102A30"/>
@@ -7994,7 +8259,7 @@
                 <a:ea typeface="Helvetica Neue"/>
                 <a:cs typeface="Helvetica Neue"/>
               </a:rPr>
-              <a:t>ИИ не заменяет независимое review и решение о выпуске.</a:t>
+              <a:t>Код проверяет партнёр, выпуск одобряют оба участника.</a:t>
             </a:r>
           </a:p>
         </p:txBody>
@@ -8033,6 +8298,7 @@
           <a:lstStyle xmlns:a="http://schemas.openxmlformats.org/drawingml/2006/main"/>
           <a:p xmlns:a="http://schemas.openxmlformats.org/drawingml/2006/main">
             <a:pPr>
+              <a:buNone/>
               <a:defRPr sz="1800" b="0">
                 <a:solidFill>
                   <a:srgbClr val="59686B"/>
@@ -8051,7 +8317,7 @@
                 <a:ea typeface="Helvetica Neue"/>
                 <a:cs typeface="Helvetica Neue"/>
               </a:rPr>
-              <a:t>Данные: материалы курса, учебные исходники и синтетические сценарии.</a:t>
+              <a:t>Данные: материалы курса, учебный код и вымышленные примеры.</a:t>
             </a:r>
           </a:p>
         </p:txBody>

--- a/presentation/taskflow-ek1.pptx
+++ b/presentation/taskflow-ek1.pptx
@@ -2,21 +2,21 @@
 <file path=ppt/presentation.xml><?xml version="1.0" encoding="utf-8"?>
 <p:presentation xmlns:p="http://schemas.openxmlformats.org/presentationml/2006/main">
   <p:sldMasterIdLst>
-    <p:sldMasterId xmlns:r="http://schemas.openxmlformats.org/officeDocument/2006/relationships" id="2147483648" r:id="Rfd2becc5ef064e6b"/>
+    <p:sldMasterId xmlns:r="http://schemas.openxmlformats.org/officeDocument/2006/relationships" id="2147483648" r:id="Ra334595c71c440d2"/>
   </p:sldMasterIdLst>
   <p:notesMasterIdLst>
-    <p:notesMasterId xmlns:r="http://schemas.openxmlformats.org/officeDocument/2006/relationships" r:id="Rf387fef931e1493b"/>
+    <p:notesMasterId xmlns:r="http://schemas.openxmlformats.org/officeDocument/2006/relationships" r:id="R4fc3c08d2be74b1b"/>
   </p:notesMasterIdLst>
   <p:sldIdLst>
-    <p:sldId xmlns:r="http://schemas.openxmlformats.org/officeDocument/2006/relationships" id="256" r:id="R55becc7d521a4a47"/>
-    <p:sldId xmlns:r="http://schemas.openxmlformats.org/officeDocument/2006/relationships" id="257" r:id="Rf92fcb5e00874b2b"/>
-    <p:sldId xmlns:r="http://schemas.openxmlformats.org/officeDocument/2006/relationships" id="258" r:id="R2ce952b0d59f45fe"/>
-    <p:sldId xmlns:r="http://schemas.openxmlformats.org/officeDocument/2006/relationships" id="259" r:id="Rb9a6b305661749c9"/>
-    <p:sldId xmlns:r="http://schemas.openxmlformats.org/officeDocument/2006/relationships" id="260" r:id="Re36c2f71c4824165"/>
-    <p:sldId xmlns:r="http://schemas.openxmlformats.org/officeDocument/2006/relationships" id="261" r:id="R80b40d06d7134cc8"/>
-    <p:sldId xmlns:r="http://schemas.openxmlformats.org/officeDocument/2006/relationships" id="262" r:id="R52477179437448c2"/>
-    <p:sldId xmlns:r="http://schemas.openxmlformats.org/officeDocument/2006/relationships" id="263" r:id="R7d14030a01fd4c1c"/>
-    <p:sldId xmlns:r="http://schemas.openxmlformats.org/officeDocument/2006/relationships" id="264" r:id="R9d94c29bc5f548a0"/>
+    <p:sldId xmlns:r="http://schemas.openxmlformats.org/officeDocument/2006/relationships" id="256" r:id="R14c97b2181034e10"/>
+    <p:sldId xmlns:r="http://schemas.openxmlformats.org/officeDocument/2006/relationships" id="257" r:id="Rde15d6e4e137407e"/>
+    <p:sldId xmlns:r="http://schemas.openxmlformats.org/officeDocument/2006/relationships" id="258" r:id="R58c4ebc909194143"/>
+    <p:sldId xmlns:r="http://schemas.openxmlformats.org/officeDocument/2006/relationships" id="259" r:id="Re24f76bfbaad456d"/>
+    <p:sldId xmlns:r="http://schemas.openxmlformats.org/officeDocument/2006/relationships" id="260" r:id="Rb185917003ca43c5"/>
+    <p:sldId xmlns:r="http://schemas.openxmlformats.org/officeDocument/2006/relationships" id="261" r:id="R484f30cdd5e644f5"/>
+    <p:sldId xmlns:r="http://schemas.openxmlformats.org/officeDocument/2006/relationships" id="262" r:id="Re0e455f41dbd468c"/>
+    <p:sldId xmlns:r="http://schemas.openxmlformats.org/officeDocument/2006/relationships" id="263" r:id="Rdb2f4ca7666f4b0b"/>
+    <p:sldId xmlns:r="http://schemas.openxmlformats.org/officeDocument/2006/relationships" id="264" r:id="R29fb268fcda74833"/>
   </p:sldIdLst>
   <p:sldSz cx="12192000" cy="6858000"/>
   <p:notesSz cx="6858000" cy="9144000"/>
@@ -455,7 +455,7 @@
           </a:p>
           <a:p xmlns:a="http://schemas.openxmlformats.org/drawingml/2006/main">
             <a:r>
-              <a:t>Мы делаем TaskFlow, трекер задач для небольшой команды. На первой защите показываем, как будем разрабатывать его безопасно: какие правила выбрали, что уже проверено и что делает каждый участник.</a:t>
+              <a:t>Мы представляем TaskFlow, локальный трекер задач для учебной команды. Покажем выбранную основу безопасной разработки, что уже проверено, чего пока не хватает и как распределена работа.</a:t>
             </a:r>
           </a:p>
           <a:p xmlns:a="http://schemas.openxmlformats.org/drawingml/2006/main">
@@ -480,7 +480,7 @@
           </a:p>
           <a:p xmlns:a="http://schemas.openxmlformats.org/drawingml/2006/main">
             <a:r>
-              <a:t>Обложка: иллюстрация OpenAI ImageGen.</a:t>
+              <a:t>Обложка: иллюстрация OpenAI ImageGen, создана для этой презентации.</a:t>
             </a:r>
           </a:p>
         </p:txBody>
@@ -550,27 +550,12 @@
           <a:lstStyle xmlns:a="http://schemas.openxmlformats.org/drawingml/2006/main"/>
           <a:p xmlns:a="http://schemas.openxmlformats.org/drawingml/2006/main">
             <a:r>
-              <a:t>Основная часть: 25 секунд. Роман.</a:t>
-            </a:r>
-          </a:p>
-          <a:p xmlns:a="http://schemas.openxmlformats.org/drawingml/2006/main">
-            <a:r>
-              <a:t>Владелец управляет задачами и участниками. Редактор меняет задачи и пишет комментарии. Наблюдатель только читает. Посторонний не видит чужой проект. Права действуют отдельно в каждом проекте. Приложение работает локально на Django и SQLite, данные учебные. Исходная версия для исследования называется baseline-mvp, будущий выпуск — v1.0.0.</a:t>
-            </a:r>
-          </a:p>
-          <a:p xmlns:a="http://schemas.openxmlformats.org/drawingml/2006/main">
-            <a:r>
-              <a:t/>
-            </a:r>
-          </a:p>
-          <a:p xmlns:a="http://schemas.openxmlformats.org/drawingml/2006/main">
-            <a:r>
-              <a:t>Для вопросов:</a:t>
-            </a:r>
-          </a:p>
-          <a:p xmlns:a="http://schemas.openxmlformats.org/drawingml/2006/main">
-            <a:r>
-              <a:t>Публичный хостинг, вложения и реальные пользовательские данные не входят в область проекта. Один пользователь может иметь разные роли в разных проектах.</a:t>
+              <a:t>Основная часть: 35 секунд. Роман.</a:t>
+            </a:r>
+          </a:p>
+          <a:p xmlns:a="http://schemas.openxmlformats.org/drawingml/2006/main">
+            <a:r>
+              <a:t>Владелец управляет задачами, участниками и удалением. Редактор меняет задачи и пишет комментарии. Наблюдатель только читает. Посторонний не видит чужой проект. Роль действует внутри проекта, поэтому права одного пользователя могут отличаться в разных проектах. Исследуем исходную версию baseline-mvp. Приложение работает на Django и SQLite, локально и с учебными данными. Публичный хостинг, вложения и реальные данные не входят в область. Планируемый выпуск — v1.0.0.</a:t>
             </a:r>
           </a:p>
           <a:p xmlns:a="http://schemas.openxmlformats.org/drawingml/2006/main">
@@ -670,7 +655,7 @@
           </a:p>
           <a:p xmlns:a="http://schemas.openxmlformats.org/drawingml/2006/main">
             <a:r>
-              <a:t>SSDF отвечает на вопрос, как организовать безопасную разработку. Он охватывает путь от требований до выпуска и исправлений, а способы выполнения мы подбираем под двух человек. Полный текст открыт. Из него мы выбрали семь правил, например проверку кода партнёром и сохранение результатов тестов. ASVS отвечает на вопрос, что именно проверять в веб-приложении: доступ, вход и обработку текста. Вместе получаем и порядок работы, и технические требования. Один SSDF не даёт подробного списка веб-проверок, а ASVS не описывает весь процесс команды.</a:t>
+              <a:t>Выбрали SSDF как основу процесса и ASVS как дополнение. SSDF охватывает путь от требований до выпуска и исправлений. Его полный текст открыт, а семь выбранных правил можем выполнять вдвоём. SAMM рассмотрели для оценки и развития практик, но у нового проекта пока мало истории их устойчивого выполнения. ГОСТ тоже подходит, однако курс разрешает выбирать основу. Для нашей области выбрали доступные практики SSDF. ASVS добавляет конкретные требования к веб-приложению: права, сессии и ввод. Поэтому источники дополняют друг друга.</a:t>
             </a:r>
           </a:p>
           <a:p xmlns:a="http://schemas.openxmlformats.org/drawingml/2006/main">
@@ -685,7 +670,7 @@
           </a:p>
           <a:p xmlns:a="http://schemas.openxmlformats.org/drawingml/2006/main">
             <a:r>
-              <a:t>Семь правил в §2 паспорта: PO.1.2, PO.2.1, PS.1.1, PW.7.1–7.2, PW.8.1–8.2, PS.3.1, RV.2.1–2.2. Их действия, роли, результаты и условия принятия описаны отдельно. Полное соответствие SSDF или уровень ASVS не заявляем. ASVS содержит требования, а конкретные тесты команда проектирует сама.</a:t>
+              <a:t>SAMM применим и к небольшой команде. ГОСТ не ограничен государственными или сертифицируемыми проектами. Обязательность по закону или договору проверяется отдельно. Карточка ГОСТ не заменяет полный текст требований. SSDF не даёт подробного списка требований к веб-приложению, ASVS не задаёт весь порядок работы пары. Полное соответствие SSDF или уровень ASVS не заявляем. Остальные рассмотренные источники и причины выбора описаны в docs/methodology-options.md.</a:t>
             </a:r>
           </a:p>
           <a:p xmlns:a="http://schemas.openxmlformats.org/drawingml/2006/main">
@@ -710,12 +695,22 @@
           </a:p>
           <a:p xmlns:a="http://schemas.openxmlformats.org/drawingml/2006/main">
             <a:r>
+              <a:t>https://owaspsamm.org/model/</a:t>
+            </a:r>
+          </a:p>
+          <a:p xmlns:a="http://schemas.openxmlformats.org/drawingml/2006/main">
+            <a:r>
+              <a:t>https://protect.gost.ru/gost/details/f3818925-a96f-4f55-96e9-46b44720ee64</a:t>
+            </a:r>
+          </a:p>
+          <a:p xmlns:a="http://schemas.openxmlformats.org/drawingml/2006/main">
+            <a:r>
               <a:t>https://github.com/hse-rbpo-master-2026/course/blob/5ce5fdf4ba4bb32ac62d1b9c6728f3a6d8fa6884/lectures/L03.pdf</a:t>
             </a:r>
           </a:p>
           <a:p xmlns:a="http://schemas.openxmlformats.org/drawingml/2006/main">
             <a:r>
-              <a:t>https://github.com/rbeketov/rbpo-yavkaib/blob/main/project.md</a:t>
+              <a:t>https://github.com/rbeketov/rbpo-yavkaib/blob/main/docs/methodology-options.md</a:t>
             </a:r>
           </a:p>
         </p:txBody>
@@ -785,12 +780,12 @@
           <a:lstStyle xmlns:a="http://schemas.openxmlformats.org/drawingml/2006/main"/>
           <a:p xmlns:a="http://schemas.openxmlformats.org/drawingml/2006/main">
             <a:r>
-              <a:t>Основная часть: 35 секунд. Роман.</a:t>
-            </a:r>
-          </a:p>
-          <a:p xmlns:a="http://schemas.openxmlformats.org/drawingml/2006/main">
-            <a:r>
-              <a:t>SAMM рассмотрели, потому что он помогает оценивать и улучшать практики команды. Но TaskFlow только начат, истории проверок мало. Сейчас нам важнее установить правила работы. ГОСТ рассмотрели как полноценную основу безопасной разработки. Задание курса разрешает выбрать основу и не требует именно ГОСТ. Мы взяли SSDF: его полный текст открыт, а выбранных практик достаточно для нашей области. Это выбор под задачу, а не утверждение, что SAMM или ГОСТ хуже.</a:t>
+              <a:t>Основная часть: 35 секунд. Ярослав.</a:t>
+            </a:r>
+          </a:p>
+          <a:p xmlns:a="http://schemas.openxmlformats.org/drawingml/2006/main">
+            <a:r>
+              <a:t>Пример нашего правила по SSDF PW.8: наблюдатель не меняет задачу. Роман отправляет запрос от наблюдателя и такой же от редактора. В первом случае сервер должен отказать, а данные остаться прежними. Во втором изменение разрешено. Ярослав повторяет запрет и читает проверку прав. Сохраняем версию кода, условия и результат. Если права нарушены, изменение не принимаем. ASVS 8.2.1 уточняет ограничение действий, а 8.2.2 — доступ к конкретным объектам.</a:t>
             </a:r>
           </a:p>
           <a:p xmlns:a="http://schemas.openxmlformats.org/drawingml/2006/main">
@@ -805,7 +800,7 @@
           </a:p>
           <a:p xmlns:a="http://schemas.openxmlformats.org/drawingml/2006/main">
             <a:r>
-              <a:t>SAMM применим и к маленькой команде. Его можно использовать позже для оценки того, насколько устойчиво выполняются правила. ГОСТ не ограничен государственными или сертифицируемыми проектами. Обязательность по закону или договору устанавливается отдельно. Официальная карточка ГОСТ подтверждает сведения о стандарте, но не заменяет полный текст требований. Для альтернативного выбора потребовались бы назначенные положения из ЭИОС или другой законный доступ.</a:t>
+              <a:t>PO.1.2 связывает сценарий с требованием, PW.8.1–8.2 — с тестированием, PW.7.1–7.2 — с чтением кода партнёром. Независимый повтор и конкретный сценарий являются адаптацией команды. ASVS 8.3.1 требует доверенного слоя проверки: скрытая кнопка не заменяет проверку на сервере.</a:t>
             </a:r>
           </a:p>
           <a:p xmlns:a="http://schemas.openxmlformats.org/drawingml/2006/main">
@@ -820,37 +815,27 @@
           </a:p>
           <a:p xmlns:a="http://schemas.openxmlformats.org/drawingml/2006/main">
             <a:r>
-              <a:t>https://owaspsamm.org/model/</a:t>
-            </a:r>
-          </a:p>
-          <a:p xmlns:a="http://schemas.openxmlformats.org/drawingml/2006/main">
-            <a:r>
-              <a:t>https://owaspsamm.org/assessment/</a:t>
-            </a:r>
-          </a:p>
-          <a:p xmlns:a="http://schemas.openxmlformats.org/drawingml/2006/main">
-            <a:r>
-              <a:t>https://protect.gost.ru/gost/details/f3818925-a96f-4f55-96e9-46b44720ee64</a:t>
-            </a:r>
-          </a:p>
-          <a:p xmlns:a="http://schemas.openxmlformats.org/drawingml/2006/main">
-            <a:r>
               <a:t>https://csrc.nist.gov/pubs/sp/800/218/final</a:t>
             </a:r>
           </a:p>
           <a:p xmlns:a="http://schemas.openxmlformats.org/drawingml/2006/main">
             <a:r>
-              <a:t>https://github.com/hse-rbpo-master-2026/course/blob/5ce5fdf4ba4bb32ac62d1b9c6728f3a6d8fa6884/seminars/S02.md</a:t>
-            </a:r>
-          </a:p>
-          <a:p xmlns:a="http://schemas.openxmlformats.org/drawingml/2006/main">
-            <a:r>
-              <a:t>https://github.com/hse-rbpo-master-2026/course/blob/5ce5fdf4ba4bb32ac62d1b9c6728f3a6d8fa6884/lectures/L03.pdf</a:t>
-            </a:r>
-          </a:p>
-          <a:p xmlns:a="http://schemas.openxmlformats.org/drawingml/2006/main">
-            <a:r>
-              <a:t>https://github.com/hse-rbpo-master-2026/course/blob/5ce5fdf4ba4bb32ac62d1b9c6728f3a6d8fa6884/lectures/L04.pdf</a:t>
+              <a:t>https://github.com/rbeketov/rbpo-yavkaib/blob/main/project.md</a:t>
+            </a:r>
+          </a:p>
+          <a:p xmlns:a="http://schemas.openxmlformats.org/drawingml/2006/main">
+            <a:r>
+              <a:t>https://github.com/rbeketov/rbpo-yavkaib/blob/main/tracker/permissions.py</a:t>
+            </a:r>
+          </a:p>
+          <a:p xmlns:a="http://schemas.openxmlformats.org/drawingml/2006/main">
+            <a:r>
+              <a:t>https://github.com/rbeketov/rbpo-yavkaib/blob/main/tracker/tests.py</a:t>
+            </a:r>
+          </a:p>
+          <a:p xmlns:a="http://schemas.openxmlformats.org/drawingml/2006/main">
+            <a:r>
+              <a:t>https://github.com/OWASP/ASVS/blob/v5.0.0/5.0/en/0x17-V8-Authorization.md</a:t>
             </a:r>
           </a:p>
         </p:txBody>
@@ -920,12 +905,12 @@
           <a:lstStyle xmlns:a="http://schemas.openxmlformats.org/drawingml/2006/main"/>
           <a:p xmlns:a="http://schemas.openxmlformats.org/drawingml/2006/main">
             <a:r>
-              <a:t>Основная часть: 30 секунд. Ярослав.</a:t>
-            </a:r>
-          </a:p>
-          <a:p xmlns:a="http://schemas.openxmlformats.org/drawingml/2006/main">
-            <a:r>
-              <a:t>В исходной версии прошли 27 тестов. Результаты и версия кода сохранены. Но на дату исследования, четвёртое октября, в репозитории не было подтверждения независимой проверки вторым участником. Код и тест могут повторять одну ошибку. Поэтому первый шаг — взаимная проверка прав пользователей. Также нужно проверить библиотеки на известные уязвимости и повторить установку из архива.</a:t>
+              <a:t>Основная часть: 35 секунд. Роман.</a:t>
+            </a:r>
+          </a:p>
+          <a:p xmlns:a="http://schemas.openxmlformats.org/drawingml/2006/main">
+            <a:r>
+              <a:t>В исходной версии прошли 27 тестов и пять инженерных проверок. Результаты и версия кода сохранены. Но в срезе репозитория на четвёртое октября нет подтверждения независимой проверки партнёром. Это главный пробел G1: код и тест могут повторять одну ошибку. Его закрываем чтением кода по PW.7 и повтором сценария по PW.8. Также в плане проверка известных уязвимостей библиотек и независимый запуск архива. Эти пробелы сами по себе не доказывают наличие уязвимости.</a:t>
             </a:r>
           </a:p>
           <a:p xmlns:a="http://schemas.openxmlformats.org/drawingml/2006/main">
@@ -935,21 +920,6 @@
           </a:p>
           <a:p xmlns:a="http://schemas.openxmlformats.org/drawingml/2006/main">
             <a:r>
-              <a:t>Для вопросов:</a:t>
-            </a:r>
-          </a:p>
-          <a:p xmlns:a="http://schemas.openxmlformats.org/drawingml/2006/main">
-            <a:r>
-              <a:t>Это срез на 04.10.2026, а не утверждение о состоянии истории в любой будущий момент. G1 имеет высокий приоритет, G2 и G3 — средний. Пять инженерных проверок baseline прошли. Успех тестов не доказывает отсутствие всех уязвимостей. pip check проверяет согласованность зависимостей, но не заменяет аудит известных CVE.</a:t>
-            </a:r>
-          </a:p>
-          <a:p xmlns:a="http://schemas.openxmlformats.org/drawingml/2006/main">
-            <a:r>
-              <a:t/>
-            </a:r>
-          </a:p>
-          <a:p xmlns:a="http://schemas.openxmlformats.org/drawingml/2006/main">
-            <a:r>
               <a:t>Источники:</a:t>
             </a:r>
           </a:p>
@@ -965,7 +935,7 @@
           </a:p>
           <a:p xmlns:a="http://schemas.openxmlformats.org/drawingml/2006/main">
             <a:r>
-              <a:t>https://github.com/rbeketov/rbpo-yavkaib/blob/main/project.md</a:t>
+              <a:t>https://github.com/hse-rbpo-master-2026/course/blob/5ce5fdf4ba4bb32ac62d1b9c6728f3a6d8fa6884/lectures/L04.pdf</a:t>
             </a:r>
           </a:p>
         </p:txBody>
@@ -1035,12 +1005,12 @@
           <a:lstStyle xmlns:a="http://schemas.openxmlformats.org/drawingml/2006/main"/>
           <a:p xmlns:a="http://schemas.openxmlformats.org/drawingml/2006/main">
             <a:r>
-              <a:t>Основная часть: 50 секунд. Ярослав.</a:t>
-            </a:r>
-          </a:p>
-          <a:p xmlns:a="http://schemas.openxmlformats.org/drawingml/2006/main">
-            <a:r>
-              <a:t>Перед изменением автор описывает ожидаемое поведение, затем меняет код и запускает тесты. Партнёр читает код и независимо повторяет важный сценарий. Например, наблюдатель отправляет прямой запрос на изменение задачи. Сервер должен отказать, а данные остаться прежними. Такой же запрос от редактора должен сработать. Сохраняем версию кода, условия и результат проверки. Так мы применяем правило SSDF PW.8. Если права нарушены или партнёр не проверил изменение, откладываем его. Перед выпуском Ярослав повторяет установку из архива, Роман собирает результаты. Решение о выпуске принимаем вместе.</a:t>
+              <a:t>Основная часть: 40 секунд. Ярослав.</a:t>
+            </a:r>
+          </a:p>
+          <a:p xmlns:a="http://schemas.openxmlformats.org/drawingml/2006/main">
+            <a:r>
+              <a:t>Перед изменением автор уточняет требование и запрещённый сценарий по PO.1.2. Назначаем автора и другого проверяющего по PO.2.1. Автор запускает тесты по PW.8, партнёр читает код по PW.7 и повторяет важный случай. Результат сохраняем для конкретной версии. Перед выпуском Роман разбирает найденные проблемы по RV.2 и проверяет защиту кода по PS.1.1. Ярослав проверяет архив и повторяет установку по нашему правилу на основе PS.3.1. Решение принимаем вместе. Без проверяющего или при нарушении прав откладываем переход.</a:t>
             </a:r>
           </a:p>
           <a:p xmlns:a="http://schemas.openxmlformats.org/drawingml/2006/main">
@@ -1055,7 +1025,7 @@
           </a:p>
           <a:p xmlns:a="http://schemas.openxmlformats.org/drawingml/2006/main">
             <a:r>
-              <a:t>PW.8.1–8.2 задаёт тестирование исполняемого кода. Сценарий, независимый повтор и правило приёмки являются нашей адаптацией. Нужен контрольный разрешённый запрос от editor, чтобы отличить проверку прав от общей поломки функции. Для версии сохраняем результат CI, отчёт и комментарий проверяющего. Автор не одобряет собственную работу. Некритическое исключение требует записи, срока до семи дней и согласия обоих. Нарушение прав исключением не допускается. При споре откладываем выпуск и обращаемся к преподавателю.</a:t>
+              <a:t>Независимая установка является способом проверки комплекта в нашей адаптации PS.3.1, а не дословным требованием задачи. Некритическое исключение: запись с причиной, срок до семи дней, согласие обоих. Нарушение прав исключением не допускается. При споре откладываем выпуск и обращаемся к преподавателю. Обязательная техническая блокировка GitHub не подтверждена, поэтому это правило пары.</a:t>
             </a:r>
           </a:p>
           <a:p xmlns:a="http://schemas.openxmlformats.org/drawingml/2006/main">
@@ -1070,11 +1040,6 @@
           </a:p>
           <a:p xmlns:a="http://schemas.openxmlformats.org/drawingml/2006/main">
             <a:r>
-              <a:t>https://csrc.nist.gov/pubs/sp/800/218/final</a:t>
-            </a:r>
-          </a:p>
-          <a:p xmlns:a="http://schemas.openxmlformats.org/drawingml/2006/main">
-            <a:r>
               <a:t>https://github.com/rbeketov/rbpo-yavkaib/blob/main/project.md</a:t>
             </a:r>
           </a:p>
@@ -1085,7 +1050,7 @@
           </a:p>
           <a:p xmlns:a="http://schemas.openxmlformats.org/drawingml/2006/main">
             <a:r>
-              <a:t>https://github.com/rbeketov/rbpo-yavkaib/blob/main/tracker/tests.py</a:t>
+              <a:t>https://github.com/hse-rbpo-master-2026/course/blob/5ce5fdf4ba4bb32ac62d1b9c6728f3a6d8fa6884/lectures/L05.pdf</a:t>
             </a:r>
           </a:p>
         </p:txBody>
@@ -1155,12 +1120,12 @@
           <a:lstStyle xmlns:a="http://schemas.openxmlformats.org/drawingml/2006/main"/>
           <a:p xmlns:a="http://schemas.openxmlformats.org/drawingml/2006/main">
             <a:r>
-              <a:t>Основная часть: 40 секунд. Ярослав.</a:t>
-            </a:r>
-          </a:p>
-          <a:p xmlns:a="http://schemas.openxmlformats.org/drawingml/2006/main">
-            <a:r>
-              <a:t>Роман проверяет права трёх ролей, изоляцию проектов, библиотеки и настройки. Ярослав проверяет ввод и вывод текста, защиту запросов от подделки и установку из архива в чистом окружении. Для каждого уже есть отдельное задание в GitHub. Сначала каждый сохраняет отчёт со своими результатами, затем проверяет работу партнёра. После этого созваниваемся, обсуждаем найденные проблемы и выбираем следующее улучшение. План технических проверок на первой защите предварительный, его уточняем после профильных лекций.</a:t>
+              <a:t>Основная часть: 35 секунд. Ярослав.</a:t>
+            </a:r>
+          </a:p>
+          <a:p xmlns:a="http://schemas.openxmlformats.org/drawingml/2006/main">
+            <a:r>
+              <a:t>В плане каждое действие связано с методологией. Роман проверяет права по PO.1.2, PW.8 и ASVS V8. Для библиотек и настроек использует RV.2 и PS.1.1. Ярослав проверяет ввод и CSRF по PW.8 и ASVS, затем независимо запускает архив по нашему правилу PS.3.1. Оба читают код партнёра по PW.7 и повторяют его проверку по PW.8. Сохраняем личные отчёты, затем обсуждаем результаты на созвоне.</a:t>
             </a:r>
           </a:p>
           <a:p xmlns:a="http://schemas.openxmlformats.org/drawingml/2006/main">
@@ -1175,7 +1140,7 @@
           </a:p>
           <a:p xmlns:a="http://schemas.openxmlformats.org/drawingml/2006/main">
             <a:r>
-              <a:t>М1: права и изоляция, ведущий Роман, проверяющий Ярослав. М2: ввод, вывод и CSRF, ведущий Ярослав, проверяющий Роман. М3: зависимости и воспроизводимость, Роман ведёт аудит и конфигурацию, Ярослав независимо устанавливает архив. CSRF — подделка запроса от имени вошедшего пользователя. Issue Ярослава пока без назначения аккаунту по договорённости.</a:t>
+              <a:t>Все сокращённые коды PO/PS/PW/RV относятся к SSDF 1.1. PW.7 = PW.7.1–7.2, PW.8 = PW.8.1–8.2, RV.2 = RV.2.1–2.2. ASVS 5.0.0 для М1: 8.1.1, 8.2.1–8.2.3, 8.3.1–8.3.2. Для М2: 1.2.1, 2.1.1, 2.2.1–2.2.2, 3.5.1, 3.5.3, 3.7.2, 7.4.1. V8 — доступ, V1 — безопасный вывод, V2 — валидация, V3 — CSRF и браузер, V7 — сессии. Сканирование зависимостей даёт входные данные для RV.2; RV.2 относится к анализу риска и решению по найденной проблеме, а не предписывает конкретный сканер. PS.1.1 — защита репозитория и конфигурации; проверка всех настроек приложения не сводится к этой задаче. Полные планы обоих с практиками и результатами — docs/work-plan.md. Issue #1 назначен Роману, Issue #2 пока без назначения аккаунту. План технических средств уточняем после Л6–Л8.</a:t>
             </a:r>
           </a:p>
           <a:p xmlns:a="http://schemas.openxmlformats.org/drawingml/2006/main">
@@ -1195,17 +1160,52 @@
           </a:p>
           <a:p xmlns:a="http://schemas.openxmlformats.org/drawingml/2006/main">
             <a:r>
+              <a:t>https://github.com/rbeketov/rbpo-yavkaib/issues</a:t>
+            </a:r>
+          </a:p>
+          <a:p xmlns:a="http://schemas.openxmlformats.org/drawingml/2006/main">
+            <a:r>
+              <a:t>https://github.com/hse-rbpo-master-2026/course/blob/5ce5fdf4ba4bb32ac62d1b9c6728f3a6d8fa6884/seminars/S06.md</a:t>
+            </a:r>
+          </a:p>
+          <a:p xmlns:a="http://schemas.openxmlformats.org/drawingml/2006/main">
+            <a:r>
+              <a:t>https://csrc.nist.gov/pubs/sp/800/218/final</a:t>
+            </a:r>
+          </a:p>
+          <a:p xmlns:a="http://schemas.openxmlformats.org/drawingml/2006/main">
+            <a:r>
+              <a:t>https://github.com/OWASP/ASVS/blob/v5.0.0/5.0/en/0x17-V8-Authorization.md</a:t>
+            </a:r>
+          </a:p>
+          <a:p xmlns:a="http://schemas.openxmlformats.org/drawingml/2006/main">
+            <a:r>
+              <a:t>https://github.com/OWASP/ASVS/blob/v5.0.0/5.0/en/0x10-V1-Encoding-and-Sanitization.md</a:t>
+            </a:r>
+          </a:p>
+          <a:p xmlns:a="http://schemas.openxmlformats.org/drawingml/2006/main">
+            <a:r>
+              <a:t>https://github.com/OWASP/ASVS/blob/v5.0.0/5.0/en/0x11-V2-Validation-and-Business-Logic.md</a:t>
+            </a:r>
+          </a:p>
+          <a:p xmlns:a="http://schemas.openxmlformats.org/drawingml/2006/main">
+            <a:r>
+              <a:t>https://github.com/OWASP/ASVS/blob/v5.0.0/5.0/en/0x12-V3-Web-Frontend-Security.md</a:t>
+            </a:r>
+          </a:p>
+          <a:p xmlns:a="http://schemas.openxmlformats.org/drawingml/2006/main">
+            <a:r>
+              <a:t>https://github.com/OWASP/ASVS/blob/v5.0.0/5.0/en/0x16-V7-Session-Management.md</a:t>
+            </a:r>
+          </a:p>
+          <a:p xmlns:a="http://schemas.openxmlformats.org/drawingml/2006/main">
+            <a:r>
               <a:t>https://github.com/rbeketov/rbpo-yavkaib/issues/1</a:t>
             </a:r>
           </a:p>
           <a:p xmlns:a="http://schemas.openxmlformats.org/drawingml/2006/main">
             <a:r>
               <a:t>https://github.com/rbeketov/rbpo-yavkaib/issues/2</a:t>
-            </a:r>
-          </a:p>
-          <a:p xmlns:a="http://schemas.openxmlformats.org/drawingml/2006/main">
-            <a:r>
-              <a:t>https://github.com/hse-rbpo-master-2026/course/blob/5ce5fdf4ba4bb32ac62d1b9c6728f3a6d8fa6884/seminars/S06.md</a:t>
             </a:r>
           </a:p>
         </p:txBody>
@@ -1280,7 +1280,7 @@
           </a:p>
           <a:p xmlns:a="http://schemas.openxmlformats.org/drawingml/2006/main">
             <a:r>
-              <a:t>ISO/IEC 27034-1 рассмотрели из-за управления безопасностью приложений на уровне организации. В нашей паре нет отдельной организационной задачи, ради которой стоит брать его основой. IEC 62443-4-1 связан с промышленной автоматизацией, TaskFlow находится вне этой области. BSIMM описывает наблюдаемые практики организаций. Сравнение с ними сейчас не является целью проекта.</a:t>
+              <a:t>Это семь выбранных групп задач SSDF, адаптированных к TaskFlow. В паспорте для каждой указаны действие, участник, результат и условие принятия. В личных планах эти же коды стоят рядом с работой Романа и Ярослава. ASVS дополняет их требованиями к конкретному поведению приложения.</a:t>
             </a:r>
           </a:p>
           <a:p xmlns:a="http://schemas.openxmlformats.org/drawingml/2006/main">
@@ -1295,7 +1295,7 @@
           </a:p>
           <a:p xmlns:a="http://schemas.openxmlformats.org/drawingml/2006/main">
             <a:r>
-              <a:t>ISO и IEC сопоставлены по назначению и области, а не по полному постатейному аудиту. Карточки стандартов не заменяют их полные тексты. На Л04 BSIMM сопоставляется с SAMM как описательная модель с предписывающей. Размер команды сам по себе не делает ISO/IEC 27034 неприменимым.</a:t>
+              <a:t>PS.3.1 касается сохранения файлов выпуска и сопроводительных данных. Независимую установку добавляем как способ проверки нашего комплекта. RV.2.1–2.2 — анализ риска и план реакции на проблему; повторный тест после исправления связываем с PW.8. Номера слайдов не заменяют точные пункты паспорта и первоисточника.</a:t>
             </a:r>
           </a:p>
           <a:p xmlns:a="http://schemas.openxmlformats.org/drawingml/2006/main">
@@ -1310,27 +1310,17 @@
           </a:p>
           <a:p xmlns:a="http://schemas.openxmlformats.org/drawingml/2006/main">
             <a:r>
-              <a:t>https://www.iso.org/standard/44378.html</a:t>
-            </a:r>
-          </a:p>
-          <a:p xmlns:a="http://schemas.openxmlformats.org/drawingml/2006/main">
-            <a:r>
-              <a:t>https://webstore.iec.ch/en/publication/33615</a:t>
-            </a:r>
-          </a:p>
-          <a:p xmlns:a="http://schemas.openxmlformats.org/drawingml/2006/main">
-            <a:r>
-              <a:t>https://github.com/hse-rbpo-master-2026/course/blob/5ce5fdf4ba4bb32ac62d1b9c6728f3a6d8fa6884/lectures/L03.pdf</a:t>
-            </a:r>
-          </a:p>
-          <a:p xmlns:a="http://schemas.openxmlformats.org/drawingml/2006/main">
-            <a:r>
-              <a:t>https://github.com/hse-rbpo-master-2026/course/blob/5ce5fdf4ba4bb32ac62d1b9c6728f3a6d8fa6884/lectures/L04.pdf</a:t>
-            </a:r>
-          </a:p>
-          <a:p xmlns:a="http://schemas.openxmlformats.org/drawingml/2006/main">
-            <a:r>
-              <a:t>https://github.com/rbeketov/rbpo-yavkaib/blob/main/docs/methodology-options.md</a:t>
+              <a:t>https://csrc.nist.gov/pubs/sp/800/218/final</a:t>
+            </a:r>
+          </a:p>
+          <a:p xmlns:a="http://schemas.openxmlformats.org/drawingml/2006/main">
+            <a:r>
+              <a:t>https://github.com/OWASP/ASVS/tree/v5.0.0</a:t>
+            </a:r>
+          </a:p>
+          <a:p xmlns:a="http://schemas.openxmlformats.org/drawingml/2006/main">
+            <a:r>
+              <a:t>https://github.com/rbeketov/rbpo-yavkaib/blob/main/project.md</a:t>
             </a:r>
           </a:p>
         </p:txBody>
@@ -1405,22 +1395,7 @@
           </a:p>
           <a:p xmlns:a="http://schemas.openxmlformats.org/drawingml/2006/main">
             <a:r>
-              <a:t>Использовали Codex для подготовки текста, кода, тестов и слайдов, а также для предложений по методологии и плану. Выбор продукта и варианта A сделал участник команды. Ответственность за решения остаётся у участников. Проверки с помощью ИИ не выдаём за независимую проверку человеком.</a:t>
-            </a:r>
-          </a:p>
-          <a:p xmlns:a="http://schemas.openxmlformats.org/drawingml/2006/main">
-            <a:r>
-              <a:t/>
-            </a:r>
-          </a:p>
-          <a:p xmlns:a="http://schemas.openxmlformats.org/drawingml/2006/main">
-            <a:r>
-              <a:t>Для вопросов:</a:t>
-            </a:r>
-          </a:p>
-          <a:p xmlns:a="http://schemas.openxmlformats.org/drawingml/2006/main">
-            <a:r>
-              <a:t>Подробное раскрытие применения ИИ находится в §12 паспорта. Изображение обложки сгенерировано OpenAI ImageGen. Проверка партнёром и совместное решение о выпуске на слайде описывают целевой порядок работы, а не утверждение о уже завершённых действиях.</a:t>
+              <a:t>Использовали Codex для автоматизации подготовки текстов, кода, тестов и оформления, а также для вариантов методологии и плана. Выбор TaskFlow и варианта A сделан участником команды. Ответственность за решения и их объяснение остаётся у участников. Проверки средствами Codex сохранены отдельно и не выдаются за независимое человеческое review. Источники — публичный курс и учебный проект, данные для приложения синтетические. Подробности в разделе двенадцать паспорта.</a:t>
             </a:r>
           </a:p>
           <a:p xmlns:a="http://schemas.openxmlformats.org/drawingml/2006/main">
@@ -1508,7 +1483,7 @@
   </p:cSld>
   <p:clrMap bg1="lt1" tx1="dk1" bg2="lt2" tx2="dk2" accent1="accent1" accent2="accent2" accent3="accent3" accent4="accent4" accent5="accent5" accent6="accent6" hlink="hlink" folHlink="folHlink"/>
   <p:sldLayoutIdLst>
-    <p:sldLayoutId xmlns:r="http://schemas.openxmlformats.org/officeDocument/2006/relationships" id="2147483649" r:id="R6e5b5d390bfd49d7"/>
+    <p:sldLayoutId xmlns:r="http://schemas.openxmlformats.org/officeDocument/2006/relationships" id="2147483649" r:id="R665cc7a5477c409a"/>
   </p:sldLayoutIdLst>
   <p:txStyles>
     <p:titleStyle>
@@ -2063,7 +2038,7 @@
           <p:nvPr/>
         </p:nvPicPr>
         <p:blipFill>
-          <a:blip xmlns:r="http://schemas.openxmlformats.org/officeDocument/2006/relationships" xmlns:a="http://schemas.openxmlformats.org/drawingml/2006/main" r:embed="R45c287352e9a4218"/>
+          <a:blip xmlns:r="http://schemas.openxmlformats.org/officeDocument/2006/relationships" xmlns:a="http://schemas.openxmlformats.org/drawingml/2006/main" r:embed="Rff2e57c791214e74"/>
           <a:srcRect xmlns:a="http://schemas.openxmlformats.org/drawingml/2006/main" l="0" t="27" r="0" b="27"/>
           <a:stretch xmlns:a="http://schemas.openxmlformats.org/drawingml/2006/main">
             <a:fillRect l="0" t="0" r="0" b="0"/>
@@ -2248,7 +2223,31 @@
                 <a:ea typeface="Helvetica Neue"/>
                 <a:cs typeface="Helvetica Neue"/>
               </a:rPr>
-              <a:t>Безопасная разработка</a:t>
+              <a:t>Концепция безопасной</a:t>
+            </a:r>
+          </a:p>
+          <a:p xmlns:a="http://schemas.openxmlformats.org/drawingml/2006/main">
+            <a:pPr>
+              <a:buNone/>
+              <a:defRPr sz="2850" b="0">
+                <a:solidFill>
+                  <a:srgbClr val="F2F5F0"/>
+                </a:solidFill>
+                <a:latin typeface="Helvetica Neue"/>
+                <a:ea typeface="Helvetica Neue"/>
+                <a:cs typeface="Helvetica Neue"/>
+              </a:defRPr>
+            </a:pPr>
+            <a:r>
+              <a:rPr sz="2850" b="0">
+                <a:solidFill>
+                  <a:srgbClr val="F2F5F0"/>
+                </a:solidFill>
+                <a:latin typeface="Helvetica Neue"/>
+                <a:ea typeface="Helvetica Neue"/>
+                <a:cs typeface="Helvetica Neue"/>
+              </a:rPr>
+              <a:t>разработки</a:t>
             </a:r>
           </a:p>
           <a:p xmlns:a="http://schemas.openxmlformats.org/drawingml/2006/main">
@@ -2557,7 +2556,7 @@
                 <a:ea typeface="Helvetica Neue"/>
                 <a:cs typeface="Helvetica Neue"/>
               </a:rPr>
-              <a:t>TaskFlow и три роли</a:t>
+              <a:t>Продукт и границы</a:t>
             </a:r>
           </a:p>
         </p:txBody>
@@ -2687,7 +2686,7 @@
           <p:nvPr/>
         </p:nvPicPr>
         <p:blipFill>
-          <a:blip xmlns:r="http://schemas.openxmlformats.org/officeDocument/2006/relationships" xmlns:a="http://schemas.openxmlformats.org/drawingml/2006/main" r:embed="R00259ca12bd84432"/>
+          <a:blip xmlns:r="http://schemas.openxmlformats.org/officeDocument/2006/relationships" xmlns:a="http://schemas.openxmlformats.org/drawingml/2006/main" r:embed="R3798f556b7e14e48"/>
           <a:stretch xmlns:a="http://schemas.openxmlformats.org/drawingml/2006/main"/>
         </p:blipFill>
         <p:spPr>
@@ -3451,10 +3450,10 @@
       </p:sp>
       <p:sp>
         <p:nvSpPr>
-          <p:cNvPr id="9" name="">
+          <p:cNvPr id="5" name="">
             <a:extLst xmlns:a="http://schemas.openxmlformats.org/drawingml/2006/main">
               <a:ext uri="{FF2B5EF4-FFF2-40B4-BE49-F238E27FC236}">
-                <a16:creationId xmlns:a16="http://schemas.microsoft.com/office/drawing/2014/main" id="{91E82C49-F9B7-4AB0-A775-E3C5577B16CD}"/>
+                <a16:creationId xmlns:a16="http://schemas.microsoft.com/office/drawing/2014/main" id="{ACE9C80F-CB2E-4C90-9CAF-DDE05F6EA728}"/>
               </a:ext>
             </a:extLst>
           </p:cNvPr>
@@ -3465,8 +3464,8 @@
         </p:nvSpPr>
         <p:spPr>
           <a:xfrm xmlns:a="http://schemas.openxmlformats.org/drawingml/2006/main">
-            <a:off x="609600" y="1952625"/>
-            <a:ext cx="5095875" cy="495300"/>
+            <a:off x="609600" y="1809750"/>
+            <a:ext cx="10972800" cy="714375"/>
           </a:xfrm>
           <a:prstGeom xmlns:a="http://schemas.openxmlformats.org/drawingml/2006/main" prst="rect">
             <a:avLst/>
@@ -3483,7 +3482,8 @@
           <a:lstStyle xmlns:a="http://schemas.openxmlformats.org/drawingml/2006/main"/>
           <a:p xmlns:a="http://schemas.openxmlformats.org/drawingml/2006/main">
             <a:pPr>
-              <a:defRPr sz="2850" b="1">
+              <a:buNone/>
+              <a:defRPr sz="2250" b="1">
                 <a:solidFill>
                   <a:srgbClr val="26756C"/>
                 </a:solidFill>
@@ -3493,7 +3493,7 @@
               </a:defRPr>
             </a:pPr>
             <a:r>
-              <a:rPr sz="2850" b="1">
+              <a:rPr sz="2250" b="1">
                 <a:solidFill>
                   <a:srgbClr val="26756C"/>
                 </a:solidFill>
@@ -3501,17 +3501,17 @@
                 <a:ea typeface="Helvetica Neue"/>
                 <a:cs typeface="Helvetica Neue"/>
               </a:rPr>
-              <a:t>SSDF 1.1</a:t>
-            </a:r>
-          </a:p>
-        </p:txBody>
-      </p:sp>
-      <p:sp>
-        <p:nvSpPr>
-          <p:cNvPr id="10" name="">
+              <a:t>SSDF 1.1 задаёт порядок работы. ASVS 5.0.0 уточняет веб-проверки.</a:t>
+            </a:r>
+          </a:p>
+        </p:txBody>
+      </p:sp>
+      <p:sp>
+        <p:nvSpPr>
+          <p:cNvPr id="7" name="">
             <a:extLst xmlns:a="http://schemas.openxmlformats.org/drawingml/2006/main">
               <a:ext uri="{FF2B5EF4-FFF2-40B4-BE49-F238E27FC236}">
-                <a16:creationId xmlns:a16="http://schemas.microsoft.com/office/drawing/2014/main" id="{CFE112CA-F979-42F0-98F4-79CB90858A78}"/>
+                <a16:creationId xmlns:a16="http://schemas.microsoft.com/office/drawing/2014/main" id="{E84E6F0E-8655-43FF-974B-6E4533BEC21F}"/>
               </a:ext>
             </a:extLst>
           </p:cNvPr>
@@ -3522,8 +3522,8 @@
         </p:nvSpPr>
         <p:spPr>
           <a:xfrm xmlns:a="http://schemas.openxmlformats.org/drawingml/2006/main">
-            <a:off x="609600" y="2600325"/>
-            <a:ext cx="5143500" cy="762000"/>
+            <a:off x="609600" y="5572125"/>
+            <a:ext cx="10972800" cy="685800"/>
           </a:xfrm>
           <a:prstGeom xmlns:a="http://schemas.openxmlformats.org/drawingml/2006/main" prst="rect">
             <a:avLst/>
@@ -3540,7 +3540,8 @@
           <a:lstStyle xmlns:a="http://schemas.openxmlformats.org/drawingml/2006/main"/>
           <a:p xmlns:a="http://schemas.openxmlformats.org/drawingml/2006/main">
             <a:pPr>
-              <a:defRPr sz="2400" b="1">
+              <a:buNone/>
+              <a:defRPr sz="1875" b="0">
                 <a:solidFill>
                   <a:srgbClr val="102A30"/>
                 </a:solidFill>
@@ -3550,7 +3551,7 @@
               </a:defRPr>
             </a:pPr>
             <a:r>
-              <a:rPr sz="2400" b="1">
+              <a:rPr sz="1875" b="0">
                 <a:solidFill>
                   <a:srgbClr val="102A30"/>
                 </a:solidFill>
@@ -3558,46 +3559,13 @@
                 <a:ea typeface="Helvetica Neue"/>
                 <a:cs typeface="Helvetica Neue"/>
               </a:rPr>
-              <a:t>Как организуем разработку</a:t>
-            </a:r>
-          </a:p>
-        </p:txBody>
-      </p:sp>
-      <p:sp>
-        <p:nvSpPr>
-          <p:cNvPr id="11" name="">
-            <a:extLst xmlns:a="http://schemas.openxmlformats.org/drawingml/2006/main">
-              <a:ext uri="{FF2B5EF4-FFF2-40B4-BE49-F238E27FC236}">
-                <a16:creationId xmlns:a16="http://schemas.microsoft.com/office/drawing/2014/main" id="{EC210CF2-132F-4AD7-8627-43A481324872}"/>
-              </a:ext>
-            </a:extLst>
-          </p:cNvPr>
-          <p:cNvSpPr>
-            <a:spLocks xmlns:a="http://schemas.openxmlformats.org/drawingml/2006/main" noGrp="1"/>
-          </p:cNvSpPr>
-          <p:nvPr/>
-        </p:nvSpPr>
-        <p:spPr>
-          <a:xfrm xmlns:a="http://schemas.openxmlformats.org/drawingml/2006/main">
-            <a:off x="609600" y="3448050"/>
-            <a:ext cx="5162550" cy="1857375"/>
-          </a:xfrm>
-          <a:prstGeom xmlns:a="http://schemas.openxmlformats.org/drawingml/2006/main" prst="rect">
-            <a:avLst/>
-          </a:prstGeom>
-          <a:noFill xmlns:a="http://schemas.openxmlformats.org/drawingml/2006/main"/>
-          <a:ln xmlns:a="http://schemas.openxmlformats.org/drawingml/2006/main" w="0">
-            <a:noFill/>
-          </a:ln>
-        </p:spPr>
-        <p:txBody>
-          <a:bodyPr xmlns:a="http://schemas.openxmlformats.org/drawingml/2006/main">
-            <a:noAutofit/>
-          </a:bodyPr>
-          <a:lstStyle xmlns:a="http://schemas.openxmlformats.org/drawingml/2006/main"/>
+              <a:t>SSDF охватывает весь путь разработки, полный текст открыт.</a:t>
+            </a:r>
+          </a:p>
           <a:p xmlns:a="http://schemas.openxmlformats.org/drawingml/2006/main">
             <a:pPr>
-              <a:defRPr sz="2100" b="0">
+              <a:buNone/>
+              <a:defRPr sz="1875" b="0">
                 <a:solidFill>
                   <a:srgbClr val="102A30"/>
                 </a:solidFill>
@@ -3607,7 +3575,7 @@
               </a:defRPr>
             </a:pPr>
             <a:r>
-              <a:rPr sz="2100" b="0">
+              <a:rPr sz="1875" b="0">
                 <a:solidFill>
                   <a:srgbClr val="102A30"/>
                 </a:solidFill>
@@ -3615,3637 +3583,31 @@
                 <a:ea typeface="Helvetica Neue"/>
                 <a:cs typeface="Helvetica Neue"/>
               </a:rPr>
-              <a:t>Охватывает работу от требований</a:t>
-            </a:r>
-          </a:p>
-          <a:p xmlns:a="http://schemas.openxmlformats.org/drawingml/2006/main">
-            <a:pPr>
-              <a:defRPr sz="2100" b="0">
-                <a:solidFill>
-                  <a:srgbClr val="102A30"/>
-                </a:solidFill>
-                <a:latin typeface="Helvetica Neue"/>
-                <a:ea typeface="Helvetica Neue"/>
-                <a:cs typeface="Helvetica Neue"/>
-              </a:defRPr>
-            </a:pPr>
-            <a:r>
-              <a:rPr sz="2100" b="0">
-                <a:solidFill>
-                  <a:srgbClr val="102A30"/>
-                </a:solidFill>
-                <a:latin typeface="Helvetica Neue"/>
-                <a:ea typeface="Helvetica Neue"/>
-                <a:cs typeface="Helvetica Neue"/>
-              </a:rPr>
-              <a:t>до выпуска и исправлений.</a:t>
-            </a:r>
-          </a:p>
-          <a:p xmlns:a="http://schemas.openxmlformats.org/drawingml/2006/main">
-            <a:r>
-              <a:t/>
-            </a:r>
-          </a:p>
-          <a:p xmlns:a="http://schemas.openxmlformats.org/drawingml/2006/main">
-            <a:pPr>
-              <a:defRPr sz="2100" b="0">
-                <a:solidFill>
-                  <a:srgbClr val="102A30"/>
-                </a:solidFill>
-                <a:latin typeface="Helvetica Neue"/>
-                <a:ea typeface="Helvetica Neue"/>
-                <a:cs typeface="Helvetica Neue"/>
-              </a:defRPr>
-            </a:pPr>
-            <a:r>
-              <a:rPr sz="2100" b="0">
-                <a:solidFill>
-                  <a:srgbClr val="102A30"/>
-                </a:solidFill>
-                <a:latin typeface="Helvetica Neue"/>
-                <a:ea typeface="Helvetica Neue"/>
-                <a:cs typeface="Helvetica Neue"/>
-              </a:rPr>
-              <a:t>Выбрали 7 правил для двух человек.</a:t>
-            </a:r>
-          </a:p>
-          <a:p xmlns:a="http://schemas.openxmlformats.org/drawingml/2006/main">
-            <a:pPr>
-              <a:defRPr sz="2100" b="0">
-                <a:solidFill>
-                  <a:srgbClr val="102A30"/>
-                </a:solidFill>
-                <a:latin typeface="Helvetica Neue"/>
-                <a:ea typeface="Helvetica Neue"/>
-                <a:cs typeface="Helvetica Neue"/>
-              </a:defRPr>
-            </a:pPr>
-            <a:r>
-              <a:rPr sz="2100" b="0">
-                <a:solidFill>
-                  <a:srgbClr val="102A30"/>
-                </a:solidFill>
-                <a:latin typeface="Helvetica Neue"/>
-                <a:ea typeface="Helvetica Neue"/>
-                <a:cs typeface="Helvetica Neue"/>
-              </a:rPr>
-              <a:t>Полный текст доступен открыто.</a:t>
-            </a:r>
-          </a:p>
-        </p:txBody>
-      </p:sp>
-      <p:sp>
-        <p:nvSpPr>
-          <p:cNvPr id="12" name="">
-            <a:extLst xmlns:a="http://schemas.openxmlformats.org/drawingml/2006/main">
-              <a:ext uri="{FF2B5EF4-FFF2-40B4-BE49-F238E27FC236}">
-                <a16:creationId xmlns:a16="http://schemas.microsoft.com/office/drawing/2014/main" id="{F31D05F6-E9E3-4F14-8A81-6C09014D2DF4}"/>
-              </a:ext>
-            </a:extLst>
-          </p:cNvPr>
-          <p:cNvSpPr>
-            <a:spLocks xmlns:a="http://schemas.openxmlformats.org/drawingml/2006/main" noGrp="1"/>
-          </p:cNvSpPr>
-          <p:nvPr/>
-        </p:nvSpPr>
-        <p:spPr>
-          <a:xfrm xmlns:a="http://schemas.openxmlformats.org/drawingml/2006/main">
-            <a:off x="6324600" y="1952625"/>
-            <a:ext cx="5238750" cy="495300"/>
-          </a:xfrm>
-          <a:prstGeom xmlns:a="http://schemas.openxmlformats.org/drawingml/2006/main" prst="rect">
-            <a:avLst/>
-          </a:prstGeom>
-          <a:noFill xmlns:a="http://schemas.openxmlformats.org/drawingml/2006/main"/>
-          <a:ln xmlns:a="http://schemas.openxmlformats.org/drawingml/2006/main" w="0">
-            <a:noFill/>
-          </a:ln>
-        </p:spPr>
-        <p:txBody>
-          <a:bodyPr xmlns:a="http://schemas.openxmlformats.org/drawingml/2006/main">
-            <a:noAutofit/>
-          </a:bodyPr>
-          <a:lstStyle xmlns:a="http://schemas.openxmlformats.org/drawingml/2006/main"/>
-          <a:p xmlns:a="http://schemas.openxmlformats.org/drawingml/2006/main">
-            <a:pPr>
-              <a:defRPr sz="2850" b="1">
-                <a:solidFill>
-                  <a:srgbClr val="26756C"/>
-                </a:solidFill>
-                <a:latin typeface="Helvetica Neue"/>
-                <a:ea typeface="Helvetica Neue"/>
-                <a:cs typeface="Helvetica Neue"/>
-              </a:defRPr>
-            </a:pPr>
-            <a:r>
-              <a:rPr sz="2850" b="1">
-                <a:solidFill>
-                  <a:srgbClr val="26756C"/>
-                </a:solidFill>
-                <a:latin typeface="Helvetica Neue"/>
-                <a:ea typeface="Helvetica Neue"/>
-                <a:cs typeface="Helvetica Neue"/>
-              </a:rPr>
-              <a:t>ASVS 5.0.0</a:t>
-            </a:r>
-          </a:p>
-        </p:txBody>
-      </p:sp>
-      <p:sp>
-        <p:nvSpPr>
-          <p:cNvPr id="13" name="">
-            <a:extLst xmlns:a="http://schemas.openxmlformats.org/drawingml/2006/main">
-              <a:ext uri="{FF2B5EF4-FFF2-40B4-BE49-F238E27FC236}">
-                <a16:creationId xmlns:a16="http://schemas.microsoft.com/office/drawing/2014/main" id="{6BE650CD-1C1C-495E-9968-F63818679045}"/>
-              </a:ext>
-            </a:extLst>
-          </p:cNvPr>
-          <p:cNvSpPr>
-            <a:spLocks xmlns:a="http://schemas.openxmlformats.org/drawingml/2006/main" noGrp="1"/>
-          </p:cNvSpPr>
-          <p:nvPr/>
-        </p:nvSpPr>
-        <p:spPr>
-          <a:xfrm xmlns:a="http://schemas.openxmlformats.org/drawingml/2006/main">
-            <a:off x="6324600" y="2600325"/>
-            <a:ext cx="5238750" cy="762000"/>
-          </a:xfrm>
-          <a:prstGeom xmlns:a="http://schemas.openxmlformats.org/drawingml/2006/main" prst="rect">
-            <a:avLst/>
-          </a:prstGeom>
-          <a:noFill xmlns:a="http://schemas.openxmlformats.org/drawingml/2006/main"/>
-          <a:ln xmlns:a="http://schemas.openxmlformats.org/drawingml/2006/main" w="0">
-            <a:noFill/>
-          </a:ln>
-        </p:spPr>
-        <p:txBody>
-          <a:bodyPr xmlns:a="http://schemas.openxmlformats.org/drawingml/2006/main">
-            <a:noAutofit/>
-          </a:bodyPr>
-          <a:lstStyle xmlns:a="http://schemas.openxmlformats.org/drawingml/2006/main"/>
-          <a:p xmlns:a="http://schemas.openxmlformats.org/drawingml/2006/main">
-            <a:pPr>
-              <a:defRPr sz="2400" b="1">
-                <a:solidFill>
-                  <a:srgbClr val="102A30"/>
-                </a:solidFill>
-                <a:latin typeface="Helvetica Neue"/>
-                <a:ea typeface="Helvetica Neue"/>
-                <a:cs typeface="Helvetica Neue"/>
-              </a:defRPr>
-            </a:pPr>
-            <a:r>
-              <a:rPr sz="2400" b="1">
-                <a:solidFill>
-                  <a:srgbClr val="102A30"/>
-                </a:solidFill>
-                <a:latin typeface="Helvetica Neue"/>
-                <a:ea typeface="Helvetica Neue"/>
-                <a:cs typeface="Helvetica Neue"/>
-              </a:rPr>
-              <a:t>Что проверяем в приложении</a:t>
-            </a:r>
-          </a:p>
-        </p:txBody>
-      </p:sp>
-      <p:sp>
-        <p:nvSpPr>
-          <p:cNvPr id="14" name="">
-            <a:extLst xmlns:a="http://schemas.openxmlformats.org/drawingml/2006/main">
-              <a:ext uri="{FF2B5EF4-FFF2-40B4-BE49-F238E27FC236}">
-                <a16:creationId xmlns:a16="http://schemas.microsoft.com/office/drawing/2014/main" id="{C8A611CC-FA83-44E1-BDCD-7921A27C1606}"/>
-              </a:ext>
-            </a:extLst>
-          </p:cNvPr>
-          <p:cNvSpPr>
-            <a:spLocks xmlns:a="http://schemas.openxmlformats.org/drawingml/2006/main" noGrp="1"/>
-          </p:cNvSpPr>
-          <p:nvPr/>
-        </p:nvSpPr>
-        <p:spPr>
-          <a:xfrm xmlns:a="http://schemas.openxmlformats.org/drawingml/2006/main">
-            <a:off x="6324600" y="3448050"/>
-            <a:ext cx="5238750" cy="1857375"/>
-          </a:xfrm>
-          <a:prstGeom xmlns:a="http://schemas.openxmlformats.org/drawingml/2006/main" prst="rect">
-            <a:avLst/>
-          </a:prstGeom>
-          <a:noFill xmlns:a="http://schemas.openxmlformats.org/drawingml/2006/main"/>
-          <a:ln xmlns:a="http://schemas.openxmlformats.org/drawingml/2006/main" w="0">
-            <a:noFill/>
-          </a:ln>
-        </p:spPr>
-        <p:txBody>
-          <a:bodyPr xmlns:a="http://schemas.openxmlformats.org/drawingml/2006/main">
-            <a:noAutofit/>
-          </a:bodyPr>
-          <a:lstStyle xmlns:a="http://schemas.openxmlformats.org/drawingml/2006/main"/>
-          <a:p xmlns:a="http://schemas.openxmlformats.org/drawingml/2006/main">
-            <a:pPr>
-              <a:defRPr sz="2100" b="0">
-                <a:solidFill>
-                  <a:srgbClr val="102A30"/>
-                </a:solidFill>
-                <a:latin typeface="Helvetica Neue"/>
-                <a:ea typeface="Helvetica Neue"/>
-                <a:cs typeface="Helvetica Neue"/>
-              </a:defRPr>
-            </a:pPr>
-            <a:r>
-              <a:rPr sz="2100" b="0">
-                <a:solidFill>
-                  <a:srgbClr val="102A30"/>
-                </a:solidFill>
-                <a:latin typeface="Helvetica Neue"/>
-                <a:ea typeface="Helvetica Neue"/>
-                <a:cs typeface="Helvetica Neue"/>
-              </a:rPr>
-              <a:t>Даёт конкретные требования</a:t>
-            </a:r>
-          </a:p>
-          <a:p xmlns:a="http://schemas.openxmlformats.org/drawingml/2006/main">
-            <a:pPr>
-              <a:defRPr sz="2100" b="0">
-                <a:solidFill>
-                  <a:srgbClr val="102A30"/>
-                </a:solidFill>
-                <a:latin typeface="Helvetica Neue"/>
-                <a:ea typeface="Helvetica Neue"/>
-                <a:cs typeface="Helvetica Neue"/>
-              </a:defRPr>
-            </a:pPr>
-            <a:r>
-              <a:rPr sz="2100" b="0">
-                <a:solidFill>
-                  <a:srgbClr val="102A30"/>
-                </a:solidFill>
-                <a:latin typeface="Helvetica Neue"/>
-                <a:ea typeface="Helvetica Neue"/>
-                <a:cs typeface="Helvetica Neue"/>
-              </a:rPr>
-              <a:t>к безопасности веб-приложений.</a:t>
-            </a:r>
-          </a:p>
-          <a:p xmlns:a="http://schemas.openxmlformats.org/drawingml/2006/main">
-            <a:r>
-              <a:t/>
-            </a:r>
-          </a:p>
-          <a:p xmlns:a="http://schemas.openxmlformats.org/drawingml/2006/main">
-            <a:pPr>
-              <a:defRPr sz="2100" b="0">
-                <a:solidFill>
-                  <a:srgbClr val="102A30"/>
-                </a:solidFill>
-                <a:latin typeface="Helvetica Neue"/>
-                <a:ea typeface="Helvetica Neue"/>
-                <a:cs typeface="Helvetica Neue"/>
-              </a:defRPr>
-            </a:pPr>
-            <a:r>
-              <a:rPr sz="2100" b="0">
-                <a:solidFill>
-                  <a:srgbClr val="102A30"/>
-                </a:solidFill>
-                <a:latin typeface="Helvetica Neue"/>
-                <a:ea typeface="Helvetica Neue"/>
-                <a:cs typeface="Helvetica Neue"/>
-              </a:rPr>
-              <a:t>Уточняет проверки прав доступа,</a:t>
-            </a:r>
-          </a:p>
-          <a:p xmlns:a="http://schemas.openxmlformats.org/drawingml/2006/main">
-            <a:pPr>
-              <a:defRPr sz="2100" b="0">
-                <a:solidFill>
-                  <a:srgbClr val="102A30"/>
-                </a:solidFill>
-                <a:latin typeface="Helvetica Neue"/>
-                <a:ea typeface="Helvetica Neue"/>
-                <a:cs typeface="Helvetica Neue"/>
-              </a:defRPr>
-            </a:pPr>
-            <a:r>
-              <a:rPr sz="2100" b="0">
-                <a:solidFill>
-                  <a:srgbClr val="102A30"/>
-                </a:solidFill>
-                <a:latin typeface="Helvetica Neue"/>
-                <a:ea typeface="Helvetica Neue"/>
-                <a:cs typeface="Helvetica Neue"/>
-              </a:rPr>
-              <a:t>входа и обработки текста.</a:t>
-            </a:r>
-          </a:p>
-        </p:txBody>
-      </p:sp>
-      <p:sp>
-        <p:nvSpPr>
-          <p:cNvPr id="15" name="">
-            <a:extLst xmlns:a="http://schemas.openxmlformats.org/drawingml/2006/main">
-              <a:ext uri="{FF2B5EF4-FFF2-40B4-BE49-F238E27FC236}">
-                <a16:creationId xmlns:a16="http://schemas.microsoft.com/office/drawing/2014/main" id="{6CF7E8AF-0587-4A51-A141-FF6EAE8A5F21}"/>
-              </a:ext>
-            </a:extLst>
-          </p:cNvPr>
-          <p:cNvSpPr>
-            <a:spLocks xmlns:a="http://schemas.openxmlformats.org/drawingml/2006/main" noGrp="1"/>
-          </p:cNvSpPr>
-          <p:nvPr/>
-        </p:nvSpPr>
-        <p:spPr>
-          <a:xfrm xmlns:a="http://schemas.openxmlformats.org/drawingml/2006/main">
-            <a:off x="609600" y="5629275"/>
-            <a:ext cx="10972800" cy="628650"/>
-          </a:xfrm>
-          <a:prstGeom xmlns:a="http://schemas.openxmlformats.org/drawingml/2006/main" prst="rect">
-            <a:avLst/>
-          </a:prstGeom>
-          <a:noFill xmlns:a="http://schemas.openxmlformats.org/drawingml/2006/main"/>
-          <a:ln xmlns:a="http://schemas.openxmlformats.org/drawingml/2006/main" w="0">
-            <a:noFill/>
-          </a:ln>
-        </p:spPr>
-        <p:txBody>
-          <a:bodyPr xmlns:a="http://schemas.openxmlformats.org/drawingml/2006/main">
-            <a:noAutofit/>
-          </a:bodyPr>
-          <a:lstStyle xmlns:a="http://schemas.openxmlformats.org/drawingml/2006/main"/>
-          <a:p xmlns:a="http://schemas.openxmlformats.org/drawingml/2006/main">
-            <a:pPr>
-              <a:defRPr sz="2100" b="1">
-                <a:solidFill>
-                  <a:srgbClr val="26756C"/>
-                </a:solidFill>
-                <a:latin typeface="Helvetica Neue"/>
-                <a:ea typeface="Helvetica Neue"/>
-                <a:cs typeface="Helvetica Neue"/>
-              </a:defRPr>
-            </a:pPr>
-            <a:r>
-              <a:rPr sz="2100" b="1">
-                <a:solidFill>
-                  <a:srgbClr val="26756C"/>
-                </a:solidFill>
-                <a:latin typeface="Helvetica Neue"/>
-                <a:ea typeface="Helvetica Neue"/>
-                <a:cs typeface="Helvetica Neue"/>
-              </a:rPr>
-              <a:t>SSDF задаёт порядок работы. ASVS уточняет технические требования.</a:t>
-            </a:r>
-          </a:p>
-        </p:txBody>
-      </p:sp>
-    </p:spTree>
-    <p:extLst>
-      <p:ext uri="{BB962C8B-B14F-4D97-AF65-F5344CB8AC3E}">
-        <p14:creationId xmlns:p14="http://schemas.microsoft.com/office/powerpoint/2010/main" val="1505149136"/>
-      </p:ext>
-    </p:extLst>
-  </p:cSld>
-</p:sld>
-</file>
-
-<file path=ppt/slides/slide4.xml><?xml version="1.0" encoding="utf-8"?>
-<p:sld xmlns:p="http://schemas.openxmlformats.org/presentationml/2006/main">
-  <p:cSld>
-    <p:bg>
-      <p:bgPr>
-        <a:solidFill xmlns:a="http://schemas.openxmlformats.org/drawingml/2006/main">
-          <a:srgbClr val="F7F6F1"/>
-        </a:solidFill>
-      </p:bgPr>
-    </p:bg>
-    <p:spTree>
-      <p:nvGrpSpPr>
-        <p:cNvPr id="1" name=""/>
-        <p:cNvGrpSpPr/>
-        <p:nvPr/>
-      </p:nvGrpSpPr>
-      <p:grpSpPr>
-        <a:xfrm xmlns:a="http://schemas.openxmlformats.org/drawingml/2006/main"/>
-      </p:grpSpPr>
-      <p:sp>
-        <p:nvSpPr>
-          <p:cNvPr id="8" name="">
-            <a:extLst xmlns:a="http://schemas.openxmlformats.org/drawingml/2006/main">
-              <a:ext uri="{FF2B5EF4-FFF2-40B4-BE49-F238E27FC236}">
-                <a16:creationId xmlns:a16="http://schemas.microsoft.com/office/drawing/2014/main" id="{CA236832-8B90-4562-9CD5-20B2209D0649}"/>
-              </a:ext>
-            </a:extLst>
-          </p:cNvPr>
-          <p:cNvSpPr>
-            <a:spLocks xmlns:a="http://schemas.openxmlformats.org/drawingml/2006/main" noGrp="1"/>
-          </p:cNvSpPr>
-          <p:nvPr/>
-        </p:nvSpPr>
-        <p:spPr>
-          <a:xfrm xmlns:a="http://schemas.openxmlformats.org/drawingml/2006/main">
-            <a:off x="609600" y="304800"/>
-            <a:ext cx="10763250" cy="266700"/>
-          </a:xfrm>
-          <a:prstGeom xmlns:a="http://schemas.openxmlformats.org/drawingml/2006/main" prst="rect">
-            <a:avLst/>
-          </a:prstGeom>
-          <a:noFill xmlns:a="http://schemas.openxmlformats.org/drawingml/2006/main"/>
-          <a:ln xmlns:a="http://schemas.openxmlformats.org/drawingml/2006/main" w="0">
-            <a:noFill/>
-          </a:ln>
-        </p:spPr>
-        <p:txBody>
-          <a:bodyPr xmlns:a="http://schemas.openxmlformats.org/drawingml/2006/main">
-            <a:noAutofit/>
-          </a:bodyPr>
-          <a:lstStyle xmlns:a="http://schemas.openxmlformats.org/drawingml/2006/main"/>
-          <a:p xmlns:a="http://schemas.openxmlformats.org/drawingml/2006/main">
-            <a:pPr>
-              <a:buNone/>
-              <a:defRPr sz="1350" b="1">
-                <a:solidFill>
-                  <a:srgbClr val="26756C"/>
-                </a:solidFill>
-                <a:latin typeface="Helvetica Neue"/>
-                <a:ea typeface="Helvetica Neue"/>
-                <a:cs typeface="Helvetica Neue"/>
-              </a:defRPr>
-            </a:pPr>
-            <a:r>
-              <a:rPr sz="1350" b="1">
-                <a:solidFill>
-                  <a:srgbClr val="26756C"/>
-                </a:solidFill>
-                <a:latin typeface="Helvetica Neue"/>
-                <a:ea typeface="Helvetica Neue"/>
-                <a:cs typeface="Helvetica Neue"/>
-              </a:rPr>
-              <a:t>КОНЦЕПЦИЯ БЕЗОПАСНОЙ РАЗРАБОТКИ</a:t>
-            </a:r>
-          </a:p>
-        </p:txBody>
-      </p:sp>
-      <p:sp>
-        <p:nvSpPr>
-          <p:cNvPr id="2" name="">
-            <a:extLst xmlns:a="http://schemas.openxmlformats.org/drawingml/2006/main">
-              <a:ext uri="{FF2B5EF4-FFF2-40B4-BE49-F238E27FC236}">
-                <a16:creationId xmlns:a16="http://schemas.microsoft.com/office/drawing/2014/main" id="{AF3E136D-6EA8-4350-B7A0-995FFCEF72B4}"/>
-              </a:ext>
-            </a:extLst>
-          </p:cNvPr>
-          <p:cNvSpPr>
-            <a:spLocks xmlns:a="http://schemas.openxmlformats.org/drawingml/2006/main" noGrp="1"/>
-          </p:cNvSpPr>
-          <p:nvPr/>
-        </p:nvSpPr>
-        <p:spPr>
-          <a:xfrm xmlns:a="http://schemas.openxmlformats.org/drawingml/2006/main">
-            <a:off x="609600" y="838200"/>
-            <a:ext cx="10972800" cy="990600"/>
-          </a:xfrm>
-          <a:prstGeom xmlns:a="http://schemas.openxmlformats.org/drawingml/2006/main" prst="rect">
-            <a:avLst/>
-          </a:prstGeom>
-          <a:noFill xmlns:a="http://schemas.openxmlformats.org/drawingml/2006/main"/>
-          <a:ln xmlns:a="http://schemas.openxmlformats.org/drawingml/2006/main" w="0">
-            <a:noFill/>
-          </a:ln>
-        </p:spPr>
-        <p:txBody>
-          <a:bodyPr xmlns:a="http://schemas.openxmlformats.org/drawingml/2006/main">
-            <a:noAutofit/>
-          </a:bodyPr>
-          <a:lstStyle xmlns:a="http://schemas.openxmlformats.org/drawingml/2006/main"/>
-          <a:p xmlns:a="http://schemas.openxmlformats.org/drawingml/2006/main">
-            <a:pPr>
-              <a:buNone/>
-              <a:defRPr sz="3300" b="1">
-                <a:solidFill>
-                  <a:srgbClr val="102A30"/>
-                </a:solidFill>
-                <a:latin typeface="Helvetica Neue"/>
-                <a:ea typeface="Helvetica Neue"/>
-                <a:cs typeface="Helvetica Neue"/>
-              </a:defRPr>
-            </a:pPr>
-            <a:r>
-              <a:rPr sz="3300" b="1">
-                <a:solidFill>
-                  <a:srgbClr val="102A30"/>
-                </a:solidFill>
-                <a:latin typeface="Helvetica Neue"/>
-                <a:ea typeface="Helvetica Neue"/>
-                <a:cs typeface="Helvetica Neue"/>
-              </a:rPr>
-              <a:t>Почему не выбрали SAMM и ГОСТ</a:t>
-            </a:r>
-          </a:p>
-        </p:txBody>
-      </p:sp>
-      <p:sp>
-        <p:nvSpPr>
-          <p:cNvPr id="3" name="">
-            <a:extLst xmlns:a="http://schemas.openxmlformats.org/drawingml/2006/main">
-              <a:ext uri="{FF2B5EF4-FFF2-40B4-BE49-F238E27FC236}">
-                <a16:creationId xmlns:a16="http://schemas.microsoft.com/office/drawing/2014/main" id="{2227BBEA-07AF-4A9C-97C1-42144AAC6139}"/>
-              </a:ext>
-            </a:extLst>
-          </p:cNvPr>
-          <p:cNvSpPr>
-            <a:spLocks xmlns:a="http://schemas.openxmlformats.org/drawingml/2006/main" noGrp="1"/>
-          </p:cNvSpPr>
-          <p:nvPr/>
-        </p:nvSpPr>
-        <p:spPr>
-          <a:xfrm xmlns:a="http://schemas.openxmlformats.org/drawingml/2006/main">
-            <a:off x="609600" y="6372225"/>
-            <a:ext cx="10001250" cy="247650"/>
-          </a:xfrm>
-          <a:prstGeom xmlns:a="http://schemas.openxmlformats.org/drawingml/2006/main" prst="rect">
-            <a:avLst/>
-          </a:prstGeom>
-          <a:noFill xmlns:a="http://schemas.openxmlformats.org/drawingml/2006/main"/>
-          <a:ln xmlns:a="http://schemas.openxmlformats.org/drawingml/2006/main" w="0">
-            <a:noFill/>
-          </a:ln>
-        </p:spPr>
-        <p:txBody>
-          <a:bodyPr xmlns:a="http://schemas.openxmlformats.org/drawingml/2006/main">
-            <a:noAutofit/>
-          </a:bodyPr>
-          <a:lstStyle xmlns:a="http://schemas.openxmlformats.org/drawingml/2006/main"/>
-          <a:p xmlns:a="http://schemas.openxmlformats.org/drawingml/2006/main">
-            <a:pPr>
-              <a:buNone/>
-              <a:defRPr sz="1350" b="0">
-                <a:solidFill>
-                  <a:srgbClr val="59686B"/>
-                </a:solidFill>
-                <a:latin typeface="Helvetica Neue"/>
-                <a:ea typeface="Helvetica Neue"/>
-                <a:cs typeface="Helvetica Neue"/>
-              </a:defRPr>
-            </a:pPr>
-            <a:r>
-              <a:rPr sz="1350" b="0">
-                <a:solidFill>
-                  <a:srgbClr val="59686B"/>
-                </a:solidFill>
-                <a:latin typeface="Helvetica Neue"/>
-                <a:ea typeface="Helvetica Neue"/>
-                <a:cs typeface="Helvetica Neue"/>
-              </a:rPr>
-              <a:t>ЯвкаИБ / TaskFlow / ЭК1</a:t>
-            </a:r>
-          </a:p>
-        </p:txBody>
-      </p:sp>
-      <p:sp>
-        <p:nvSpPr>
-          <p:cNvPr id="4" name="">
-            <a:extLst xmlns:a="http://schemas.openxmlformats.org/drawingml/2006/main">
-              <a:ext uri="{FF2B5EF4-FFF2-40B4-BE49-F238E27FC236}">
-                <a16:creationId xmlns:a16="http://schemas.microsoft.com/office/drawing/2014/main" id="{DE95B7F1-F785-4784-AAF1-38F88216DB9A}"/>
-              </a:ext>
-            </a:extLst>
-          </p:cNvPr>
-          <p:cNvSpPr>
-            <a:spLocks xmlns:a="http://schemas.openxmlformats.org/drawingml/2006/main" noGrp="1"/>
-          </p:cNvSpPr>
-          <p:nvPr/>
-        </p:nvSpPr>
-        <p:spPr>
-          <a:xfrm xmlns:a="http://schemas.openxmlformats.org/drawingml/2006/main">
-            <a:off x="11029950" y="6324600"/>
-            <a:ext cx="619125" cy="333375"/>
-          </a:xfrm>
-          <a:prstGeom xmlns:a="http://schemas.openxmlformats.org/drawingml/2006/main" prst="rect">
-            <a:avLst/>
-          </a:prstGeom>
-          <a:noFill xmlns:a="http://schemas.openxmlformats.org/drawingml/2006/main"/>
-          <a:ln xmlns:a="http://schemas.openxmlformats.org/drawingml/2006/main" w="0">
-            <a:noFill/>
-          </a:ln>
-        </p:spPr>
-        <p:txBody>
-          <a:bodyPr xmlns:a="http://schemas.openxmlformats.org/drawingml/2006/main">
-            <a:noAutofit/>
-          </a:bodyPr>
-          <a:lstStyle xmlns:a="http://schemas.openxmlformats.org/drawingml/2006/main"/>
-          <a:p xmlns:a="http://schemas.openxmlformats.org/drawingml/2006/main">
-            <a:pPr>
-              <a:buNone/>
-              <a:defRPr sz="1800" b="1">
-                <a:solidFill>
-                  <a:srgbClr val="26756C"/>
-                </a:solidFill>
-                <a:latin typeface="Helvetica Neue"/>
-                <a:ea typeface="Helvetica Neue"/>
-                <a:cs typeface="Helvetica Neue"/>
-              </a:defRPr>
-            </a:pPr>
-            <a:r>
-              <a:rPr sz="1800" b="1">
-                <a:solidFill>
-                  <a:srgbClr val="26756C"/>
-                </a:solidFill>
-                <a:latin typeface="Helvetica Neue"/>
-                <a:ea typeface="Helvetica Neue"/>
-                <a:cs typeface="Helvetica Neue"/>
-              </a:rPr>
-              <a:t>04</a:t>
+              <a:t>ASVS дополняет его требованиями к доступу, сессиям и вводу.</a:t>
             </a:r>
           </a:p>
         </p:txBody>
       </p:sp>
       <p:graphicFrame>
         <p:nvGraphicFramePr>
-          <p:cNvPr id="15" name=""/>
+          <p:cNvPr id="16" name=""/>
           <p:cNvGraphicFramePr/>
           <p:nvPr/>
         </p:nvGraphicFramePr>
         <p:xfrm>
-          <a:off xmlns:a="http://schemas.openxmlformats.org/drawingml/2006/main" x="609600" y="2047875"/>
-          <a:ext xmlns:a="http://schemas.openxmlformats.org/drawingml/2006/main" cx="10972800" cy="3143250"/>
+          <a:off xmlns:a="http://schemas.openxmlformats.org/drawingml/2006/main" x="609600" y="2657475"/>
+          <a:ext xmlns:a="http://schemas.openxmlformats.org/drawingml/2006/main" cx="10972800" cy="2771775"/>
         </p:xfrm>
         <a:graphic xmlns:a="http://schemas.openxmlformats.org/drawingml/2006/main">
           <a:graphicData uri="http://schemas.openxmlformats.org/drawingml/2006/table">
             <a:tbl>
               <a:tblPr/>
               <a:tblGrid>
-                <a:gridCol w="2333625"/>
-                <a:gridCol w="3495675"/>
-                <a:gridCol w="5143500"/>
+                <a:gridCol w="2743200"/>
+                <a:gridCol w="4324350"/>
+                <a:gridCol w="3905250"/>
               </a:tblGrid>
-              <a:tr h="571500">
-                <a:tc>
-                  <a:txBody>
-                    <a:bodyPr>
-                      <a:noAutofit/>
-                    </a:bodyPr>
-                    <a:lstStyle/>
-                    <a:p>
-                      <a:r>
-                        <a:rPr sz="1950" b="1">
-                          <a:solidFill>
-                            <a:srgbClr val="FFFFFF"/>
-                          </a:solidFill>
-                          <a:latin typeface="Helvetica Neue"/>
-                          <a:ea typeface="Helvetica Neue"/>
-                          <a:cs typeface="Helvetica Neue"/>
-                        </a:rPr>
-                        <a:t>Источник</a:t>
-                      </a:r>
-                    </a:p>
-                  </a:txBody>
-                  <a:tcPr marL="91440" marR="91440" marT="45720" marB="45720">
-                    <a:solidFill>
-                      <a:srgbClr val="102A30"/>
-                    </a:solidFill>
-                  </a:tcPr>
-                </a:tc>
-                <a:tc>
-                  <a:txBody>
-                    <a:bodyPr>
-                      <a:noAutofit/>
-                    </a:bodyPr>
-                    <a:lstStyle/>
-                    <a:p>
-                      <a:r>
-                        <a:rPr sz="1950" b="1">
-                          <a:solidFill>
-                            <a:srgbClr val="FFFFFF"/>
-                          </a:solidFill>
-                          <a:latin typeface="Helvetica Neue"/>
-                          <a:ea typeface="Helvetica Neue"/>
-                          <a:cs typeface="Helvetica Neue"/>
-                        </a:rPr>
-                        <a:t>Зачем рассмотрели</a:t>
-                      </a:r>
-                    </a:p>
-                  </a:txBody>
-                  <a:tcPr marL="91440" marR="91440" marT="45720" marB="45720">
-                    <a:solidFill>
-                      <a:srgbClr val="102A30"/>
-                    </a:solidFill>
-                  </a:tcPr>
-                </a:tc>
-                <a:tc>
-                  <a:txBody>
-                    <a:bodyPr>
-                      <a:noAutofit/>
-                    </a:bodyPr>
-                    <a:lstStyle/>
-                    <a:p>
-                      <a:r>
-                        <a:rPr sz="1950" b="1">
-                          <a:solidFill>
-                            <a:srgbClr val="FFFFFF"/>
-                          </a:solidFill>
-                          <a:latin typeface="Helvetica Neue"/>
-                          <a:ea typeface="Helvetica Neue"/>
-                          <a:cs typeface="Helvetica Neue"/>
-                        </a:rPr>
-                        <a:t>Почему не взяли за основу</a:t>
-                      </a:r>
-                    </a:p>
-                  </a:txBody>
-                  <a:tcPr marL="91440" marR="91440" marT="45720" marB="45720">
-                    <a:solidFill>
-                      <a:srgbClr val="102A30"/>
-                    </a:solidFill>
-                  </a:tcPr>
-                </a:tc>
-              </a:tr>
-              <a:tr h="1285875">
-                <a:tc>
-                  <a:txBody>
-                    <a:bodyPr>
-                      <a:noAutofit/>
-                    </a:bodyPr>
-                    <a:lstStyle/>
-                    <a:p>
-                      <a:r>
-                        <a:rPr sz="1950" b="0">
-                          <a:solidFill>
-                            <a:srgbClr val="102A30"/>
-                          </a:solidFill>
-                          <a:latin typeface="Helvetica Neue"/>
-                          <a:ea typeface="Helvetica Neue"/>
-                          <a:cs typeface="Helvetica Neue"/>
-                        </a:rPr>
-                        <a:t>OWASP SAMM 2</a:t>
-                      </a:r>
-                    </a:p>
-                  </a:txBody>
-                  <a:tcPr marL="91440" marR="91440" marT="45720" marB="45720">
-                    <a:solidFill>
-                      <a:srgbClr val="FFFFFF"/>
-                    </a:solidFill>
-                  </a:tcPr>
-                </a:tc>
-                <a:tc>
-                  <a:txBody>
-                    <a:bodyPr>
-                      <a:noAutofit/>
-                    </a:bodyPr>
-                    <a:lstStyle/>
-                    <a:p>
-                      <a:r>
-                        <a:rPr sz="1950" b="0">
-                          <a:solidFill>
-                            <a:srgbClr val="102A30"/>
-                          </a:solidFill>
-                          <a:latin typeface="Helvetica Neue"/>
-                          <a:ea typeface="Helvetica Neue"/>
-                          <a:cs typeface="Helvetica Neue"/>
-                        </a:rPr>
-                        <a:t>Помогает оценивать</a:t>
-                      </a:r>
-                    </a:p>
-                    <a:p>
-                      <a:r>
-                        <a:rPr sz="1950" b="0">
-                          <a:solidFill>
-                            <a:srgbClr val="102A30"/>
-                          </a:solidFill>
-                          <a:latin typeface="Helvetica Neue"/>
-                          <a:ea typeface="Helvetica Neue"/>
-                          <a:cs typeface="Helvetica Neue"/>
-                        </a:rPr>
-                        <a:t>и улучшать практики</a:t>
-                      </a:r>
-                    </a:p>
-                    <a:p>
-                      <a:r>
-                        <a:rPr sz="1950" b="0">
-                          <a:solidFill>
-                            <a:srgbClr val="102A30"/>
-                          </a:solidFill>
-                          <a:latin typeface="Helvetica Neue"/>
-                          <a:ea typeface="Helvetica Neue"/>
-                          <a:cs typeface="Helvetica Neue"/>
-                        </a:rPr>
-                        <a:t>команды</a:t>
-                      </a:r>
-                    </a:p>
-                  </a:txBody>
-                  <a:tcPr marL="91440" marR="91440" marT="45720" marB="45720">
-                    <a:solidFill>
-                      <a:srgbClr val="FFFFFF"/>
-                    </a:solidFill>
-                  </a:tcPr>
-                </a:tc>
-                <a:tc>
-                  <a:txBody>
-                    <a:bodyPr>
-                      <a:noAutofit/>
-                    </a:bodyPr>
-                    <a:lstStyle/>
-                    <a:p>
-                      <a:r>
-                        <a:rPr sz="1950" b="0">
-                          <a:solidFill>
-                            <a:srgbClr val="102A30"/>
-                          </a:solidFill>
-                          <a:latin typeface="Helvetica Neue"/>
-                          <a:ea typeface="Helvetica Neue"/>
-                          <a:cs typeface="Helvetica Neue"/>
-                        </a:rPr>
-                        <a:t>Проект только начат. Мало истории</a:t>
-                      </a:r>
-                    </a:p>
-                    <a:p>
-                      <a:r>
-                        <a:rPr sz="1950" b="0">
-                          <a:solidFill>
-                            <a:srgbClr val="102A30"/>
-                          </a:solidFill>
-                          <a:latin typeface="Helvetica Neue"/>
-                          <a:ea typeface="Helvetica Neue"/>
-                          <a:cs typeface="Helvetica Neue"/>
-                        </a:rPr>
-                        <a:t>для оценки устойчивости практик.</a:t>
-                      </a:r>
-                    </a:p>
-                    <a:p>
-                      <a:r>
-                        <a:rPr sz="1950" b="0">
-                          <a:solidFill>
-                            <a:srgbClr val="102A30"/>
-                          </a:solidFill>
-                          <a:latin typeface="Helvetica Neue"/>
-                          <a:ea typeface="Helvetica Neue"/>
-                          <a:cs typeface="Helvetica Neue"/>
-                        </a:rPr>
-                        <a:t>Сначала устанавливаем правила.</a:t>
-                      </a:r>
-                    </a:p>
-                  </a:txBody>
-                  <a:tcPr marL="91440" marR="91440" marT="45720" marB="45720">
-                    <a:solidFill>
-                      <a:srgbClr val="FFFFFF"/>
-                    </a:solidFill>
-                  </a:tcPr>
-                </a:tc>
-              </a:tr>
-              <a:tr h="1285875">
-                <a:tc>
-                  <a:txBody>
-                    <a:bodyPr>
-                      <a:noAutofit/>
-                    </a:bodyPr>
-                    <a:lstStyle/>
-                    <a:p>
-                      <a:r>
-                        <a:rPr sz="1950" b="0">
-                          <a:solidFill>
-                            <a:srgbClr val="102A30"/>
-                          </a:solidFill>
-                          <a:latin typeface="Helvetica Neue"/>
-                          <a:ea typeface="Helvetica Neue"/>
-                          <a:cs typeface="Helvetica Neue"/>
-                        </a:rPr>
-                        <a:t>ГОСТ Р</a:t>
-                      </a:r>
-                    </a:p>
-                    <a:p>
-                      <a:r>
-                        <a:rPr sz="1950" b="0">
-                          <a:solidFill>
-                            <a:srgbClr val="102A30"/>
-                          </a:solidFill>
-                          <a:latin typeface="Helvetica Neue"/>
-                          <a:ea typeface="Helvetica Neue"/>
-                          <a:cs typeface="Helvetica Neue"/>
-                        </a:rPr>
-                        <a:t>56939-2024</a:t>
-                      </a:r>
-                    </a:p>
-                  </a:txBody>
-                  <a:tcPr marL="91440" marR="91440" marT="45720" marB="45720">
-                    <a:solidFill>
-                      <a:srgbClr val="F7F6F1"/>
-                    </a:solidFill>
-                  </a:tcPr>
-                </a:tc>
-                <a:tc>
-                  <a:txBody>
-                    <a:bodyPr>
-                      <a:noAutofit/>
-                    </a:bodyPr>
-                    <a:lstStyle/>
-                    <a:p>
-                      <a:r>
-                        <a:rPr sz="1950" b="0">
-                          <a:solidFill>
-                            <a:srgbClr val="102A30"/>
-                          </a:solidFill>
-                          <a:latin typeface="Helvetica Neue"/>
-                          <a:ea typeface="Helvetica Neue"/>
-                          <a:cs typeface="Helvetica Neue"/>
-                        </a:rPr>
-                        <a:t>Задаёт требования</a:t>
-                      </a:r>
-                    </a:p>
-                    <a:p>
-                      <a:r>
-                        <a:rPr sz="1950" b="0">
-                          <a:solidFill>
-                            <a:srgbClr val="102A30"/>
-                          </a:solidFill>
-                          <a:latin typeface="Helvetica Neue"/>
-                          <a:ea typeface="Helvetica Neue"/>
-                          <a:cs typeface="Helvetica Neue"/>
-                        </a:rPr>
-                        <a:t>к работам безопасной</a:t>
-                      </a:r>
-                    </a:p>
-                    <a:p>
-                      <a:r>
-                        <a:rPr sz="1950" b="0">
-                          <a:solidFill>
-                            <a:srgbClr val="102A30"/>
-                          </a:solidFill>
-                          <a:latin typeface="Helvetica Neue"/>
-                          <a:ea typeface="Helvetica Neue"/>
-                          <a:cs typeface="Helvetica Neue"/>
-                        </a:rPr>
-                        <a:t>разработки</a:t>
-                      </a:r>
-                    </a:p>
-                  </a:txBody>
-                  <a:tcPr marL="91440" marR="91440" marT="45720" marB="45720">
-                    <a:solidFill>
-                      <a:srgbClr val="F7F6F1"/>
-                    </a:solidFill>
-                  </a:tcPr>
-                </a:tc>
-                <a:tc>
-                  <a:txBody>
-                    <a:bodyPr>
-                      <a:noAutofit/>
-                    </a:bodyPr>
-                    <a:lstStyle/>
-                    <a:p>
-                      <a:r>
-                        <a:rPr sz="1950" b="0">
-                          <a:solidFill>
-                            <a:srgbClr val="102A30"/>
-                          </a:solidFill>
-                          <a:latin typeface="Helvetica Neue"/>
-                          <a:ea typeface="Helvetica Neue"/>
-                          <a:cs typeface="Helvetica Neue"/>
-                        </a:rPr>
-                        <a:t>В задании нет требования брать ГОСТ.</a:t>
-                      </a:r>
-                    </a:p>
-                    <a:p>
-                      <a:r>
-                        <a:rPr sz="1950" b="0">
-                          <a:solidFill>
-                            <a:srgbClr val="102A30"/>
-                          </a:solidFill>
-                          <a:latin typeface="Helvetica Neue"/>
-                          <a:ea typeface="Helvetica Neue"/>
-                          <a:cs typeface="Helvetica Neue"/>
-                        </a:rPr>
-                        <a:t>Для нашей области достаточно SSDF,</a:t>
-                      </a:r>
-                    </a:p>
-                    <a:p>
-                      <a:r>
-                        <a:rPr sz="1950" b="0">
-                          <a:solidFill>
-                            <a:srgbClr val="102A30"/>
-                          </a:solidFill>
-                          <a:latin typeface="Helvetica Neue"/>
-                          <a:ea typeface="Helvetica Neue"/>
-                          <a:cs typeface="Helvetica Neue"/>
-                        </a:rPr>
-                        <a:t>полный текст которого открыт.</a:t>
-                      </a:r>
-                    </a:p>
-                  </a:txBody>
-                  <a:tcPr marL="91440" marR="91440" marT="45720" marB="45720">
-                    <a:solidFill>
-                      <a:srgbClr val="F7F6F1"/>
-                    </a:solidFill>
-                  </a:tcPr>
-                </a:tc>
-              </a:tr>
-            </a:tbl>
-          </a:graphicData>
-        </a:graphic>
-      </p:graphicFrame>
-      <p:sp>
-        <p:nvSpPr>
-          <p:cNvPr id="10" name="">
-            <a:extLst xmlns:a="http://schemas.openxmlformats.org/drawingml/2006/main">
-              <a:ext uri="{FF2B5EF4-FFF2-40B4-BE49-F238E27FC236}">
-                <a16:creationId xmlns:a16="http://schemas.microsoft.com/office/drawing/2014/main" id="{0F1252E7-C4FB-417C-9CC7-9E7D2F833BF8}"/>
-              </a:ext>
-            </a:extLst>
-          </p:cNvPr>
-          <p:cNvSpPr>
-            <a:spLocks xmlns:a="http://schemas.openxmlformats.org/drawingml/2006/main" noGrp="1"/>
-          </p:cNvSpPr>
-          <p:nvPr/>
-        </p:nvSpPr>
-        <p:spPr>
-          <a:xfrm xmlns:a="http://schemas.openxmlformats.org/drawingml/2006/main">
-            <a:off x="609600" y="5457825"/>
-            <a:ext cx="10972800" cy="733425"/>
-          </a:xfrm>
-          <a:prstGeom xmlns:a="http://schemas.openxmlformats.org/drawingml/2006/main" prst="rect">
-            <a:avLst/>
-          </a:prstGeom>
-          <a:noFill xmlns:a="http://schemas.openxmlformats.org/drawingml/2006/main"/>
-          <a:ln xmlns:a="http://schemas.openxmlformats.org/drawingml/2006/main" w="0">
-            <a:noFill/>
-          </a:ln>
-        </p:spPr>
-        <p:txBody>
-          <a:bodyPr xmlns:a="http://schemas.openxmlformats.org/drawingml/2006/main">
-            <a:noAutofit/>
-          </a:bodyPr>
-          <a:lstStyle xmlns:a="http://schemas.openxmlformats.org/drawingml/2006/main"/>
-          <a:p xmlns:a="http://schemas.openxmlformats.org/drawingml/2006/main">
-            <a:pPr>
-              <a:defRPr sz="2100" b="1">
-                <a:solidFill>
-                  <a:srgbClr val="26756C"/>
-                </a:solidFill>
-                <a:latin typeface="Helvetica Neue"/>
-                <a:ea typeface="Helvetica Neue"/>
-                <a:cs typeface="Helvetica Neue"/>
-              </a:defRPr>
-            </a:pPr>
-            <a:r>
-              <a:rPr sz="2100" b="1">
-                <a:solidFill>
-                  <a:srgbClr val="26756C"/>
-                </a:solidFill>
-                <a:latin typeface="Helvetica Neue"/>
-                <a:ea typeface="Helvetica Neue"/>
-                <a:cs typeface="Helvetica Neue"/>
-              </a:rPr>
-              <a:t>Оба подхода применимы. Выбор зависит от цели проекта и требований.</a:t>
-            </a:r>
-          </a:p>
-        </p:txBody>
-      </p:sp>
-    </p:spTree>
-    <p:extLst>
-      <p:ext uri="{BB962C8B-B14F-4D97-AF65-F5344CB8AC3E}">
-        <p14:creationId xmlns:p14="http://schemas.microsoft.com/office/powerpoint/2010/main" val="231355314"/>
-      </p:ext>
-    </p:extLst>
-  </p:cSld>
-</p:sld>
-</file>
-
-<file path=ppt/slides/slide5.xml><?xml version="1.0" encoding="utf-8"?>
-<p:sld xmlns:p="http://schemas.openxmlformats.org/presentationml/2006/main">
-  <p:cSld>
-    <p:bg>
-      <p:bgPr>
-        <a:solidFill xmlns:a="http://schemas.openxmlformats.org/drawingml/2006/main">
-          <a:srgbClr val="F7F6F1"/>
-        </a:solidFill>
-      </p:bgPr>
-    </p:bg>
-    <p:spTree>
-      <p:nvGrpSpPr>
-        <p:cNvPr id="1" name=""/>
-        <p:cNvGrpSpPr/>
-        <p:nvPr/>
-      </p:nvGrpSpPr>
-      <p:grpSpPr>
-        <a:xfrm xmlns:a="http://schemas.openxmlformats.org/drawingml/2006/main"/>
-      </p:grpSpPr>
-      <p:sp>
-        <p:nvSpPr>
-          <p:cNvPr id="11" name="">
-            <a:extLst xmlns:a="http://schemas.openxmlformats.org/drawingml/2006/main">
-              <a:ext uri="{FF2B5EF4-FFF2-40B4-BE49-F238E27FC236}">
-                <a16:creationId xmlns:a16="http://schemas.microsoft.com/office/drawing/2014/main" id="{522CFE3C-CD5C-4122-B953-3F4FCBBED9AB}"/>
-              </a:ext>
-            </a:extLst>
-          </p:cNvPr>
-          <p:cNvSpPr>
-            <a:spLocks xmlns:a="http://schemas.openxmlformats.org/drawingml/2006/main" noGrp="1"/>
-          </p:cNvSpPr>
-          <p:nvPr/>
-        </p:nvSpPr>
-        <p:spPr>
-          <a:xfrm xmlns:a="http://schemas.openxmlformats.org/drawingml/2006/main">
-            <a:off x="609600" y="304800"/>
-            <a:ext cx="10763250" cy="266700"/>
-          </a:xfrm>
-          <a:prstGeom xmlns:a="http://schemas.openxmlformats.org/drawingml/2006/main" prst="rect">
-            <a:avLst/>
-          </a:prstGeom>
-          <a:noFill xmlns:a="http://schemas.openxmlformats.org/drawingml/2006/main"/>
-          <a:ln xmlns:a="http://schemas.openxmlformats.org/drawingml/2006/main" w="0">
-            <a:noFill/>
-          </a:ln>
-        </p:spPr>
-        <p:txBody>
-          <a:bodyPr xmlns:a="http://schemas.openxmlformats.org/drawingml/2006/main">
-            <a:noAutofit/>
-          </a:bodyPr>
-          <a:lstStyle xmlns:a="http://schemas.openxmlformats.org/drawingml/2006/main"/>
-          <a:p xmlns:a="http://schemas.openxmlformats.org/drawingml/2006/main">
-            <a:pPr>
-              <a:buNone/>
-              <a:defRPr sz="1350" b="1">
-                <a:solidFill>
-                  <a:srgbClr val="26756C"/>
-                </a:solidFill>
-                <a:latin typeface="Helvetica Neue"/>
-                <a:ea typeface="Helvetica Neue"/>
-                <a:cs typeface="Helvetica Neue"/>
-              </a:defRPr>
-            </a:pPr>
-            <a:r>
-              <a:rPr sz="1350" b="1">
-                <a:solidFill>
-                  <a:srgbClr val="26756C"/>
-                </a:solidFill>
-                <a:latin typeface="Helvetica Neue"/>
-                <a:ea typeface="Helvetica Neue"/>
-                <a:cs typeface="Helvetica Neue"/>
-              </a:rPr>
-              <a:t>КОНЦЕПЦИЯ БЕЗОПАСНОЙ РАЗРАБОТКИ</a:t>
-            </a:r>
-          </a:p>
-        </p:txBody>
-      </p:sp>
-      <p:sp>
-        <p:nvSpPr>
-          <p:cNvPr id="2" name="">
-            <a:extLst xmlns:a="http://schemas.openxmlformats.org/drawingml/2006/main">
-              <a:ext uri="{FF2B5EF4-FFF2-40B4-BE49-F238E27FC236}">
-                <a16:creationId xmlns:a16="http://schemas.microsoft.com/office/drawing/2014/main" id="{1ACE3952-3CCD-43AA-AC7B-7147A2781EEE}"/>
-              </a:ext>
-            </a:extLst>
-          </p:cNvPr>
-          <p:cNvSpPr>
-            <a:spLocks xmlns:a="http://schemas.openxmlformats.org/drawingml/2006/main" noGrp="1"/>
-          </p:cNvSpPr>
-          <p:nvPr/>
-        </p:nvSpPr>
-        <p:spPr>
-          <a:xfrm xmlns:a="http://schemas.openxmlformats.org/drawingml/2006/main">
-            <a:off x="609600" y="838200"/>
-            <a:ext cx="10972800" cy="990600"/>
-          </a:xfrm>
-          <a:prstGeom xmlns:a="http://schemas.openxmlformats.org/drawingml/2006/main" prst="rect">
-            <a:avLst/>
-          </a:prstGeom>
-          <a:noFill xmlns:a="http://schemas.openxmlformats.org/drawingml/2006/main"/>
-          <a:ln xmlns:a="http://schemas.openxmlformats.org/drawingml/2006/main" w="0">
-            <a:noFill/>
-          </a:ln>
-        </p:spPr>
-        <p:txBody>
-          <a:bodyPr xmlns:a="http://schemas.openxmlformats.org/drawingml/2006/main">
-            <a:noAutofit/>
-          </a:bodyPr>
-          <a:lstStyle xmlns:a="http://schemas.openxmlformats.org/drawingml/2006/main"/>
-          <a:p xmlns:a="http://schemas.openxmlformats.org/drawingml/2006/main">
-            <a:pPr>
-              <a:buNone/>
-              <a:defRPr sz="3300" b="1">
-                <a:solidFill>
-                  <a:srgbClr val="102A30"/>
-                </a:solidFill>
-                <a:latin typeface="Helvetica Neue"/>
-                <a:ea typeface="Helvetica Neue"/>
-                <a:cs typeface="Helvetica Neue"/>
-              </a:defRPr>
-            </a:pPr>
-            <a:r>
-              <a:rPr sz="3300" b="1">
-                <a:solidFill>
-                  <a:srgbClr val="102A30"/>
-                </a:solidFill>
-                <a:latin typeface="Helvetica Neue"/>
-                <a:ea typeface="Helvetica Neue"/>
-                <a:cs typeface="Helvetica Neue"/>
-              </a:rPr>
-              <a:t>Что уже есть и чего не хватает</a:t>
-            </a:r>
-          </a:p>
-        </p:txBody>
-      </p:sp>
-      <p:sp>
-        <p:nvSpPr>
-          <p:cNvPr id="3" name="">
-            <a:extLst xmlns:a="http://schemas.openxmlformats.org/drawingml/2006/main">
-              <a:ext uri="{FF2B5EF4-FFF2-40B4-BE49-F238E27FC236}">
-                <a16:creationId xmlns:a16="http://schemas.microsoft.com/office/drawing/2014/main" id="{49483CD4-91EB-4FB5-921C-78D64513F913}"/>
-              </a:ext>
-            </a:extLst>
-          </p:cNvPr>
-          <p:cNvSpPr>
-            <a:spLocks xmlns:a="http://schemas.openxmlformats.org/drawingml/2006/main" noGrp="1"/>
-          </p:cNvSpPr>
-          <p:nvPr/>
-        </p:nvSpPr>
-        <p:spPr>
-          <a:xfrm xmlns:a="http://schemas.openxmlformats.org/drawingml/2006/main">
-            <a:off x="609600" y="6372225"/>
-            <a:ext cx="10001250" cy="247650"/>
-          </a:xfrm>
-          <a:prstGeom xmlns:a="http://schemas.openxmlformats.org/drawingml/2006/main" prst="rect">
-            <a:avLst/>
-          </a:prstGeom>
-          <a:noFill xmlns:a="http://schemas.openxmlformats.org/drawingml/2006/main"/>
-          <a:ln xmlns:a="http://schemas.openxmlformats.org/drawingml/2006/main" w="0">
-            <a:noFill/>
-          </a:ln>
-        </p:spPr>
-        <p:txBody>
-          <a:bodyPr xmlns:a="http://schemas.openxmlformats.org/drawingml/2006/main">
-            <a:noAutofit/>
-          </a:bodyPr>
-          <a:lstStyle xmlns:a="http://schemas.openxmlformats.org/drawingml/2006/main"/>
-          <a:p xmlns:a="http://schemas.openxmlformats.org/drawingml/2006/main">
-            <a:pPr>
-              <a:buNone/>
-              <a:defRPr sz="1350" b="0">
-                <a:solidFill>
-                  <a:srgbClr val="59686B"/>
-                </a:solidFill>
-                <a:latin typeface="Helvetica Neue"/>
-                <a:ea typeface="Helvetica Neue"/>
-                <a:cs typeface="Helvetica Neue"/>
-              </a:defRPr>
-            </a:pPr>
-            <a:r>
-              <a:rPr sz="1350" b="0">
-                <a:solidFill>
-                  <a:srgbClr val="59686B"/>
-                </a:solidFill>
-                <a:latin typeface="Helvetica Neue"/>
-                <a:ea typeface="Helvetica Neue"/>
-                <a:cs typeface="Helvetica Neue"/>
-              </a:rPr>
-              <a:t>ЯвкаИБ / TaskFlow / ЭК1</a:t>
-            </a:r>
-          </a:p>
-        </p:txBody>
-      </p:sp>
-      <p:sp>
-        <p:nvSpPr>
-          <p:cNvPr id="4" name="">
-            <a:extLst xmlns:a="http://schemas.openxmlformats.org/drawingml/2006/main">
-              <a:ext uri="{FF2B5EF4-FFF2-40B4-BE49-F238E27FC236}">
-                <a16:creationId xmlns:a16="http://schemas.microsoft.com/office/drawing/2014/main" id="{5755EE69-5510-4909-9058-5F0204064B8B}"/>
-              </a:ext>
-            </a:extLst>
-          </p:cNvPr>
-          <p:cNvSpPr>
-            <a:spLocks xmlns:a="http://schemas.openxmlformats.org/drawingml/2006/main" noGrp="1"/>
-          </p:cNvSpPr>
-          <p:nvPr/>
-        </p:nvSpPr>
-        <p:spPr>
-          <a:xfrm xmlns:a="http://schemas.openxmlformats.org/drawingml/2006/main">
-            <a:off x="11029950" y="6324600"/>
-            <a:ext cx="619125" cy="333375"/>
-          </a:xfrm>
-          <a:prstGeom xmlns:a="http://schemas.openxmlformats.org/drawingml/2006/main" prst="rect">
-            <a:avLst/>
-          </a:prstGeom>
-          <a:noFill xmlns:a="http://schemas.openxmlformats.org/drawingml/2006/main"/>
-          <a:ln xmlns:a="http://schemas.openxmlformats.org/drawingml/2006/main" w="0">
-            <a:noFill/>
-          </a:ln>
-        </p:spPr>
-        <p:txBody>
-          <a:bodyPr xmlns:a="http://schemas.openxmlformats.org/drawingml/2006/main">
-            <a:noAutofit/>
-          </a:bodyPr>
-          <a:lstStyle xmlns:a="http://schemas.openxmlformats.org/drawingml/2006/main"/>
-          <a:p xmlns:a="http://schemas.openxmlformats.org/drawingml/2006/main">
-            <a:pPr>
-              <a:buNone/>
-              <a:defRPr sz="1800" b="1">
-                <a:solidFill>
-                  <a:srgbClr val="26756C"/>
-                </a:solidFill>
-                <a:latin typeface="Helvetica Neue"/>
-                <a:ea typeface="Helvetica Neue"/>
-                <a:cs typeface="Helvetica Neue"/>
-              </a:defRPr>
-            </a:pPr>
-            <a:r>
-              <a:rPr sz="1800" b="1">
-                <a:solidFill>
-                  <a:srgbClr val="26756C"/>
-                </a:solidFill>
-                <a:latin typeface="Helvetica Neue"/>
-                <a:ea typeface="Helvetica Neue"/>
-                <a:cs typeface="Helvetica Neue"/>
-              </a:rPr>
-              <a:t>05</a:t>
-            </a:r>
-          </a:p>
-        </p:txBody>
-      </p:sp>
-      <p:sp>
-        <p:nvSpPr>
-          <p:cNvPr id="12" name="">
-            <a:extLst xmlns:a="http://schemas.openxmlformats.org/drawingml/2006/main">
-              <a:ext uri="{FF2B5EF4-FFF2-40B4-BE49-F238E27FC236}">
-                <a16:creationId xmlns:a16="http://schemas.microsoft.com/office/drawing/2014/main" id="{0C045A3E-C67B-4BBE-B374-55C62D799643}"/>
-              </a:ext>
-            </a:extLst>
-          </p:cNvPr>
-          <p:cNvSpPr>
-            <a:spLocks xmlns:a="http://schemas.openxmlformats.org/drawingml/2006/main" noGrp="1"/>
-          </p:cNvSpPr>
-          <p:nvPr/>
-        </p:nvSpPr>
-        <p:spPr>
-          <a:xfrm xmlns:a="http://schemas.openxmlformats.org/drawingml/2006/main">
-            <a:off x="609600" y="2028825"/>
-            <a:ext cx="5095875" cy="762000"/>
-          </a:xfrm>
-          <a:prstGeom xmlns:a="http://schemas.openxmlformats.org/drawingml/2006/main" prst="rect">
-            <a:avLst/>
-          </a:prstGeom>
-          <a:noFill xmlns:a="http://schemas.openxmlformats.org/drawingml/2006/main"/>
-          <a:ln xmlns:a="http://schemas.openxmlformats.org/drawingml/2006/main" w="0">
-            <a:noFill/>
-          </a:ln>
-        </p:spPr>
-        <p:txBody>
-          <a:bodyPr xmlns:a="http://schemas.openxmlformats.org/drawingml/2006/main">
-            <a:noAutofit/>
-          </a:bodyPr>
-          <a:lstStyle xmlns:a="http://schemas.openxmlformats.org/drawingml/2006/main"/>
-          <a:p xmlns:a="http://schemas.openxmlformats.org/drawingml/2006/main">
-            <a:pPr>
-              <a:defRPr sz="3600" b="1">
-                <a:solidFill>
-                  <a:srgbClr val="26756C"/>
-                </a:solidFill>
-                <a:latin typeface="Helvetica Neue"/>
-                <a:ea typeface="Helvetica Neue"/>
-                <a:cs typeface="Helvetica Neue"/>
-              </a:defRPr>
-            </a:pPr>
-            <a:r>
-              <a:rPr sz="3600" b="1">
-                <a:solidFill>
-                  <a:srgbClr val="26756C"/>
-                </a:solidFill>
-                <a:latin typeface="Helvetica Neue"/>
-                <a:ea typeface="Helvetica Neue"/>
-                <a:cs typeface="Helvetica Neue"/>
-              </a:rPr>
-              <a:t>27 тестов прошли</a:t>
-            </a:r>
-          </a:p>
-        </p:txBody>
-      </p:sp>
-      <p:sp>
-        <p:nvSpPr>
-          <p:cNvPr id="13" name="">
-            <a:extLst xmlns:a="http://schemas.openxmlformats.org/drawingml/2006/main">
-              <a:ext uri="{FF2B5EF4-FFF2-40B4-BE49-F238E27FC236}">
-                <a16:creationId xmlns:a16="http://schemas.microsoft.com/office/drawing/2014/main" id="{99F8A746-BEBB-4ED2-BFDF-F310063523A6}"/>
-              </a:ext>
-            </a:extLst>
-          </p:cNvPr>
-          <p:cNvSpPr>
-            <a:spLocks xmlns:a="http://schemas.openxmlformats.org/drawingml/2006/main" noGrp="1"/>
-          </p:cNvSpPr>
-          <p:nvPr/>
-        </p:nvSpPr>
-        <p:spPr>
-          <a:xfrm xmlns:a="http://schemas.openxmlformats.org/drawingml/2006/main">
-            <a:off x="609600" y="3057525"/>
-            <a:ext cx="4857750" cy="1657350"/>
-          </a:xfrm>
-          <a:prstGeom xmlns:a="http://schemas.openxmlformats.org/drawingml/2006/main" prst="rect">
-            <a:avLst/>
-          </a:prstGeom>
-          <a:noFill xmlns:a="http://schemas.openxmlformats.org/drawingml/2006/main"/>
-          <a:ln xmlns:a="http://schemas.openxmlformats.org/drawingml/2006/main" w="0">
-            <a:noFill/>
-          </a:ln>
-        </p:spPr>
-        <p:txBody>
-          <a:bodyPr xmlns:a="http://schemas.openxmlformats.org/drawingml/2006/main">
-            <a:noAutofit/>
-          </a:bodyPr>
-          <a:lstStyle xmlns:a="http://schemas.openxmlformats.org/drawingml/2006/main"/>
-          <a:p xmlns:a="http://schemas.openxmlformats.org/drawingml/2006/main">
-            <a:pPr>
-              <a:defRPr sz="2100" b="0">
-                <a:solidFill>
-                  <a:srgbClr val="102A30"/>
-                </a:solidFill>
-                <a:latin typeface="Helvetica Neue"/>
-                <a:ea typeface="Helvetica Neue"/>
-                <a:cs typeface="Helvetica Neue"/>
-              </a:defRPr>
-            </a:pPr>
-            <a:r>
-              <a:rPr sz="2100" b="0">
-                <a:solidFill>
-                  <a:srgbClr val="102A30"/>
-                </a:solidFill>
-                <a:latin typeface="Helvetica Neue"/>
-                <a:ea typeface="Helvetica Neue"/>
-                <a:cs typeface="Helvetica Neue"/>
-              </a:rPr>
-              <a:t>Результаты и версия кода</a:t>
-            </a:r>
-          </a:p>
-          <a:p xmlns:a="http://schemas.openxmlformats.org/drawingml/2006/main">
-            <a:pPr>
-              <a:defRPr sz="2100" b="0">
-                <a:solidFill>
-                  <a:srgbClr val="102A30"/>
-                </a:solidFill>
-                <a:latin typeface="Helvetica Neue"/>
-                <a:ea typeface="Helvetica Neue"/>
-                <a:cs typeface="Helvetica Neue"/>
-              </a:defRPr>
-            </a:pPr>
-            <a:r>
-              <a:rPr sz="2100" b="0">
-                <a:solidFill>
-                  <a:srgbClr val="102A30"/>
-                </a:solidFill>
-                <a:latin typeface="Helvetica Neue"/>
-                <a:ea typeface="Helvetica Neue"/>
-                <a:cs typeface="Helvetica Neue"/>
-              </a:rPr>
-              <a:t>сохранены в репозитории.</a:t>
-            </a:r>
-          </a:p>
-          <a:p xmlns:a="http://schemas.openxmlformats.org/drawingml/2006/main">
-            <a:r>
-              <a:t/>
-            </a:r>
-          </a:p>
-          <a:p xmlns:a="http://schemas.openxmlformats.org/drawingml/2006/main">
-            <a:pPr>
-              <a:defRPr sz="2100" b="0">
-                <a:solidFill>
-                  <a:srgbClr val="102A30"/>
-                </a:solidFill>
-                <a:latin typeface="Helvetica Neue"/>
-                <a:ea typeface="Helvetica Neue"/>
-                <a:cs typeface="Helvetica Neue"/>
-              </a:defRPr>
-            </a:pPr>
-            <a:r>
-              <a:rPr sz="2100" b="0">
-                <a:solidFill>
-                  <a:srgbClr val="102A30"/>
-                </a:solidFill>
-                <a:latin typeface="Helvetica Neue"/>
-                <a:ea typeface="Helvetica Neue"/>
-                <a:cs typeface="Helvetica Neue"/>
-              </a:rPr>
-              <a:t>Срез проверки: 04.10.2026</a:t>
-            </a:r>
-          </a:p>
-        </p:txBody>
-      </p:sp>
-      <p:sp>
-        <p:nvSpPr>
-          <p:cNvPr id="14" name="">
-            <a:extLst xmlns:a="http://schemas.openxmlformats.org/drawingml/2006/main">
-              <a:ext uri="{FF2B5EF4-FFF2-40B4-BE49-F238E27FC236}">
-                <a16:creationId xmlns:a16="http://schemas.microsoft.com/office/drawing/2014/main" id="{452308AF-18C7-4A31-BE20-1C5DD28A1318}"/>
-              </a:ext>
-            </a:extLst>
-          </p:cNvPr>
-          <p:cNvSpPr>
-            <a:spLocks xmlns:a="http://schemas.openxmlformats.org/drawingml/2006/main" noGrp="1"/>
-          </p:cNvSpPr>
-          <p:nvPr/>
-        </p:nvSpPr>
-        <p:spPr>
-          <a:xfrm xmlns:a="http://schemas.openxmlformats.org/drawingml/2006/main">
-            <a:off x="6191250" y="2009775"/>
-            <a:ext cx="5410200" cy="952500"/>
-          </a:xfrm>
-          <a:prstGeom xmlns:a="http://schemas.openxmlformats.org/drawingml/2006/main" prst="rect">
-            <a:avLst/>
-          </a:prstGeom>
-          <a:noFill xmlns:a="http://schemas.openxmlformats.org/drawingml/2006/main"/>
-          <a:ln xmlns:a="http://schemas.openxmlformats.org/drawingml/2006/main" w="0">
-            <a:noFill/>
-          </a:ln>
-        </p:spPr>
-        <p:txBody>
-          <a:bodyPr xmlns:a="http://schemas.openxmlformats.org/drawingml/2006/main">
-            <a:noAutofit/>
-          </a:bodyPr>
-          <a:lstStyle xmlns:a="http://schemas.openxmlformats.org/drawingml/2006/main"/>
-          <a:p xmlns:a="http://schemas.openxmlformats.org/drawingml/2006/main">
-            <a:pPr>
-              <a:defRPr sz="2700" b="1">
-                <a:solidFill>
-                  <a:srgbClr val="102A30"/>
-                </a:solidFill>
-                <a:latin typeface="Helvetica Neue"/>
-                <a:ea typeface="Helvetica Neue"/>
-                <a:cs typeface="Helvetica Neue"/>
-              </a:defRPr>
-            </a:pPr>
-            <a:r>
-              <a:rPr sz="2700" b="1">
-                <a:solidFill>
-                  <a:srgbClr val="102A30"/>
-                </a:solidFill>
-                <a:latin typeface="Helvetica Neue"/>
-                <a:ea typeface="Helvetica Neue"/>
-                <a:cs typeface="Helvetica Neue"/>
-              </a:rPr>
-              <a:t>Нет сохранённой</a:t>
-            </a:r>
-          </a:p>
-          <a:p xmlns:a="http://schemas.openxmlformats.org/drawingml/2006/main">
-            <a:pPr>
-              <a:defRPr sz="2700" b="1">
-                <a:solidFill>
-                  <a:srgbClr val="102A30"/>
-                </a:solidFill>
-                <a:latin typeface="Helvetica Neue"/>
-                <a:ea typeface="Helvetica Neue"/>
-                <a:cs typeface="Helvetica Neue"/>
-              </a:defRPr>
-            </a:pPr>
-            <a:r>
-              <a:rPr sz="2700" b="1">
-                <a:solidFill>
-                  <a:srgbClr val="102A30"/>
-                </a:solidFill>
-                <a:latin typeface="Helvetica Neue"/>
-                <a:ea typeface="Helvetica Neue"/>
-                <a:cs typeface="Helvetica Neue"/>
-              </a:rPr>
-              <a:t>проверки партнёром</a:t>
-            </a:r>
-          </a:p>
-        </p:txBody>
-      </p:sp>
-      <p:sp>
-        <p:nvSpPr>
-          <p:cNvPr id="15" name="">
-            <a:extLst xmlns:a="http://schemas.openxmlformats.org/drawingml/2006/main">
-              <a:ext uri="{FF2B5EF4-FFF2-40B4-BE49-F238E27FC236}">
-                <a16:creationId xmlns:a16="http://schemas.microsoft.com/office/drawing/2014/main" id="{D9C2119C-3533-4180-9019-ACC86707BC3C}"/>
-              </a:ext>
-            </a:extLst>
-          </p:cNvPr>
-          <p:cNvSpPr>
-            <a:spLocks xmlns:a="http://schemas.openxmlformats.org/drawingml/2006/main" noGrp="1"/>
-          </p:cNvSpPr>
-          <p:nvPr/>
-        </p:nvSpPr>
-        <p:spPr>
-          <a:xfrm xmlns:a="http://schemas.openxmlformats.org/drawingml/2006/main">
-            <a:off x="6191250" y="3162300"/>
-            <a:ext cx="5381625" cy="1714500"/>
-          </a:xfrm>
-          <a:prstGeom xmlns:a="http://schemas.openxmlformats.org/drawingml/2006/main" prst="rect">
-            <a:avLst/>
-          </a:prstGeom>
-          <a:noFill xmlns:a="http://schemas.openxmlformats.org/drawingml/2006/main"/>
-          <a:ln xmlns:a="http://schemas.openxmlformats.org/drawingml/2006/main" w="0">
-            <a:noFill/>
-          </a:ln>
-        </p:spPr>
-        <p:txBody>
-          <a:bodyPr xmlns:a="http://schemas.openxmlformats.org/drawingml/2006/main">
-            <a:noAutofit/>
-          </a:bodyPr>
-          <a:lstStyle xmlns:a="http://schemas.openxmlformats.org/drawingml/2006/main"/>
-          <a:p xmlns:a="http://schemas.openxmlformats.org/drawingml/2006/main">
-            <a:pPr>
-              <a:defRPr sz="2100" b="0">
-                <a:solidFill>
-                  <a:srgbClr val="102A30"/>
-                </a:solidFill>
-                <a:latin typeface="Helvetica Neue"/>
-                <a:ea typeface="Helvetica Neue"/>
-                <a:cs typeface="Helvetica Neue"/>
-              </a:defRPr>
-            </a:pPr>
-            <a:r>
-              <a:rPr sz="2100" b="0">
-                <a:solidFill>
-                  <a:srgbClr val="102A30"/>
-                </a:solidFill>
-                <a:latin typeface="Helvetica Neue"/>
-                <a:ea typeface="Helvetica Neue"/>
-                <a:cs typeface="Helvetica Neue"/>
-              </a:rPr>
-              <a:t>Код и тест могут повторять</a:t>
-            </a:r>
-          </a:p>
-          <a:p xmlns:a="http://schemas.openxmlformats.org/drawingml/2006/main">
-            <a:pPr>
-              <a:defRPr sz="2100" b="0">
-                <a:solidFill>
-                  <a:srgbClr val="102A30"/>
-                </a:solidFill>
-                <a:latin typeface="Helvetica Neue"/>
-                <a:ea typeface="Helvetica Neue"/>
-                <a:cs typeface="Helvetica Neue"/>
-              </a:defRPr>
-            </a:pPr>
-            <a:r>
-              <a:rPr sz="2100" b="0">
-                <a:solidFill>
-                  <a:srgbClr val="102A30"/>
-                </a:solidFill>
-                <a:latin typeface="Helvetica Neue"/>
-                <a:ea typeface="Helvetica Neue"/>
-                <a:cs typeface="Helvetica Neue"/>
-              </a:rPr>
-              <a:t>одну и ту же ошибку.</a:t>
-            </a:r>
-          </a:p>
-          <a:p xmlns:a="http://schemas.openxmlformats.org/drawingml/2006/main">
-            <a:r>
-              <a:t/>
-            </a:r>
-          </a:p>
-          <a:p xmlns:a="http://schemas.openxmlformats.org/drawingml/2006/main">
-            <a:pPr>
-              <a:defRPr sz="2100" b="0">
-                <a:solidFill>
-                  <a:srgbClr val="102A30"/>
-                </a:solidFill>
-                <a:latin typeface="Helvetica Neue"/>
-                <a:ea typeface="Helvetica Neue"/>
-                <a:cs typeface="Helvetica Neue"/>
-              </a:defRPr>
-            </a:pPr>
-            <a:r>
-              <a:rPr sz="2100" b="0">
-                <a:solidFill>
-                  <a:srgbClr val="102A30"/>
-                </a:solidFill>
-                <a:latin typeface="Helvetica Neue"/>
-                <a:ea typeface="Helvetica Neue"/>
-                <a:cs typeface="Helvetica Neue"/>
-              </a:rPr>
-              <a:t>Нужно независимо проверить</a:t>
-            </a:r>
-          </a:p>
-          <a:p xmlns:a="http://schemas.openxmlformats.org/drawingml/2006/main">
-            <a:pPr>
-              <a:defRPr sz="2100" b="0">
-                <a:solidFill>
-                  <a:srgbClr val="102A30"/>
-                </a:solidFill>
-                <a:latin typeface="Helvetica Neue"/>
-                <a:ea typeface="Helvetica Neue"/>
-                <a:cs typeface="Helvetica Neue"/>
-              </a:defRPr>
-            </a:pPr>
-            <a:r>
-              <a:rPr sz="2100" b="0">
-                <a:solidFill>
-                  <a:srgbClr val="102A30"/>
-                </a:solidFill>
-                <a:latin typeface="Helvetica Neue"/>
-                <a:ea typeface="Helvetica Neue"/>
-                <a:cs typeface="Helvetica Neue"/>
-              </a:rPr>
-              <a:t>права пользователей.</a:t>
-            </a:r>
-          </a:p>
-        </p:txBody>
-      </p:sp>
-      <p:sp>
-        <p:nvSpPr>
-          <p:cNvPr id="16" name="">
-            <a:extLst xmlns:a="http://schemas.openxmlformats.org/drawingml/2006/main">
-              <a:ext uri="{FF2B5EF4-FFF2-40B4-BE49-F238E27FC236}">
-                <a16:creationId xmlns:a16="http://schemas.microsoft.com/office/drawing/2014/main" id="{2D232191-E767-431C-9E30-B38E784F1AE3}"/>
-              </a:ext>
-            </a:extLst>
-          </p:cNvPr>
-          <p:cNvSpPr>
-            <a:spLocks xmlns:a="http://schemas.openxmlformats.org/drawingml/2006/main" noGrp="1"/>
-          </p:cNvSpPr>
-          <p:nvPr/>
-        </p:nvSpPr>
-        <p:spPr>
-          <a:xfrm xmlns:a="http://schemas.openxmlformats.org/drawingml/2006/main">
-            <a:off x="609600" y="5276850"/>
-            <a:ext cx="10972800" cy="600075"/>
-          </a:xfrm>
-          <a:prstGeom xmlns:a="http://schemas.openxmlformats.org/drawingml/2006/main" prst="rect">
-            <a:avLst/>
-          </a:prstGeom>
-          <a:noFill xmlns:a="http://schemas.openxmlformats.org/drawingml/2006/main"/>
-          <a:ln xmlns:a="http://schemas.openxmlformats.org/drawingml/2006/main" w="0">
-            <a:noFill/>
-          </a:ln>
-        </p:spPr>
-        <p:txBody>
-          <a:bodyPr xmlns:a="http://schemas.openxmlformats.org/drawingml/2006/main">
-            <a:noAutofit/>
-          </a:bodyPr>
-          <a:lstStyle xmlns:a="http://schemas.openxmlformats.org/drawingml/2006/main"/>
-          <a:p xmlns:a="http://schemas.openxmlformats.org/drawingml/2006/main">
-            <a:pPr>
-              <a:defRPr sz="2250" b="1">
-                <a:solidFill>
-                  <a:srgbClr val="26756C"/>
-                </a:solidFill>
-                <a:latin typeface="Helvetica Neue"/>
-                <a:ea typeface="Helvetica Neue"/>
-                <a:cs typeface="Helvetica Neue"/>
-              </a:defRPr>
-            </a:pPr>
-            <a:r>
-              <a:rPr sz="2250" b="1">
-                <a:solidFill>
-                  <a:srgbClr val="26756C"/>
-                </a:solidFill>
-                <a:latin typeface="Helvetica Neue"/>
-                <a:ea typeface="Helvetica Neue"/>
-                <a:cs typeface="Helvetica Neue"/>
-              </a:rPr>
-              <a:t>Первый шаг: каждый проверяет важный результат другого.</a:t>
-            </a:r>
-          </a:p>
-        </p:txBody>
-      </p:sp>
-      <p:sp>
-        <p:nvSpPr>
-          <p:cNvPr id="17" name="">
-            <a:extLst xmlns:a="http://schemas.openxmlformats.org/drawingml/2006/main">
-              <a:ext uri="{FF2B5EF4-FFF2-40B4-BE49-F238E27FC236}">
-                <a16:creationId xmlns:a16="http://schemas.microsoft.com/office/drawing/2014/main" id="{7AD3F8C9-BE81-437B-BFDF-F86277668C61}"/>
-              </a:ext>
-            </a:extLst>
-          </p:cNvPr>
-          <p:cNvSpPr>
-            <a:spLocks xmlns:a="http://schemas.openxmlformats.org/drawingml/2006/main" noGrp="1"/>
-          </p:cNvSpPr>
-          <p:nvPr/>
-        </p:nvSpPr>
-        <p:spPr>
-          <a:xfrm xmlns:a="http://schemas.openxmlformats.org/drawingml/2006/main">
-            <a:off x="609600" y="5953125"/>
-            <a:ext cx="10972800" cy="333375"/>
-          </a:xfrm>
-          <a:prstGeom xmlns:a="http://schemas.openxmlformats.org/drawingml/2006/main" prst="rect">
-            <a:avLst/>
-          </a:prstGeom>
-          <a:noFill xmlns:a="http://schemas.openxmlformats.org/drawingml/2006/main"/>
-          <a:ln xmlns:a="http://schemas.openxmlformats.org/drawingml/2006/main" w="0">
-            <a:noFill/>
-          </a:ln>
-        </p:spPr>
-        <p:txBody>
-          <a:bodyPr xmlns:a="http://schemas.openxmlformats.org/drawingml/2006/main">
-            <a:noAutofit/>
-          </a:bodyPr>
-          <a:lstStyle xmlns:a="http://schemas.openxmlformats.org/drawingml/2006/main"/>
-          <a:p xmlns:a="http://schemas.openxmlformats.org/drawingml/2006/main">
-            <a:pPr>
-              <a:defRPr sz="1875" b="0">
-                <a:solidFill>
-                  <a:srgbClr val="59686B"/>
-                </a:solidFill>
-                <a:latin typeface="Helvetica Neue"/>
-                <a:ea typeface="Helvetica Neue"/>
-                <a:cs typeface="Helvetica Neue"/>
-              </a:defRPr>
-            </a:pPr>
-            <a:r>
-              <a:rPr sz="1875" b="0">
-                <a:solidFill>
-                  <a:srgbClr val="59686B"/>
-                </a:solidFill>
-                <a:latin typeface="Helvetica Neue"/>
-                <a:ea typeface="Helvetica Neue"/>
-                <a:cs typeface="Helvetica Neue"/>
-              </a:rPr>
-              <a:t>Также в плане: проверка библиотек и установка из архива.</a:t>
-            </a:r>
-          </a:p>
-        </p:txBody>
-      </p:sp>
-    </p:spTree>
-    <p:extLst>
-      <p:ext uri="{BB962C8B-B14F-4D97-AF65-F5344CB8AC3E}">
-        <p14:creationId xmlns:p14="http://schemas.microsoft.com/office/powerpoint/2010/main" val="950495193"/>
-      </p:ext>
-    </p:extLst>
-  </p:cSld>
-</p:sld>
-</file>
-
-<file path=ppt/slides/slide6.xml><?xml version="1.0" encoding="utf-8"?>
-<p:sld xmlns:p="http://schemas.openxmlformats.org/presentationml/2006/main">
-  <p:cSld>
-    <p:bg>
-      <p:bgPr>
-        <a:solidFill xmlns:a="http://schemas.openxmlformats.org/drawingml/2006/main">
-          <a:srgbClr val="F7F6F1"/>
-        </a:solidFill>
-      </p:bgPr>
-    </p:bg>
-    <p:spTree>
-      <p:nvGrpSpPr>
-        <p:cNvPr id="1" name=""/>
-        <p:cNvGrpSpPr/>
-        <p:nvPr/>
-      </p:nvGrpSpPr>
-      <p:grpSpPr>
-        <a:xfrm xmlns:a="http://schemas.openxmlformats.org/drawingml/2006/main"/>
-      </p:grpSpPr>
-      <p:sp>
-        <p:nvSpPr>
-          <p:cNvPr id="11" name="">
-            <a:extLst xmlns:a="http://schemas.openxmlformats.org/drawingml/2006/main">
-              <a:ext uri="{FF2B5EF4-FFF2-40B4-BE49-F238E27FC236}">
-                <a16:creationId xmlns:a16="http://schemas.microsoft.com/office/drawing/2014/main" id="{2CD12E6B-543E-40BB-8C37-F1BF5E1EC074}"/>
-              </a:ext>
-            </a:extLst>
-          </p:cNvPr>
-          <p:cNvSpPr>
-            <a:spLocks xmlns:a="http://schemas.openxmlformats.org/drawingml/2006/main" noGrp="1"/>
-          </p:cNvSpPr>
-          <p:nvPr/>
-        </p:nvSpPr>
-        <p:spPr>
-          <a:xfrm xmlns:a="http://schemas.openxmlformats.org/drawingml/2006/main">
-            <a:off x="609600" y="304800"/>
-            <a:ext cx="10763250" cy="266700"/>
-          </a:xfrm>
-          <a:prstGeom xmlns:a="http://schemas.openxmlformats.org/drawingml/2006/main" prst="rect">
-            <a:avLst/>
-          </a:prstGeom>
-          <a:noFill xmlns:a="http://schemas.openxmlformats.org/drawingml/2006/main"/>
-          <a:ln xmlns:a="http://schemas.openxmlformats.org/drawingml/2006/main" w="0">
-            <a:noFill/>
-          </a:ln>
-        </p:spPr>
-        <p:txBody>
-          <a:bodyPr xmlns:a="http://schemas.openxmlformats.org/drawingml/2006/main">
-            <a:noAutofit/>
-          </a:bodyPr>
-          <a:lstStyle xmlns:a="http://schemas.openxmlformats.org/drawingml/2006/main"/>
-          <a:p xmlns:a="http://schemas.openxmlformats.org/drawingml/2006/main">
-            <a:pPr>
-              <a:buNone/>
-              <a:defRPr sz="1350" b="1">
-                <a:solidFill>
-                  <a:srgbClr val="26756C"/>
-                </a:solidFill>
-                <a:latin typeface="Helvetica Neue"/>
-                <a:ea typeface="Helvetica Neue"/>
-                <a:cs typeface="Helvetica Neue"/>
-              </a:defRPr>
-            </a:pPr>
-            <a:r>
-              <a:rPr sz="1350" b="1">
-                <a:solidFill>
-                  <a:srgbClr val="26756C"/>
-                </a:solidFill>
-                <a:latin typeface="Helvetica Neue"/>
-                <a:ea typeface="Helvetica Neue"/>
-                <a:cs typeface="Helvetica Neue"/>
-              </a:rPr>
-              <a:t>КОНЦЕПЦИЯ БЕЗОПАСНОЙ РАЗРАБОТКИ</a:t>
-            </a:r>
-          </a:p>
-        </p:txBody>
-      </p:sp>
-      <p:sp>
-        <p:nvSpPr>
-          <p:cNvPr id="2" name="">
-            <a:extLst xmlns:a="http://schemas.openxmlformats.org/drawingml/2006/main">
-              <a:ext uri="{FF2B5EF4-FFF2-40B4-BE49-F238E27FC236}">
-                <a16:creationId xmlns:a16="http://schemas.microsoft.com/office/drawing/2014/main" id="{1F1F4FC4-EE0D-4131-97DB-64897854A388}"/>
-              </a:ext>
-            </a:extLst>
-          </p:cNvPr>
-          <p:cNvSpPr>
-            <a:spLocks xmlns:a="http://schemas.openxmlformats.org/drawingml/2006/main" noGrp="1"/>
-          </p:cNvSpPr>
-          <p:nvPr/>
-        </p:nvSpPr>
-        <p:spPr>
-          <a:xfrm xmlns:a="http://schemas.openxmlformats.org/drawingml/2006/main">
-            <a:off x="609600" y="838200"/>
-            <a:ext cx="10972800" cy="990600"/>
-          </a:xfrm>
-          <a:prstGeom xmlns:a="http://schemas.openxmlformats.org/drawingml/2006/main" prst="rect">
-            <a:avLst/>
-          </a:prstGeom>
-          <a:noFill xmlns:a="http://schemas.openxmlformats.org/drawingml/2006/main"/>
-          <a:ln xmlns:a="http://schemas.openxmlformats.org/drawingml/2006/main" w="0">
-            <a:noFill/>
-          </a:ln>
-        </p:spPr>
-        <p:txBody>
-          <a:bodyPr xmlns:a="http://schemas.openxmlformats.org/drawingml/2006/main">
-            <a:noAutofit/>
-          </a:bodyPr>
-          <a:lstStyle xmlns:a="http://schemas.openxmlformats.org/drawingml/2006/main"/>
-          <a:p xmlns:a="http://schemas.openxmlformats.org/drawingml/2006/main">
-            <a:pPr>
-              <a:buNone/>
-              <a:defRPr sz="3300" b="1">
-                <a:solidFill>
-                  <a:srgbClr val="102A30"/>
-                </a:solidFill>
-                <a:latin typeface="Helvetica Neue"/>
-                <a:ea typeface="Helvetica Neue"/>
-                <a:cs typeface="Helvetica Neue"/>
-              </a:defRPr>
-            </a:pPr>
-            <a:r>
-              <a:rPr sz="3300" b="1">
-                <a:solidFill>
-                  <a:srgbClr val="102A30"/>
-                </a:solidFill>
-                <a:latin typeface="Helvetica Neue"/>
-                <a:ea typeface="Helvetica Neue"/>
-                <a:cs typeface="Helvetica Neue"/>
-              </a:rPr>
-              <a:t>Как проверяем изменения</a:t>
-            </a:r>
-          </a:p>
-        </p:txBody>
-      </p:sp>
-      <p:sp>
-        <p:nvSpPr>
-          <p:cNvPr id="3" name="">
-            <a:extLst xmlns:a="http://schemas.openxmlformats.org/drawingml/2006/main">
-              <a:ext uri="{FF2B5EF4-FFF2-40B4-BE49-F238E27FC236}">
-                <a16:creationId xmlns:a16="http://schemas.microsoft.com/office/drawing/2014/main" id="{7E06421F-B56C-4E3A-81AA-03E620BFACAE}"/>
-              </a:ext>
-            </a:extLst>
-          </p:cNvPr>
-          <p:cNvSpPr>
-            <a:spLocks xmlns:a="http://schemas.openxmlformats.org/drawingml/2006/main" noGrp="1"/>
-          </p:cNvSpPr>
-          <p:nvPr/>
-        </p:nvSpPr>
-        <p:spPr>
-          <a:xfrm xmlns:a="http://schemas.openxmlformats.org/drawingml/2006/main">
-            <a:off x="609600" y="6372225"/>
-            <a:ext cx="10001250" cy="247650"/>
-          </a:xfrm>
-          <a:prstGeom xmlns:a="http://schemas.openxmlformats.org/drawingml/2006/main" prst="rect">
-            <a:avLst/>
-          </a:prstGeom>
-          <a:noFill xmlns:a="http://schemas.openxmlformats.org/drawingml/2006/main"/>
-          <a:ln xmlns:a="http://schemas.openxmlformats.org/drawingml/2006/main" w="0">
-            <a:noFill/>
-          </a:ln>
-        </p:spPr>
-        <p:txBody>
-          <a:bodyPr xmlns:a="http://schemas.openxmlformats.org/drawingml/2006/main">
-            <a:noAutofit/>
-          </a:bodyPr>
-          <a:lstStyle xmlns:a="http://schemas.openxmlformats.org/drawingml/2006/main"/>
-          <a:p xmlns:a="http://schemas.openxmlformats.org/drawingml/2006/main">
-            <a:pPr>
-              <a:buNone/>
-              <a:defRPr sz="1350" b="0">
-                <a:solidFill>
-                  <a:srgbClr val="59686B"/>
-                </a:solidFill>
-                <a:latin typeface="Helvetica Neue"/>
-                <a:ea typeface="Helvetica Neue"/>
-                <a:cs typeface="Helvetica Neue"/>
-              </a:defRPr>
-            </a:pPr>
-            <a:r>
-              <a:rPr sz="1350" b="0">
-                <a:solidFill>
-                  <a:srgbClr val="59686B"/>
-                </a:solidFill>
-                <a:latin typeface="Helvetica Neue"/>
-                <a:ea typeface="Helvetica Neue"/>
-                <a:cs typeface="Helvetica Neue"/>
-              </a:rPr>
-              <a:t>ЯвкаИБ / TaskFlow / ЭК1</a:t>
-            </a:r>
-          </a:p>
-        </p:txBody>
-      </p:sp>
-      <p:sp>
-        <p:nvSpPr>
-          <p:cNvPr id="4" name="">
-            <a:extLst xmlns:a="http://schemas.openxmlformats.org/drawingml/2006/main">
-              <a:ext uri="{FF2B5EF4-FFF2-40B4-BE49-F238E27FC236}">
-                <a16:creationId xmlns:a16="http://schemas.microsoft.com/office/drawing/2014/main" id="{507D2BF9-671A-4A48-8268-793497F6835C}"/>
-              </a:ext>
-            </a:extLst>
-          </p:cNvPr>
-          <p:cNvSpPr>
-            <a:spLocks xmlns:a="http://schemas.openxmlformats.org/drawingml/2006/main" noGrp="1"/>
-          </p:cNvSpPr>
-          <p:nvPr/>
-        </p:nvSpPr>
-        <p:spPr>
-          <a:xfrm xmlns:a="http://schemas.openxmlformats.org/drawingml/2006/main">
-            <a:off x="11029950" y="6324600"/>
-            <a:ext cx="619125" cy="333375"/>
-          </a:xfrm>
-          <a:prstGeom xmlns:a="http://schemas.openxmlformats.org/drawingml/2006/main" prst="rect">
-            <a:avLst/>
-          </a:prstGeom>
-          <a:noFill xmlns:a="http://schemas.openxmlformats.org/drawingml/2006/main"/>
-          <a:ln xmlns:a="http://schemas.openxmlformats.org/drawingml/2006/main" w="0">
-            <a:noFill/>
-          </a:ln>
-        </p:spPr>
-        <p:txBody>
-          <a:bodyPr xmlns:a="http://schemas.openxmlformats.org/drawingml/2006/main">
-            <a:noAutofit/>
-          </a:bodyPr>
-          <a:lstStyle xmlns:a="http://schemas.openxmlformats.org/drawingml/2006/main"/>
-          <a:p xmlns:a="http://schemas.openxmlformats.org/drawingml/2006/main">
-            <a:pPr>
-              <a:buNone/>
-              <a:defRPr sz="1800" b="1">
-                <a:solidFill>
-                  <a:srgbClr val="26756C"/>
-                </a:solidFill>
-                <a:latin typeface="Helvetica Neue"/>
-                <a:ea typeface="Helvetica Neue"/>
-                <a:cs typeface="Helvetica Neue"/>
-              </a:defRPr>
-            </a:pPr>
-            <a:r>
-              <a:rPr sz="1800" b="1">
-                <a:solidFill>
-                  <a:srgbClr val="26756C"/>
-                </a:solidFill>
-                <a:latin typeface="Helvetica Neue"/>
-                <a:ea typeface="Helvetica Neue"/>
-                <a:cs typeface="Helvetica Neue"/>
-              </a:rPr>
-              <a:t>06</a:t>
-            </a:r>
-          </a:p>
-        </p:txBody>
-      </p:sp>
-      <p:sp>
-        <p:nvSpPr>
-          <p:cNvPr id="12" name="">
-            <a:extLst xmlns:a="http://schemas.openxmlformats.org/drawingml/2006/main">
-              <a:ext uri="{FF2B5EF4-FFF2-40B4-BE49-F238E27FC236}">
-                <a16:creationId xmlns:a16="http://schemas.microsoft.com/office/drawing/2014/main" id="{76AA19FD-CB8B-4010-A65D-F881CC0AF7E4}"/>
-              </a:ext>
-            </a:extLst>
-          </p:cNvPr>
-          <p:cNvSpPr>
-            <a:spLocks xmlns:a="http://schemas.openxmlformats.org/drawingml/2006/main" noGrp="1"/>
-          </p:cNvSpPr>
-          <p:nvPr/>
-        </p:nvSpPr>
-        <p:spPr>
-          <a:xfrm xmlns:a="http://schemas.openxmlformats.org/drawingml/2006/main">
-            <a:off x="609600" y="2009775"/>
-            <a:ext cx="5048250" cy="485775"/>
-          </a:xfrm>
-          <a:prstGeom xmlns:a="http://schemas.openxmlformats.org/drawingml/2006/main" prst="rect">
-            <a:avLst/>
-          </a:prstGeom>
-          <a:noFill xmlns:a="http://schemas.openxmlformats.org/drawingml/2006/main"/>
-          <a:ln xmlns:a="http://schemas.openxmlformats.org/drawingml/2006/main" w="0">
-            <a:noFill/>
-          </a:ln>
-        </p:spPr>
-        <p:txBody>
-          <a:bodyPr xmlns:a="http://schemas.openxmlformats.org/drawingml/2006/main">
-            <a:noAutofit/>
-          </a:bodyPr>
-          <a:lstStyle xmlns:a="http://schemas.openxmlformats.org/drawingml/2006/main"/>
-          <a:p xmlns:a="http://schemas.openxmlformats.org/drawingml/2006/main">
-            <a:pPr>
-              <a:defRPr sz="2550" b="1">
-                <a:solidFill>
-                  <a:srgbClr val="26756C"/>
-                </a:solidFill>
-                <a:latin typeface="Helvetica Neue"/>
-                <a:ea typeface="Helvetica Neue"/>
-                <a:cs typeface="Helvetica Neue"/>
-              </a:defRPr>
-            </a:pPr>
-            <a:r>
-              <a:rPr sz="2550" b="1">
-                <a:solidFill>
-                  <a:srgbClr val="26756C"/>
-                </a:solidFill>
-                <a:latin typeface="Helvetica Neue"/>
-                <a:ea typeface="Helvetica Neue"/>
-                <a:cs typeface="Helvetica Neue"/>
-              </a:rPr>
-              <a:t>Порядок работы</a:t>
-            </a:r>
-          </a:p>
-        </p:txBody>
-      </p:sp>
-      <p:sp>
-        <p:nvSpPr>
-          <p:cNvPr id="13" name="">
-            <a:extLst xmlns:a="http://schemas.openxmlformats.org/drawingml/2006/main">
-              <a:ext uri="{FF2B5EF4-FFF2-40B4-BE49-F238E27FC236}">
-                <a16:creationId xmlns:a16="http://schemas.microsoft.com/office/drawing/2014/main" id="{E23F74E6-030A-48DB-9B21-EE4AD77241E4}"/>
-              </a:ext>
-            </a:extLst>
-          </p:cNvPr>
-          <p:cNvSpPr>
-            <a:spLocks xmlns:a="http://schemas.openxmlformats.org/drawingml/2006/main" noGrp="1"/>
-          </p:cNvSpPr>
-          <p:nvPr/>
-        </p:nvSpPr>
-        <p:spPr>
-          <a:xfrm xmlns:a="http://schemas.openxmlformats.org/drawingml/2006/main">
-            <a:off x="609600" y="2724150"/>
-            <a:ext cx="5381625" cy="2209800"/>
-          </a:xfrm>
-          <a:prstGeom xmlns:a="http://schemas.openxmlformats.org/drawingml/2006/main" prst="rect">
-            <a:avLst/>
-          </a:prstGeom>
-          <a:noFill xmlns:a="http://schemas.openxmlformats.org/drawingml/2006/main"/>
-          <a:ln xmlns:a="http://schemas.openxmlformats.org/drawingml/2006/main" w="0">
-            <a:noFill/>
-          </a:ln>
-        </p:spPr>
-        <p:txBody>
-          <a:bodyPr xmlns:a="http://schemas.openxmlformats.org/drawingml/2006/main">
-            <a:noAutofit/>
-          </a:bodyPr>
-          <a:lstStyle xmlns:a="http://schemas.openxmlformats.org/drawingml/2006/main"/>
-          <a:p xmlns:a="http://schemas.openxmlformats.org/drawingml/2006/main">
-            <a:pPr>
-              <a:defRPr sz="2100" b="0">
-                <a:solidFill>
-                  <a:srgbClr val="102A30"/>
-                </a:solidFill>
-                <a:latin typeface="Helvetica Neue"/>
-                <a:ea typeface="Helvetica Neue"/>
-                <a:cs typeface="Helvetica Neue"/>
-              </a:defRPr>
-            </a:pPr>
-            <a:r>
-              <a:rPr sz="2100" b="0">
-                <a:solidFill>
-                  <a:srgbClr val="102A30"/>
-                </a:solidFill>
-                <a:latin typeface="Helvetica Neue"/>
-                <a:ea typeface="Helvetica Neue"/>
-                <a:cs typeface="Helvetica Neue"/>
-              </a:rPr>
-              <a:t>1. Автор описывает нужное поведение.</a:t>
-            </a:r>
-          </a:p>
-          <a:p xmlns:a="http://schemas.openxmlformats.org/drawingml/2006/main">
-            <a:pPr>
-              <a:defRPr sz="2100" b="0">
-                <a:solidFill>
-                  <a:srgbClr val="102A30"/>
-                </a:solidFill>
-                <a:latin typeface="Helvetica Neue"/>
-                <a:ea typeface="Helvetica Neue"/>
-                <a:cs typeface="Helvetica Neue"/>
-              </a:defRPr>
-            </a:pPr>
-            <a:r>
-              <a:rPr sz="2100" b="0">
-                <a:solidFill>
-                  <a:srgbClr val="102A30"/>
-                </a:solidFill>
-                <a:latin typeface="Helvetica Neue"/>
-                <a:ea typeface="Helvetica Neue"/>
-                <a:cs typeface="Helvetica Neue"/>
-              </a:rPr>
-              <a:t>2. Меняет код и запускает тесты.</a:t>
-            </a:r>
-          </a:p>
-          <a:p xmlns:a="http://schemas.openxmlformats.org/drawingml/2006/main">
-            <a:pPr>
-              <a:defRPr sz="2100" b="0">
-                <a:solidFill>
-                  <a:srgbClr val="102A30"/>
-                </a:solidFill>
-                <a:latin typeface="Helvetica Neue"/>
-                <a:ea typeface="Helvetica Neue"/>
-                <a:cs typeface="Helvetica Neue"/>
-              </a:defRPr>
-            </a:pPr>
-            <a:r>
-              <a:rPr sz="2100" b="0">
-                <a:solidFill>
-                  <a:srgbClr val="102A30"/>
-                </a:solidFill>
-                <a:latin typeface="Helvetica Neue"/>
-                <a:ea typeface="Helvetica Neue"/>
-                <a:cs typeface="Helvetica Neue"/>
-              </a:rPr>
-              <a:t>3. Партнёр читает код и повторяет</a:t>
-            </a:r>
-          </a:p>
-          <a:p xmlns:a="http://schemas.openxmlformats.org/drawingml/2006/main">
-            <a:pPr>
-              <a:defRPr sz="2100" b="0">
-                <a:solidFill>
-                  <a:srgbClr val="102A30"/>
-                </a:solidFill>
-                <a:latin typeface="Helvetica Neue"/>
-                <a:ea typeface="Helvetica Neue"/>
-                <a:cs typeface="Helvetica Neue"/>
-              </a:defRPr>
-            </a:pPr>
-            <a:r>
-              <a:rPr sz="2100" b="0">
-                <a:solidFill>
-                  <a:srgbClr val="102A30"/>
-                </a:solidFill>
-                <a:latin typeface="Helvetica Neue"/>
-                <a:ea typeface="Helvetica Neue"/>
-                <a:cs typeface="Helvetica Neue"/>
-              </a:rPr>
-              <a:t>    важную проверку.</a:t>
-            </a:r>
-          </a:p>
-          <a:p xmlns:a="http://schemas.openxmlformats.org/drawingml/2006/main">
-            <a:pPr>
-              <a:defRPr sz="2100" b="0">
-                <a:solidFill>
-                  <a:srgbClr val="102A30"/>
-                </a:solidFill>
-                <a:latin typeface="Helvetica Neue"/>
-                <a:ea typeface="Helvetica Neue"/>
-                <a:cs typeface="Helvetica Neue"/>
-              </a:defRPr>
-            </a:pPr>
-            <a:r>
-              <a:rPr sz="2100" b="0">
-                <a:solidFill>
-                  <a:srgbClr val="102A30"/>
-                </a:solidFill>
-                <a:latin typeface="Helvetica Neue"/>
-                <a:ea typeface="Helvetica Neue"/>
-                <a:cs typeface="Helvetica Neue"/>
-              </a:rPr>
-              <a:t>4. Сохраняем результат для версии.</a:t>
-            </a:r>
-          </a:p>
-        </p:txBody>
-      </p:sp>
-      <p:sp>
-        <p:nvSpPr>
-          <p:cNvPr id="14" name="">
-            <a:extLst xmlns:a="http://schemas.openxmlformats.org/drawingml/2006/main">
-              <a:ext uri="{FF2B5EF4-FFF2-40B4-BE49-F238E27FC236}">
-                <a16:creationId xmlns:a16="http://schemas.microsoft.com/office/drawing/2014/main" id="{529B33DD-76D7-4B46-A4AA-1C6AE0591145}"/>
-              </a:ext>
-            </a:extLst>
-          </p:cNvPr>
-          <p:cNvSpPr>
-            <a:spLocks xmlns:a="http://schemas.openxmlformats.org/drawingml/2006/main" noGrp="1"/>
-          </p:cNvSpPr>
-          <p:nvPr/>
-        </p:nvSpPr>
-        <p:spPr>
-          <a:xfrm xmlns:a="http://schemas.openxmlformats.org/drawingml/2006/main">
-            <a:off x="6419850" y="2009775"/>
-            <a:ext cx="5143500" cy="485775"/>
-          </a:xfrm>
-          <a:prstGeom xmlns:a="http://schemas.openxmlformats.org/drawingml/2006/main" prst="rect">
-            <a:avLst/>
-          </a:prstGeom>
-          <a:noFill xmlns:a="http://schemas.openxmlformats.org/drawingml/2006/main"/>
-          <a:ln xmlns:a="http://schemas.openxmlformats.org/drawingml/2006/main" w="0">
-            <a:noFill/>
-          </a:ln>
-        </p:spPr>
-        <p:txBody>
-          <a:bodyPr xmlns:a="http://schemas.openxmlformats.org/drawingml/2006/main">
-            <a:noAutofit/>
-          </a:bodyPr>
-          <a:lstStyle xmlns:a="http://schemas.openxmlformats.org/drawingml/2006/main"/>
-          <a:p xmlns:a="http://schemas.openxmlformats.org/drawingml/2006/main">
-            <a:pPr>
-              <a:defRPr sz="2550" b="1">
-                <a:solidFill>
-                  <a:srgbClr val="26756C"/>
-                </a:solidFill>
-                <a:latin typeface="Helvetica Neue"/>
-                <a:ea typeface="Helvetica Neue"/>
-                <a:cs typeface="Helvetica Neue"/>
-              </a:defRPr>
-            </a:pPr>
-            <a:r>
-              <a:rPr sz="2550" b="1">
-                <a:solidFill>
-                  <a:srgbClr val="26756C"/>
-                </a:solidFill>
-                <a:latin typeface="Helvetica Neue"/>
-                <a:ea typeface="Helvetica Neue"/>
-                <a:cs typeface="Helvetica Neue"/>
-              </a:rPr>
-              <a:t>Пример: наблюдатель</a:t>
-            </a:r>
-          </a:p>
-        </p:txBody>
-      </p:sp>
-      <p:sp>
-        <p:nvSpPr>
-          <p:cNvPr id="15" name="">
-            <a:extLst xmlns:a="http://schemas.openxmlformats.org/drawingml/2006/main">
-              <a:ext uri="{FF2B5EF4-FFF2-40B4-BE49-F238E27FC236}">
-                <a16:creationId xmlns:a16="http://schemas.microsoft.com/office/drawing/2014/main" id="{F10CB677-5CD1-430F-BE1C-23CA6155F44C}"/>
-              </a:ext>
-            </a:extLst>
-          </p:cNvPr>
-          <p:cNvSpPr>
-            <a:spLocks xmlns:a="http://schemas.openxmlformats.org/drawingml/2006/main" noGrp="1"/>
-          </p:cNvSpPr>
-          <p:nvPr/>
-        </p:nvSpPr>
-        <p:spPr>
-          <a:xfrm xmlns:a="http://schemas.openxmlformats.org/drawingml/2006/main">
-            <a:off x="6419850" y="2724150"/>
-            <a:ext cx="5143500" cy="2095500"/>
-          </a:xfrm>
-          <a:prstGeom xmlns:a="http://schemas.openxmlformats.org/drawingml/2006/main" prst="rect">
-            <a:avLst/>
-          </a:prstGeom>
-          <a:noFill xmlns:a="http://schemas.openxmlformats.org/drawingml/2006/main"/>
-          <a:ln xmlns:a="http://schemas.openxmlformats.org/drawingml/2006/main" w="0">
-            <a:noFill/>
-          </a:ln>
-        </p:spPr>
-        <p:txBody>
-          <a:bodyPr xmlns:a="http://schemas.openxmlformats.org/drawingml/2006/main">
-            <a:noAutofit/>
-          </a:bodyPr>
-          <a:lstStyle xmlns:a="http://schemas.openxmlformats.org/drawingml/2006/main"/>
-          <a:p xmlns:a="http://schemas.openxmlformats.org/drawingml/2006/main">
-            <a:pPr>
-              <a:defRPr sz="2100" b="0">
-                <a:solidFill>
-                  <a:srgbClr val="102A30"/>
-                </a:solidFill>
-                <a:latin typeface="Helvetica Neue"/>
-                <a:ea typeface="Helvetica Neue"/>
-                <a:cs typeface="Helvetica Neue"/>
-              </a:defRPr>
-            </a:pPr>
-            <a:r>
-              <a:rPr sz="2100" b="0">
-                <a:solidFill>
-                  <a:srgbClr val="102A30"/>
-                </a:solidFill>
-                <a:latin typeface="Helvetica Neue"/>
-                <a:ea typeface="Helvetica Neue"/>
-                <a:cs typeface="Helvetica Neue"/>
-              </a:rPr>
-              <a:t>Пробуем изменить задачу</a:t>
-            </a:r>
-          </a:p>
-          <a:p xmlns:a="http://schemas.openxmlformats.org/drawingml/2006/main">
-            <a:pPr>
-              <a:defRPr sz="2100" b="0">
-                <a:solidFill>
-                  <a:srgbClr val="102A30"/>
-                </a:solidFill>
-                <a:latin typeface="Helvetica Neue"/>
-                <a:ea typeface="Helvetica Neue"/>
-                <a:cs typeface="Helvetica Neue"/>
-              </a:defRPr>
-            </a:pPr>
-            <a:r>
-              <a:rPr sz="2100" b="0">
-                <a:solidFill>
-                  <a:srgbClr val="102A30"/>
-                </a:solidFill>
-                <a:latin typeface="Helvetica Neue"/>
-                <a:ea typeface="Helvetica Neue"/>
-                <a:cs typeface="Helvetica Neue"/>
-              </a:rPr>
-              <a:t>прямым запросом к серверу.</a:t>
-            </a:r>
-          </a:p>
-          <a:p xmlns:a="http://schemas.openxmlformats.org/drawingml/2006/main">
-            <a:r>
-              <a:t/>
-            </a:r>
-          </a:p>
-          <a:p xmlns:a="http://schemas.openxmlformats.org/drawingml/2006/main">
-            <a:pPr>
-              <a:defRPr sz="2100" b="0">
-                <a:solidFill>
-                  <a:srgbClr val="102A30"/>
-                </a:solidFill>
-                <a:latin typeface="Helvetica Neue"/>
-                <a:ea typeface="Helvetica Neue"/>
-                <a:cs typeface="Helvetica Neue"/>
-              </a:defRPr>
-            </a:pPr>
-            <a:r>
-              <a:rPr sz="2100" b="0">
-                <a:solidFill>
-                  <a:srgbClr val="102A30"/>
-                </a:solidFill>
-                <a:latin typeface="Helvetica Neue"/>
-                <a:ea typeface="Helvetica Neue"/>
-                <a:cs typeface="Helvetica Neue"/>
-              </a:rPr>
-              <a:t>Ожидаем отказ.</a:t>
-            </a:r>
-          </a:p>
-          <a:p xmlns:a="http://schemas.openxmlformats.org/drawingml/2006/main">
-            <a:pPr>
-              <a:defRPr sz="2100" b="0">
-                <a:solidFill>
-                  <a:srgbClr val="102A30"/>
-                </a:solidFill>
-                <a:latin typeface="Helvetica Neue"/>
-                <a:ea typeface="Helvetica Neue"/>
-                <a:cs typeface="Helvetica Neue"/>
-              </a:defRPr>
-            </a:pPr>
-            <a:r>
-              <a:rPr sz="2100" b="0">
-                <a:solidFill>
-                  <a:srgbClr val="102A30"/>
-                </a:solidFill>
-                <a:latin typeface="Helvetica Neue"/>
-                <a:ea typeface="Helvetica Neue"/>
-                <a:cs typeface="Helvetica Neue"/>
-              </a:rPr>
-              <a:t>Данные остаются прежними.</a:t>
-            </a:r>
-          </a:p>
-        </p:txBody>
-      </p:sp>
-      <p:sp>
-        <p:nvSpPr>
-          <p:cNvPr id="16" name="">
-            <a:extLst xmlns:a="http://schemas.openxmlformats.org/drawingml/2006/main">
-              <a:ext uri="{FF2B5EF4-FFF2-40B4-BE49-F238E27FC236}">
-                <a16:creationId xmlns:a16="http://schemas.microsoft.com/office/drawing/2014/main" id="{F46AC114-CF0D-4E8C-A63F-A9FEA51CE709}"/>
-              </a:ext>
-            </a:extLst>
-          </p:cNvPr>
-          <p:cNvSpPr>
-            <a:spLocks xmlns:a="http://schemas.openxmlformats.org/drawingml/2006/main" noGrp="1"/>
-          </p:cNvSpPr>
-          <p:nvPr/>
-        </p:nvSpPr>
-        <p:spPr>
-          <a:xfrm xmlns:a="http://schemas.openxmlformats.org/drawingml/2006/main">
-            <a:off x="609600" y="5286375"/>
-            <a:ext cx="10972800" cy="600075"/>
-          </a:xfrm>
-          <a:prstGeom xmlns:a="http://schemas.openxmlformats.org/drawingml/2006/main" prst="rect">
-            <a:avLst/>
-          </a:prstGeom>
-          <a:noFill xmlns:a="http://schemas.openxmlformats.org/drawingml/2006/main"/>
-          <a:ln xmlns:a="http://schemas.openxmlformats.org/drawingml/2006/main" w="0">
-            <a:noFill/>
-          </a:ln>
-        </p:spPr>
-        <p:txBody>
-          <a:bodyPr xmlns:a="http://schemas.openxmlformats.org/drawingml/2006/main">
-            <a:noAutofit/>
-          </a:bodyPr>
-          <a:lstStyle xmlns:a="http://schemas.openxmlformats.org/drawingml/2006/main"/>
-          <a:p xmlns:a="http://schemas.openxmlformats.org/drawingml/2006/main">
-            <a:pPr>
-              <a:defRPr sz="2175" b="1">
-                <a:solidFill>
-                  <a:srgbClr val="26756C"/>
-                </a:solidFill>
-                <a:latin typeface="Helvetica Neue"/>
-                <a:ea typeface="Helvetica Neue"/>
-                <a:cs typeface="Helvetica Neue"/>
-              </a:defRPr>
-            </a:pPr>
-            <a:r>
-              <a:rPr sz="2175" b="1">
-                <a:solidFill>
-                  <a:srgbClr val="26756C"/>
-                </a:solidFill>
-                <a:latin typeface="Helvetica Neue"/>
-                <a:ea typeface="Helvetica Neue"/>
-                <a:cs typeface="Helvetica Neue"/>
-              </a:rPr>
-              <a:t>При нарушении прав или без проверки партнёра изменение ждёт.</a:t>
-            </a:r>
-          </a:p>
-        </p:txBody>
-      </p:sp>
-      <p:sp>
-        <p:nvSpPr>
-          <p:cNvPr id="17" name="">
-            <a:extLst xmlns:a="http://schemas.openxmlformats.org/drawingml/2006/main">
-              <a:ext uri="{FF2B5EF4-FFF2-40B4-BE49-F238E27FC236}">
-                <a16:creationId xmlns:a16="http://schemas.microsoft.com/office/drawing/2014/main" id="{3421A573-B973-44F3-AE0F-0E0657EEA533}"/>
-              </a:ext>
-            </a:extLst>
-          </p:cNvPr>
-          <p:cNvSpPr>
-            <a:spLocks xmlns:a="http://schemas.openxmlformats.org/drawingml/2006/main" noGrp="1"/>
-          </p:cNvSpPr>
-          <p:nvPr/>
-        </p:nvSpPr>
-        <p:spPr>
-          <a:xfrm xmlns:a="http://schemas.openxmlformats.org/drawingml/2006/main">
-            <a:off x="609600" y="5943600"/>
-            <a:ext cx="10972800" cy="352425"/>
-          </a:xfrm>
-          <a:prstGeom xmlns:a="http://schemas.openxmlformats.org/drawingml/2006/main" prst="rect">
-            <a:avLst/>
-          </a:prstGeom>
-          <a:noFill xmlns:a="http://schemas.openxmlformats.org/drawingml/2006/main"/>
-          <a:ln xmlns:a="http://schemas.openxmlformats.org/drawingml/2006/main" w="0">
-            <a:noFill/>
-          </a:ln>
-        </p:spPr>
-        <p:txBody>
-          <a:bodyPr xmlns:a="http://schemas.openxmlformats.org/drawingml/2006/main">
-            <a:noAutofit/>
-          </a:bodyPr>
-          <a:lstStyle xmlns:a="http://schemas.openxmlformats.org/drawingml/2006/main"/>
-          <a:p xmlns:a="http://schemas.openxmlformats.org/drawingml/2006/main">
-            <a:pPr>
-              <a:defRPr sz="1875" b="0">
-                <a:solidFill>
-                  <a:srgbClr val="59686B"/>
-                </a:solidFill>
-                <a:latin typeface="Helvetica Neue"/>
-                <a:ea typeface="Helvetica Neue"/>
-                <a:cs typeface="Helvetica Neue"/>
-              </a:defRPr>
-            </a:pPr>
-            <a:r>
-              <a:rPr sz="1875" b="0">
-                <a:solidFill>
-                  <a:srgbClr val="59686B"/>
-                </a:solidFill>
-                <a:latin typeface="Helvetica Neue"/>
-                <a:ea typeface="Helvetica Neue"/>
-                <a:cs typeface="Helvetica Neue"/>
-              </a:rPr>
-              <a:t>Перед выпуском: запуск из архива и общее решение по отчётам.</a:t>
-            </a:r>
-          </a:p>
-        </p:txBody>
-      </p:sp>
-    </p:spTree>
-    <p:extLst>
-      <p:ext uri="{BB962C8B-B14F-4D97-AF65-F5344CB8AC3E}">
-        <p14:creationId xmlns:p14="http://schemas.microsoft.com/office/powerpoint/2010/main" val="763208239"/>
-      </p:ext>
-    </p:extLst>
-  </p:cSld>
-</p:sld>
-</file>
-
-<file path=ppt/slides/slide7.xml><?xml version="1.0" encoding="utf-8"?>
-<p:sld xmlns:p="http://schemas.openxmlformats.org/presentationml/2006/main">
-  <p:cSld>
-    <p:bg>
-      <p:bgPr>
-        <a:solidFill xmlns:a="http://schemas.openxmlformats.org/drawingml/2006/main">
-          <a:srgbClr val="F7F6F1"/>
-        </a:solidFill>
-      </p:bgPr>
-    </p:bg>
-    <p:spTree>
-      <p:nvGrpSpPr>
-        <p:cNvPr id="1" name=""/>
-        <p:cNvGrpSpPr/>
-        <p:nvPr/>
-      </p:nvGrpSpPr>
-      <p:grpSpPr>
-        <a:xfrm xmlns:a="http://schemas.openxmlformats.org/drawingml/2006/main"/>
-      </p:grpSpPr>
-      <p:sp>
-        <p:nvSpPr>
-          <p:cNvPr id="8" name="">
-            <a:extLst xmlns:a="http://schemas.openxmlformats.org/drawingml/2006/main">
-              <a:ext uri="{FF2B5EF4-FFF2-40B4-BE49-F238E27FC236}">
-                <a16:creationId xmlns:a16="http://schemas.microsoft.com/office/drawing/2014/main" id="{2EA77BED-1E9A-412E-94AF-B9525FD214DE}"/>
-              </a:ext>
-            </a:extLst>
-          </p:cNvPr>
-          <p:cNvSpPr>
-            <a:spLocks xmlns:a="http://schemas.openxmlformats.org/drawingml/2006/main" noGrp="1"/>
-          </p:cNvSpPr>
-          <p:nvPr/>
-        </p:nvSpPr>
-        <p:spPr>
-          <a:xfrm xmlns:a="http://schemas.openxmlformats.org/drawingml/2006/main">
-            <a:off x="609600" y="304800"/>
-            <a:ext cx="10763250" cy="266700"/>
-          </a:xfrm>
-          <a:prstGeom xmlns:a="http://schemas.openxmlformats.org/drawingml/2006/main" prst="rect">
-            <a:avLst/>
-          </a:prstGeom>
-          <a:noFill xmlns:a="http://schemas.openxmlformats.org/drawingml/2006/main"/>
-          <a:ln xmlns:a="http://schemas.openxmlformats.org/drawingml/2006/main" w="0">
-            <a:noFill/>
-          </a:ln>
-        </p:spPr>
-        <p:txBody>
-          <a:bodyPr xmlns:a="http://schemas.openxmlformats.org/drawingml/2006/main">
-            <a:noAutofit/>
-          </a:bodyPr>
-          <a:lstStyle xmlns:a="http://schemas.openxmlformats.org/drawingml/2006/main"/>
-          <a:p xmlns:a="http://schemas.openxmlformats.org/drawingml/2006/main">
-            <a:pPr>
-              <a:buNone/>
-              <a:defRPr sz="1350" b="1">
-                <a:solidFill>
-                  <a:srgbClr val="26756C"/>
-                </a:solidFill>
-                <a:latin typeface="Helvetica Neue"/>
-                <a:ea typeface="Helvetica Neue"/>
-                <a:cs typeface="Helvetica Neue"/>
-              </a:defRPr>
-            </a:pPr>
-            <a:r>
-              <a:rPr sz="1350" b="1">
-                <a:solidFill>
-                  <a:srgbClr val="26756C"/>
-                </a:solidFill>
-                <a:latin typeface="Helvetica Neue"/>
-                <a:ea typeface="Helvetica Neue"/>
-                <a:cs typeface="Helvetica Neue"/>
-              </a:rPr>
-              <a:t>КОНЦЕПЦИЯ БЕЗОПАСНОЙ РАЗРАБОТКИ</a:t>
-            </a:r>
-          </a:p>
-        </p:txBody>
-      </p:sp>
-      <p:sp>
-        <p:nvSpPr>
-          <p:cNvPr id="2" name="">
-            <a:extLst xmlns:a="http://schemas.openxmlformats.org/drawingml/2006/main">
-              <a:ext uri="{FF2B5EF4-FFF2-40B4-BE49-F238E27FC236}">
-                <a16:creationId xmlns:a16="http://schemas.microsoft.com/office/drawing/2014/main" id="{4A763159-4B2B-4A5F-BE65-2C3873DE4364}"/>
-              </a:ext>
-            </a:extLst>
-          </p:cNvPr>
-          <p:cNvSpPr>
-            <a:spLocks xmlns:a="http://schemas.openxmlformats.org/drawingml/2006/main" noGrp="1"/>
-          </p:cNvSpPr>
-          <p:nvPr/>
-        </p:nvSpPr>
-        <p:spPr>
-          <a:xfrm xmlns:a="http://schemas.openxmlformats.org/drawingml/2006/main">
-            <a:off x="609600" y="838200"/>
-            <a:ext cx="10972800" cy="990600"/>
-          </a:xfrm>
-          <a:prstGeom xmlns:a="http://schemas.openxmlformats.org/drawingml/2006/main" prst="rect">
-            <a:avLst/>
-          </a:prstGeom>
-          <a:noFill xmlns:a="http://schemas.openxmlformats.org/drawingml/2006/main"/>
-          <a:ln xmlns:a="http://schemas.openxmlformats.org/drawingml/2006/main" w="0">
-            <a:noFill/>
-          </a:ln>
-        </p:spPr>
-        <p:txBody>
-          <a:bodyPr xmlns:a="http://schemas.openxmlformats.org/drawingml/2006/main">
-            <a:noAutofit/>
-          </a:bodyPr>
-          <a:lstStyle xmlns:a="http://schemas.openxmlformats.org/drawingml/2006/main"/>
-          <a:p xmlns:a="http://schemas.openxmlformats.org/drawingml/2006/main">
-            <a:pPr>
-              <a:buNone/>
-              <a:defRPr sz="3300" b="1">
-                <a:solidFill>
-                  <a:srgbClr val="102A30"/>
-                </a:solidFill>
-                <a:latin typeface="Helvetica Neue"/>
-                <a:ea typeface="Helvetica Neue"/>
-                <a:cs typeface="Helvetica Neue"/>
-              </a:defRPr>
-            </a:pPr>
-            <a:r>
-              <a:rPr sz="3300" b="1">
-                <a:solidFill>
-                  <a:srgbClr val="102A30"/>
-                </a:solidFill>
-                <a:latin typeface="Helvetica Neue"/>
-                <a:ea typeface="Helvetica Neue"/>
-                <a:cs typeface="Helvetica Neue"/>
-              </a:rPr>
-              <a:t>Что делает каждый участник</a:t>
-            </a:r>
-          </a:p>
-        </p:txBody>
-      </p:sp>
-      <p:sp>
-        <p:nvSpPr>
-          <p:cNvPr id="3" name="">
-            <a:extLst xmlns:a="http://schemas.openxmlformats.org/drawingml/2006/main">
-              <a:ext uri="{FF2B5EF4-FFF2-40B4-BE49-F238E27FC236}">
-                <a16:creationId xmlns:a16="http://schemas.microsoft.com/office/drawing/2014/main" id="{8D2D0351-E4D1-4F95-A8F7-769D9136646A}"/>
-              </a:ext>
-            </a:extLst>
-          </p:cNvPr>
-          <p:cNvSpPr>
-            <a:spLocks xmlns:a="http://schemas.openxmlformats.org/drawingml/2006/main" noGrp="1"/>
-          </p:cNvSpPr>
-          <p:nvPr/>
-        </p:nvSpPr>
-        <p:spPr>
-          <a:xfrm xmlns:a="http://schemas.openxmlformats.org/drawingml/2006/main">
-            <a:off x="609600" y="6372225"/>
-            <a:ext cx="10001250" cy="247650"/>
-          </a:xfrm>
-          <a:prstGeom xmlns:a="http://schemas.openxmlformats.org/drawingml/2006/main" prst="rect">
-            <a:avLst/>
-          </a:prstGeom>
-          <a:noFill xmlns:a="http://schemas.openxmlformats.org/drawingml/2006/main"/>
-          <a:ln xmlns:a="http://schemas.openxmlformats.org/drawingml/2006/main" w="0">
-            <a:noFill/>
-          </a:ln>
-        </p:spPr>
-        <p:txBody>
-          <a:bodyPr xmlns:a="http://schemas.openxmlformats.org/drawingml/2006/main">
-            <a:noAutofit/>
-          </a:bodyPr>
-          <a:lstStyle xmlns:a="http://schemas.openxmlformats.org/drawingml/2006/main"/>
-          <a:p xmlns:a="http://schemas.openxmlformats.org/drawingml/2006/main">
-            <a:pPr>
-              <a:buNone/>
-              <a:defRPr sz="1350" b="0">
-                <a:solidFill>
-                  <a:srgbClr val="59686B"/>
-                </a:solidFill>
-                <a:latin typeface="Helvetica Neue"/>
-                <a:ea typeface="Helvetica Neue"/>
-                <a:cs typeface="Helvetica Neue"/>
-              </a:defRPr>
-            </a:pPr>
-            <a:r>
-              <a:rPr sz="1350" b="0">
-                <a:solidFill>
-                  <a:srgbClr val="59686B"/>
-                </a:solidFill>
-                <a:latin typeface="Helvetica Neue"/>
-                <a:ea typeface="Helvetica Neue"/>
-                <a:cs typeface="Helvetica Neue"/>
-              </a:rPr>
-              <a:t>ЯвкаИБ / TaskFlow / ЭК1</a:t>
-            </a:r>
-          </a:p>
-        </p:txBody>
-      </p:sp>
-      <p:sp>
-        <p:nvSpPr>
-          <p:cNvPr id="4" name="">
-            <a:extLst xmlns:a="http://schemas.openxmlformats.org/drawingml/2006/main">
-              <a:ext uri="{FF2B5EF4-FFF2-40B4-BE49-F238E27FC236}">
-                <a16:creationId xmlns:a16="http://schemas.microsoft.com/office/drawing/2014/main" id="{457C1ED1-A387-4B37-BDDC-A361605C80F3}"/>
-              </a:ext>
-            </a:extLst>
-          </p:cNvPr>
-          <p:cNvSpPr>
-            <a:spLocks xmlns:a="http://schemas.openxmlformats.org/drawingml/2006/main" noGrp="1"/>
-          </p:cNvSpPr>
-          <p:nvPr/>
-        </p:nvSpPr>
-        <p:spPr>
-          <a:xfrm xmlns:a="http://schemas.openxmlformats.org/drawingml/2006/main">
-            <a:off x="11029950" y="6324600"/>
-            <a:ext cx="619125" cy="333375"/>
-          </a:xfrm>
-          <a:prstGeom xmlns:a="http://schemas.openxmlformats.org/drawingml/2006/main" prst="rect">
-            <a:avLst/>
-          </a:prstGeom>
-          <a:noFill xmlns:a="http://schemas.openxmlformats.org/drawingml/2006/main"/>
-          <a:ln xmlns:a="http://schemas.openxmlformats.org/drawingml/2006/main" w="0">
-            <a:noFill/>
-          </a:ln>
-        </p:spPr>
-        <p:txBody>
-          <a:bodyPr xmlns:a="http://schemas.openxmlformats.org/drawingml/2006/main">
-            <a:noAutofit/>
-          </a:bodyPr>
-          <a:lstStyle xmlns:a="http://schemas.openxmlformats.org/drawingml/2006/main"/>
-          <a:p xmlns:a="http://schemas.openxmlformats.org/drawingml/2006/main">
-            <a:pPr>
-              <a:buNone/>
-              <a:defRPr sz="1800" b="1">
-                <a:solidFill>
-                  <a:srgbClr val="26756C"/>
-                </a:solidFill>
-                <a:latin typeface="Helvetica Neue"/>
-                <a:ea typeface="Helvetica Neue"/>
-                <a:cs typeface="Helvetica Neue"/>
-              </a:defRPr>
-            </a:pPr>
-            <a:r>
-              <a:rPr sz="1800" b="1">
-                <a:solidFill>
-                  <a:srgbClr val="26756C"/>
-                </a:solidFill>
-                <a:latin typeface="Helvetica Neue"/>
-                <a:ea typeface="Helvetica Neue"/>
-                <a:cs typeface="Helvetica Neue"/>
-              </a:rPr>
-              <a:t>07</a:t>
-            </a:r>
-          </a:p>
-        </p:txBody>
-      </p:sp>
-      <p:sp>
-        <p:nvSpPr>
-          <p:cNvPr id="9" name="">
-            <a:extLst xmlns:a="http://schemas.openxmlformats.org/drawingml/2006/main">
-              <a:ext uri="{FF2B5EF4-FFF2-40B4-BE49-F238E27FC236}">
-                <a16:creationId xmlns:a16="http://schemas.microsoft.com/office/drawing/2014/main" id="{608E8E3E-A544-4FE5-B1A3-EDCDF8F83F72}"/>
-              </a:ext>
-            </a:extLst>
-          </p:cNvPr>
-          <p:cNvSpPr>
-            <a:spLocks xmlns:a="http://schemas.openxmlformats.org/drawingml/2006/main" noGrp="1"/>
-          </p:cNvSpPr>
-          <p:nvPr/>
-        </p:nvSpPr>
-        <p:spPr>
-          <a:xfrm xmlns:a="http://schemas.openxmlformats.org/drawingml/2006/main">
-            <a:off x="609600" y="2009775"/>
-            <a:ext cx="5095875" cy="485775"/>
-          </a:xfrm>
-          <a:prstGeom xmlns:a="http://schemas.openxmlformats.org/drawingml/2006/main" prst="rect">
-            <a:avLst/>
-          </a:prstGeom>
-          <a:noFill xmlns:a="http://schemas.openxmlformats.org/drawingml/2006/main"/>
-          <a:ln xmlns:a="http://schemas.openxmlformats.org/drawingml/2006/main" w="0">
-            <a:noFill/>
-          </a:ln>
-        </p:spPr>
-        <p:txBody>
-          <a:bodyPr xmlns:a="http://schemas.openxmlformats.org/drawingml/2006/main">
-            <a:noAutofit/>
-          </a:bodyPr>
-          <a:lstStyle xmlns:a="http://schemas.openxmlformats.org/drawingml/2006/main"/>
-          <a:p xmlns:a="http://schemas.openxmlformats.org/drawingml/2006/main">
-            <a:pPr>
-              <a:defRPr sz="2550" b="1">
-                <a:solidFill>
-                  <a:srgbClr val="26756C"/>
-                </a:solidFill>
-                <a:latin typeface="Helvetica Neue"/>
-                <a:ea typeface="Helvetica Neue"/>
-                <a:cs typeface="Helvetica Neue"/>
-              </a:defRPr>
-            </a:pPr>
-            <a:r>
-              <a:rPr sz="2550" b="1">
-                <a:solidFill>
-                  <a:srgbClr val="26756C"/>
-                </a:solidFill>
-                <a:latin typeface="Helvetica Neue"/>
-                <a:ea typeface="Helvetica Neue"/>
-                <a:cs typeface="Helvetica Neue"/>
-              </a:rPr>
-              <a:t>Роман / Issue #1</a:t>
-            </a:r>
-          </a:p>
-        </p:txBody>
-      </p:sp>
-      <p:sp>
-        <p:nvSpPr>
-          <p:cNvPr id="10" name="">
-            <a:extLst xmlns:a="http://schemas.openxmlformats.org/drawingml/2006/main">
-              <a:ext uri="{FF2B5EF4-FFF2-40B4-BE49-F238E27FC236}">
-                <a16:creationId xmlns:a16="http://schemas.microsoft.com/office/drawing/2014/main" id="{7A336C38-F9AF-4585-A5A1-A87103A5E579}"/>
-              </a:ext>
-            </a:extLst>
-          </p:cNvPr>
-          <p:cNvSpPr>
-            <a:spLocks xmlns:a="http://schemas.openxmlformats.org/drawingml/2006/main" noGrp="1"/>
-          </p:cNvSpPr>
-          <p:nvPr/>
-        </p:nvSpPr>
-        <p:spPr>
-          <a:xfrm xmlns:a="http://schemas.openxmlformats.org/drawingml/2006/main">
-            <a:off x="609600" y="2724150"/>
-            <a:ext cx="5143500" cy="2000250"/>
-          </a:xfrm>
-          <a:prstGeom xmlns:a="http://schemas.openxmlformats.org/drawingml/2006/main" prst="rect">
-            <a:avLst/>
-          </a:prstGeom>
-          <a:noFill xmlns:a="http://schemas.openxmlformats.org/drawingml/2006/main"/>
-          <a:ln xmlns:a="http://schemas.openxmlformats.org/drawingml/2006/main" w="0">
-            <a:noFill/>
-          </a:ln>
-        </p:spPr>
-        <p:txBody>
-          <a:bodyPr xmlns:a="http://schemas.openxmlformats.org/drawingml/2006/main">
-            <a:noAutofit/>
-          </a:bodyPr>
-          <a:lstStyle xmlns:a="http://schemas.openxmlformats.org/drawingml/2006/main"/>
-          <a:p xmlns:a="http://schemas.openxmlformats.org/drawingml/2006/main">
-            <a:pPr>
-              <a:defRPr sz="2100" b="0">
-                <a:solidFill>
-                  <a:srgbClr val="102A30"/>
-                </a:solidFill>
-                <a:latin typeface="Helvetica Neue"/>
-                <a:ea typeface="Helvetica Neue"/>
-                <a:cs typeface="Helvetica Neue"/>
-              </a:defRPr>
-            </a:pPr>
-            <a:r>
-              <a:rPr sz="2100" b="0">
-                <a:solidFill>
-                  <a:srgbClr val="102A30"/>
-                </a:solidFill>
-                <a:latin typeface="Helvetica Neue"/>
-                <a:ea typeface="Helvetica Neue"/>
-                <a:cs typeface="Helvetica Neue"/>
-              </a:rPr>
-              <a:t>Проверяет права трёх ролей</a:t>
-            </a:r>
-          </a:p>
-          <a:p xmlns:a="http://schemas.openxmlformats.org/drawingml/2006/main">
-            <a:pPr>
-              <a:defRPr sz="2100" b="0">
-                <a:solidFill>
-                  <a:srgbClr val="102A30"/>
-                </a:solidFill>
-                <a:latin typeface="Helvetica Neue"/>
-                <a:ea typeface="Helvetica Neue"/>
-                <a:cs typeface="Helvetica Neue"/>
-              </a:defRPr>
-            </a:pPr>
-            <a:r>
-              <a:rPr sz="2100" b="0">
-                <a:solidFill>
-                  <a:srgbClr val="102A30"/>
-                </a:solidFill>
-                <a:latin typeface="Helvetica Neue"/>
-                <a:ea typeface="Helvetica Neue"/>
-                <a:cs typeface="Helvetica Neue"/>
-              </a:rPr>
-              <a:t>и изоляцию проектов.</a:t>
-            </a:r>
-          </a:p>
-          <a:p xmlns:a="http://schemas.openxmlformats.org/drawingml/2006/main">
-            <a:r>
-              <a:t/>
-            </a:r>
-          </a:p>
-          <a:p xmlns:a="http://schemas.openxmlformats.org/drawingml/2006/main">
-            <a:pPr>
-              <a:defRPr sz="2100" b="0">
-                <a:solidFill>
-                  <a:srgbClr val="102A30"/>
-                </a:solidFill>
-                <a:latin typeface="Helvetica Neue"/>
-                <a:ea typeface="Helvetica Neue"/>
-                <a:cs typeface="Helvetica Neue"/>
-              </a:defRPr>
-            </a:pPr>
-            <a:r>
-              <a:rPr sz="2100" b="0">
-                <a:solidFill>
-                  <a:srgbClr val="102A30"/>
-                </a:solidFill>
-                <a:latin typeface="Helvetica Neue"/>
-                <a:ea typeface="Helvetica Neue"/>
-                <a:cs typeface="Helvetica Neue"/>
-              </a:rPr>
-              <a:t>Проверяет библиотеки</a:t>
-            </a:r>
-          </a:p>
-          <a:p xmlns:a="http://schemas.openxmlformats.org/drawingml/2006/main">
-            <a:pPr>
-              <a:defRPr sz="2100" b="0">
-                <a:solidFill>
-                  <a:srgbClr val="102A30"/>
-                </a:solidFill>
-                <a:latin typeface="Helvetica Neue"/>
-                <a:ea typeface="Helvetica Neue"/>
-                <a:cs typeface="Helvetica Neue"/>
-              </a:defRPr>
-            </a:pPr>
-            <a:r>
-              <a:rPr sz="2100" b="0">
-                <a:solidFill>
-                  <a:srgbClr val="102A30"/>
-                </a:solidFill>
-                <a:latin typeface="Helvetica Neue"/>
-                <a:ea typeface="Helvetica Neue"/>
-                <a:cs typeface="Helvetica Neue"/>
-              </a:rPr>
-              <a:t>и настройки приложения.</a:t>
-            </a:r>
-          </a:p>
-        </p:txBody>
-      </p:sp>
-      <p:sp>
-        <p:nvSpPr>
-          <p:cNvPr id="11" name="">
-            <a:extLst xmlns:a="http://schemas.openxmlformats.org/drawingml/2006/main">
-              <a:ext uri="{FF2B5EF4-FFF2-40B4-BE49-F238E27FC236}">
-                <a16:creationId xmlns:a16="http://schemas.microsoft.com/office/drawing/2014/main" id="{EE97B6B7-67DC-48C3-8CA4-54B161BB877F}"/>
-              </a:ext>
-            </a:extLst>
-          </p:cNvPr>
-          <p:cNvSpPr>
-            <a:spLocks xmlns:a="http://schemas.openxmlformats.org/drawingml/2006/main" noGrp="1"/>
-          </p:cNvSpPr>
-          <p:nvPr/>
-        </p:nvSpPr>
-        <p:spPr>
-          <a:xfrm xmlns:a="http://schemas.openxmlformats.org/drawingml/2006/main">
-            <a:off x="6419850" y="2009775"/>
-            <a:ext cx="5143500" cy="485775"/>
-          </a:xfrm>
-          <a:prstGeom xmlns:a="http://schemas.openxmlformats.org/drawingml/2006/main" prst="rect">
-            <a:avLst/>
-          </a:prstGeom>
-          <a:noFill xmlns:a="http://schemas.openxmlformats.org/drawingml/2006/main"/>
-          <a:ln xmlns:a="http://schemas.openxmlformats.org/drawingml/2006/main" w="0">
-            <a:noFill/>
-          </a:ln>
-        </p:spPr>
-        <p:txBody>
-          <a:bodyPr xmlns:a="http://schemas.openxmlformats.org/drawingml/2006/main">
-            <a:noAutofit/>
-          </a:bodyPr>
-          <a:lstStyle xmlns:a="http://schemas.openxmlformats.org/drawingml/2006/main"/>
-          <a:p xmlns:a="http://schemas.openxmlformats.org/drawingml/2006/main">
-            <a:pPr>
-              <a:defRPr sz="2550" b="1">
-                <a:solidFill>
-                  <a:srgbClr val="26756C"/>
-                </a:solidFill>
-                <a:latin typeface="Helvetica Neue"/>
-                <a:ea typeface="Helvetica Neue"/>
-                <a:cs typeface="Helvetica Neue"/>
-              </a:defRPr>
-            </a:pPr>
-            <a:r>
-              <a:rPr sz="2550" b="1">
-                <a:solidFill>
-                  <a:srgbClr val="26756C"/>
-                </a:solidFill>
-                <a:latin typeface="Helvetica Neue"/>
-                <a:ea typeface="Helvetica Neue"/>
-                <a:cs typeface="Helvetica Neue"/>
-              </a:rPr>
-              <a:t>Ярослав / Issue #2</a:t>
-            </a:r>
-          </a:p>
-        </p:txBody>
-      </p:sp>
-      <p:sp>
-        <p:nvSpPr>
-          <p:cNvPr id="12" name="">
-            <a:extLst xmlns:a="http://schemas.openxmlformats.org/drawingml/2006/main">
-              <a:ext uri="{FF2B5EF4-FFF2-40B4-BE49-F238E27FC236}">
-                <a16:creationId xmlns:a16="http://schemas.microsoft.com/office/drawing/2014/main" id="{6F935AD2-0E1C-4FBE-B97B-EC48D93685C2}"/>
-              </a:ext>
-            </a:extLst>
-          </p:cNvPr>
-          <p:cNvSpPr>
-            <a:spLocks xmlns:a="http://schemas.openxmlformats.org/drawingml/2006/main" noGrp="1"/>
-          </p:cNvSpPr>
-          <p:nvPr/>
-        </p:nvSpPr>
-        <p:spPr>
-          <a:xfrm xmlns:a="http://schemas.openxmlformats.org/drawingml/2006/main">
-            <a:off x="6419850" y="2724150"/>
-            <a:ext cx="5143500" cy="2000250"/>
-          </a:xfrm>
-          <a:prstGeom xmlns:a="http://schemas.openxmlformats.org/drawingml/2006/main" prst="rect">
-            <a:avLst/>
-          </a:prstGeom>
-          <a:noFill xmlns:a="http://schemas.openxmlformats.org/drawingml/2006/main"/>
-          <a:ln xmlns:a="http://schemas.openxmlformats.org/drawingml/2006/main" w="0">
-            <a:noFill/>
-          </a:ln>
-        </p:spPr>
-        <p:txBody>
-          <a:bodyPr xmlns:a="http://schemas.openxmlformats.org/drawingml/2006/main">
-            <a:noAutofit/>
-          </a:bodyPr>
-          <a:lstStyle xmlns:a="http://schemas.openxmlformats.org/drawingml/2006/main"/>
-          <a:p xmlns:a="http://schemas.openxmlformats.org/drawingml/2006/main">
-            <a:pPr>
-              <a:defRPr sz="2100" b="0">
-                <a:solidFill>
-                  <a:srgbClr val="102A30"/>
-                </a:solidFill>
-                <a:latin typeface="Helvetica Neue"/>
-                <a:ea typeface="Helvetica Neue"/>
-                <a:cs typeface="Helvetica Neue"/>
-              </a:defRPr>
-            </a:pPr>
-            <a:r>
-              <a:rPr sz="2100" b="0">
-                <a:solidFill>
-                  <a:srgbClr val="102A30"/>
-                </a:solidFill>
-                <a:latin typeface="Helvetica Neue"/>
-                <a:ea typeface="Helvetica Neue"/>
-                <a:cs typeface="Helvetica Neue"/>
-              </a:rPr>
-              <a:t>Проверяет ввод текста</a:t>
-            </a:r>
-          </a:p>
-          <a:p xmlns:a="http://schemas.openxmlformats.org/drawingml/2006/main">
-            <a:pPr>
-              <a:defRPr sz="2100" b="0">
-                <a:solidFill>
-                  <a:srgbClr val="102A30"/>
-                </a:solidFill>
-                <a:latin typeface="Helvetica Neue"/>
-                <a:ea typeface="Helvetica Neue"/>
-                <a:cs typeface="Helvetica Neue"/>
-              </a:defRPr>
-            </a:pPr>
-            <a:r>
-              <a:rPr sz="2100" b="0">
-                <a:solidFill>
-                  <a:srgbClr val="102A30"/>
-                </a:solidFill>
-                <a:latin typeface="Helvetica Neue"/>
-                <a:ea typeface="Helvetica Neue"/>
-                <a:cs typeface="Helvetica Neue"/>
-              </a:rPr>
-              <a:t>и защиту запросов от подделки.</a:t>
-            </a:r>
-          </a:p>
-          <a:p xmlns:a="http://schemas.openxmlformats.org/drawingml/2006/main">
-            <a:r>
-              <a:t/>
-            </a:r>
-          </a:p>
-          <a:p xmlns:a="http://schemas.openxmlformats.org/drawingml/2006/main">
-            <a:pPr>
-              <a:defRPr sz="2100" b="0">
-                <a:solidFill>
-                  <a:srgbClr val="102A30"/>
-                </a:solidFill>
-                <a:latin typeface="Helvetica Neue"/>
-                <a:ea typeface="Helvetica Neue"/>
-                <a:cs typeface="Helvetica Neue"/>
-              </a:defRPr>
-            </a:pPr>
-            <a:r>
-              <a:rPr sz="2100" b="0">
-                <a:solidFill>
-                  <a:srgbClr val="102A30"/>
-                </a:solidFill>
-                <a:latin typeface="Helvetica Neue"/>
-                <a:ea typeface="Helvetica Neue"/>
-                <a:cs typeface="Helvetica Neue"/>
-              </a:rPr>
-              <a:t>Повторяет установку</a:t>
-            </a:r>
-          </a:p>
-          <a:p xmlns:a="http://schemas.openxmlformats.org/drawingml/2006/main">
-            <a:pPr>
-              <a:defRPr sz="2100" b="0">
-                <a:solidFill>
-                  <a:srgbClr val="102A30"/>
-                </a:solidFill>
-                <a:latin typeface="Helvetica Neue"/>
-                <a:ea typeface="Helvetica Neue"/>
-                <a:cs typeface="Helvetica Neue"/>
-              </a:defRPr>
-            </a:pPr>
-            <a:r>
-              <a:rPr sz="2100" b="0">
-                <a:solidFill>
-                  <a:srgbClr val="102A30"/>
-                </a:solidFill>
-                <a:latin typeface="Helvetica Neue"/>
-                <a:ea typeface="Helvetica Neue"/>
-                <a:cs typeface="Helvetica Neue"/>
-              </a:rPr>
-              <a:t>из архива на чистом окружении.</a:t>
-            </a:r>
-          </a:p>
-        </p:txBody>
-      </p:sp>
-      <p:sp>
-        <p:nvSpPr>
-          <p:cNvPr id="13" name="">
-            <a:extLst xmlns:a="http://schemas.openxmlformats.org/drawingml/2006/main">
-              <a:ext uri="{FF2B5EF4-FFF2-40B4-BE49-F238E27FC236}">
-                <a16:creationId xmlns:a16="http://schemas.microsoft.com/office/drawing/2014/main" id="{A7E17ABD-3AA4-4B0B-B4F3-817BAB58B23C}"/>
-              </a:ext>
-            </a:extLst>
-          </p:cNvPr>
-          <p:cNvSpPr>
-            <a:spLocks xmlns:a="http://schemas.openxmlformats.org/drawingml/2006/main" noGrp="1"/>
-          </p:cNvSpPr>
-          <p:nvPr/>
-        </p:nvSpPr>
-        <p:spPr>
-          <a:xfrm xmlns:a="http://schemas.openxmlformats.org/drawingml/2006/main">
-            <a:off x="609600" y="5181600"/>
-            <a:ext cx="10972800" cy="628650"/>
-          </a:xfrm>
-          <a:prstGeom xmlns:a="http://schemas.openxmlformats.org/drawingml/2006/main" prst="rect">
-            <a:avLst/>
-          </a:prstGeom>
-          <a:noFill xmlns:a="http://schemas.openxmlformats.org/drawingml/2006/main"/>
-          <a:ln xmlns:a="http://schemas.openxmlformats.org/drawingml/2006/main" w="0">
-            <a:noFill/>
-          </a:ln>
-        </p:spPr>
-        <p:txBody>
-          <a:bodyPr xmlns:a="http://schemas.openxmlformats.org/drawingml/2006/main">
-            <a:noAutofit/>
-          </a:bodyPr>
-          <a:lstStyle xmlns:a="http://schemas.openxmlformats.org/drawingml/2006/main"/>
-          <a:p xmlns:a="http://schemas.openxmlformats.org/drawingml/2006/main">
-            <a:pPr>
-              <a:defRPr sz="2250" b="1">
-                <a:solidFill>
-                  <a:srgbClr val="26756C"/>
-                </a:solidFill>
-                <a:latin typeface="Helvetica Neue"/>
-                <a:ea typeface="Helvetica Neue"/>
-                <a:cs typeface="Helvetica Neue"/>
-              </a:defRPr>
-            </a:pPr>
-            <a:r>
-              <a:rPr sz="2250" b="1">
-                <a:solidFill>
-                  <a:srgbClr val="26756C"/>
-                </a:solidFill>
-                <a:latin typeface="Helvetica Neue"/>
-                <a:ea typeface="Helvetica Neue"/>
-                <a:cs typeface="Helvetica Neue"/>
-              </a:rPr>
-              <a:t>Каждый сохраняет отчёт и проверяет результат партнёра.</a:t>
-            </a:r>
-          </a:p>
-        </p:txBody>
-      </p:sp>
-      <p:sp>
-        <p:nvSpPr>
-          <p:cNvPr id="14" name="">
-            <a:extLst xmlns:a="http://schemas.openxmlformats.org/drawingml/2006/main">
-              <a:ext uri="{FF2B5EF4-FFF2-40B4-BE49-F238E27FC236}">
-                <a16:creationId xmlns:a16="http://schemas.microsoft.com/office/drawing/2014/main" id="{49267C2F-5D98-4E1B-86F5-A6365AC37E03}"/>
-              </a:ext>
-            </a:extLst>
-          </p:cNvPr>
-          <p:cNvSpPr>
-            <a:spLocks xmlns:a="http://schemas.openxmlformats.org/drawingml/2006/main" noGrp="1"/>
-          </p:cNvSpPr>
-          <p:nvPr/>
-        </p:nvSpPr>
-        <p:spPr>
-          <a:xfrm xmlns:a="http://schemas.openxmlformats.org/drawingml/2006/main">
-            <a:off x="609600" y="5915025"/>
-            <a:ext cx="10972800" cy="381000"/>
-          </a:xfrm>
-          <a:prstGeom xmlns:a="http://schemas.openxmlformats.org/drawingml/2006/main" prst="rect">
-            <a:avLst/>
-          </a:prstGeom>
-          <a:noFill xmlns:a="http://schemas.openxmlformats.org/drawingml/2006/main"/>
-          <a:ln xmlns:a="http://schemas.openxmlformats.org/drawingml/2006/main" w="0">
-            <a:noFill/>
-          </a:ln>
-        </p:spPr>
-        <p:txBody>
-          <a:bodyPr xmlns:a="http://schemas.openxmlformats.org/drawingml/2006/main">
-            <a:noAutofit/>
-          </a:bodyPr>
-          <a:lstStyle xmlns:a="http://schemas.openxmlformats.org/drawingml/2006/main"/>
-          <a:p xmlns:a="http://schemas.openxmlformats.org/drawingml/2006/main">
-            <a:pPr>
-              <a:defRPr sz="1875" b="0">
-                <a:solidFill>
-                  <a:srgbClr val="59686B"/>
-                </a:solidFill>
-                <a:latin typeface="Helvetica Neue"/>
-                <a:ea typeface="Helvetica Neue"/>
-                <a:cs typeface="Helvetica Neue"/>
-              </a:defRPr>
-            </a:pPr>
-            <a:r>
-              <a:rPr sz="1875" b="0">
-                <a:solidFill>
-                  <a:srgbClr val="59686B"/>
-                </a:solidFill>
-                <a:latin typeface="Helvetica Neue"/>
-                <a:ea typeface="Helvetica Neue"/>
-                <a:cs typeface="Helvetica Neue"/>
-              </a:rPr>
-              <a:t>После взаимной проверки созваниваемся и обсуждаем результаты.</a:t>
-            </a:r>
-          </a:p>
-        </p:txBody>
-      </p:sp>
-    </p:spTree>
-    <p:extLst>
-      <p:ext uri="{BB962C8B-B14F-4D97-AF65-F5344CB8AC3E}">
-        <p14:creationId xmlns:p14="http://schemas.microsoft.com/office/powerpoint/2010/main" val="1993845445"/>
-      </p:ext>
-    </p:extLst>
-  </p:cSld>
-</p:sld>
-</file>
-
-<file path=ppt/slides/slide8.xml><?xml version="1.0" encoding="utf-8"?>
-<p:sld xmlns:p="http://schemas.openxmlformats.org/presentationml/2006/main">
-  <p:cSld>
-    <p:bg>
-      <p:bgPr>
-        <a:solidFill xmlns:a="http://schemas.openxmlformats.org/drawingml/2006/main">
-          <a:srgbClr val="F7F6F1"/>
-        </a:solidFill>
-      </p:bgPr>
-    </p:bg>
-    <p:spTree>
-      <p:nvGrpSpPr>
-        <p:cNvPr id="1" name=""/>
-        <p:cNvGrpSpPr/>
-        <p:nvPr/>
-      </p:nvGrpSpPr>
-      <p:grpSpPr>
-        <a:xfrm xmlns:a="http://schemas.openxmlformats.org/drawingml/2006/main"/>
-      </p:grpSpPr>
-      <p:sp>
-        <p:nvSpPr>
-          <p:cNvPr id="6" name="">
-            <a:extLst xmlns:a="http://schemas.openxmlformats.org/drawingml/2006/main">
-              <a:ext uri="{FF2B5EF4-FFF2-40B4-BE49-F238E27FC236}">
-                <a16:creationId xmlns:a16="http://schemas.microsoft.com/office/drawing/2014/main" id="{AF886ED6-BDFE-48A6-98B9-433AE990CBA9}"/>
-              </a:ext>
-            </a:extLst>
-          </p:cNvPr>
-          <p:cNvSpPr>
-            <a:spLocks xmlns:a="http://schemas.openxmlformats.org/drawingml/2006/main" noGrp="1"/>
-          </p:cNvSpPr>
-          <p:nvPr/>
-        </p:nvSpPr>
-        <p:spPr>
-          <a:xfrm xmlns:a="http://schemas.openxmlformats.org/drawingml/2006/main">
-            <a:off x="609600" y="304800"/>
-            <a:ext cx="10763250" cy="266700"/>
-          </a:xfrm>
-          <a:prstGeom xmlns:a="http://schemas.openxmlformats.org/drawingml/2006/main" prst="rect">
-            <a:avLst/>
-          </a:prstGeom>
-          <a:noFill xmlns:a="http://schemas.openxmlformats.org/drawingml/2006/main"/>
-          <a:ln xmlns:a="http://schemas.openxmlformats.org/drawingml/2006/main" w="0">
-            <a:noFill/>
-          </a:ln>
-        </p:spPr>
-        <p:txBody>
-          <a:bodyPr xmlns:a="http://schemas.openxmlformats.org/drawingml/2006/main">
-            <a:noAutofit/>
-          </a:bodyPr>
-          <a:lstStyle xmlns:a="http://schemas.openxmlformats.org/drawingml/2006/main"/>
-          <a:p xmlns:a="http://schemas.openxmlformats.org/drawingml/2006/main">
-            <a:pPr>
-              <a:buNone/>
-              <a:defRPr sz="1350" b="1">
-                <a:solidFill>
-                  <a:srgbClr val="26756C"/>
-                </a:solidFill>
-                <a:latin typeface="Helvetica Neue"/>
-                <a:ea typeface="Helvetica Neue"/>
-                <a:cs typeface="Helvetica Neue"/>
-              </a:defRPr>
-            </a:pPr>
-            <a:r>
-              <a:rPr sz="1350" b="1">
-                <a:solidFill>
-                  <a:srgbClr val="26756C"/>
-                </a:solidFill>
-                <a:latin typeface="Helvetica Neue"/>
-                <a:ea typeface="Helvetica Neue"/>
-                <a:cs typeface="Helvetica Neue"/>
-              </a:rPr>
-              <a:t>ПРИЛОЖЕНИЕ / ДЛЯ ВОПРОСОВ</a:t>
-            </a:r>
-          </a:p>
-        </p:txBody>
-      </p:sp>
-      <p:sp>
-        <p:nvSpPr>
-          <p:cNvPr id="2" name="">
-            <a:extLst xmlns:a="http://schemas.openxmlformats.org/drawingml/2006/main">
-              <a:ext uri="{FF2B5EF4-FFF2-40B4-BE49-F238E27FC236}">
-                <a16:creationId xmlns:a16="http://schemas.microsoft.com/office/drawing/2014/main" id="{E406CD5F-ECAB-4536-B31D-15A74C28D6D6}"/>
-              </a:ext>
-            </a:extLst>
-          </p:cNvPr>
-          <p:cNvSpPr>
-            <a:spLocks xmlns:a="http://schemas.openxmlformats.org/drawingml/2006/main" noGrp="1"/>
-          </p:cNvSpPr>
-          <p:nvPr/>
-        </p:nvSpPr>
-        <p:spPr>
-          <a:xfrm xmlns:a="http://schemas.openxmlformats.org/drawingml/2006/main">
-            <a:off x="609600" y="838200"/>
-            <a:ext cx="10972800" cy="990600"/>
-          </a:xfrm>
-          <a:prstGeom xmlns:a="http://schemas.openxmlformats.org/drawingml/2006/main" prst="rect">
-            <a:avLst/>
-          </a:prstGeom>
-          <a:noFill xmlns:a="http://schemas.openxmlformats.org/drawingml/2006/main"/>
-          <a:ln xmlns:a="http://schemas.openxmlformats.org/drawingml/2006/main" w="0">
-            <a:noFill/>
-          </a:ln>
-        </p:spPr>
-        <p:txBody>
-          <a:bodyPr xmlns:a="http://schemas.openxmlformats.org/drawingml/2006/main">
-            <a:noAutofit/>
-          </a:bodyPr>
-          <a:lstStyle xmlns:a="http://schemas.openxmlformats.org/drawingml/2006/main"/>
-          <a:p xmlns:a="http://schemas.openxmlformats.org/drawingml/2006/main">
-            <a:pPr>
-              <a:buNone/>
-              <a:defRPr sz="3300" b="1">
-                <a:solidFill>
-                  <a:srgbClr val="102A30"/>
-                </a:solidFill>
-                <a:latin typeface="Helvetica Neue"/>
-                <a:ea typeface="Helvetica Neue"/>
-                <a:cs typeface="Helvetica Neue"/>
-              </a:defRPr>
-            </a:pPr>
-            <a:r>
-              <a:rPr sz="3300" b="1">
-                <a:solidFill>
-                  <a:srgbClr val="102A30"/>
-                </a:solidFill>
-                <a:latin typeface="Helvetica Neue"/>
-                <a:ea typeface="Helvetica Neue"/>
-                <a:cs typeface="Helvetica Neue"/>
-              </a:rPr>
-              <a:t>Другие источники из лекций</a:t>
-            </a:r>
-          </a:p>
-        </p:txBody>
-      </p:sp>
-      <p:sp>
-        <p:nvSpPr>
-          <p:cNvPr id="3" name="">
-            <a:extLst xmlns:a="http://schemas.openxmlformats.org/drawingml/2006/main">
-              <a:ext uri="{FF2B5EF4-FFF2-40B4-BE49-F238E27FC236}">
-                <a16:creationId xmlns:a16="http://schemas.microsoft.com/office/drawing/2014/main" id="{2247638A-5B28-4A13-BA18-C1210C16A40F}"/>
-              </a:ext>
-            </a:extLst>
-          </p:cNvPr>
-          <p:cNvSpPr>
-            <a:spLocks xmlns:a="http://schemas.openxmlformats.org/drawingml/2006/main" noGrp="1"/>
-          </p:cNvSpPr>
-          <p:nvPr/>
-        </p:nvSpPr>
-        <p:spPr>
-          <a:xfrm xmlns:a="http://schemas.openxmlformats.org/drawingml/2006/main">
-            <a:off x="609600" y="6372225"/>
-            <a:ext cx="10001250" cy="247650"/>
-          </a:xfrm>
-          <a:prstGeom xmlns:a="http://schemas.openxmlformats.org/drawingml/2006/main" prst="rect">
-            <a:avLst/>
-          </a:prstGeom>
-          <a:noFill xmlns:a="http://schemas.openxmlformats.org/drawingml/2006/main"/>
-          <a:ln xmlns:a="http://schemas.openxmlformats.org/drawingml/2006/main" w="0">
-            <a:noFill/>
-          </a:ln>
-        </p:spPr>
-        <p:txBody>
-          <a:bodyPr xmlns:a="http://schemas.openxmlformats.org/drawingml/2006/main">
-            <a:noAutofit/>
-          </a:bodyPr>
-          <a:lstStyle xmlns:a="http://schemas.openxmlformats.org/drawingml/2006/main"/>
-          <a:p xmlns:a="http://schemas.openxmlformats.org/drawingml/2006/main">
-            <a:pPr>
-              <a:buNone/>
-              <a:defRPr sz="1350" b="0">
-                <a:solidFill>
-                  <a:srgbClr val="59686B"/>
-                </a:solidFill>
-                <a:latin typeface="Helvetica Neue"/>
-                <a:ea typeface="Helvetica Neue"/>
-                <a:cs typeface="Helvetica Neue"/>
-              </a:defRPr>
-            </a:pPr>
-            <a:r>
-              <a:rPr sz="1350" b="0">
-                <a:solidFill>
-                  <a:srgbClr val="59686B"/>
-                </a:solidFill>
-                <a:latin typeface="Helvetica Neue"/>
-                <a:ea typeface="Helvetica Neue"/>
-                <a:cs typeface="Helvetica Neue"/>
-              </a:rPr>
-              <a:t>ЯвкаИБ / TaskFlow / ЭК1</a:t>
-            </a:r>
-          </a:p>
-        </p:txBody>
-      </p:sp>
-      <p:sp>
-        <p:nvSpPr>
-          <p:cNvPr id="4" name="">
-            <a:extLst xmlns:a="http://schemas.openxmlformats.org/drawingml/2006/main">
-              <a:ext uri="{FF2B5EF4-FFF2-40B4-BE49-F238E27FC236}">
-                <a16:creationId xmlns:a16="http://schemas.microsoft.com/office/drawing/2014/main" id="{8DC3F3C9-9753-422C-84F6-3AED8A53B3BF}"/>
-              </a:ext>
-            </a:extLst>
-          </p:cNvPr>
-          <p:cNvSpPr>
-            <a:spLocks xmlns:a="http://schemas.openxmlformats.org/drawingml/2006/main" noGrp="1"/>
-          </p:cNvSpPr>
-          <p:nvPr/>
-        </p:nvSpPr>
-        <p:spPr>
-          <a:xfrm xmlns:a="http://schemas.openxmlformats.org/drawingml/2006/main">
-            <a:off x="11029950" y="6324600"/>
-            <a:ext cx="619125" cy="333375"/>
-          </a:xfrm>
-          <a:prstGeom xmlns:a="http://schemas.openxmlformats.org/drawingml/2006/main" prst="rect">
-            <a:avLst/>
-          </a:prstGeom>
-          <a:noFill xmlns:a="http://schemas.openxmlformats.org/drawingml/2006/main"/>
-          <a:ln xmlns:a="http://schemas.openxmlformats.org/drawingml/2006/main" w="0">
-            <a:noFill/>
-          </a:ln>
-        </p:spPr>
-        <p:txBody>
-          <a:bodyPr xmlns:a="http://schemas.openxmlformats.org/drawingml/2006/main">
-            <a:noAutofit/>
-          </a:bodyPr>
-          <a:lstStyle xmlns:a="http://schemas.openxmlformats.org/drawingml/2006/main"/>
-          <a:p xmlns:a="http://schemas.openxmlformats.org/drawingml/2006/main">
-            <a:pPr>
-              <a:buNone/>
-              <a:defRPr sz="1800" b="1">
-                <a:solidFill>
-                  <a:srgbClr val="26756C"/>
-                </a:solidFill>
-                <a:latin typeface="Helvetica Neue"/>
-                <a:ea typeface="Helvetica Neue"/>
-                <a:cs typeface="Helvetica Neue"/>
-              </a:defRPr>
-            </a:pPr>
-            <a:r>
-              <a:rPr sz="1800" b="1">
-                <a:solidFill>
-                  <a:srgbClr val="26756C"/>
-                </a:solidFill>
-                <a:latin typeface="Helvetica Neue"/>
-                <a:ea typeface="Helvetica Neue"/>
-                <a:cs typeface="Helvetica Neue"/>
-              </a:rPr>
-              <a:t>08</a:t>
-            </a:r>
-          </a:p>
-        </p:txBody>
-      </p:sp>
-      <p:graphicFrame>
-        <p:nvGraphicFramePr>
-          <p:cNvPr id="12" name=""/>
-          <p:cNvGraphicFramePr/>
-          <p:nvPr/>
-        </p:nvGraphicFramePr>
-        <p:xfrm>
-          <a:off xmlns:a="http://schemas.openxmlformats.org/drawingml/2006/main" x="609600" y="2028825"/>
-          <a:ext xmlns:a="http://schemas.openxmlformats.org/drawingml/2006/main" cx="10972800" cy="3857625"/>
-        </p:xfrm>
-        <a:graphic xmlns:a="http://schemas.openxmlformats.org/drawingml/2006/main">
-          <a:graphicData uri="http://schemas.openxmlformats.org/drawingml/2006/table">
-            <a:tbl>
-              <a:tblPr/>
-              <a:tblGrid>
-                <a:gridCol w="2190750"/>
-                <a:gridCol w="3810000"/>
-                <a:gridCol w="4972050"/>
-              </a:tblGrid>
-              <a:tr h="542925">
+              <a:tr h="485775">
                 <a:tc>
                   <a:txBody>
                     <a:bodyPr>
@@ -7262,7 +3624,7 @@
                           <a:ea typeface="Helvetica Neue"/>
                           <a:cs typeface="Helvetica Neue"/>
                         </a:rPr>
-                        <a:t>Источник</a:t>
+                        <a:t>Основа</a:t>
                       </a:r>
                     </a:p>
                   </a:txBody>
@@ -7314,7 +3676,7 @@
                           <a:ea typeface="Helvetica Neue"/>
                           <a:cs typeface="Helvetica Neue"/>
                         </a:rPr>
-                        <a:t>Почему не взяли за основу</a:t>
+                        <a:t>Решение</a:t>
                       </a:r>
                     </a:p>
                   </a:txBody>
@@ -7325,7 +3687,7 @@
                   </a:tcPr>
                 </a:tc>
               </a:tr>
-              <a:tr h="1104900">
+              <a:tr h="762000">
                 <a:tc>
                   <a:txBody>
                     <a:bodyPr>
@@ -7342,20 +3704,7 @@
                           <a:ea typeface="Helvetica Neue"/>
                           <a:cs typeface="Helvetica Neue"/>
                         </a:rPr>
-                        <a:t>ISO/IEC</a:t>
-                      </a:r>
-                    </a:p>
-                    <a:p>
-                      <a:r>
-                        <a:rPr sz="1875" b="0">
-                          <a:solidFill>
-                            <a:srgbClr val="102A30"/>
-                          </a:solidFill>
-                          <a:latin typeface="Helvetica Neue"/>
-                          <a:ea typeface="Helvetica Neue"/>
-                          <a:cs typeface="Helvetica Neue"/>
-                        </a:rPr>
-                        <a:t>27034-1</a:t>
+                        <a:t>NIST SSDF 1.1</a:t>
                       </a:r>
                     </a:p>
                   </a:txBody>
@@ -7381,7 +3730,7 @@
                           <a:ea typeface="Helvetica Neue"/>
                           <a:cs typeface="Helvetica Neue"/>
                         </a:rPr>
-                        <a:t>Управление безопасностью</a:t>
+                        <a:t>Требования, проверка кода,</a:t>
                       </a:r>
                     </a:p>
                     <a:p>
@@ -7394,7 +3743,7 @@
                           <a:ea typeface="Helvetica Neue"/>
                           <a:cs typeface="Helvetica Neue"/>
                         </a:rPr>
-                        <a:t>приложений в организации</a:t>
+                        <a:t>тесты и выпуск</a:t>
                       </a:r>
                     </a:p>
                   </a:txBody>
@@ -7420,33 +3769,7 @@
                           <a:ea typeface="Helvetica Neue"/>
                           <a:cs typeface="Helvetica Neue"/>
                         </a:rPr>
-                        <a:t>В нашей паре нет отдельной</a:t>
-                      </a:r>
-                    </a:p>
-                    <a:p>
-                      <a:r>
-                        <a:rPr sz="1875" b="0">
-                          <a:solidFill>
-                            <a:srgbClr val="102A30"/>
-                          </a:solidFill>
-                          <a:latin typeface="Helvetica Neue"/>
-                          <a:ea typeface="Helvetica Neue"/>
-                          <a:cs typeface="Helvetica Neue"/>
-                        </a:rPr>
-                        <a:t>задачи управления безопасностью</a:t>
-                      </a:r>
-                    </a:p>
-                    <a:p>
-                      <a:r>
-                        <a:rPr sz="1875" b="0">
-                          <a:solidFill>
-                            <a:srgbClr val="102A30"/>
-                          </a:solidFill>
-                          <a:latin typeface="Helvetica Neue"/>
-                          <a:ea typeface="Helvetica Neue"/>
-                          <a:cs typeface="Helvetica Neue"/>
-                        </a:rPr>
-                        <a:t>на уровне организации.</a:t>
+                        <a:t>Основа: 7 правил пары</a:t>
                       </a:r>
                     </a:p>
                   </a:txBody>
@@ -7457,7 +3780,7 @@
                   </a:tcPr>
                 </a:tc>
               </a:tr>
-              <a:tr h="1104900">
+              <a:tr h="762000">
                 <a:tc>
                   <a:txBody>
                     <a:bodyPr>
@@ -7474,20 +3797,7 @@
                           <a:ea typeface="Helvetica Neue"/>
                           <a:cs typeface="Helvetica Neue"/>
                         </a:rPr>
-                        <a:t>IEC</a:t>
-                      </a:r>
-                    </a:p>
-                    <a:p>
-                      <a:r>
-                        <a:rPr sz="1875" b="0">
-                          <a:solidFill>
-                            <a:srgbClr val="102A30"/>
-                          </a:solidFill>
-                          <a:latin typeface="Helvetica Neue"/>
-                          <a:ea typeface="Helvetica Neue"/>
-                          <a:cs typeface="Helvetica Neue"/>
-                        </a:rPr>
-                        <a:t>62443-4-1</a:t>
+                        <a:t>OWASP SAMM 2</a:t>
                       </a:r>
                     </a:p>
                   </a:txBody>
@@ -7513,7 +3823,7 @@
                           <a:ea typeface="Helvetica Neue"/>
                           <a:cs typeface="Helvetica Neue"/>
                         </a:rPr>
-                        <a:t>Безопасная разработка</a:t>
+                        <a:t>Оценка и развитие</a:t>
                       </a:r>
                     </a:p>
                     <a:p>
@@ -7526,7 +3836,7 @@
                           <a:ea typeface="Helvetica Neue"/>
                           <a:cs typeface="Helvetica Neue"/>
                         </a:rPr>
-                        <a:t>промышленных продуктов</a:t>
+                        <a:t>практик команды</a:t>
                       </a:r>
                     </a:p>
                   </a:txBody>
@@ -7552,7 +3862,7 @@
                           <a:ea typeface="Helvetica Neue"/>
                           <a:cs typeface="Helvetica Neue"/>
                         </a:rPr>
-                        <a:t>TaskFlow не относится</a:t>
+                        <a:t>Пока мало истории</a:t>
                       </a:r>
                     </a:p>
                     <a:p>
@@ -7565,7 +3875,7 @@
                           <a:ea typeface="Helvetica Neue"/>
                           <a:cs typeface="Helvetica Neue"/>
                         </a:rPr>
-                        <a:t>к промышленной автоматизации.</a:t>
+                        <a:t>устойчивой работы</a:t>
                       </a:r>
                     </a:p>
                   </a:txBody>
@@ -7576,7 +3886,7 @@
                   </a:tcPr>
                 </a:tc>
               </a:tr>
-              <a:tr h="1104900">
+              <a:tr h="762000">
                 <a:tc>
                   <a:txBody>
                     <a:bodyPr>
@@ -7593,7 +3903,7 @@
                           <a:ea typeface="Helvetica Neue"/>
                           <a:cs typeface="Helvetica Neue"/>
                         </a:rPr>
-                        <a:t>BSIMM</a:t>
+                        <a:t>ГОСТ Р 56939-2024</a:t>
                       </a:r>
                     </a:p>
                   </a:txBody>
@@ -7619,7 +3929,7 @@
                           <a:ea typeface="Helvetica Neue"/>
                           <a:cs typeface="Helvetica Neue"/>
                         </a:rPr>
-                        <a:t>Практики безопасности,</a:t>
+                        <a:t>Требования к работам</a:t>
                       </a:r>
                     </a:p>
                     <a:p>
@@ -7632,7 +3942,7 @@
                           <a:ea typeface="Helvetica Neue"/>
                           <a:cs typeface="Helvetica Neue"/>
                         </a:rPr>
-                        <a:t>наблюдаемые в организациях</a:t>
+                        <a:t>безопасной разработки</a:t>
                       </a:r>
                     </a:p>
                   </a:txBody>
@@ -7658,7 +3968,7 @@
                           <a:ea typeface="Helvetica Neue"/>
                           <a:cs typeface="Helvetica Neue"/>
                         </a:rPr>
-                        <a:t>Сравнение с другими</a:t>
+                        <a:t>Курс допускает выбор.</a:t>
                       </a:r>
                     </a:p>
                     <a:p>
@@ -7671,7 +3981,2849 @@
                           <a:ea typeface="Helvetica Neue"/>
                           <a:cs typeface="Helvetica Neue"/>
                         </a:rPr>
-                        <a:t>организациями не является</a:t>
+                        <a:t>Выбрали открытый SSDF</a:t>
+                      </a:r>
+                    </a:p>
+                  </a:txBody>
+                  <a:tcPr marL="91440" marR="91440" marT="45720" marB="45720">
+                    <a:solidFill>
+                      <a:srgbClr val="FFFFFF"/>
+                    </a:solidFill>
+                  </a:tcPr>
+                </a:tc>
+              </a:tr>
+            </a:tbl>
+          </a:graphicData>
+        </a:graphic>
+      </p:graphicFrame>
+    </p:spTree>
+    <p:extLst>
+      <p:ext uri="{BB962C8B-B14F-4D97-AF65-F5344CB8AC3E}">
+        <p14:creationId xmlns:p14="http://schemas.microsoft.com/office/powerpoint/2010/main" val="1505149136"/>
+      </p:ext>
+    </p:extLst>
+  </p:cSld>
+</p:sld>
+</file>
+
+<file path=ppt/slides/slide4.xml><?xml version="1.0" encoding="utf-8"?>
+<p:sld xmlns:p="http://schemas.openxmlformats.org/presentationml/2006/main">
+  <p:cSld>
+    <p:bg>
+      <p:bgPr>
+        <a:solidFill xmlns:a="http://schemas.openxmlformats.org/drawingml/2006/main">
+          <a:srgbClr val="F7F6F1"/>
+        </a:solidFill>
+      </p:bgPr>
+    </p:bg>
+    <p:spTree>
+      <p:nvGrpSpPr>
+        <p:cNvPr id="1" name=""/>
+        <p:cNvGrpSpPr/>
+        <p:nvPr/>
+      </p:nvGrpSpPr>
+      <p:grpSpPr>
+        <a:xfrm xmlns:a="http://schemas.openxmlformats.org/drawingml/2006/main"/>
+      </p:grpSpPr>
+      <p:sp>
+        <p:nvSpPr>
+          <p:cNvPr id="8" name="">
+            <a:extLst xmlns:a="http://schemas.openxmlformats.org/drawingml/2006/main">
+              <a:ext uri="{FF2B5EF4-FFF2-40B4-BE49-F238E27FC236}">
+                <a16:creationId xmlns:a16="http://schemas.microsoft.com/office/drawing/2014/main" id="{CA236832-8B90-4562-9CD5-20B2209D0649}"/>
+              </a:ext>
+            </a:extLst>
+          </p:cNvPr>
+          <p:cNvSpPr>
+            <a:spLocks xmlns:a="http://schemas.openxmlformats.org/drawingml/2006/main" noGrp="1"/>
+          </p:cNvSpPr>
+          <p:nvPr/>
+        </p:nvSpPr>
+        <p:spPr>
+          <a:xfrm xmlns:a="http://schemas.openxmlformats.org/drawingml/2006/main">
+            <a:off x="609600" y="304800"/>
+            <a:ext cx="10763250" cy="266700"/>
+          </a:xfrm>
+          <a:prstGeom xmlns:a="http://schemas.openxmlformats.org/drawingml/2006/main" prst="rect">
+            <a:avLst/>
+          </a:prstGeom>
+          <a:noFill xmlns:a="http://schemas.openxmlformats.org/drawingml/2006/main"/>
+          <a:ln xmlns:a="http://schemas.openxmlformats.org/drawingml/2006/main" w="0">
+            <a:noFill/>
+          </a:ln>
+        </p:spPr>
+        <p:txBody>
+          <a:bodyPr xmlns:a="http://schemas.openxmlformats.org/drawingml/2006/main">
+            <a:noAutofit/>
+          </a:bodyPr>
+          <a:lstStyle xmlns:a="http://schemas.openxmlformats.org/drawingml/2006/main"/>
+          <a:p xmlns:a="http://schemas.openxmlformats.org/drawingml/2006/main">
+            <a:pPr>
+              <a:buNone/>
+              <a:defRPr sz="1350" b="1">
+                <a:solidFill>
+                  <a:srgbClr val="26756C"/>
+                </a:solidFill>
+                <a:latin typeface="Helvetica Neue"/>
+                <a:ea typeface="Helvetica Neue"/>
+                <a:cs typeface="Helvetica Neue"/>
+              </a:defRPr>
+            </a:pPr>
+            <a:r>
+              <a:rPr sz="1350" b="1">
+                <a:solidFill>
+                  <a:srgbClr val="26756C"/>
+                </a:solidFill>
+                <a:latin typeface="Helvetica Neue"/>
+                <a:ea typeface="Helvetica Neue"/>
+                <a:cs typeface="Helvetica Neue"/>
+              </a:rPr>
+              <a:t>КОНЦЕПЦИЯ БЕЗОПАСНОЙ РАЗРАБОТКИ</a:t>
+            </a:r>
+          </a:p>
+        </p:txBody>
+      </p:sp>
+      <p:sp>
+        <p:nvSpPr>
+          <p:cNvPr id="2" name="">
+            <a:extLst xmlns:a="http://schemas.openxmlformats.org/drawingml/2006/main">
+              <a:ext uri="{FF2B5EF4-FFF2-40B4-BE49-F238E27FC236}">
+                <a16:creationId xmlns:a16="http://schemas.microsoft.com/office/drawing/2014/main" id="{AF3E136D-6EA8-4350-B7A0-995FFCEF72B4}"/>
+              </a:ext>
+            </a:extLst>
+          </p:cNvPr>
+          <p:cNvSpPr>
+            <a:spLocks xmlns:a="http://schemas.openxmlformats.org/drawingml/2006/main" noGrp="1"/>
+          </p:cNvSpPr>
+          <p:nvPr/>
+        </p:nvSpPr>
+        <p:spPr>
+          <a:xfrm xmlns:a="http://schemas.openxmlformats.org/drawingml/2006/main">
+            <a:off x="609600" y="838200"/>
+            <a:ext cx="10972800" cy="990600"/>
+          </a:xfrm>
+          <a:prstGeom xmlns:a="http://schemas.openxmlformats.org/drawingml/2006/main" prst="rect">
+            <a:avLst/>
+          </a:prstGeom>
+          <a:noFill xmlns:a="http://schemas.openxmlformats.org/drawingml/2006/main"/>
+          <a:ln xmlns:a="http://schemas.openxmlformats.org/drawingml/2006/main" w="0">
+            <a:noFill/>
+          </a:ln>
+        </p:spPr>
+        <p:txBody>
+          <a:bodyPr xmlns:a="http://schemas.openxmlformats.org/drawingml/2006/main">
+            <a:noAutofit/>
+          </a:bodyPr>
+          <a:lstStyle xmlns:a="http://schemas.openxmlformats.org/drawingml/2006/main"/>
+          <a:p xmlns:a="http://schemas.openxmlformats.org/drawingml/2006/main">
+            <a:pPr>
+              <a:buNone/>
+              <a:defRPr sz="3300" b="1">
+                <a:solidFill>
+                  <a:srgbClr val="102A30"/>
+                </a:solidFill>
+                <a:latin typeface="Helvetica Neue"/>
+                <a:ea typeface="Helvetica Neue"/>
+                <a:cs typeface="Helvetica Neue"/>
+              </a:defRPr>
+            </a:pPr>
+            <a:r>
+              <a:rPr sz="3300" b="1">
+                <a:solidFill>
+                  <a:srgbClr val="102A30"/>
+                </a:solidFill>
+                <a:latin typeface="Helvetica Neue"/>
+                <a:ea typeface="Helvetica Neue"/>
+                <a:cs typeface="Helvetica Neue"/>
+              </a:rPr>
+              <a:t>Одно правило в действии</a:t>
+            </a:r>
+          </a:p>
+        </p:txBody>
+      </p:sp>
+      <p:sp>
+        <p:nvSpPr>
+          <p:cNvPr id="3" name="">
+            <a:extLst xmlns:a="http://schemas.openxmlformats.org/drawingml/2006/main">
+              <a:ext uri="{FF2B5EF4-FFF2-40B4-BE49-F238E27FC236}">
+                <a16:creationId xmlns:a16="http://schemas.microsoft.com/office/drawing/2014/main" id="{2227BBEA-07AF-4A9C-97C1-42144AAC6139}"/>
+              </a:ext>
+            </a:extLst>
+          </p:cNvPr>
+          <p:cNvSpPr>
+            <a:spLocks xmlns:a="http://schemas.openxmlformats.org/drawingml/2006/main" noGrp="1"/>
+          </p:cNvSpPr>
+          <p:nvPr/>
+        </p:nvSpPr>
+        <p:spPr>
+          <a:xfrm xmlns:a="http://schemas.openxmlformats.org/drawingml/2006/main">
+            <a:off x="609600" y="6372225"/>
+            <a:ext cx="10001250" cy="247650"/>
+          </a:xfrm>
+          <a:prstGeom xmlns:a="http://schemas.openxmlformats.org/drawingml/2006/main" prst="rect">
+            <a:avLst/>
+          </a:prstGeom>
+          <a:noFill xmlns:a="http://schemas.openxmlformats.org/drawingml/2006/main"/>
+          <a:ln xmlns:a="http://schemas.openxmlformats.org/drawingml/2006/main" w="0">
+            <a:noFill/>
+          </a:ln>
+        </p:spPr>
+        <p:txBody>
+          <a:bodyPr xmlns:a="http://schemas.openxmlformats.org/drawingml/2006/main">
+            <a:noAutofit/>
+          </a:bodyPr>
+          <a:lstStyle xmlns:a="http://schemas.openxmlformats.org/drawingml/2006/main"/>
+          <a:p xmlns:a="http://schemas.openxmlformats.org/drawingml/2006/main">
+            <a:pPr>
+              <a:buNone/>
+              <a:defRPr sz="1350" b="0">
+                <a:solidFill>
+                  <a:srgbClr val="59686B"/>
+                </a:solidFill>
+                <a:latin typeface="Helvetica Neue"/>
+                <a:ea typeface="Helvetica Neue"/>
+                <a:cs typeface="Helvetica Neue"/>
+              </a:defRPr>
+            </a:pPr>
+            <a:r>
+              <a:rPr sz="1350" b="0">
+                <a:solidFill>
+                  <a:srgbClr val="59686B"/>
+                </a:solidFill>
+                <a:latin typeface="Helvetica Neue"/>
+                <a:ea typeface="Helvetica Neue"/>
+                <a:cs typeface="Helvetica Neue"/>
+              </a:rPr>
+              <a:t>ЯвкаИБ / TaskFlow / ЭК1</a:t>
+            </a:r>
+          </a:p>
+        </p:txBody>
+      </p:sp>
+      <p:sp>
+        <p:nvSpPr>
+          <p:cNvPr id="4" name="">
+            <a:extLst xmlns:a="http://schemas.openxmlformats.org/drawingml/2006/main">
+              <a:ext uri="{FF2B5EF4-FFF2-40B4-BE49-F238E27FC236}">
+                <a16:creationId xmlns:a16="http://schemas.microsoft.com/office/drawing/2014/main" id="{DE95B7F1-F785-4784-AAF1-38F88216DB9A}"/>
+              </a:ext>
+            </a:extLst>
+          </p:cNvPr>
+          <p:cNvSpPr>
+            <a:spLocks xmlns:a="http://schemas.openxmlformats.org/drawingml/2006/main" noGrp="1"/>
+          </p:cNvSpPr>
+          <p:nvPr/>
+        </p:nvSpPr>
+        <p:spPr>
+          <a:xfrm xmlns:a="http://schemas.openxmlformats.org/drawingml/2006/main">
+            <a:off x="11029950" y="6324600"/>
+            <a:ext cx="619125" cy="333375"/>
+          </a:xfrm>
+          <a:prstGeom xmlns:a="http://schemas.openxmlformats.org/drawingml/2006/main" prst="rect">
+            <a:avLst/>
+          </a:prstGeom>
+          <a:noFill xmlns:a="http://schemas.openxmlformats.org/drawingml/2006/main"/>
+          <a:ln xmlns:a="http://schemas.openxmlformats.org/drawingml/2006/main" w="0">
+            <a:noFill/>
+          </a:ln>
+        </p:spPr>
+        <p:txBody>
+          <a:bodyPr xmlns:a="http://schemas.openxmlformats.org/drawingml/2006/main">
+            <a:noAutofit/>
+          </a:bodyPr>
+          <a:lstStyle xmlns:a="http://schemas.openxmlformats.org/drawingml/2006/main"/>
+          <a:p xmlns:a="http://schemas.openxmlformats.org/drawingml/2006/main">
+            <a:pPr>
+              <a:buNone/>
+              <a:defRPr sz="1800" b="1">
+                <a:solidFill>
+                  <a:srgbClr val="26756C"/>
+                </a:solidFill>
+                <a:latin typeface="Helvetica Neue"/>
+                <a:ea typeface="Helvetica Neue"/>
+                <a:cs typeface="Helvetica Neue"/>
+              </a:defRPr>
+            </a:pPr>
+            <a:r>
+              <a:rPr sz="1800" b="1">
+                <a:solidFill>
+                  <a:srgbClr val="26756C"/>
+                </a:solidFill>
+                <a:latin typeface="Helvetica Neue"/>
+                <a:ea typeface="Helvetica Neue"/>
+                <a:cs typeface="Helvetica Neue"/>
+              </a:rPr>
+              <a:t>04</a:t>
+            </a:r>
+          </a:p>
+        </p:txBody>
+      </p:sp>
+      <p:sp>
+        <p:nvSpPr>
+          <p:cNvPr id="5" name="">
+            <a:extLst xmlns:a="http://schemas.openxmlformats.org/drawingml/2006/main">
+              <a:ext uri="{FF2B5EF4-FFF2-40B4-BE49-F238E27FC236}">
+                <a16:creationId xmlns:a16="http://schemas.microsoft.com/office/drawing/2014/main" id="{2EBFEF88-8900-49AA-857B-B98B094AFE0B}"/>
+              </a:ext>
+            </a:extLst>
+          </p:cNvPr>
+          <p:cNvSpPr>
+            <a:spLocks xmlns:a="http://schemas.openxmlformats.org/drawingml/2006/main" noGrp="1"/>
+          </p:cNvSpPr>
+          <p:nvPr/>
+        </p:nvSpPr>
+        <p:spPr>
+          <a:xfrm xmlns:a="http://schemas.openxmlformats.org/drawingml/2006/main">
+            <a:off x="609600" y="1809750"/>
+            <a:ext cx="10972800" cy="447675"/>
+          </a:xfrm>
+          <a:prstGeom xmlns:a="http://schemas.openxmlformats.org/drawingml/2006/main" prst="rect">
+            <a:avLst/>
+          </a:prstGeom>
+          <a:noFill xmlns:a="http://schemas.openxmlformats.org/drawingml/2006/main"/>
+          <a:ln xmlns:a="http://schemas.openxmlformats.org/drawingml/2006/main" w="0">
+            <a:noFill/>
+          </a:ln>
+        </p:spPr>
+        <p:txBody>
+          <a:bodyPr xmlns:a="http://schemas.openxmlformats.org/drawingml/2006/main">
+            <a:noAutofit/>
+          </a:bodyPr>
+          <a:lstStyle xmlns:a="http://schemas.openxmlformats.org/drawingml/2006/main"/>
+          <a:p xmlns:a="http://schemas.openxmlformats.org/drawingml/2006/main">
+            <a:pPr>
+              <a:buNone/>
+              <a:defRPr sz="2250" b="1">
+                <a:solidFill>
+                  <a:srgbClr val="26756C"/>
+                </a:solidFill>
+                <a:latin typeface="Helvetica Neue"/>
+                <a:ea typeface="Helvetica Neue"/>
+                <a:cs typeface="Helvetica Neue"/>
+              </a:defRPr>
+            </a:pPr>
+            <a:r>
+              <a:rPr sz="2250" b="1">
+                <a:solidFill>
+                  <a:srgbClr val="26756C"/>
+                </a:solidFill>
+                <a:latin typeface="Helvetica Neue"/>
+                <a:ea typeface="Helvetica Neue"/>
+                <a:cs typeface="Helvetica Neue"/>
+              </a:rPr>
+              <a:t>PW.8.1–8.2: проверка работающего приложения</a:t>
+            </a:r>
+          </a:p>
+        </p:txBody>
+      </p:sp>
+      <p:sp>
+        <p:nvSpPr>
+          <p:cNvPr id="7" name="">
+            <a:extLst xmlns:a="http://schemas.openxmlformats.org/drawingml/2006/main">
+              <a:ext uri="{FF2B5EF4-FFF2-40B4-BE49-F238E27FC236}">
+                <a16:creationId xmlns:a16="http://schemas.microsoft.com/office/drawing/2014/main" id="{A3883D5E-1612-4E94-8323-4D4E117E15C5}"/>
+              </a:ext>
+            </a:extLst>
+          </p:cNvPr>
+          <p:cNvSpPr>
+            <a:spLocks xmlns:a="http://schemas.openxmlformats.org/drawingml/2006/main" noGrp="1"/>
+          </p:cNvSpPr>
+          <p:nvPr/>
+        </p:nvSpPr>
+        <p:spPr>
+          <a:xfrm xmlns:a="http://schemas.openxmlformats.org/drawingml/2006/main">
+            <a:off x="609600" y="5876925"/>
+            <a:ext cx="10972800" cy="381000"/>
+          </a:xfrm>
+          <a:prstGeom xmlns:a="http://schemas.openxmlformats.org/drawingml/2006/main" prst="rect">
+            <a:avLst/>
+          </a:prstGeom>
+          <a:noFill xmlns:a="http://schemas.openxmlformats.org/drawingml/2006/main"/>
+          <a:ln xmlns:a="http://schemas.openxmlformats.org/drawingml/2006/main" w="0">
+            <a:noFill/>
+          </a:ln>
+        </p:spPr>
+        <p:txBody>
+          <a:bodyPr xmlns:a="http://schemas.openxmlformats.org/drawingml/2006/main">
+            <a:noAutofit/>
+          </a:bodyPr>
+          <a:lstStyle xmlns:a="http://schemas.openxmlformats.org/drawingml/2006/main"/>
+          <a:p xmlns:a="http://schemas.openxmlformats.org/drawingml/2006/main">
+            <a:pPr>
+              <a:buNone/>
+              <a:defRPr sz="1875" b="0">
+                <a:solidFill>
+                  <a:srgbClr val="102A30"/>
+                </a:solidFill>
+                <a:latin typeface="Helvetica Neue"/>
+                <a:ea typeface="Helvetica Neue"/>
+                <a:cs typeface="Helvetica Neue"/>
+              </a:defRPr>
+            </a:pPr>
+            <a:r>
+              <a:rPr sz="1875" b="0">
+                <a:solidFill>
+                  <a:srgbClr val="102A30"/>
+                </a:solidFill>
+                <a:latin typeface="Helvetica Neue"/>
+                <a:ea typeface="Helvetica Neue"/>
+                <a:cs typeface="Helvetica Neue"/>
+              </a:rPr>
+              <a:t>Сохраняем версию кода, условия, результат и проверку партнёра.</a:t>
+            </a:r>
+          </a:p>
+        </p:txBody>
+      </p:sp>
+      <p:graphicFrame>
+        <p:nvGraphicFramePr>
+          <p:cNvPr id="16" name=""/>
+          <p:cNvGraphicFramePr/>
+          <p:nvPr/>
+        </p:nvGraphicFramePr>
+        <p:xfrm>
+          <a:off xmlns:a="http://schemas.openxmlformats.org/drawingml/2006/main" x="609600" y="2476500"/>
+          <a:ext xmlns:a="http://schemas.openxmlformats.org/drawingml/2006/main" cx="10972800" cy="3171825"/>
+        </p:xfrm>
+        <a:graphic xmlns:a="http://schemas.openxmlformats.org/drawingml/2006/main">
+          <a:graphicData uri="http://schemas.openxmlformats.org/drawingml/2006/table">
+            <a:tbl>
+              <a:tblPr/>
+              <a:tblGrid>
+                <a:gridCol w="2667000"/>
+                <a:gridCol w="8305800"/>
+              </a:tblGrid>
+              <a:tr h="528638">
+                <a:tc>
+                  <a:txBody>
+                    <a:bodyPr>
+                      <a:noAutofit/>
+                    </a:bodyPr>
+                    <a:lstStyle/>
+                    <a:p>
+                      <a:r>
+                        <a:rPr sz="1875" b="1">
+                          <a:solidFill>
+                            <a:srgbClr val="FFFFFF"/>
+                          </a:solidFill>
+                          <a:latin typeface="Helvetica Neue"/>
+                          <a:ea typeface="Helvetica Neue"/>
+                          <a:cs typeface="Helvetica Neue"/>
+                        </a:rPr>
+                        <a:t>Шаг</a:t>
+                      </a:r>
+                    </a:p>
+                  </a:txBody>
+                  <a:tcPr marL="91440" marR="91440" marT="45720" marB="45720">
+                    <a:solidFill>
+                      <a:srgbClr val="102A30"/>
+                    </a:solidFill>
+                  </a:tcPr>
+                </a:tc>
+                <a:tc>
+                  <a:txBody>
+                    <a:bodyPr>
+                      <a:noAutofit/>
+                    </a:bodyPr>
+                    <a:lstStyle/>
+                    <a:p>
+                      <a:r>
+                        <a:rPr sz="1875" b="1">
+                          <a:solidFill>
+                            <a:srgbClr val="FFFFFF"/>
+                          </a:solidFill>
+                          <a:latin typeface="Helvetica Neue"/>
+                          <a:ea typeface="Helvetica Neue"/>
+                          <a:cs typeface="Helvetica Neue"/>
+                        </a:rPr>
+                        <a:t>Пример для прав доступа</a:t>
+                      </a:r>
+                    </a:p>
+                  </a:txBody>
+                  <a:tcPr marL="91440" marR="91440" marT="45720" marB="45720">
+                    <a:solidFill>
+                      <a:srgbClr val="102A30"/>
+                    </a:solidFill>
+                  </a:tcPr>
+                </a:tc>
+              </a:tr>
+              <a:tr h="528638">
+                <a:tc>
+                  <a:txBody>
+                    <a:bodyPr>
+                      <a:noAutofit/>
+                    </a:bodyPr>
+                    <a:lstStyle/>
+                    <a:p>
+                      <a:r>
+                        <a:rPr sz="1875" b="0">
+                          <a:solidFill>
+                            <a:srgbClr val="102A30"/>
+                          </a:solidFill>
+                          <a:latin typeface="Helvetica Neue"/>
+                          <a:ea typeface="Helvetica Neue"/>
+                          <a:cs typeface="Helvetica Neue"/>
+                        </a:rPr>
+                        <a:t>Требование</a:t>
+                      </a:r>
+                    </a:p>
+                  </a:txBody>
+                  <a:tcPr marL="91440" marR="91440" marT="45720" marB="45720">
+                    <a:solidFill>
+                      <a:srgbClr val="FFFFFF"/>
+                    </a:solidFill>
+                  </a:tcPr>
+                </a:tc>
+                <a:tc>
+                  <a:txBody>
+                    <a:bodyPr>
+                      <a:noAutofit/>
+                    </a:bodyPr>
+                    <a:lstStyle/>
+                    <a:p>
+                      <a:r>
+                        <a:rPr sz="1875" b="0">
+                          <a:solidFill>
+                            <a:srgbClr val="102A30"/>
+                          </a:solidFill>
+                          <a:latin typeface="Helvetica Neue"/>
+                          <a:ea typeface="Helvetica Neue"/>
+                          <a:cs typeface="Helvetica Neue"/>
+                        </a:rPr>
+                        <a:t>Наблюдатель не изменяет задачу</a:t>
+                      </a:r>
+                    </a:p>
+                  </a:txBody>
+                  <a:tcPr marL="91440" marR="91440" marT="45720" marB="45720">
+                    <a:solidFill>
+                      <a:srgbClr val="FFFFFF"/>
+                    </a:solidFill>
+                  </a:tcPr>
+                </a:tc>
+              </a:tr>
+              <a:tr h="528638">
+                <a:tc>
+                  <a:txBody>
+                    <a:bodyPr>
+                      <a:noAutofit/>
+                    </a:bodyPr>
+                    <a:lstStyle/>
+                    <a:p>
+                      <a:r>
+                        <a:rPr sz="1875" b="0">
+                          <a:solidFill>
+                            <a:srgbClr val="102A30"/>
+                          </a:solidFill>
+                          <a:latin typeface="Helvetica Neue"/>
+                          <a:ea typeface="Helvetica Neue"/>
+                          <a:cs typeface="Helvetica Neue"/>
+                        </a:rPr>
+                        <a:t>Действие Романа</a:t>
+                      </a:r>
+                    </a:p>
+                  </a:txBody>
+                  <a:tcPr marL="91440" marR="91440" marT="45720" marB="45720">
+                    <a:solidFill>
+                      <a:srgbClr val="F7F6F1"/>
+                    </a:solidFill>
+                  </a:tcPr>
+                </a:tc>
+                <a:tc>
+                  <a:txBody>
+                    <a:bodyPr>
+                      <a:noAutofit/>
+                    </a:bodyPr>
+                    <a:lstStyle/>
+                    <a:p>
+                      <a:r>
+                        <a:rPr sz="1875" b="0">
+                          <a:solidFill>
+                            <a:srgbClr val="102A30"/>
+                          </a:solidFill>
+                          <a:latin typeface="Helvetica Neue"/>
+                          <a:ea typeface="Helvetica Neue"/>
+                          <a:cs typeface="Helvetica Neue"/>
+                        </a:rPr>
+                        <a:t>Запрос от наблюдателя и такой же от редактора</a:t>
+                      </a:r>
+                    </a:p>
+                  </a:txBody>
+                  <a:tcPr marL="91440" marR="91440" marT="45720" marB="45720">
+                    <a:solidFill>
+                      <a:srgbClr val="F7F6F1"/>
+                    </a:solidFill>
+                  </a:tcPr>
+                </a:tc>
+              </a:tr>
+              <a:tr h="528638">
+                <a:tc>
+                  <a:txBody>
+                    <a:bodyPr>
+                      <a:noAutofit/>
+                    </a:bodyPr>
+                    <a:lstStyle/>
+                    <a:p>
+                      <a:r>
+                        <a:rPr sz="1875" b="0">
+                          <a:solidFill>
+                            <a:srgbClr val="102A30"/>
+                          </a:solidFill>
+                          <a:latin typeface="Helvetica Neue"/>
+                          <a:ea typeface="Helvetica Neue"/>
+                          <a:cs typeface="Helvetica Neue"/>
+                        </a:rPr>
+                        <a:t>Результат</a:t>
+                      </a:r>
+                    </a:p>
+                  </a:txBody>
+                  <a:tcPr marL="91440" marR="91440" marT="45720" marB="45720">
+                    <a:solidFill>
+                      <a:srgbClr val="FFFFFF"/>
+                    </a:solidFill>
+                  </a:tcPr>
+                </a:tc>
+                <a:tc>
+                  <a:txBody>
+                    <a:bodyPr>
+                      <a:noAutofit/>
+                    </a:bodyPr>
+                    <a:lstStyle/>
+                    <a:p>
+                      <a:r>
+                        <a:rPr sz="1875" b="0">
+                          <a:solidFill>
+                            <a:srgbClr val="102A30"/>
+                          </a:solidFill>
+                          <a:latin typeface="Helvetica Neue"/>
+                          <a:ea typeface="Helvetica Neue"/>
+                          <a:cs typeface="Helvetica Neue"/>
+                        </a:rPr>
+                        <a:t>Наблюдателю отказано, данные прежние. Редактор меняет</a:t>
+                      </a:r>
+                    </a:p>
+                  </a:txBody>
+                  <a:tcPr marL="91440" marR="91440" marT="45720" marB="45720">
+                    <a:solidFill>
+                      <a:srgbClr val="FFFFFF"/>
+                    </a:solidFill>
+                  </a:tcPr>
+                </a:tc>
+              </a:tr>
+              <a:tr h="528638">
+                <a:tc>
+                  <a:txBody>
+                    <a:bodyPr>
+                      <a:noAutofit/>
+                    </a:bodyPr>
+                    <a:lstStyle/>
+                    <a:p>
+                      <a:r>
+                        <a:rPr sz="1875" b="0">
+                          <a:solidFill>
+                            <a:srgbClr val="102A30"/>
+                          </a:solidFill>
+                          <a:latin typeface="Helvetica Neue"/>
+                          <a:ea typeface="Helvetica Neue"/>
+                          <a:cs typeface="Helvetica Neue"/>
+                        </a:rPr>
+                        <a:t>Проверка Ярослава</a:t>
+                      </a:r>
+                    </a:p>
+                  </a:txBody>
+                  <a:tcPr marL="91440" marR="91440" marT="45720" marB="45720">
+                    <a:solidFill>
+                      <a:srgbClr val="F7F6F1"/>
+                    </a:solidFill>
+                  </a:tcPr>
+                </a:tc>
+                <a:tc>
+                  <a:txBody>
+                    <a:bodyPr>
+                      <a:noAutofit/>
+                    </a:bodyPr>
+                    <a:lstStyle/>
+                    <a:p>
+                      <a:r>
+                        <a:rPr sz="1875" b="0">
+                          <a:solidFill>
+                            <a:srgbClr val="102A30"/>
+                          </a:solidFill>
+                          <a:latin typeface="Helvetica Neue"/>
+                          <a:ea typeface="Helvetica Neue"/>
+                          <a:cs typeface="Helvetica Neue"/>
+                        </a:rPr>
+                        <a:t>Повторить запрет и прочитать проверку прав</a:t>
+                      </a:r>
+                    </a:p>
+                  </a:txBody>
+                  <a:tcPr marL="91440" marR="91440" marT="45720" marB="45720">
+                    <a:solidFill>
+                      <a:srgbClr val="F7F6F1"/>
+                    </a:solidFill>
+                  </a:tcPr>
+                </a:tc>
+              </a:tr>
+              <a:tr h="528638">
+                <a:tc>
+                  <a:txBody>
+                    <a:bodyPr>
+                      <a:noAutofit/>
+                    </a:bodyPr>
+                    <a:lstStyle/>
+                    <a:p>
+                      <a:r>
+                        <a:rPr sz="1875" b="0">
+                          <a:solidFill>
+                            <a:srgbClr val="102A30"/>
+                          </a:solidFill>
+                          <a:latin typeface="Helvetica Neue"/>
+                          <a:ea typeface="Helvetica Neue"/>
+                          <a:cs typeface="Helvetica Neue"/>
+                        </a:rPr>
+                        <a:t>Решение</a:t>
+                      </a:r>
+                    </a:p>
+                  </a:txBody>
+                  <a:tcPr marL="91440" marR="91440" marT="45720" marB="45720">
+                    <a:solidFill>
+                      <a:srgbClr val="FFFFFF"/>
+                    </a:solidFill>
+                  </a:tcPr>
+                </a:tc>
+                <a:tc>
+                  <a:txBody>
+                    <a:bodyPr>
+                      <a:noAutofit/>
+                    </a:bodyPr>
+                    <a:lstStyle/>
+                    <a:p>
+                      <a:r>
+                        <a:rPr sz="1875" b="0">
+                          <a:solidFill>
+                            <a:srgbClr val="102A30"/>
+                          </a:solidFill>
+                          <a:latin typeface="Helvetica Neue"/>
+                          <a:ea typeface="Helvetica Neue"/>
+                          <a:cs typeface="Helvetica Neue"/>
+                        </a:rPr>
+                        <a:t>Если права нарушены, изменение не принимаем</a:t>
+                      </a:r>
+                    </a:p>
+                  </a:txBody>
+                  <a:tcPr marL="91440" marR="91440" marT="45720" marB="45720">
+                    <a:solidFill>
+                      <a:srgbClr val="FFFFFF"/>
+                    </a:solidFill>
+                  </a:tcPr>
+                </a:tc>
+              </a:tr>
+            </a:tbl>
+          </a:graphicData>
+        </a:graphic>
+      </p:graphicFrame>
+    </p:spTree>
+    <p:extLst>
+      <p:ext uri="{BB962C8B-B14F-4D97-AF65-F5344CB8AC3E}">
+        <p14:creationId xmlns:p14="http://schemas.microsoft.com/office/powerpoint/2010/main" val="231355314"/>
+      </p:ext>
+    </p:extLst>
+  </p:cSld>
+</p:sld>
+</file>
+
+<file path=ppt/slides/slide5.xml><?xml version="1.0" encoding="utf-8"?>
+<p:sld xmlns:p="http://schemas.openxmlformats.org/presentationml/2006/main">
+  <p:cSld>
+    <p:bg>
+      <p:bgPr>
+        <a:solidFill xmlns:a="http://schemas.openxmlformats.org/drawingml/2006/main">
+          <a:srgbClr val="F7F6F1"/>
+        </a:solidFill>
+      </p:bgPr>
+    </p:bg>
+    <p:spTree>
+      <p:nvGrpSpPr>
+        <p:cNvPr id="1" name=""/>
+        <p:cNvGrpSpPr/>
+        <p:nvPr/>
+      </p:nvGrpSpPr>
+      <p:grpSpPr>
+        <a:xfrm xmlns:a="http://schemas.openxmlformats.org/drawingml/2006/main"/>
+      </p:grpSpPr>
+      <p:sp>
+        <p:nvSpPr>
+          <p:cNvPr id="11" name="">
+            <a:extLst xmlns:a="http://schemas.openxmlformats.org/drawingml/2006/main">
+              <a:ext uri="{FF2B5EF4-FFF2-40B4-BE49-F238E27FC236}">
+                <a16:creationId xmlns:a16="http://schemas.microsoft.com/office/drawing/2014/main" id="{522CFE3C-CD5C-4122-B953-3F4FCBBED9AB}"/>
+              </a:ext>
+            </a:extLst>
+          </p:cNvPr>
+          <p:cNvSpPr>
+            <a:spLocks xmlns:a="http://schemas.openxmlformats.org/drawingml/2006/main" noGrp="1"/>
+          </p:cNvSpPr>
+          <p:nvPr/>
+        </p:nvSpPr>
+        <p:spPr>
+          <a:xfrm xmlns:a="http://schemas.openxmlformats.org/drawingml/2006/main">
+            <a:off x="609600" y="304800"/>
+            <a:ext cx="10763250" cy="266700"/>
+          </a:xfrm>
+          <a:prstGeom xmlns:a="http://schemas.openxmlformats.org/drawingml/2006/main" prst="rect">
+            <a:avLst/>
+          </a:prstGeom>
+          <a:noFill xmlns:a="http://schemas.openxmlformats.org/drawingml/2006/main"/>
+          <a:ln xmlns:a="http://schemas.openxmlformats.org/drawingml/2006/main" w="0">
+            <a:noFill/>
+          </a:ln>
+        </p:spPr>
+        <p:txBody>
+          <a:bodyPr xmlns:a="http://schemas.openxmlformats.org/drawingml/2006/main">
+            <a:noAutofit/>
+          </a:bodyPr>
+          <a:lstStyle xmlns:a="http://schemas.openxmlformats.org/drawingml/2006/main"/>
+          <a:p xmlns:a="http://schemas.openxmlformats.org/drawingml/2006/main">
+            <a:pPr>
+              <a:buNone/>
+              <a:defRPr sz="1350" b="1">
+                <a:solidFill>
+                  <a:srgbClr val="26756C"/>
+                </a:solidFill>
+                <a:latin typeface="Helvetica Neue"/>
+                <a:ea typeface="Helvetica Neue"/>
+                <a:cs typeface="Helvetica Neue"/>
+              </a:defRPr>
+            </a:pPr>
+            <a:r>
+              <a:rPr sz="1350" b="1">
+                <a:solidFill>
+                  <a:srgbClr val="26756C"/>
+                </a:solidFill>
+                <a:latin typeface="Helvetica Neue"/>
+                <a:ea typeface="Helvetica Neue"/>
+                <a:cs typeface="Helvetica Neue"/>
+              </a:rPr>
+              <a:t>КОНЦЕПЦИЯ БЕЗОПАСНОЙ РАЗРАБОТКИ</a:t>
+            </a:r>
+          </a:p>
+        </p:txBody>
+      </p:sp>
+      <p:sp>
+        <p:nvSpPr>
+          <p:cNvPr id="2" name="">
+            <a:extLst xmlns:a="http://schemas.openxmlformats.org/drawingml/2006/main">
+              <a:ext uri="{FF2B5EF4-FFF2-40B4-BE49-F238E27FC236}">
+                <a16:creationId xmlns:a16="http://schemas.microsoft.com/office/drawing/2014/main" id="{1ACE3952-3CCD-43AA-AC7B-7147A2781EEE}"/>
+              </a:ext>
+            </a:extLst>
+          </p:cNvPr>
+          <p:cNvSpPr>
+            <a:spLocks xmlns:a="http://schemas.openxmlformats.org/drawingml/2006/main" noGrp="1"/>
+          </p:cNvSpPr>
+          <p:nvPr/>
+        </p:nvSpPr>
+        <p:spPr>
+          <a:xfrm xmlns:a="http://schemas.openxmlformats.org/drawingml/2006/main">
+            <a:off x="609600" y="838200"/>
+            <a:ext cx="10972800" cy="990600"/>
+          </a:xfrm>
+          <a:prstGeom xmlns:a="http://schemas.openxmlformats.org/drawingml/2006/main" prst="rect">
+            <a:avLst/>
+          </a:prstGeom>
+          <a:noFill xmlns:a="http://schemas.openxmlformats.org/drawingml/2006/main"/>
+          <a:ln xmlns:a="http://schemas.openxmlformats.org/drawingml/2006/main" w="0">
+            <a:noFill/>
+          </a:ln>
+        </p:spPr>
+        <p:txBody>
+          <a:bodyPr xmlns:a="http://schemas.openxmlformats.org/drawingml/2006/main">
+            <a:noAutofit/>
+          </a:bodyPr>
+          <a:lstStyle xmlns:a="http://schemas.openxmlformats.org/drawingml/2006/main"/>
+          <a:p xmlns:a="http://schemas.openxmlformats.org/drawingml/2006/main">
+            <a:pPr>
+              <a:buNone/>
+              <a:defRPr sz="3300" b="1">
+                <a:solidFill>
+                  <a:srgbClr val="102A30"/>
+                </a:solidFill>
+                <a:latin typeface="Helvetica Neue"/>
+                <a:ea typeface="Helvetica Neue"/>
+                <a:cs typeface="Helvetica Neue"/>
+              </a:defRPr>
+            </a:pPr>
+            <a:r>
+              <a:rPr sz="3300" b="1">
+                <a:solidFill>
+                  <a:srgbClr val="102A30"/>
+                </a:solidFill>
+                <a:latin typeface="Helvetica Neue"/>
+                <a:ea typeface="Helvetica Neue"/>
+                <a:cs typeface="Helvetica Neue"/>
+              </a:rPr>
+              <a:t>Текущее состояние и главный пробел</a:t>
+            </a:r>
+          </a:p>
+        </p:txBody>
+      </p:sp>
+      <p:sp>
+        <p:nvSpPr>
+          <p:cNvPr id="3" name="">
+            <a:extLst xmlns:a="http://schemas.openxmlformats.org/drawingml/2006/main">
+              <a:ext uri="{FF2B5EF4-FFF2-40B4-BE49-F238E27FC236}">
+                <a16:creationId xmlns:a16="http://schemas.microsoft.com/office/drawing/2014/main" id="{49483CD4-91EB-4FB5-921C-78D64513F913}"/>
+              </a:ext>
+            </a:extLst>
+          </p:cNvPr>
+          <p:cNvSpPr>
+            <a:spLocks xmlns:a="http://schemas.openxmlformats.org/drawingml/2006/main" noGrp="1"/>
+          </p:cNvSpPr>
+          <p:nvPr/>
+        </p:nvSpPr>
+        <p:spPr>
+          <a:xfrm xmlns:a="http://schemas.openxmlformats.org/drawingml/2006/main">
+            <a:off x="609600" y="6372225"/>
+            <a:ext cx="10001250" cy="247650"/>
+          </a:xfrm>
+          <a:prstGeom xmlns:a="http://schemas.openxmlformats.org/drawingml/2006/main" prst="rect">
+            <a:avLst/>
+          </a:prstGeom>
+          <a:noFill xmlns:a="http://schemas.openxmlformats.org/drawingml/2006/main"/>
+          <a:ln xmlns:a="http://schemas.openxmlformats.org/drawingml/2006/main" w="0">
+            <a:noFill/>
+          </a:ln>
+        </p:spPr>
+        <p:txBody>
+          <a:bodyPr xmlns:a="http://schemas.openxmlformats.org/drawingml/2006/main">
+            <a:noAutofit/>
+          </a:bodyPr>
+          <a:lstStyle xmlns:a="http://schemas.openxmlformats.org/drawingml/2006/main"/>
+          <a:p xmlns:a="http://schemas.openxmlformats.org/drawingml/2006/main">
+            <a:pPr>
+              <a:buNone/>
+              <a:defRPr sz="1350" b="0">
+                <a:solidFill>
+                  <a:srgbClr val="59686B"/>
+                </a:solidFill>
+                <a:latin typeface="Helvetica Neue"/>
+                <a:ea typeface="Helvetica Neue"/>
+                <a:cs typeface="Helvetica Neue"/>
+              </a:defRPr>
+            </a:pPr>
+            <a:r>
+              <a:rPr sz="1350" b="0">
+                <a:solidFill>
+                  <a:srgbClr val="59686B"/>
+                </a:solidFill>
+                <a:latin typeface="Helvetica Neue"/>
+                <a:ea typeface="Helvetica Neue"/>
+                <a:cs typeface="Helvetica Neue"/>
+              </a:rPr>
+              <a:t>ЯвкаИБ / TaskFlow / ЭК1</a:t>
+            </a:r>
+          </a:p>
+        </p:txBody>
+      </p:sp>
+      <p:sp>
+        <p:nvSpPr>
+          <p:cNvPr id="4" name="">
+            <a:extLst xmlns:a="http://schemas.openxmlformats.org/drawingml/2006/main">
+              <a:ext uri="{FF2B5EF4-FFF2-40B4-BE49-F238E27FC236}">
+                <a16:creationId xmlns:a16="http://schemas.microsoft.com/office/drawing/2014/main" id="{5755EE69-5510-4909-9058-5F0204064B8B}"/>
+              </a:ext>
+            </a:extLst>
+          </p:cNvPr>
+          <p:cNvSpPr>
+            <a:spLocks xmlns:a="http://schemas.openxmlformats.org/drawingml/2006/main" noGrp="1"/>
+          </p:cNvSpPr>
+          <p:nvPr/>
+        </p:nvSpPr>
+        <p:spPr>
+          <a:xfrm xmlns:a="http://schemas.openxmlformats.org/drawingml/2006/main">
+            <a:off x="11029950" y="6324600"/>
+            <a:ext cx="619125" cy="333375"/>
+          </a:xfrm>
+          <a:prstGeom xmlns:a="http://schemas.openxmlformats.org/drawingml/2006/main" prst="rect">
+            <a:avLst/>
+          </a:prstGeom>
+          <a:noFill xmlns:a="http://schemas.openxmlformats.org/drawingml/2006/main"/>
+          <a:ln xmlns:a="http://schemas.openxmlformats.org/drawingml/2006/main" w="0">
+            <a:noFill/>
+          </a:ln>
+        </p:spPr>
+        <p:txBody>
+          <a:bodyPr xmlns:a="http://schemas.openxmlformats.org/drawingml/2006/main">
+            <a:noAutofit/>
+          </a:bodyPr>
+          <a:lstStyle xmlns:a="http://schemas.openxmlformats.org/drawingml/2006/main"/>
+          <a:p xmlns:a="http://schemas.openxmlformats.org/drawingml/2006/main">
+            <a:pPr>
+              <a:buNone/>
+              <a:defRPr sz="1800" b="1">
+                <a:solidFill>
+                  <a:srgbClr val="26756C"/>
+                </a:solidFill>
+                <a:latin typeface="Helvetica Neue"/>
+                <a:ea typeface="Helvetica Neue"/>
+                <a:cs typeface="Helvetica Neue"/>
+              </a:defRPr>
+            </a:pPr>
+            <a:r>
+              <a:rPr sz="1800" b="1">
+                <a:solidFill>
+                  <a:srgbClr val="26756C"/>
+                </a:solidFill>
+                <a:latin typeface="Helvetica Neue"/>
+                <a:ea typeface="Helvetica Neue"/>
+                <a:cs typeface="Helvetica Neue"/>
+              </a:rPr>
+              <a:t>05</a:t>
+            </a:r>
+          </a:p>
+        </p:txBody>
+      </p:sp>
+      <p:sp>
+        <p:nvSpPr>
+          <p:cNvPr id="5" name="">
+            <a:extLst xmlns:a="http://schemas.openxmlformats.org/drawingml/2006/main">
+              <a:ext uri="{FF2B5EF4-FFF2-40B4-BE49-F238E27FC236}">
+                <a16:creationId xmlns:a16="http://schemas.microsoft.com/office/drawing/2014/main" id="{6948F4B4-8575-46C0-A782-EEE17DEB4A3E}"/>
+              </a:ext>
+            </a:extLst>
+          </p:cNvPr>
+          <p:cNvSpPr>
+            <a:spLocks xmlns:a="http://schemas.openxmlformats.org/drawingml/2006/main" noGrp="1"/>
+          </p:cNvSpPr>
+          <p:nvPr/>
+        </p:nvSpPr>
+        <p:spPr>
+          <a:xfrm xmlns:a="http://schemas.openxmlformats.org/drawingml/2006/main">
+            <a:off x="609600" y="1971675"/>
+            <a:ext cx="4238625" cy="781050"/>
+          </a:xfrm>
+          <a:prstGeom xmlns:a="http://schemas.openxmlformats.org/drawingml/2006/main" prst="rect">
+            <a:avLst/>
+          </a:prstGeom>
+          <a:noFill xmlns:a="http://schemas.openxmlformats.org/drawingml/2006/main"/>
+          <a:ln xmlns:a="http://schemas.openxmlformats.org/drawingml/2006/main" w="0">
+            <a:noFill/>
+          </a:ln>
+        </p:spPr>
+        <p:txBody>
+          <a:bodyPr xmlns:a="http://schemas.openxmlformats.org/drawingml/2006/main">
+            <a:noAutofit/>
+          </a:bodyPr>
+          <a:lstStyle xmlns:a="http://schemas.openxmlformats.org/drawingml/2006/main"/>
+          <a:p xmlns:a="http://schemas.openxmlformats.org/drawingml/2006/main">
+            <a:pPr>
+              <a:buNone/>
+              <a:defRPr sz="4950" b="1">
+                <a:solidFill>
+                  <a:srgbClr val="26756C"/>
+                </a:solidFill>
+                <a:latin typeface="Helvetica Neue"/>
+                <a:ea typeface="Helvetica Neue"/>
+                <a:cs typeface="Helvetica Neue"/>
+              </a:defRPr>
+            </a:pPr>
+            <a:r>
+              <a:rPr sz="4950" b="1">
+                <a:solidFill>
+                  <a:srgbClr val="26756C"/>
+                </a:solidFill>
+                <a:latin typeface="Helvetica Neue"/>
+                <a:ea typeface="Helvetica Neue"/>
+                <a:cs typeface="Helvetica Neue"/>
+              </a:rPr>
+              <a:t>27 тестов</a:t>
+            </a:r>
+          </a:p>
+        </p:txBody>
+      </p:sp>
+      <p:sp>
+        <p:nvSpPr>
+          <p:cNvPr id="6" name="">
+            <a:extLst xmlns:a="http://schemas.openxmlformats.org/drawingml/2006/main">
+              <a:ext uri="{FF2B5EF4-FFF2-40B4-BE49-F238E27FC236}">
+                <a16:creationId xmlns:a16="http://schemas.microsoft.com/office/drawing/2014/main" id="{DB0DD727-F875-4A96-84D8-36442A5F0E18}"/>
+              </a:ext>
+            </a:extLst>
+          </p:cNvPr>
+          <p:cNvSpPr>
+            <a:spLocks xmlns:a="http://schemas.openxmlformats.org/drawingml/2006/main" noGrp="1"/>
+          </p:cNvSpPr>
+          <p:nvPr/>
+        </p:nvSpPr>
+        <p:spPr>
+          <a:xfrm xmlns:a="http://schemas.openxmlformats.org/drawingml/2006/main">
+            <a:off x="609600" y="3028950"/>
+            <a:ext cx="4381500" cy="1266825"/>
+          </a:xfrm>
+          <a:prstGeom xmlns:a="http://schemas.openxmlformats.org/drawingml/2006/main" prst="rect">
+            <a:avLst/>
+          </a:prstGeom>
+          <a:noFill xmlns:a="http://schemas.openxmlformats.org/drawingml/2006/main"/>
+          <a:ln xmlns:a="http://schemas.openxmlformats.org/drawingml/2006/main" w="0">
+            <a:noFill/>
+          </a:ln>
+        </p:spPr>
+        <p:txBody>
+          <a:bodyPr xmlns:a="http://schemas.openxmlformats.org/drawingml/2006/main">
+            <a:noAutofit/>
+          </a:bodyPr>
+          <a:lstStyle xmlns:a="http://schemas.openxmlformats.org/drawingml/2006/main"/>
+          <a:p xmlns:a="http://schemas.openxmlformats.org/drawingml/2006/main">
+            <a:pPr>
+              <a:buNone/>
+              <a:defRPr sz="2100" b="0">
+                <a:solidFill>
+                  <a:srgbClr val="102A30"/>
+                </a:solidFill>
+                <a:latin typeface="Helvetica Neue"/>
+                <a:ea typeface="Helvetica Neue"/>
+                <a:cs typeface="Helvetica Neue"/>
+              </a:defRPr>
+            </a:pPr>
+            <a:r>
+              <a:rPr sz="2100" b="0">
+                <a:solidFill>
+                  <a:srgbClr val="102A30"/>
+                </a:solidFill>
+                <a:latin typeface="Helvetica Neue"/>
+                <a:ea typeface="Helvetica Neue"/>
+                <a:cs typeface="Helvetica Neue"/>
+              </a:rPr>
+              <a:t>5 проверок прошли.</a:t>
+            </a:r>
+          </a:p>
+          <a:p xmlns:a="http://schemas.openxmlformats.org/drawingml/2006/main">
+            <a:pPr>
+              <a:buNone/>
+              <a:defRPr sz="2100" b="0">
+                <a:solidFill>
+                  <a:srgbClr val="102A30"/>
+                </a:solidFill>
+                <a:latin typeface="Helvetica Neue"/>
+                <a:ea typeface="Helvetica Neue"/>
+                <a:cs typeface="Helvetica Neue"/>
+              </a:defRPr>
+            </a:pPr>
+            <a:r>
+              <a:rPr sz="2100" b="0">
+                <a:solidFill>
+                  <a:srgbClr val="102A30"/>
+                </a:solidFill>
+                <a:latin typeface="Helvetica Neue"/>
+                <a:ea typeface="Helvetica Neue"/>
+                <a:cs typeface="Helvetica Neue"/>
+              </a:rPr>
+              <a:t>Результаты и версия сохранены.</a:t>
+            </a:r>
+          </a:p>
+          <a:p xmlns:a="http://schemas.openxmlformats.org/drawingml/2006/main">
+            <a:pPr>
+              <a:buNone/>
+              <a:defRPr sz="2100" b="0">
+                <a:solidFill>
+                  <a:srgbClr val="102A30"/>
+                </a:solidFill>
+                <a:latin typeface="Helvetica Neue"/>
+                <a:ea typeface="Helvetica Neue"/>
+                <a:cs typeface="Helvetica Neue"/>
+              </a:defRPr>
+            </a:pPr>
+            <a:r>
+              <a:rPr sz="2100" b="0">
+                <a:solidFill>
+                  <a:srgbClr val="102A30"/>
+                </a:solidFill>
+                <a:latin typeface="Helvetica Neue"/>
+                <a:ea typeface="Helvetica Neue"/>
+                <a:cs typeface="Helvetica Neue"/>
+              </a:rPr>
+              <a:t>Срез: 04.10.2026.</a:t>
+            </a:r>
+          </a:p>
+        </p:txBody>
+      </p:sp>
+      <p:sp>
+        <p:nvSpPr>
+          <p:cNvPr id="7" name="">
+            <a:extLst xmlns:a="http://schemas.openxmlformats.org/drawingml/2006/main">
+              <a:ext uri="{FF2B5EF4-FFF2-40B4-BE49-F238E27FC236}">
+                <a16:creationId xmlns:a16="http://schemas.microsoft.com/office/drawing/2014/main" id="{8BDD8E09-772E-46B6-BBD2-1A5FC025A657}"/>
+              </a:ext>
+            </a:extLst>
+          </p:cNvPr>
+          <p:cNvSpPr>
+            <a:spLocks xmlns:a="http://schemas.openxmlformats.org/drawingml/2006/main" noGrp="1"/>
+          </p:cNvSpPr>
+          <p:nvPr/>
+        </p:nvSpPr>
+        <p:spPr>
+          <a:xfrm xmlns:a="http://schemas.openxmlformats.org/drawingml/2006/main">
+            <a:off x="5562600" y="2076450"/>
+            <a:ext cx="5981700" cy="800100"/>
+          </a:xfrm>
+          <a:prstGeom xmlns:a="http://schemas.openxmlformats.org/drawingml/2006/main" prst="rect">
+            <a:avLst/>
+          </a:prstGeom>
+          <a:noFill xmlns:a="http://schemas.openxmlformats.org/drawingml/2006/main"/>
+          <a:ln xmlns:a="http://schemas.openxmlformats.org/drawingml/2006/main" w="0">
+            <a:noFill/>
+          </a:ln>
+        </p:spPr>
+        <p:txBody>
+          <a:bodyPr xmlns:a="http://schemas.openxmlformats.org/drawingml/2006/main">
+            <a:noAutofit/>
+          </a:bodyPr>
+          <a:lstStyle xmlns:a="http://schemas.openxmlformats.org/drawingml/2006/main"/>
+          <a:p xmlns:a="http://schemas.openxmlformats.org/drawingml/2006/main">
+            <a:pPr>
+              <a:buNone/>
+              <a:defRPr sz="2700" b="1">
+                <a:solidFill>
+                  <a:srgbClr val="102A30"/>
+                </a:solidFill>
+                <a:latin typeface="Helvetica Neue"/>
+                <a:ea typeface="Helvetica Neue"/>
+                <a:cs typeface="Helvetica Neue"/>
+              </a:defRPr>
+            </a:pPr>
+            <a:r>
+              <a:rPr sz="2700" b="1">
+                <a:solidFill>
+                  <a:srgbClr val="102A30"/>
+                </a:solidFill>
+                <a:latin typeface="Helvetica Neue"/>
+                <a:ea typeface="Helvetica Neue"/>
+                <a:cs typeface="Helvetica Neue"/>
+              </a:rPr>
+              <a:t>G1: нет проверки партнёром</a:t>
+            </a:r>
+          </a:p>
+        </p:txBody>
+      </p:sp>
+      <p:sp>
+        <p:nvSpPr>
+          <p:cNvPr id="8" name="">
+            <a:extLst xmlns:a="http://schemas.openxmlformats.org/drawingml/2006/main">
+              <a:ext uri="{FF2B5EF4-FFF2-40B4-BE49-F238E27FC236}">
+                <a16:creationId xmlns:a16="http://schemas.microsoft.com/office/drawing/2014/main" id="{58FA0FA6-B78F-406A-B1B3-7D5645F89CCE}"/>
+              </a:ext>
+            </a:extLst>
+          </p:cNvPr>
+          <p:cNvSpPr>
+            <a:spLocks xmlns:a="http://schemas.openxmlformats.org/drawingml/2006/main" noGrp="1"/>
+          </p:cNvSpPr>
+          <p:nvPr/>
+        </p:nvSpPr>
+        <p:spPr>
+          <a:xfrm xmlns:a="http://schemas.openxmlformats.org/drawingml/2006/main">
+            <a:off x="5562600" y="3143250"/>
+            <a:ext cx="5981700" cy="1447800"/>
+          </a:xfrm>
+          <a:prstGeom xmlns:a="http://schemas.openxmlformats.org/drawingml/2006/main" prst="rect">
+            <a:avLst/>
+          </a:prstGeom>
+          <a:noFill xmlns:a="http://schemas.openxmlformats.org/drawingml/2006/main"/>
+          <a:ln xmlns:a="http://schemas.openxmlformats.org/drawingml/2006/main" w="0">
+            <a:noFill/>
+          </a:ln>
+        </p:spPr>
+        <p:txBody>
+          <a:bodyPr xmlns:a="http://schemas.openxmlformats.org/drawingml/2006/main">
+            <a:noAutofit/>
+          </a:bodyPr>
+          <a:lstStyle xmlns:a="http://schemas.openxmlformats.org/drawingml/2006/main"/>
+          <a:p xmlns:a="http://schemas.openxmlformats.org/drawingml/2006/main">
+            <a:pPr>
+              <a:buNone/>
+              <a:defRPr sz="2100" b="0">
+                <a:solidFill>
+                  <a:srgbClr val="102A30"/>
+                </a:solidFill>
+                <a:latin typeface="Helvetica Neue"/>
+                <a:ea typeface="Helvetica Neue"/>
+                <a:cs typeface="Helvetica Neue"/>
+              </a:defRPr>
+            </a:pPr>
+            <a:r>
+              <a:rPr sz="2100" b="0">
+                <a:solidFill>
+                  <a:srgbClr val="102A30"/>
+                </a:solidFill>
+                <a:latin typeface="Helvetica Neue"/>
+                <a:ea typeface="Helvetica Neue"/>
+                <a:cs typeface="Helvetica Neue"/>
+              </a:rPr>
+              <a:t>Код и тесты могут повторять</a:t>
+            </a:r>
+          </a:p>
+          <a:p xmlns:a="http://schemas.openxmlformats.org/drawingml/2006/main">
+            <a:pPr>
+              <a:buNone/>
+              <a:defRPr sz="2100" b="0">
+                <a:solidFill>
+                  <a:srgbClr val="102A30"/>
+                </a:solidFill>
+                <a:latin typeface="Helvetica Neue"/>
+                <a:ea typeface="Helvetica Neue"/>
+                <a:cs typeface="Helvetica Neue"/>
+              </a:defRPr>
+            </a:pPr>
+            <a:r>
+              <a:rPr sz="2100" b="0">
+                <a:solidFill>
+                  <a:srgbClr val="102A30"/>
+                </a:solidFill>
+                <a:latin typeface="Helvetica Neue"/>
+                <a:ea typeface="Helvetica Neue"/>
+                <a:cs typeface="Helvetica Neue"/>
+              </a:rPr>
+              <a:t>одну и ту же ошибку.</a:t>
+            </a:r>
+          </a:p>
+          <a:p xmlns:a="http://schemas.openxmlformats.org/drawingml/2006/main">
+            <a:pPr>
+              <a:buNone/>
+              <a:defRPr sz="2100" b="0">
+                <a:solidFill>
+                  <a:srgbClr val="102A30"/>
+                </a:solidFill>
+                <a:latin typeface="Helvetica Neue"/>
+                <a:ea typeface="Helvetica Neue"/>
+                <a:cs typeface="Helvetica Neue"/>
+              </a:defRPr>
+            </a:pPr>
+            <a:r>
+              <a:rPr sz="2100" b="0">
+                <a:solidFill>
+                  <a:srgbClr val="102A30"/>
+                </a:solidFill>
+                <a:latin typeface="Helvetica Neue"/>
+                <a:ea typeface="Helvetica Neue"/>
+                <a:cs typeface="Helvetica Neue"/>
+              </a:rPr>
+              <a:t>В исследованной истории нет</a:t>
+            </a:r>
+          </a:p>
+          <a:p xmlns:a="http://schemas.openxmlformats.org/drawingml/2006/main">
+            <a:pPr>
+              <a:buNone/>
+              <a:defRPr sz="2100" b="0">
+                <a:solidFill>
+                  <a:srgbClr val="102A30"/>
+                </a:solidFill>
+                <a:latin typeface="Helvetica Neue"/>
+                <a:ea typeface="Helvetica Neue"/>
+                <a:cs typeface="Helvetica Neue"/>
+              </a:defRPr>
+            </a:pPr>
+            <a:r>
+              <a:rPr sz="2100" b="0">
+                <a:solidFill>
+                  <a:srgbClr val="102A30"/>
+                </a:solidFill>
+                <a:latin typeface="Helvetica Neue"/>
+                <a:ea typeface="Helvetica Neue"/>
+                <a:cs typeface="Helvetica Neue"/>
+              </a:rPr>
+              <a:t>сохранённой проверки партнёром.</a:t>
+            </a:r>
+          </a:p>
+        </p:txBody>
+      </p:sp>
+      <p:sp>
+        <p:nvSpPr>
+          <p:cNvPr id="9" name="">
+            <a:extLst xmlns:a="http://schemas.openxmlformats.org/drawingml/2006/main">
+              <a:ext uri="{FF2B5EF4-FFF2-40B4-BE49-F238E27FC236}">
+                <a16:creationId xmlns:a16="http://schemas.microsoft.com/office/drawing/2014/main" id="{7D052799-A702-4358-A173-6C648B14F291}"/>
+              </a:ext>
+            </a:extLst>
+          </p:cNvPr>
+          <p:cNvSpPr>
+            <a:spLocks xmlns:a="http://schemas.openxmlformats.org/drawingml/2006/main" noGrp="1"/>
+          </p:cNvSpPr>
+          <p:nvPr/>
+        </p:nvSpPr>
+        <p:spPr>
+          <a:xfrm xmlns:a="http://schemas.openxmlformats.org/drawingml/2006/main">
+            <a:off x="609600" y="5133975"/>
+            <a:ext cx="10972800" cy="619125"/>
+          </a:xfrm>
+          <a:prstGeom xmlns:a="http://schemas.openxmlformats.org/drawingml/2006/main" prst="rect">
+            <a:avLst/>
+          </a:prstGeom>
+          <a:noFill xmlns:a="http://schemas.openxmlformats.org/drawingml/2006/main"/>
+          <a:ln xmlns:a="http://schemas.openxmlformats.org/drawingml/2006/main" w="0">
+            <a:noFill/>
+          </a:ln>
+        </p:spPr>
+        <p:txBody>
+          <a:bodyPr xmlns:a="http://schemas.openxmlformats.org/drawingml/2006/main">
+            <a:noAutofit/>
+          </a:bodyPr>
+          <a:lstStyle xmlns:a="http://schemas.openxmlformats.org/drawingml/2006/main"/>
+          <a:p xmlns:a="http://schemas.openxmlformats.org/drawingml/2006/main">
+            <a:pPr>
+              <a:buNone/>
+              <a:defRPr sz="2250" b="1">
+                <a:solidFill>
+                  <a:srgbClr val="26756C"/>
+                </a:solidFill>
+                <a:latin typeface="Helvetica Neue"/>
+                <a:ea typeface="Helvetica Neue"/>
+                <a:cs typeface="Helvetica Neue"/>
+              </a:defRPr>
+            </a:pPr>
+            <a:r>
+              <a:rPr sz="2250" b="1">
+                <a:solidFill>
+                  <a:srgbClr val="26756C"/>
+                </a:solidFill>
+                <a:latin typeface="Helvetica Neue"/>
+                <a:ea typeface="Helvetica Neue"/>
+                <a:cs typeface="Helvetica Neue"/>
+              </a:rPr>
+              <a:t>Приоритет: независимая проверка прав перед принятием изменений.</a:t>
+            </a:r>
+          </a:p>
+        </p:txBody>
+      </p:sp>
+      <p:sp>
+        <p:nvSpPr>
+          <p:cNvPr id="10" name="">
+            <a:extLst xmlns:a="http://schemas.openxmlformats.org/drawingml/2006/main">
+              <a:ext uri="{FF2B5EF4-FFF2-40B4-BE49-F238E27FC236}">
+                <a16:creationId xmlns:a16="http://schemas.microsoft.com/office/drawing/2014/main" id="{1EF29582-37BA-49FC-BB78-C6D14D9B395C}"/>
+              </a:ext>
+            </a:extLst>
+          </p:cNvPr>
+          <p:cNvSpPr>
+            <a:spLocks xmlns:a="http://schemas.openxmlformats.org/drawingml/2006/main" noGrp="1"/>
+          </p:cNvSpPr>
+          <p:nvPr/>
+        </p:nvSpPr>
+        <p:spPr>
+          <a:xfrm xmlns:a="http://schemas.openxmlformats.org/drawingml/2006/main">
+            <a:off x="609600" y="5886450"/>
+            <a:ext cx="10972800" cy="381000"/>
+          </a:xfrm>
+          <a:prstGeom xmlns:a="http://schemas.openxmlformats.org/drawingml/2006/main" prst="rect">
+            <a:avLst/>
+          </a:prstGeom>
+          <a:noFill xmlns:a="http://schemas.openxmlformats.org/drawingml/2006/main"/>
+          <a:ln xmlns:a="http://schemas.openxmlformats.org/drawingml/2006/main" w="0">
+            <a:noFill/>
+          </a:ln>
+        </p:spPr>
+        <p:txBody>
+          <a:bodyPr xmlns:a="http://schemas.openxmlformats.org/drawingml/2006/main">
+            <a:noAutofit/>
+          </a:bodyPr>
+          <a:lstStyle xmlns:a="http://schemas.openxmlformats.org/drawingml/2006/main"/>
+          <a:p xmlns:a="http://schemas.openxmlformats.org/drawingml/2006/main">
+            <a:pPr>
+              <a:buNone/>
+              <a:defRPr sz="1875" b="0">
+                <a:solidFill>
+                  <a:srgbClr val="59686B"/>
+                </a:solidFill>
+                <a:latin typeface="Helvetica Neue"/>
+                <a:ea typeface="Helvetica Neue"/>
+                <a:cs typeface="Helvetica Neue"/>
+              </a:defRPr>
+            </a:pPr>
+            <a:r>
+              <a:rPr sz="1875" b="0">
+                <a:solidFill>
+                  <a:srgbClr val="59686B"/>
+                </a:solidFill>
+                <a:latin typeface="Helvetica Neue"/>
+                <a:ea typeface="Helvetica Neue"/>
+                <a:cs typeface="Helvetica Neue"/>
+              </a:rPr>
+              <a:t>G2: анализ уязвимостей библиотек. G3: запуск архива партнёром.</a:t>
+            </a:r>
+          </a:p>
+        </p:txBody>
+      </p:sp>
+    </p:spTree>
+    <p:extLst>
+      <p:ext uri="{BB962C8B-B14F-4D97-AF65-F5344CB8AC3E}">
+        <p14:creationId xmlns:p14="http://schemas.microsoft.com/office/powerpoint/2010/main" val="950495193"/>
+      </p:ext>
+    </p:extLst>
+  </p:cSld>
+</p:sld>
+</file>
+
+<file path=ppt/slides/slide6.xml><?xml version="1.0" encoding="utf-8"?>
+<p:sld xmlns:p="http://schemas.openxmlformats.org/presentationml/2006/main">
+  <p:cSld>
+    <p:bg>
+      <p:bgPr>
+        <a:solidFill xmlns:a="http://schemas.openxmlformats.org/drawingml/2006/main">
+          <a:srgbClr val="F7F6F1"/>
+        </a:solidFill>
+      </p:bgPr>
+    </p:bg>
+    <p:spTree>
+      <p:nvGrpSpPr>
+        <p:cNvPr id="1" name=""/>
+        <p:cNvGrpSpPr/>
+        <p:nvPr/>
+      </p:nvGrpSpPr>
+      <p:grpSpPr>
+        <a:xfrm xmlns:a="http://schemas.openxmlformats.org/drawingml/2006/main"/>
+      </p:grpSpPr>
+      <p:sp>
+        <p:nvSpPr>
+          <p:cNvPr id="11" name="">
+            <a:extLst xmlns:a="http://schemas.openxmlformats.org/drawingml/2006/main">
+              <a:ext uri="{FF2B5EF4-FFF2-40B4-BE49-F238E27FC236}">
+                <a16:creationId xmlns:a16="http://schemas.microsoft.com/office/drawing/2014/main" id="{2CD12E6B-543E-40BB-8C37-F1BF5E1EC074}"/>
+              </a:ext>
+            </a:extLst>
+          </p:cNvPr>
+          <p:cNvSpPr>
+            <a:spLocks xmlns:a="http://schemas.openxmlformats.org/drawingml/2006/main" noGrp="1"/>
+          </p:cNvSpPr>
+          <p:nvPr/>
+        </p:nvSpPr>
+        <p:spPr>
+          <a:xfrm xmlns:a="http://schemas.openxmlformats.org/drawingml/2006/main">
+            <a:off x="609600" y="304800"/>
+            <a:ext cx="10763250" cy="266700"/>
+          </a:xfrm>
+          <a:prstGeom xmlns:a="http://schemas.openxmlformats.org/drawingml/2006/main" prst="rect">
+            <a:avLst/>
+          </a:prstGeom>
+          <a:noFill xmlns:a="http://schemas.openxmlformats.org/drawingml/2006/main"/>
+          <a:ln xmlns:a="http://schemas.openxmlformats.org/drawingml/2006/main" w="0">
+            <a:noFill/>
+          </a:ln>
+        </p:spPr>
+        <p:txBody>
+          <a:bodyPr xmlns:a="http://schemas.openxmlformats.org/drawingml/2006/main">
+            <a:noAutofit/>
+          </a:bodyPr>
+          <a:lstStyle xmlns:a="http://schemas.openxmlformats.org/drawingml/2006/main"/>
+          <a:p xmlns:a="http://schemas.openxmlformats.org/drawingml/2006/main">
+            <a:pPr>
+              <a:buNone/>
+              <a:defRPr sz="1350" b="1">
+                <a:solidFill>
+                  <a:srgbClr val="26756C"/>
+                </a:solidFill>
+                <a:latin typeface="Helvetica Neue"/>
+                <a:ea typeface="Helvetica Neue"/>
+                <a:cs typeface="Helvetica Neue"/>
+              </a:defRPr>
+            </a:pPr>
+            <a:r>
+              <a:rPr sz="1350" b="1">
+                <a:solidFill>
+                  <a:srgbClr val="26756C"/>
+                </a:solidFill>
+                <a:latin typeface="Helvetica Neue"/>
+                <a:ea typeface="Helvetica Neue"/>
+                <a:cs typeface="Helvetica Neue"/>
+              </a:rPr>
+              <a:t>КОНЦЕПЦИЯ БЕЗОПАСНОЙ РАЗРАБОТКИ</a:t>
+            </a:r>
+          </a:p>
+        </p:txBody>
+      </p:sp>
+      <p:sp>
+        <p:nvSpPr>
+          <p:cNvPr id="2" name="">
+            <a:extLst xmlns:a="http://schemas.openxmlformats.org/drawingml/2006/main">
+              <a:ext uri="{FF2B5EF4-FFF2-40B4-BE49-F238E27FC236}">
+                <a16:creationId xmlns:a16="http://schemas.microsoft.com/office/drawing/2014/main" id="{1F1F4FC4-EE0D-4131-97DB-64897854A388}"/>
+              </a:ext>
+            </a:extLst>
+          </p:cNvPr>
+          <p:cNvSpPr>
+            <a:spLocks xmlns:a="http://schemas.openxmlformats.org/drawingml/2006/main" noGrp="1"/>
+          </p:cNvSpPr>
+          <p:nvPr/>
+        </p:nvSpPr>
+        <p:spPr>
+          <a:xfrm xmlns:a="http://schemas.openxmlformats.org/drawingml/2006/main">
+            <a:off x="609600" y="838200"/>
+            <a:ext cx="10972800" cy="990600"/>
+          </a:xfrm>
+          <a:prstGeom xmlns:a="http://schemas.openxmlformats.org/drawingml/2006/main" prst="rect">
+            <a:avLst/>
+          </a:prstGeom>
+          <a:noFill xmlns:a="http://schemas.openxmlformats.org/drawingml/2006/main"/>
+          <a:ln xmlns:a="http://schemas.openxmlformats.org/drawingml/2006/main" w="0">
+            <a:noFill/>
+          </a:ln>
+        </p:spPr>
+        <p:txBody>
+          <a:bodyPr xmlns:a="http://schemas.openxmlformats.org/drawingml/2006/main">
+            <a:noAutofit/>
+          </a:bodyPr>
+          <a:lstStyle xmlns:a="http://schemas.openxmlformats.org/drawingml/2006/main"/>
+          <a:p xmlns:a="http://schemas.openxmlformats.org/drawingml/2006/main">
+            <a:pPr>
+              <a:buNone/>
+              <a:defRPr sz="3300" b="1">
+                <a:solidFill>
+                  <a:srgbClr val="102A30"/>
+                </a:solidFill>
+                <a:latin typeface="Helvetica Neue"/>
+                <a:ea typeface="Helvetica Neue"/>
+                <a:cs typeface="Helvetica Neue"/>
+              </a:defRPr>
+            </a:pPr>
+            <a:r>
+              <a:rPr sz="3300" b="1">
+                <a:solidFill>
+                  <a:srgbClr val="102A30"/>
+                </a:solidFill>
+                <a:latin typeface="Helvetica Neue"/>
+                <a:ea typeface="Helvetica Neue"/>
+                <a:cs typeface="Helvetica Neue"/>
+              </a:rPr>
+              <a:t>Контрольные точки и ответственность</a:t>
+            </a:r>
+          </a:p>
+        </p:txBody>
+      </p:sp>
+      <p:sp>
+        <p:nvSpPr>
+          <p:cNvPr id="3" name="">
+            <a:extLst xmlns:a="http://schemas.openxmlformats.org/drawingml/2006/main">
+              <a:ext uri="{FF2B5EF4-FFF2-40B4-BE49-F238E27FC236}">
+                <a16:creationId xmlns:a16="http://schemas.microsoft.com/office/drawing/2014/main" id="{7E06421F-B56C-4E3A-81AA-03E620BFACAE}"/>
+              </a:ext>
+            </a:extLst>
+          </p:cNvPr>
+          <p:cNvSpPr>
+            <a:spLocks xmlns:a="http://schemas.openxmlformats.org/drawingml/2006/main" noGrp="1"/>
+          </p:cNvSpPr>
+          <p:nvPr/>
+        </p:nvSpPr>
+        <p:spPr>
+          <a:xfrm xmlns:a="http://schemas.openxmlformats.org/drawingml/2006/main">
+            <a:off x="609600" y="6372225"/>
+            <a:ext cx="10001250" cy="247650"/>
+          </a:xfrm>
+          <a:prstGeom xmlns:a="http://schemas.openxmlformats.org/drawingml/2006/main" prst="rect">
+            <a:avLst/>
+          </a:prstGeom>
+          <a:noFill xmlns:a="http://schemas.openxmlformats.org/drawingml/2006/main"/>
+          <a:ln xmlns:a="http://schemas.openxmlformats.org/drawingml/2006/main" w="0">
+            <a:noFill/>
+          </a:ln>
+        </p:spPr>
+        <p:txBody>
+          <a:bodyPr xmlns:a="http://schemas.openxmlformats.org/drawingml/2006/main">
+            <a:noAutofit/>
+          </a:bodyPr>
+          <a:lstStyle xmlns:a="http://schemas.openxmlformats.org/drawingml/2006/main"/>
+          <a:p xmlns:a="http://schemas.openxmlformats.org/drawingml/2006/main">
+            <a:pPr>
+              <a:buNone/>
+              <a:defRPr sz="1350" b="0">
+                <a:solidFill>
+                  <a:srgbClr val="59686B"/>
+                </a:solidFill>
+                <a:latin typeface="Helvetica Neue"/>
+                <a:ea typeface="Helvetica Neue"/>
+                <a:cs typeface="Helvetica Neue"/>
+              </a:defRPr>
+            </a:pPr>
+            <a:r>
+              <a:rPr sz="1350" b="0">
+                <a:solidFill>
+                  <a:srgbClr val="59686B"/>
+                </a:solidFill>
+                <a:latin typeface="Helvetica Neue"/>
+                <a:ea typeface="Helvetica Neue"/>
+                <a:cs typeface="Helvetica Neue"/>
+              </a:rPr>
+              <a:t>ЯвкаИБ / TaskFlow / ЭК1</a:t>
+            </a:r>
+          </a:p>
+        </p:txBody>
+      </p:sp>
+      <p:sp>
+        <p:nvSpPr>
+          <p:cNvPr id="4" name="">
+            <a:extLst xmlns:a="http://schemas.openxmlformats.org/drawingml/2006/main">
+              <a:ext uri="{FF2B5EF4-FFF2-40B4-BE49-F238E27FC236}">
+                <a16:creationId xmlns:a16="http://schemas.microsoft.com/office/drawing/2014/main" id="{507D2BF9-671A-4A48-8268-793497F6835C}"/>
+              </a:ext>
+            </a:extLst>
+          </p:cNvPr>
+          <p:cNvSpPr>
+            <a:spLocks xmlns:a="http://schemas.openxmlformats.org/drawingml/2006/main" noGrp="1"/>
+          </p:cNvSpPr>
+          <p:nvPr/>
+        </p:nvSpPr>
+        <p:spPr>
+          <a:xfrm xmlns:a="http://schemas.openxmlformats.org/drawingml/2006/main">
+            <a:off x="11029950" y="6324600"/>
+            <a:ext cx="619125" cy="333375"/>
+          </a:xfrm>
+          <a:prstGeom xmlns:a="http://schemas.openxmlformats.org/drawingml/2006/main" prst="rect">
+            <a:avLst/>
+          </a:prstGeom>
+          <a:noFill xmlns:a="http://schemas.openxmlformats.org/drawingml/2006/main"/>
+          <a:ln xmlns:a="http://schemas.openxmlformats.org/drawingml/2006/main" w="0">
+            <a:noFill/>
+          </a:ln>
+        </p:spPr>
+        <p:txBody>
+          <a:bodyPr xmlns:a="http://schemas.openxmlformats.org/drawingml/2006/main">
+            <a:noAutofit/>
+          </a:bodyPr>
+          <a:lstStyle xmlns:a="http://schemas.openxmlformats.org/drawingml/2006/main"/>
+          <a:p xmlns:a="http://schemas.openxmlformats.org/drawingml/2006/main">
+            <a:pPr>
+              <a:buNone/>
+              <a:defRPr sz="1800" b="1">
+                <a:solidFill>
+                  <a:srgbClr val="26756C"/>
+                </a:solidFill>
+                <a:latin typeface="Helvetica Neue"/>
+                <a:ea typeface="Helvetica Neue"/>
+                <a:cs typeface="Helvetica Neue"/>
+              </a:defRPr>
+            </a:pPr>
+            <a:r>
+              <a:rPr sz="1800" b="1">
+                <a:solidFill>
+                  <a:srgbClr val="26756C"/>
+                </a:solidFill>
+                <a:latin typeface="Helvetica Neue"/>
+                <a:ea typeface="Helvetica Neue"/>
+                <a:cs typeface="Helvetica Neue"/>
+              </a:rPr>
+              <a:t>06</a:t>
+            </a:r>
+          </a:p>
+        </p:txBody>
+      </p:sp>
+      <p:sp>
+        <p:nvSpPr>
+          <p:cNvPr id="5" name="">
+            <a:extLst xmlns:a="http://schemas.openxmlformats.org/drawingml/2006/main">
+              <a:ext uri="{FF2B5EF4-FFF2-40B4-BE49-F238E27FC236}">
+                <a16:creationId xmlns:a16="http://schemas.microsoft.com/office/drawing/2014/main" id="{C72402D9-A02D-479A-B420-BE8D791756FE}"/>
+              </a:ext>
+            </a:extLst>
+          </p:cNvPr>
+          <p:cNvSpPr>
+            <a:spLocks xmlns:a="http://schemas.openxmlformats.org/drawingml/2006/main" noGrp="1"/>
+          </p:cNvSpPr>
+          <p:nvPr/>
+        </p:nvSpPr>
+        <p:spPr>
+          <a:xfrm xmlns:a="http://schemas.openxmlformats.org/drawingml/2006/main">
+            <a:off x="609600" y="1981200"/>
+            <a:ext cx="5095875" cy="485775"/>
+          </a:xfrm>
+          <a:prstGeom xmlns:a="http://schemas.openxmlformats.org/drawingml/2006/main" prst="rect">
+            <a:avLst/>
+          </a:prstGeom>
+          <a:noFill xmlns:a="http://schemas.openxmlformats.org/drawingml/2006/main"/>
+          <a:ln xmlns:a="http://schemas.openxmlformats.org/drawingml/2006/main" w="0">
+            <a:noFill/>
+          </a:ln>
+        </p:spPr>
+        <p:txBody>
+          <a:bodyPr xmlns:a="http://schemas.openxmlformats.org/drawingml/2006/main">
+            <a:noAutofit/>
+          </a:bodyPr>
+          <a:lstStyle xmlns:a="http://schemas.openxmlformats.org/drawingml/2006/main"/>
+          <a:p xmlns:a="http://schemas.openxmlformats.org/drawingml/2006/main">
+            <a:pPr>
+              <a:buNone/>
+              <a:defRPr sz="2550" b="1">
+                <a:solidFill>
+                  <a:srgbClr val="26756C"/>
+                </a:solidFill>
+                <a:latin typeface="Helvetica Neue"/>
+                <a:ea typeface="Helvetica Neue"/>
+                <a:cs typeface="Helvetica Neue"/>
+              </a:defRPr>
+            </a:pPr>
+            <a:r>
+              <a:rPr sz="2550" b="1">
+                <a:solidFill>
+                  <a:srgbClr val="26756C"/>
+                </a:solidFill>
+                <a:latin typeface="Helvetica Neue"/>
+                <a:ea typeface="Helvetica Neue"/>
+                <a:cs typeface="Helvetica Neue"/>
+              </a:rPr>
+              <a:t>Включение изменения</a:t>
+            </a:r>
+          </a:p>
+        </p:txBody>
+      </p:sp>
+      <p:sp>
+        <p:nvSpPr>
+          <p:cNvPr id="6" name="">
+            <a:extLst xmlns:a="http://schemas.openxmlformats.org/drawingml/2006/main">
+              <a:ext uri="{FF2B5EF4-FFF2-40B4-BE49-F238E27FC236}">
+                <a16:creationId xmlns:a16="http://schemas.microsoft.com/office/drawing/2014/main" id="{85516324-16D2-406D-BFE4-239E5DAF2B66}"/>
+              </a:ext>
+            </a:extLst>
+          </p:cNvPr>
+          <p:cNvSpPr>
+            <a:spLocks xmlns:a="http://schemas.openxmlformats.org/drawingml/2006/main" noGrp="1"/>
+          </p:cNvSpPr>
+          <p:nvPr/>
+        </p:nvSpPr>
+        <p:spPr>
+          <a:xfrm xmlns:a="http://schemas.openxmlformats.org/drawingml/2006/main">
+            <a:off x="609600" y="2638425"/>
+            <a:ext cx="5038725" cy="2276475"/>
+          </a:xfrm>
+          <a:prstGeom xmlns:a="http://schemas.openxmlformats.org/drawingml/2006/main" prst="rect">
+            <a:avLst/>
+          </a:prstGeom>
+          <a:noFill xmlns:a="http://schemas.openxmlformats.org/drawingml/2006/main"/>
+          <a:ln xmlns:a="http://schemas.openxmlformats.org/drawingml/2006/main" w="0">
+            <a:noFill/>
+          </a:ln>
+        </p:spPr>
+        <p:txBody>
+          <a:bodyPr xmlns:a="http://schemas.openxmlformats.org/drawingml/2006/main">
+            <a:noAutofit/>
+          </a:bodyPr>
+          <a:lstStyle xmlns:a="http://schemas.openxmlformats.org/drawingml/2006/main"/>
+          <a:p xmlns:a="http://schemas.openxmlformats.org/drawingml/2006/main">
+            <a:pPr>
+              <a:buNone/>
+              <a:defRPr sz="2100" b="0">
+                <a:solidFill>
+                  <a:srgbClr val="102A30"/>
+                </a:solidFill>
+                <a:latin typeface="Helvetica Neue"/>
+                <a:ea typeface="Helvetica Neue"/>
+                <a:cs typeface="Helvetica Neue"/>
+              </a:defRPr>
+            </a:pPr>
+            <a:r>
+              <a:rPr sz="2100" b="0">
+                <a:solidFill>
+                  <a:srgbClr val="102A30"/>
+                </a:solidFill>
+                <a:latin typeface="Helvetica Neue"/>
+                <a:ea typeface="Helvetica Neue"/>
+                <a:cs typeface="Helvetica Neue"/>
+              </a:rPr>
+              <a:t>Автор: изменение и тесты (PW.8).</a:t>
+            </a:r>
+          </a:p>
+          <a:p xmlns:a="http://schemas.openxmlformats.org/drawingml/2006/main">
+            <a:pPr>
+              <a:buNone/>
+              <a:defRPr sz="2100" b="0">
+                <a:solidFill>
+                  <a:srgbClr val="102A30"/>
+                </a:solidFill>
+                <a:latin typeface="Helvetica Neue"/>
+                <a:ea typeface="Helvetica Neue"/>
+                <a:cs typeface="Helvetica Neue"/>
+              </a:defRPr>
+            </a:pPr>
+            <a:r>
+              <a:rPr sz="2100" b="0">
+                <a:solidFill>
+                  <a:srgbClr val="102A30"/>
+                </a:solidFill>
+                <a:latin typeface="Helvetica Neue"/>
+                <a:ea typeface="Helvetica Neue"/>
+                <a:cs typeface="Helvetica Neue"/>
+              </a:rPr>
+              <a:t>Партнёр: чтение кода (PW.7)</a:t>
+            </a:r>
+          </a:p>
+          <a:p xmlns:a="http://schemas.openxmlformats.org/drawingml/2006/main">
+            <a:pPr>
+              <a:buNone/>
+              <a:defRPr sz="2100" b="0">
+                <a:solidFill>
+                  <a:srgbClr val="102A30"/>
+                </a:solidFill>
+                <a:latin typeface="Helvetica Neue"/>
+                <a:ea typeface="Helvetica Neue"/>
+                <a:cs typeface="Helvetica Neue"/>
+              </a:defRPr>
+            </a:pPr>
+            <a:r>
+              <a:rPr sz="2100" b="0">
+                <a:solidFill>
+                  <a:srgbClr val="102A30"/>
+                </a:solidFill>
+                <a:latin typeface="Helvetica Neue"/>
+                <a:ea typeface="Helvetica Neue"/>
+                <a:cs typeface="Helvetica Neue"/>
+              </a:rPr>
+              <a:t>и повтор важного сценария.</a:t>
+            </a:r>
+          </a:p>
+          <a:p xmlns:a="http://schemas.openxmlformats.org/drawingml/2006/main">
+            <a:r>
+              <a:t/>
+            </a:r>
+          </a:p>
+          <a:p xmlns:a="http://schemas.openxmlformats.org/drawingml/2006/main">
+            <a:pPr>
+              <a:buNone/>
+              <a:defRPr sz="2100" b="0">
+                <a:solidFill>
+                  <a:srgbClr val="102A30"/>
+                </a:solidFill>
+                <a:latin typeface="Helvetica Neue"/>
+                <a:ea typeface="Helvetica Neue"/>
+                <a:cs typeface="Helvetica Neue"/>
+              </a:defRPr>
+            </a:pPr>
+            <a:r>
+              <a:rPr sz="2100" b="0">
+                <a:solidFill>
+                  <a:srgbClr val="102A30"/>
+                </a:solidFill>
+                <a:latin typeface="Helvetica Neue"/>
+                <a:ea typeface="Helvetica Neue"/>
+                <a:cs typeface="Helvetica Neue"/>
+              </a:rPr>
+              <a:t>Сохраняем результат проверки</a:t>
+            </a:r>
+          </a:p>
+          <a:p xmlns:a="http://schemas.openxmlformats.org/drawingml/2006/main">
+            <a:pPr>
+              <a:buNone/>
+              <a:defRPr sz="2100" b="0">
+                <a:solidFill>
+                  <a:srgbClr val="102A30"/>
+                </a:solidFill>
+                <a:latin typeface="Helvetica Neue"/>
+                <a:ea typeface="Helvetica Neue"/>
+                <a:cs typeface="Helvetica Neue"/>
+              </a:defRPr>
+            </a:pPr>
+            <a:r>
+              <a:rPr sz="2100" b="0">
+                <a:solidFill>
+                  <a:srgbClr val="102A30"/>
+                </a:solidFill>
+                <a:latin typeface="Helvetica Neue"/>
+                <a:ea typeface="Helvetica Neue"/>
+                <a:cs typeface="Helvetica Neue"/>
+              </a:rPr>
+              <a:t>для конкретной версии кода.</a:t>
+            </a:r>
+          </a:p>
+        </p:txBody>
+      </p:sp>
+      <p:sp>
+        <p:nvSpPr>
+          <p:cNvPr id="7" name="">
+            <a:extLst xmlns:a="http://schemas.openxmlformats.org/drawingml/2006/main">
+              <a:ext uri="{FF2B5EF4-FFF2-40B4-BE49-F238E27FC236}">
+                <a16:creationId xmlns:a16="http://schemas.microsoft.com/office/drawing/2014/main" id="{AE3396E6-D76B-4509-BF47-24CD09FF8FDD}"/>
+              </a:ext>
+            </a:extLst>
+          </p:cNvPr>
+          <p:cNvSpPr>
+            <a:spLocks xmlns:a="http://schemas.openxmlformats.org/drawingml/2006/main" noGrp="1"/>
+          </p:cNvSpPr>
+          <p:nvPr/>
+        </p:nvSpPr>
+        <p:spPr>
+          <a:xfrm xmlns:a="http://schemas.openxmlformats.org/drawingml/2006/main">
+            <a:off x="6324600" y="1981200"/>
+            <a:ext cx="5238750" cy="485775"/>
+          </a:xfrm>
+          <a:prstGeom xmlns:a="http://schemas.openxmlformats.org/drawingml/2006/main" prst="rect">
+            <a:avLst/>
+          </a:prstGeom>
+          <a:noFill xmlns:a="http://schemas.openxmlformats.org/drawingml/2006/main"/>
+          <a:ln xmlns:a="http://schemas.openxmlformats.org/drawingml/2006/main" w="0">
+            <a:noFill/>
+          </a:ln>
+        </p:spPr>
+        <p:txBody>
+          <a:bodyPr xmlns:a="http://schemas.openxmlformats.org/drawingml/2006/main">
+            <a:noAutofit/>
+          </a:bodyPr>
+          <a:lstStyle xmlns:a="http://schemas.openxmlformats.org/drawingml/2006/main"/>
+          <a:p xmlns:a="http://schemas.openxmlformats.org/drawingml/2006/main">
+            <a:pPr>
+              <a:buNone/>
+              <a:defRPr sz="2550" b="1">
+                <a:solidFill>
+                  <a:srgbClr val="26756C"/>
+                </a:solidFill>
+                <a:latin typeface="Helvetica Neue"/>
+                <a:ea typeface="Helvetica Neue"/>
+                <a:cs typeface="Helvetica Neue"/>
+              </a:defRPr>
+            </a:pPr>
+            <a:r>
+              <a:rPr sz="2550" b="1">
+                <a:solidFill>
+                  <a:srgbClr val="26756C"/>
+                </a:solidFill>
+                <a:latin typeface="Helvetica Neue"/>
+                <a:ea typeface="Helvetica Neue"/>
+                <a:cs typeface="Helvetica Neue"/>
+              </a:rPr>
+              <a:t>Продуктовый выпуск</a:t>
+            </a:r>
+          </a:p>
+        </p:txBody>
+      </p:sp>
+      <p:sp>
+        <p:nvSpPr>
+          <p:cNvPr id="8" name="">
+            <a:extLst xmlns:a="http://schemas.openxmlformats.org/drawingml/2006/main">
+              <a:ext uri="{FF2B5EF4-FFF2-40B4-BE49-F238E27FC236}">
+                <a16:creationId xmlns:a16="http://schemas.microsoft.com/office/drawing/2014/main" id="{B5F8EF49-D7BD-4A62-9B1D-EC1E3D0AF08C}"/>
+              </a:ext>
+            </a:extLst>
+          </p:cNvPr>
+          <p:cNvSpPr>
+            <a:spLocks xmlns:a="http://schemas.openxmlformats.org/drawingml/2006/main" noGrp="1"/>
+          </p:cNvSpPr>
+          <p:nvPr/>
+        </p:nvSpPr>
+        <p:spPr>
+          <a:xfrm xmlns:a="http://schemas.openxmlformats.org/drawingml/2006/main">
+            <a:off x="6324600" y="2638425"/>
+            <a:ext cx="5238750" cy="2276475"/>
+          </a:xfrm>
+          <a:prstGeom xmlns:a="http://schemas.openxmlformats.org/drawingml/2006/main" prst="rect">
+            <a:avLst/>
+          </a:prstGeom>
+          <a:noFill xmlns:a="http://schemas.openxmlformats.org/drawingml/2006/main"/>
+          <a:ln xmlns:a="http://schemas.openxmlformats.org/drawingml/2006/main" w="0">
+            <a:noFill/>
+          </a:ln>
+        </p:spPr>
+        <p:txBody>
+          <a:bodyPr xmlns:a="http://schemas.openxmlformats.org/drawingml/2006/main">
+            <a:noAutofit/>
+          </a:bodyPr>
+          <a:lstStyle xmlns:a="http://schemas.openxmlformats.org/drawingml/2006/main"/>
+          <a:p xmlns:a="http://schemas.openxmlformats.org/drawingml/2006/main">
+            <a:pPr>
+              <a:buNone/>
+              <a:defRPr sz="2100" b="0">
+                <a:solidFill>
+                  <a:srgbClr val="102A30"/>
+                </a:solidFill>
+                <a:latin typeface="Helvetica Neue"/>
+                <a:ea typeface="Helvetica Neue"/>
+                <a:cs typeface="Helvetica Neue"/>
+              </a:defRPr>
+            </a:pPr>
+            <a:r>
+              <a:rPr sz="2100" b="0">
+                <a:solidFill>
+                  <a:srgbClr val="102A30"/>
+                </a:solidFill>
+                <a:latin typeface="Helvetica Neue"/>
+                <a:ea typeface="Helvetica Neue"/>
+                <a:cs typeface="Helvetica Neue"/>
+              </a:rPr>
+              <a:t>Роман: разбор проблем (RV.2),</a:t>
+            </a:r>
+          </a:p>
+          <a:p xmlns:a="http://schemas.openxmlformats.org/drawingml/2006/main">
+            <a:pPr>
+              <a:buNone/>
+              <a:defRPr sz="2100" b="0">
+                <a:solidFill>
+                  <a:srgbClr val="102A30"/>
+                </a:solidFill>
+                <a:latin typeface="Helvetica Neue"/>
+                <a:ea typeface="Helvetica Neue"/>
+                <a:cs typeface="Helvetica Neue"/>
+              </a:defRPr>
+            </a:pPr>
+            <a:r>
+              <a:rPr sz="2100" b="0">
+                <a:solidFill>
+                  <a:srgbClr val="102A30"/>
+                </a:solidFill>
+                <a:latin typeface="Helvetica Neue"/>
+                <a:ea typeface="Helvetica Neue"/>
+                <a:cs typeface="Helvetica Neue"/>
+              </a:rPr>
+              <a:t>защита кода и секретов (PS.1.1).</a:t>
+            </a:r>
+          </a:p>
+          <a:p xmlns:a="http://schemas.openxmlformats.org/drawingml/2006/main">
+            <a:pPr>
+              <a:buNone/>
+              <a:defRPr sz="2100" b="0">
+                <a:solidFill>
+                  <a:srgbClr val="102A30"/>
+                </a:solidFill>
+                <a:latin typeface="Helvetica Neue"/>
+                <a:ea typeface="Helvetica Neue"/>
+                <a:cs typeface="Helvetica Neue"/>
+              </a:defRPr>
+            </a:pPr>
+            <a:r>
+              <a:rPr sz="2100" b="0">
+                <a:solidFill>
+                  <a:srgbClr val="102A30"/>
+                </a:solidFill>
+                <a:latin typeface="Helvetica Neue"/>
+                <a:ea typeface="Helvetica Neue"/>
+                <a:cs typeface="Helvetica Neue"/>
+              </a:rPr>
+              <a:t>Ярослав: проверка архива (PS.3.1).</a:t>
+            </a:r>
+          </a:p>
+          <a:p xmlns:a="http://schemas.openxmlformats.org/drawingml/2006/main">
+            <a:pPr>
+              <a:defRPr sz="2100" b="0">
+                <a:solidFill>
+                  <a:srgbClr val="102A30"/>
+                </a:solidFill>
+                <a:latin typeface="Helvetica Neue"/>
+                <a:ea typeface="Helvetica Neue"/>
+                <a:cs typeface="Helvetica Neue"/>
+              </a:defRPr>
+            </a:pPr>
+            <a:r>
+              <a:rPr sz="2100" b="0">
+                <a:solidFill>
+                  <a:srgbClr val="102A30"/>
+                </a:solidFill>
+                <a:latin typeface="Helvetica Neue"/>
+                <a:ea typeface="Helvetica Neue"/>
+                <a:cs typeface="Helvetica Neue"/>
+              </a:rPr>
+              <a:t>Оба: решение по отчётам.</a:t>
+            </a:r>
+          </a:p>
+          <a:p xmlns:a="http://schemas.openxmlformats.org/drawingml/2006/main">
+            <a:pPr>
+              <a:buNone/>
+              <a:defRPr sz="2100" b="0">
+                <a:solidFill>
+                  <a:srgbClr val="102A30"/>
+                </a:solidFill>
+                <a:latin typeface="Helvetica Neue"/>
+                <a:ea typeface="Helvetica Neue"/>
+                <a:cs typeface="Helvetica Neue"/>
+              </a:defRPr>
+            </a:pPr>
+            <a:r>
+              <a:rPr sz="2100" b="0">
+                <a:solidFill>
+                  <a:srgbClr val="102A30"/>
+                </a:solidFill>
+                <a:latin typeface="Helvetica Neue"/>
+                <a:ea typeface="Helvetica Neue"/>
+                <a:cs typeface="Helvetica Neue"/>
+              </a:rPr>
+              <a:t/>
+            </a:r>
+          </a:p>
+          <a:p xmlns:a="http://schemas.openxmlformats.org/drawingml/2006/main">
+            <a:pPr>
+              <a:buNone/>
+              <a:defRPr sz="2100" b="0">
+                <a:solidFill>
+                  <a:srgbClr val="102A30"/>
+                </a:solidFill>
+                <a:latin typeface="Helvetica Neue"/>
+                <a:ea typeface="Helvetica Neue"/>
+                <a:cs typeface="Helvetica Neue"/>
+              </a:defRPr>
+            </a:pPr>
+            <a:r>
+              <a:rPr sz="2100" b="0">
+                <a:solidFill>
+                  <a:srgbClr val="102A30"/>
+                </a:solidFill>
+                <a:latin typeface="Helvetica Neue"/>
+                <a:ea typeface="Helvetica Neue"/>
+                <a:cs typeface="Helvetica Neue"/>
+              </a:rPr>
+              <a:t>Сохраняем версию, тег и SHA-256.</a:t>
+            </a:r>
+          </a:p>
+        </p:txBody>
+      </p:sp>
+      <p:sp>
+        <p:nvSpPr>
+          <p:cNvPr id="9" name="">
+            <a:extLst xmlns:a="http://schemas.openxmlformats.org/drawingml/2006/main">
+              <a:ext uri="{FF2B5EF4-FFF2-40B4-BE49-F238E27FC236}">
+                <a16:creationId xmlns:a16="http://schemas.microsoft.com/office/drawing/2014/main" id="{0E2F82F7-3D2E-4DFE-B106-2BE97AD6EF3A}"/>
+              </a:ext>
+            </a:extLst>
+          </p:cNvPr>
+          <p:cNvSpPr>
+            <a:spLocks xmlns:a="http://schemas.openxmlformats.org/drawingml/2006/main" noGrp="1"/>
+          </p:cNvSpPr>
+          <p:nvPr/>
+        </p:nvSpPr>
+        <p:spPr>
+          <a:xfrm xmlns:a="http://schemas.openxmlformats.org/drawingml/2006/main">
+            <a:off x="609600" y="5334000"/>
+            <a:ext cx="10972800" cy="571500"/>
+          </a:xfrm>
+          <a:prstGeom xmlns:a="http://schemas.openxmlformats.org/drawingml/2006/main" prst="rect">
+            <a:avLst/>
+          </a:prstGeom>
+          <a:noFill xmlns:a="http://schemas.openxmlformats.org/drawingml/2006/main"/>
+          <a:ln xmlns:a="http://schemas.openxmlformats.org/drawingml/2006/main" w="0">
+            <a:noFill/>
+          </a:ln>
+        </p:spPr>
+        <p:txBody>
+          <a:bodyPr xmlns:a="http://schemas.openxmlformats.org/drawingml/2006/main">
+            <a:noAutofit/>
+          </a:bodyPr>
+          <a:lstStyle xmlns:a="http://schemas.openxmlformats.org/drawingml/2006/main"/>
+          <a:p xmlns:a="http://schemas.openxmlformats.org/drawingml/2006/main">
+            <a:pPr>
+              <a:buNone/>
+              <a:defRPr sz="2175" b="1">
+                <a:solidFill>
+                  <a:srgbClr val="102A30"/>
+                </a:solidFill>
+                <a:latin typeface="Helvetica Neue"/>
+                <a:ea typeface="Helvetica Neue"/>
+                <a:cs typeface="Helvetica Neue"/>
+              </a:defRPr>
+            </a:pPr>
+            <a:r>
+              <a:rPr sz="2175" b="1">
+                <a:solidFill>
+                  <a:srgbClr val="102A30"/>
+                </a:solidFill>
+                <a:latin typeface="Helvetica Neue"/>
+                <a:ea typeface="Helvetica Neue"/>
+                <a:cs typeface="Helvetica Neue"/>
+              </a:rPr>
+              <a:t>Без проверки партнёром или при нарушении прав изменение ждёт.</a:t>
+            </a:r>
+          </a:p>
+        </p:txBody>
+      </p:sp>
+      <p:sp>
+        <p:nvSpPr>
+          <p:cNvPr id="10" name="">
+            <a:extLst xmlns:a="http://schemas.openxmlformats.org/drawingml/2006/main">
+              <a:ext uri="{FF2B5EF4-FFF2-40B4-BE49-F238E27FC236}">
+                <a16:creationId xmlns:a16="http://schemas.microsoft.com/office/drawing/2014/main" id="{F0533CA4-DD94-47F6-8BA5-4BF9CA847AE2}"/>
+              </a:ext>
+            </a:extLst>
+          </p:cNvPr>
+          <p:cNvSpPr>
+            <a:spLocks xmlns:a="http://schemas.openxmlformats.org/drawingml/2006/main" noGrp="1"/>
+          </p:cNvSpPr>
+          <p:nvPr/>
+        </p:nvSpPr>
+        <p:spPr>
+          <a:xfrm xmlns:a="http://schemas.openxmlformats.org/drawingml/2006/main">
+            <a:off x="609600" y="5886450"/>
+            <a:ext cx="10972800" cy="333375"/>
+          </a:xfrm>
+          <a:prstGeom xmlns:a="http://schemas.openxmlformats.org/drawingml/2006/main" prst="rect">
+            <a:avLst/>
+          </a:prstGeom>
+          <a:noFill xmlns:a="http://schemas.openxmlformats.org/drawingml/2006/main"/>
+          <a:ln xmlns:a="http://schemas.openxmlformats.org/drawingml/2006/main" w="0">
+            <a:noFill/>
+          </a:ln>
+        </p:spPr>
+        <p:txBody>
+          <a:bodyPr xmlns:a="http://schemas.openxmlformats.org/drawingml/2006/main">
+            <a:noAutofit/>
+          </a:bodyPr>
+          <a:lstStyle xmlns:a="http://schemas.openxmlformats.org/drawingml/2006/main"/>
+          <a:p xmlns:a="http://schemas.openxmlformats.org/drawingml/2006/main">
+            <a:pPr>
+              <a:buNone/>
+              <a:defRPr sz="1875" b="0">
+                <a:solidFill>
+                  <a:srgbClr val="59686B"/>
+                </a:solidFill>
+                <a:latin typeface="Helvetica Neue"/>
+                <a:ea typeface="Helvetica Neue"/>
+                <a:cs typeface="Helvetica Neue"/>
+              </a:defRPr>
+            </a:pPr>
+            <a:r>
+              <a:rPr sz="1875" b="0">
+                <a:solidFill>
+                  <a:srgbClr val="59686B"/>
+                </a:solidFill>
+                <a:latin typeface="Helvetica Neue"/>
+                <a:ea typeface="Helvetica Neue"/>
+                <a:cs typeface="Helvetica Neue"/>
+              </a:rPr>
+              <a:t>Некритическое исключение: запись, срок до 7 дней и согласие обоих.</a:t>
+            </a:r>
+          </a:p>
+        </p:txBody>
+      </p:sp>
+    </p:spTree>
+    <p:extLst>
+      <p:ext uri="{BB962C8B-B14F-4D97-AF65-F5344CB8AC3E}">
+        <p14:creationId xmlns:p14="http://schemas.microsoft.com/office/powerpoint/2010/main" val="763208239"/>
+      </p:ext>
+    </p:extLst>
+  </p:cSld>
+</p:sld>
+</file>
+
+<file path=ppt/slides/slide7.xml><?xml version="1.0" encoding="utf-8"?>
+<p:sld xmlns:p="http://schemas.openxmlformats.org/presentationml/2006/main">
+  <p:cSld>
+    <p:bg>
+      <p:bgPr>
+        <a:solidFill xmlns:a="http://schemas.openxmlformats.org/drawingml/2006/main">
+          <a:srgbClr val="F7F6F1"/>
+        </a:solidFill>
+      </p:bgPr>
+    </p:bg>
+    <p:spTree>
+      <p:nvGrpSpPr>
+        <p:cNvPr id="1" name=""/>
+        <p:cNvGrpSpPr/>
+        <p:nvPr/>
+      </p:nvGrpSpPr>
+      <p:grpSpPr>
+        <a:xfrm xmlns:a="http://schemas.openxmlformats.org/drawingml/2006/main"/>
+      </p:grpSpPr>
+      <p:sp>
+        <p:nvSpPr>
+          <p:cNvPr id="8" name="">
+            <a:extLst xmlns:a="http://schemas.openxmlformats.org/drawingml/2006/main">
+              <a:ext uri="{FF2B5EF4-FFF2-40B4-BE49-F238E27FC236}">
+                <a16:creationId xmlns:a16="http://schemas.microsoft.com/office/drawing/2014/main" id="{2EA77BED-1E9A-412E-94AF-B9525FD214DE}"/>
+              </a:ext>
+            </a:extLst>
+          </p:cNvPr>
+          <p:cNvSpPr>
+            <a:spLocks xmlns:a="http://schemas.openxmlformats.org/drawingml/2006/main" noGrp="1"/>
+          </p:cNvSpPr>
+          <p:nvPr/>
+        </p:nvSpPr>
+        <p:spPr>
+          <a:xfrm xmlns:a="http://schemas.openxmlformats.org/drawingml/2006/main">
+            <a:off x="609600" y="304800"/>
+            <a:ext cx="10763250" cy="266700"/>
+          </a:xfrm>
+          <a:prstGeom xmlns:a="http://schemas.openxmlformats.org/drawingml/2006/main" prst="rect">
+            <a:avLst/>
+          </a:prstGeom>
+          <a:noFill xmlns:a="http://schemas.openxmlformats.org/drawingml/2006/main"/>
+          <a:ln xmlns:a="http://schemas.openxmlformats.org/drawingml/2006/main" w="0">
+            <a:noFill/>
+          </a:ln>
+        </p:spPr>
+        <p:txBody>
+          <a:bodyPr xmlns:a="http://schemas.openxmlformats.org/drawingml/2006/main">
+            <a:noAutofit/>
+          </a:bodyPr>
+          <a:lstStyle xmlns:a="http://schemas.openxmlformats.org/drawingml/2006/main"/>
+          <a:p xmlns:a="http://schemas.openxmlformats.org/drawingml/2006/main">
+            <a:pPr>
+              <a:buNone/>
+              <a:defRPr sz="1350" b="1">
+                <a:solidFill>
+                  <a:srgbClr val="26756C"/>
+                </a:solidFill>
+                <a:latin typeface="Helvetica Neue"/>
+                <a:ea typeface="Helvetica Neue"/>
+                <a:cs typeface="Helvetica Neue"/>
+              </a:defRPr>
+            </a:pPr>
+            <a:r>
+              <a:rPr sz="1350" b="1">
+                <a:solidFill>
+                  <a:srgbClr val="26756C"/>
+                </a:solidFill>
+                <a:latin typeface="Helvetica Neue"/>
+                <a:ea typeface="Helvetica Neue"/>
+                <a:cs typeface="Helvetica Neue"/>
+              </a:rPr>
+              <a:t>КОНЦЕПЦИЯ БЕЗОПАСНОЙ РАЗРАБОТКИ</a:t>
+            </a:r>
+          </a:p>
+        </p:txBody>
+      </p:sp>
+      <p:sp>
+        <p:nvSpPr>
+          <p:cNvPr id="2" name="">
+            <a:extLst xmlns:a="http://schemas.openxmlformats.org/drawingml/2006/main">
+              <a:ext uri="{FF2B5EF4-FFF2-40B4-BE49-F238E27FC236}">
+                <a16:creationId xmlns:a16="http://schemas.microsoft.com/office/drawing/2014/main" id="{4A763159-4B2B-4A5F-BE65-2C3873DE4364}"/>
+              </a:ext>
+            </a:extLst>
+          </p:cNvPr>
+          <p:cNvSpPr>
+            <a:spLocks xmlns:a="http://schemas.openxmlformats.org/drawingml/2006/main" noGrp="1"/>
+          </p:cNvSpPr>
+          <p:nvPr/>
+        </p:nvSpPr>
+        <p:spPr>
+          <a:xfrm xmlns:a="http://schemas.openxmlformats.org/drawingml/2006/main">
+            <a:off x="609600" y="838200"/>
+            <a:ext cx="10972800" cy="990600"/>
+          </a:xfrm>
+          <a:prstGeom xmlns:a="http://schemas.openxmlformats.org/drawingml/2006/main" prst="rect">
+            <a:avLst/>
+          </a:prstGeom>
+          <a:noFill xmlns:a="http://schemas.openxmlformats.org/drawingml/2006/main"/>
+          <a:ln xmlns:a="http://schemas.openxmlformats.org/drawingml/2006/main" w="0">
+            <a:noFill/>
+          </a:ln>
+        </p:spPr>
+        <p:txBody>
+          <a:bodyPr xmlns:a="http://schemas.openxmlformats.org/drawingml/2006/main">
+            <a:noAutofit/>
+          </a:bodyPr>
+          <a:lstStyle xmlns:a="http://schemas.openxmlformats.org/drawingml/2006/main"/>
+          <a:p xmlns:a="http://schemas.openxmlformats.org/drawingml/2006/main">
+            <a:pPr>
+              <a:buNone/>
+              <a:defRPr sz="3300" b="1">
+                <a:solidFill>
+                  <a:srgbClr val="102A30"/>
+                </a:solidFill>
+                <a:latin typeface="Helvetica Neue"/>
+                <a:ea typeface="Helvetica Neue"/>
+                <a:cs typeface="Helvetica Neue"/>
+              </a:defRPr>
+            </a:pPr>
+            <a:r>
+              <a:rPr sz="3300" b="1">
+                <a:solidFill>
+                  <a:srgbClr val="102A30"/>
+                </a:solidFill>
+                <a:latin typeface="Helvetica Neue"/>
+                <a:ea typeface="Helvetica Neue"/>
+                <a:cs typeface="Helvetica Neue"/>
+              </a:rPr>
+              <a:t>План проверок Романа и Ярослава</a:t>
+            </a:r>
+          </a:p>
+        </p:txBody>
+      </p:sp>
+      <p:sp>
+        <p:nvSpPr>
+          <p:cNvPr id="3" name="">
+            <a:extLst xmlns:a="http://schemas.openxmlformats.org/drawingml/2006/main">
+              <a:ext uri="{FF2B5EF4-FFF2-40B4-BE49-F238E27FC236}">
+                <a16:creationId xmlns:a16="http://schemas.microsoft.com/office/drawing/2014/main" id="{8D2D0351-E4D1-4F95-A8F7-769D9136646A}"/>
+              </a:ext>
+            </a:extLst>
+          </p:cNvPr>
+          <p:cNvSpPr>
+            <a:spLocks xmlns:a="http://schemas.openxmlformats.org/drawingml/2006/main" noGrp="1"/>
+          </p:cNvSpPr>
+          <p:nvPr/>
+        </p:nvSpPr>
+        <p:spPr>
+          <a:xfrm xmlns:a="http://schemas.openxmlformats.org/drawingml/2006/main">
+            <a:off x="609600" y="6372225"/>
+            <a:ext cx="10001250" cy="247650"/>
+          </a:xfrm>
+          <a:prstGeom xmlns:a="http://schemas.openxmlformats.org/drawingml/2006/main" prst="rect">
+            <a:avLst/>
+          </a:prstGeom>
+          <a:noFill xmlns:a="http://schemas.openxmlformats.org/drawingml/2006/main"/>
+          <a:ln xmlns:a="http://schemas.openxmlformats.org/drawingml/2006/main" w="0">
+            <a:noFill/>
+          </a:ln>
+        </p:spPr>
+        <p:txBody>
+          <a:bodyPr xmlns:a="http://schemas.openxmlformats.org/drawingml/2006/main">
+            <a:noAutofit/>
+          </a:bodyPr>
+          <a:lstStyle xmlns:a="http://schemas.openxmlformats.org/drawingml/2006/main"/>
+          <a:p xmlns:a="http://schemas.openxmlformats.org/drawingml/2006/main">
+            <a:pPr>
+              <a:buNone/>
+              <a:defRPr sz="1350" b="0">
+                <a:solidFill>
+                  <a:srgbClr val="59686B"/>
+                </a:solidFill>
+                <a:latin typeface="Helvetica Neue"/>
+                <a:ea typeface="Helvetica Neue"/>
+                <a:cs typeface="Helvetica Neue"/>
+              </a:defRPr>
+            </a:pPr>
+            <a:r>
+              <a:rPr sz="1350" b="0">
+                <a:solidFill>
+                  <a:srgbClr val="59686B"/>
+                </a:solidFill>
+                <a:latin typeface="Helvetica Neue"/>
+                <a:ea typeface="Helvetica Neue"/>
+                <a:cs typeface="Helvetica Neue"/>
+              </a:rPr>
+              <a:t>ЯвкаИБ / TaskFlow / ЭК1</a:t>
+            </a:r>
+          </a:p>
+        </p:txBody>
+      </p:sp>
+      <p:sp>
+        <p:nvSpPr>
+          <p:cNvPr id="4" name="">
+            <a:extLst xmlns:a="http://schemas.openxmlformats.org/drawingml/2006/main">
+              <a:ext uri="{FF2B5EF4-FFF2-40B4-BE49-F238E27FC236}">
+                <a16:creationId xmlns:a16="http://schemas.microsoft.com/office/drawing/2014/main" id="{457C1ED1-A387-4B37-BDDC-A361605C80F3}"/>
+              </a:ext>
+            </a:extLst>
+          </p:cNvPr>
+          <p:cNvSpPr>
+            <a:spLocks xmlns:a="http://schemas.openxmlformats.org/drawingml/2006/main" noGrp="1"/>
+          </p:cNvSpPr>
+          <p:nvPr/>
+        </p:nvSpPr>
+        <p:spPr>
+          <a:xfrm xmlns:a="http://schemas.openxmlformats.org/drawingml/2006/main">
+            <a:off x="11029950" y="6324600"/>
+            <a:ext cx="619125" cy="333375"/>
+          </a:xfrm>
+          <a:prstGeom xmlns:a="http://schemas.openxmlformats.org/drawingml/2006/main" prst="rect">
+            <a:avLst/>
+          </a:prstGeom>
+          <a:noFill xmlns:a="http://schemas.openxmlformats.org/drawingml/2006/main"/>
+          <a:ln xmlns:a="http://schemas.openxmlformats.org/drawingml/2006/main" w="0">
+            <a:noFill/>
+          </a:ln>
+        </p:spPr>
+        <p:txBody>
+          <a:bodyPr xmlns:a="http://schemas.openxmlformats.org/drawingml/2006/main">
+            <a:noAutofit/>
+          </a:bodyPr>
+          <a:lstStyle xmlns:a="http://schemas.openxmlformats.org/drawingml/2006/main"/>
+          <a:p xmlns:a="http://schemas.openxmlformats.org/drawingml/2006/main">
+            <a:pPr>
+              <a:buNone/>
+              <a:defRPr sz="1800" b="1">
+                <a:solidFill>
+                  <a:srgbClr val="26756C"/>
+                </a:solidFill>
+                <a:latin typeface="Helvetica Neue"/>
+                <a:ea typeface="Helvetica Neue"/>
+                <a:cs typeface="Helvetica Neue"/>
+              </a:defRPr>
+            </a:pPr>
+            <a:r>
+              <a:rPr sz="1800" b="1">
+                <a:solidFill>
+                  <a:srgbClr val="26756C"/>
+                </a:solidFill>
+                <a:latin typeface="Helvetica Neue"/>
+                <a:ea typeface="Helvetica Neue"/>
+                <a:cs typeface="Helvetica Neue"/>
+              </a:rPr>
+              <a:t>07</a:t>
+            </a:r>
+          </a:p>
+        </p:txBody>
+      </p:sp>
+      <p:sp>
+        <p:nvSpPr>
+          <p:cNvPr id="6" name="">
+            <a:extLst xmlns:a="http://schemas.openxmlformats.org/drawingml/2006/main">
+              <a:ext uri="{FF2B5EF4-FFF2-40B4-BE49-F238E27FC236}">
+                <a16:creationId xmlns:a16="http://schemas.microsoft.com/office/drawing/2014/main" id="{D52DE8F3-9552-45CC-8F1D-EBB679041ECA}"/>
+              </a:ext>
+            </a:extLst>
+          </p:cNvPr>
+          <p:cNvSpPr>
+            <a:spLocks xmlns:a="http://schemas.openxmlformats.org/drawingml/2006/main" noGrp="1"/>
+          </p:cNvSpPr>
+          <p:nvPr/>
+        </p:nvSpPr>
+        <p:spPr>
+          <a:xfrm xmlns:a="http://schemas.openxmlformats.org/drawingml/2006/main">
+            <a:off x="609600" y="5543550"/>
+            <a:ext cx="10972800" cy="361950"/>
+          </a:xfrm>
+          <a:prstGeom xmlns:a="http://schemas.openxmlformats.org/drawingml/2006/main" prst="rect">
+            <a:avLst/>
+          </a:prstGeom>
+          <a:noFill xmlns:a="http://schemas.openxmlformats.org/drawingml/2006/main"/>
+          <a:ln xmlns:a="http://schemas.openxmlformats.org/drawingml/2006/main" w="0">
+            <a:noFill/>
+          </a:ln>
+        </p:spPr>
+        <p:txBody>
+          <a:bodyPr xmlns:a="http://schemas.openxmlformats.org/drawingml/2006/main">
+            <a:noAutofit/>
+          </a:bodyPr>
+          <a:lstStyle xmlns:a="http://schemas.openxmlformats.org/drawingml/2006/main"/>
+          <a:p xmlns:a="http://schemas.openxmlformats.org/drawingml/2006/main">
+            <a:pPr>
+              <a:buNone/>
+              <a:defRPr sz="2100" b="1">
+                <a:solidFill>
+                  <a:srgbClr val="26756C"/>
+                </a:solidFill>
+                <a:latin typeface="Helvetica Neue"/>
+                <a:ea typeface="Helvetica Neue"/>
+                <a:cs typeface="Helvetica Neue"/>
+              </a:defRPr>
+            </a:pPr>
+            <a:r>
+              <a:rPr sz="2100" b="1">
+                <a:solidFill>
+                  <a:srgbClr val="26756C"/>
+                </a:solidFill>
+                <a:latin typeface="Helvetica Neue"/>
+                <a:ea typeface="Helvetica Neue"/>
+                <a:cs typeface="Helvetica Neue"/>
+              </a:rPr>
+              <a:t>Оба: читают код партнёра (PW.7), повторяют проверку (PW.8).</a:t>
+            </a:r>
+          </a:p>
+        </p:txBody>
+      </p:sp>
+      <p:sp>
+        <p:nvSpPr>
+          <p:cNvPr id="7" name="">
+            <a:extLst xmlns:a="http://schemas.openxmlformats.org/drawingml/2006/main">
+              <a:ext uri="{FF2B5EF4-FFF2-40B4-BE49-F238E27FC236}">
+                <a16:creationId xmlns:a16="http://schemas.microsoft.com/office/drawing/2014/main" id="{7E60ADA1-6CB0-4EA4-8C94-0D3A52A8F577}"/>
+              </a:ext>
+            </a:extLst>
+          </p:cNvPr>
+          <p:cNvSpPr>
+            <a:spLocks xmlns:a="http://schemas.openxmlformats.org/drawingml/2006/main" noGrp="1"/>
+          </p:cNvSpPr>
+          <p:nvPr/>
+        </p:nvSpPr>
+        <p:spPr>
+          <a:xfrm xmlns:a="http://schemas.openxmlformats.org/drawingml/2006/main">
+            <a:off x="609600" y="5943600"/>
+            <a:ext cx="10972800" cy="333375"/>
+          </a:xfrm>
+          <a:prstGeom xmlns:a="http://schemas.openxmlformats.org/drawingml/2006/main" prst="rect">
+            <a:avLst/>
+          </a:prstGeom>
+          <a:noFill xmlns:a="http://schemas.openxmlformats.org/drawingml/2006/main"/>
+          <a:ln xmlns:a="http://schemas.openxmlformats.org/drawingml/2006/main" w="0">
+            <a:noFill/>
+          </a:ln>
+        </p:spPr>
+        <p:txBody>
+          <a:bodyPr xmlns:a="http://schemas.openxmlformats.org/drawingml/2006/main">
+            <a:noAutofit/>
+          </a:bodyPr>
+          <a:lstStyle xmlns:a="http://schemas.openxmlformats.org/drawingml/2006/main"/>
+          <a:p xmlns:a="http://schemas.openxmlformats.org/drawingml/2006/main">
+            <a:pPr>
+              <a:buNone/>
+              <a:defRPr sz="1800" b="0">
+                <a:solidFill>
+                  <a:srgbClr val="59686B"/>
+                </a:solidFill>
+                <a:latin typeface="Helvetica Neue"/>
+                <a:ea typeface="Helvetica Neue"/>
+                <a:cs typeface="Helvetica Neue"/>
+              </a:defRPr>
+            </a:pPr>
+            <a:r>
+              <a:rPr sz="1800" b="0">
+                <a:solidFill>
+                  <a:srgbClr val="59686B"/>
+                </a:solidFill>
+                <a:latin typeface="Helvetica Neue"/>
+                <a:ea typeface="Helvetica Neue"/>
+                <a:cs typeface="Helvetica Neue"/>
+              </a:rPr>
+              <a:t>После отчётов и взаимной проверки созваниваемся. План ЭК1 предварительный.</a:t>
+            </a:r>
+          </a:p>
+        </p:txBody>
+      </p:sp>
+      <p:graphicFrame>
+        <p:nvGraphicFramePr>
+          <p:cNvPr id="16" name=""/>
+          <p:cNvGraphicFramePr/>
+          <p:nvPr/>
+        </p:nvGraphicFramePr>
+        <p:xfrm>
+          <a:off xmlns:a="http://schemas.openxmlformats.org/drawingml/2006/main" x="609600" y="1952625"/>
+          <a:ext xmlns:a="http://schemas.openxmlformats.org/drawingml/2006/main" cx="10972800" cy="3381375"/>
+        </p:xfrm>
+        <a:graphic xmlns:a="http://schemas.openxmlformats.org/drawingml/2006/main">
+          <a:graphicData uri="http://schemas.openxmlformats.org/drawingml/2006/table">
+            <a:tbl>
+              <a:tblPr/>
+              <a:tblGrid>
+                <a:gridCol w="2095500"/>
+                <a:gridCol w="3238500"/>
+                <a:gridCol w="2857500"/>
+                <a:gridCol w="2781300"/>
+              </a:tblGrid>
+              <a:tr h="485775">
+                <a:tc>
+                  <a:txBody>
+                    <a:bodyPr>
+                      <a:noAutofit/>
+                    </a:bodyPr>
+                    <a:lstStyle/>
+                    <a:p>
+                      <a:r>
+                        <a:rPr sz="1875" b="1">
+                          <a:solidFill>
+                            <a:srgbClr val="FFFFFF"/>
+                          </a:solidFill>
+                          <a:latin typeface="Helvetica Neue"/>
+                          <a:ea typeface="Helvetica Neue"/>
+                          <a:cs typeface="Helvetica Neue"/>
+                        </a:rPr>
+                        <a:t>Участник</a:t>
+                      </a:r>
+                    </a:p>
+                  </a:txBody>
+                  <a:tcPr marL="91440" marR="91440" marT="45720" marB="45720">
+                    <a:solidFill>
+                      <a:srgbClr val="102A30"/>
+                    </a:solidFill>
+                  </a:tcPr>
+                </a:tc>
+                <a:tc>
+                  <a:txBody>
+                    <a:bodyPr>
+                      <a:noAutofit/>
+                    </a:bodyPr>
+                    <a:lstStyle/>
+                    <a:p>
+                      <a:r>
+                        <a:rPr sz="1875" b="1">
+                          <a:solidFill>
+                            <a:srgbClr val="FFFFFF"/>
+                          </a:solidFill>
+                          <a:latin typeface="Helvetica Neue"/>
+                          <a:ea typeface="Helvetica Neue"/>
+                          <a:cs typeface="Helvetica Neue"/>
+                        </a:rPr>
+                        <a:t>Что делает</a:t>
+                      </a:r>
+                    </a:p>
+                  </a:txBody>
+                  <a:tcPr marL="91440" marR="91440" marT="45720" marB="45720">
+                    <a:solidFill>
+                      <a:srgbClr val="102A30"/>
+                    </a:solidFill>
+                  </a:tcPr>
+                </a:tc>
+                <a:tc>
+                  <a:txBody>
+                    <a:bodyPr>
+                      <a:noAutofit/>
+                    </a:bodyPr>
+                    <a:lstStyle/>
+                    <a:p>
+                      <a:r>
+                        <a:rPr sz="1875" b="1">
+                          <a:solidFill>
+                            <a:srgbClr val="FFFFFF"/>
+                          </a:solidFill>
+                          <a:latin typeface="Helvetica Neue"/>
+                          <a:ea typeface="Helvetica Neue"/>
+                          <a:cs typeface="Helvetica Neue"/>
+                        </a:rPr>
+                        <a:t>Основа</a:t>
+                      </a:r>
+                    </a:p>
+                  </a:txBody>
+                  <a:tcPr marL="91440" marR="91440" marT="45720" marB="45720">
+                    <a:solidFill>
+                      <a:srgbClr val="102A30"/>
+                    </a:solidFill>
+                  </a:tcPr>
+                </a:tc>
+                <a:tc>
+                  <a:txBody>
+                    <a:bodyPr>
+                      <a:noAutofit/>
+                    </a:bodyPr>
+                    <a:lstStyle/>
+                    <a:p>
+                      <a:r>
+                        <a:rPr sz="1875" b="1">
+                          <a:solidFill>
+                            <a:srgbClr val="FFFFFF"/>
+                          </a:solidFill>
+                          <a:latin typeface="Helvetica Neue"/>
+                          <a:ea typeface="Helvetica Neue"/>
+                          <a:cs typeface="Helvetica Neue"/>
+                        </a:rPr>
+                        <a:t>Кто проверяет</a:t>
+                      </a:r>
+                    </a:p>
+                  </a:txBody>
+                  <a:tcPr marL="91440" marR="91440" marT="45720" marB="45720">
+                    <a:solidFill>
+                      <a:srgbClr val="102A30"/>
+                    </a:solidFill>
+                  </a:tcPr>
+                </a:tc>
+              </a:tr>
+              <a:tr h="723900">
+                <a:tc>
+                  <a:txBody>
+                    <a:bodyPr>
+                      <a:noAutofit/>
+                    </a:bodyPr>
+                    <a:lstStyle/>
+                    <a:p>
+                      <a:r>
+                        <a:rPr sz="1875" b="0">
+                          <a:solidFill>
+                            <a:srgbClr val="102A30"/>
+                          </a:solidFill>
+                          <a:latin typeface="Helvetica Neue"/>
+                          <a:ea typeface="Helvetica Neue"/>
+                          <a:cs typeface="Helvetica Neue"/>
+                        </a:rPr>
+                        <a:t>Роман / М1</a:t>
+                      </a:r>
+                    </a:p>
+                  </a:txBody>
+                  <a:tcPr marL="91440" marR="91440" marT="45720" marB="45720">
+                    <a:solidFill>
+                      <a:srgbClr val="FFFFFF"/>
+                    </a:solidFill>
+                  </a:tcPr>
+                </a:tc>
+                <a:tc>
+                  <a:txBody>
+                    <a:bodyPr>
+                      <a:noAutofit/>
+                    </a:bodyPr>
+                    <a:lstStyle/>
+                    <a:p>
+                      <a:r>
+                        <a:rPr sz="1875" b="0">
+                          <a:solidFill>
+                            <a:srgbClr val="102A30"/>
+                          </a:solidFill>
+                          <a:latin typeface="Helvetica Neue"/>
+                          <a:ea typeface="Helvetica Neue"/>
+                          <a:cs typeface="Helvetica Neue"/>
+                        </a:rPr>
+                        <a:t>Права и изоляция</a:t>
                       </a:r>
                     </a:p>
                     <a:p>
@@ -7684,7 +6836,1209 @@
                           <a:ea typeface="Helvetica Neue"/>
                           <a:cs typeface="Helvetica Neue"/>
                         </a:rPr>
-                        <a:t>целью нашего проекта.</a:t>
+                        <a:t>проектов</a:t>
+                      </a:r>
+                    </a:p>
+                  </a:txBody>
+                  <a:tcPr marL="91440" marR="91440" marT="45720" marB="45720">
+                    <a:solidFill>
+                      <a:srgbClr val="FFFFFF"/>
+                    </a:solidFill>
+                  </a:tcPr>
+                </a:tc>
+                <a:tc>
+                  <a:txBody>
+                    <a:bodyPr>
+                      <a:noAutofit/>
+                    </a:bodyPr>
+                    <a:lstStyle/>
+                    <a:p>
+                      <a:r>
+                        <a:rPr sz="1875" b="0">
+                          <a:solidFill>
+                            <a:srgbClr val="102A30"/>
+                          </a:solidFill>
+                          <a:latin typeface="Helvetica Neue"/>
+                          <a:ea typeface="Helvetica Neue"/>
+                          <a:cs typeface="Helvetica Neue"/>
+                        </a:rPr>
+                        <a:t>PO.1.2, PW.8</a:t>
+                      </a:r>
+                    </a:p>
+                    <a:p>
+                      <a:r>
+                        <a:rPr sz="1875" b="0">
+                          <a:solidFill>
+                            <a:srgbClr val="102A30"/>
+                          </a:solidFill>
+                          <a:latin typeface="Helvetica Neue"/>
+                          <a:ea typeface="Helvetica Neue"/>
+                          <a:cs typeface="Helvetica Neue"/>
+                        </a:rPr>
+                        <a:t>ASVS V8</a:t>
+                      </a:r>
+                    </a:p>
+                  </a:txBody>
+                  <a:tcPr marL="91440" marR="91440" marT="45720" marB="45720">
+                    <a:solidFill>
+                      <a:srgbClr val="FFFFFF"/>
+                    </a:solidFill>
+                  </a:tcPr>
+                </a:tc>
+                <a:tc>
+                  <a:txBody>
+                    <a:bodyPr>
+                      <a:noAutofit/>
+                    </a:bodyPr>
+                    <a:lstStyle/>
+                    <a:p>
+                      <a:r>
+                        <a:rPr sz="1875" b="0">
+                          <a:solidFill>
+                            <a:srgbClr val="102A30"/>
+                          </a:solidFill>
+                          <a:latin typeface="Helvetica Neue"/>
+                          <a:ea typeface="Helvetica Neue"/>
+                          <a:cs typeface="Helvetica Neue"/>
+                        </a:rPr>
+                        <a:t>Ярослав:</a:t>
+                      </a:r>
+                    </a:p>
+                    <a:p>
+                      <a:r>
+                        <a:rPr sz="1875" b="0">
+                          <a:solidFill>
+                            <a:srgbClr val="102A30"/>
+                          </a:solidFill>
+                          <a:latin typeface="Helvetica Neue"/>
+                          <a:ea typeface="Helvetica Neue"/>
+                          <a:cs typeface="Helvetica Neue"/>
+                        </a:rPr>
+                        <a:t>повтор запрета</a:t>
+                      </a:r>
+                    </a:p>
+                  </a:txBody>
+                  <a:tcPr marL="91440" marR="91440" marT="45720" marB="45720">
+                    <a:solidFill>
+                      <a:srgbClr val="FFFFFF"/>
+                    </a:solidFill>
+                  </a:tcPr>
+                </a:tc>
+              </a:tr>
+              <a:tr h="723900">
+                <a:tc>
+                  <a:txBody>
+                    <a:bodyPr>
+                      <a:noAutofit/>
+                    </a:bodyPr>
+                    <a:lstStyle/>
+                    <a:p>
+                      <a:r>
+                        <a:rPr sz="1875" b="0">
+                          <a:solidFill>
+                            <a:srgbClr val="102A30"/>
+                          </a:solidFill>
+                          <a:latin typeface="Helvetica Neue"/>
+                          <a:ea typeface="Helvetica Neue"/>
+                          <a:cs typeface="Helvetica Neue"/>
+                        </a:rPr>
+                        <a:t>Роман / М3</a:t>
+                      </a:r>
+                    </a:p>
+                  </a:txBody>
+                  <a:tcPr marL="91440" marR="91440" marT="45720" marB="45720">
+                    <a:solidFill>
+                      <a:srgbClr val="F7F6F1"/>
+                    </a:solidFill>
+                  </a:tcPr>
+                </a:tc>
+                <a:tc>
+                  <a:txBody>
+                    <a:bodyPr>
+                      <a:noAutofit/>
+                    </a:bodyPr>
+                    <a:lstStyle/>
+                    <a:p>
+                      <a:r>
+                        <a:rPr sz="1875" b="0">
+                          <a:solidFill>
+                            <a:srgbClr val="102A30"/>
+                          </a:solidFill>
+                          <a:latin typeface="Helvetica Neue"/>
+                          <a:ea typeface="Helvetica Neue"/>
+                          <a:cs typeface="Helvetica Neue"/>
+                        </a:rPr>
+                        <a:t>Библиотеки</a:t>
+                      </a:r>
+                    </a:p>
+                    <a:p>
+                      <a:r>
+                        <a:rPr sz="1875" b="0">
+                          <a:solidFill>
+                            <a:srgbClr val="102A30"/>
+                          </a:solidFill>
+                          <a:latin typeface="Helvetica Neue"/>
+                          <a:ea typeface="Helvetica Neue"/>
+                          <a:cs typeface="Helvetica Neue"/>
+                        </a:rPr>
+                        <a:t>и настройки</a:t>
+                      </a:r>
+                    </a:p>
+                  </a:txBody>
+                  <a:tcPr marL="91440" marR="91440" marT="45720" marB="45720">
+                    <a:solidFill>
+                      <a:srgbClr val="F7F6F1"/>
+                    </a:solidFill>
+                  </a:tcPr>
+                </a:tc>
+                <a:tc>
+                  <a:txBody>
+                    <a:bodyPr>
+                      <a:noAutofit/>
+                    </a:bodyPr>
+                    <a:lstStyle/>
+                    <a:p>
+                      <a:r>
+                        <a:rPr sz="1875" b="0">
+                          <a:solidFill>
+                            <a:srgbClr val="102A30"/>
+                          </a:solidFill>
+                          <a:latin typeface="Helvetica Neue"/>
+                          <a:ea typeface="Helvetica Neue"/>
+                          <a:cs typeface="Helvetica Neue"/>
+                        </a:rPr>
+                        <a:t>RV.2, PS.1.1</a:t>
+                      </a:r>
+                    </a:p>
+                  </a:txBody>
+                  <a:tcPr marL="91440" marR="91440" marT="45720" marB="45720">
+                    <a:solidFill>
+                      <a:srgbClr val="F7F6F1"/>
+                    </a:solidFill>
+                  </a:tcPr>
+                </a:tc>
+                <a:tc>
+                  <a:txBody>
+                    <a:bodyPr>
+                      <a:noAutofit/>
+                    </a:bodyPr>
+                    <a:lstStyle/>
+                    <a:p>
+                      <a:r>
+                        <a:rPr sz="1875" b="0">
+                          <a:solidFill>
+                            <a:srgbClr val="102A30"/>
+                          </a:solidFill>
+                          <a:latin typeface="Helvetica Neue"/>
+                          <a:ea typeface="Helvetica Neue"/>
+                          <a:cs typeface="Helvetica Neue"/>
+                        </a:rPr>
+                        <a:t>Ярослав:</a:t>
+                      </a:r>
+                    </a:p>
+                    <a:p>
+                      <a:r>
+                        <a:rPr sz="1875" b="0">
+                          <a:solidFill>
+                            <a:srgbClr val="102A30"/>
+                          </a:solidFill>
+                          <a:latin typeface="Helvetica Neue"/>
+                          <a:ea typeface="Helvetica Neue"/>
+                          <a:cs typeface="Helvetica Neue"/>
+                        </a:rPr>
+                        <a:t>проверка вывода</a:t>
+                      </a:r>
+                    </a:p>
+                  </a:txBody>
+                  <a:tcPr marL="91440" marR="91440" marT="45720" marB="45720">
+                    <a:solidFill>
+                      <a:srgbClr val="F7F6F1"/>
+                    </a:solidFill>
+                  </a:tcPr>
+                </a:tc>
+              </a:tr>
+              <a:tr h="723900">
+                <a:tc>
+                  <a:txBody>
+                    <a:bodyPr>
+                      <a:noAutofit/>
+                    </a:bodyPr>
+                    <a:lstStyle/>
+                    <a:p>
+                      <a:r>
+                        <a:rPr sz="1875" b="0">
+                          <a:solidFill>
+                            <a:srgbClr val="102A30"/>
+                          </a:solidFill>
+                          <a:latin typeface="Helvetica Neue"/>
+                          <a:ea typeface="Helvetica Neue"/>
+                          <a:cs typeface="Helvetica Neue"/>
+                        </a:rPr>
+                        <a:t>Ярослав / М2</a:t>
+                      </a:r>
+                    </a:p>
+                  </a:txBody>
+                  <a:tcPr marL="91440" marR="91440" marT="45720" marB="45720">
+                    <a:solidFill>
+                      <a:srgbClr val="FFFFFF"/>
+                    </a:solidFill>
+                  </a:tcPr>
+                </a:tc>
+                <a:tc>
+                  <a:txBody>
+                    <a:bodyPr>
+                      <a:noAutofit/>
+                    </a:bodyPr>
+                    <a:lstStyle/>
+                    <a:p>
+                      <a:r>
+                        <a:rPr sz="1875" b="0">
+                          <a:solidFill>
+                            <a:srgbClr val="102A30"/>
+                          </a:solidFill>
+                          <a:latin typeface="Helvetica Neue"/>
+                          <a:ea typeface="Helvetica Neue"/>
+                          <a:cs typeface="Helvetica Neue"/>
+                        </a:rPr>
+                        <a:t>Ввод, вывод</a:t>
+                      </a:r>
+                    </a:p>
+                    <a:p>
+                      <a:r>
+                        <a:rPr sz="1875" b="0">
+                          <a:solidFill>
+                            <a:srgbClr val="102A30"/>
+                          </a:solidFill>
+                          <a:latin typeface="Helvetica Neue"/>
+                          <a:ea typeface="Helvetica Neue"/>
+                          <a:cs typeface="Helvetica Neue"/>
+                        </a:rPr>
+                        <a:t>и CSRF</a:t>
+                      </a:r>
+                    </a:p>
+                  </a:txBody>
+                  <a:tcPr marL="91440" marR="91440" marT="45720" marB="45720">
+                    <a:solidFill>
+                      <a:srgbClr val="FFFFFF"/>
+                    </a:solidFill>
+                  </a:tcPr>
+                </a:tc>
+                <a:tc>
+                  <a:txBody>
+                    <a:bodyPr>
+                      <a:noAutofit/>
+                    </a:bodyPr>
+                    <a:lstStyle/>
+                    <a:p>
+                      <a:r>
+                        <a:rPr sz="1875" b="0">
+                          <a:solidFill>
+                            <a:srgbClr val="102A30"/>
+                          </a:solidFill>
+                          <a:latin typeface="Helvetica Neue"/>
+                          <a:ea typeface="Helvetica Neue"/>
+                          <a:cs typeface="Helvetica Neue"/>
+                        </a:rPr>
+                        <a:t>PW.8</a:t>
+                      </a:r>
+                    </a:p>
+                    <a:p>
+                      <a:r>
+                        <a:rPr sz="1875" b="0">
+                          <a:solidFill>
+                            <a:srgbClr val="102A30"/>
+                          </a:solidFill>
+                          <a:latin typeface="Helvetica Neue"/>
+                          <a:ea typeface="Helvetica Neue"/>
+                          <a:cs typeface="Helvetica Neue"/>
+                        </a:rPr>
+                        <a:t>ASVS V1–V3, V7</a:t>
+                      </a:r>
+                    </a:p>
+                  </a:txBody>
+                  <a:tcPr marL="91440" marR="91440" marT="45720" marB="45720">
+                    <a:solidFill>
+                      <a:srgbClr val="FFFFFF"/>
+                    </a:solidFill>
+                  </a:tcPr>
+                </a:tc>
+                <a:tc>
+                  <a:txBody>
+                    <a:bodyPr>
+                      <a:noAutofit/>
+                    </a:bodyPr>
+                    <a:lstStyle/>
+                    <a:p>
+                      <a:r>
+                        <a:rPr sz="1875" b="0">
+                          <a:solidFill>
+                            <a:srgbClr val="102A30"/>
+                          </a:solidFill>
+                          <a:latin typeface="Helvetica Neue"/>
+                          <a:ea typeface="Helvetica Neue"/>
+                          <a:cs typeface="Helvetica Neue"/>
+                        </a:rPr>
+                        <a:t>Роман:</a:t>
+                      </a:r>
+                    </a:p>
+                    <a:p>
+                      <a:r>
+                        <a:rPr sz="1875" b="0">
+                          <a:solidFill>
+                            <a:srgbClr val="102A30"/>
+                          </a:solidFill>
+                          <a:latin typeface="Helvetica Neue"/>
+                          <a:ea typeface="Helvetica Neue"/>
+                          <a:cs typeface="Helvetica Neue"/>
+                        </a:rPr>
+                        <a:t>повтор сценария</a:t>
+                      </a:r>
+                    </a:p>
+                  </a:txBody>
+                  <a:tcPr marL="91440" marR="91440" marT="45720" marB="45720">
+                    <a:solidFill>
+                      <a:srgbClr val="FFFFFF"/>
+                    </a:solidFill>
+                  </a:tcPr>
+                </a:tc>
+              </a:tr>
+              <a:tr h="723900">
+                <a:tc>
+                  <a:txBody>
+                    <a:bodyPr>
+                      <a:noAutofit/>
+                    </a:bodyPr>
+                    <a:lstStyle/>
+                    <a:p>
+                      <a:r>
+                        <a:rPr sz="1875" b="0">
+                          <a:solidFill>
+                            <a:srgbClr val="102A30"/>
+                          </a:solidFill>
+                          <a:latin typeface="Helvetica Neue"/>
+                          <a:ea typeface="Helvetica Neue"/>
+                          <a:cs typeface="Helvetica Neue"/>
+                        </a:rPr>
+                        <a:t>Ярослав / М3</a:t>
+                      </a:r>
+                    </a:p>
+                  </a:txBody>
+                  <a:tcPr marL="91440" marR="91440" marT="45720" marB="45720">
+                    <a:solidFill>
+                      <a:srgbClr val="F7F6F1"/>
+                    </a:solidFill>
+                  </a:tcPr>
+                </a:tc>
+                <a:tc>
+                  <a:txBody>
+                    <a:bodyPr>
+                      <a:noAutofit/>
+                    </a:bodyPr>
+                    <a:lstStyle/>
+                    <a:p>
+                      <a:r>
+                        <a:rPr sz="1875" b="0">
+                          <a:solidFill>
+                            <a:srgbClr val="102A30"/>
+                          </a:solidFill>
+                          <a:latin typeface="Helvetica Neue"/>
+                          <a:ea typeface="Helvetica Neue"/>
+                          <a:cs typeface="Helvetica Neue"/>
+                        </a:rPr>
+                        <a:t>Установка и запуск</a:t>
+                      </a:r>
+                    </a:p>
+                    <a:p>
+                      <a:r>
+                        <a:rPr sz="1875" b="0">
+                          <a:solidFill>
+                            <a:srgbClr val="102A30"/>
+                          </a:solidFill>
+                          <a:latin typeface="Helvetica Neue"/>
+                          <a:ea typeface="Helvetica Neue"/>
+                          <a:cs typeface="Helvetica Neue"/>
+                        </a:rPr>
+                        <a:t>из архива</a:t>
+                      </a:r>
+                    </a:p>
+                  </a:txBody>
+                  <a:tcPr marL="91440" marR="91440" marT="45720" marB="45720">
+                    <a:solidFill>
+                      <a:srgbClr val="F7F6F1"/>
+                    </a:solidFill>
+                  </a:tcPr>
+                </a:tc>
+                <a:tc>
+                  <a:txBody>
+                    <a:bodyPr>
+                      <a:noAutofit/>
+                    </a:bodyPr>
+                    <a:lstStyle/>
+                    <a:p>
+                      <a:r>
+                        <a:rPr sz="1875" b="0">
+                          <a:solidFill>
+                            <a:srgbClr val="102A30"/>
+                          </a:solidFill>
+                          <a:latin typeface="Helvetica Neue"/>
+                          <a:ea typeface="Helvetica Neue"/>
+                          <a:cs typeface="Helvetica Neue"/>
+                        </a:rPr>
+                        <a:t>PS.3.1</a:t>
+                      </a:r>
+                    </a:p>
+                  </a:txBody>
+                  <a:tcPr marL="91440" marR="91440" marT="45720" marB="45720">
+                    <a:solidFill>
+                      <a:srgbClr val="F7F6F1"/>
+                    </a:solidFill>
+                  </a:tcPr>
+                </a:tc>
+                <a:tc>
+                  <a:txBody>
+                    <a:bodyPr>
+                      <a:noAutofit/>
+                    </a:bodyPr>
+                    <a:lstStyle/>
+                    <a:p>
+                      <a:r>
+                        <a:rPr sz="1875" b="0">
+                          <a:solidFill>
+                            <a:srgbClr val="102A30"/>
+                          </a:solidFill>
+                          <a:latin typeface="Helvetica Neue"/>
+                          <a:ea typeface="Helvetica Neue"/>
+                          <a:cs typeface="Helvetica Neue"/>
+                        </a:rPr>
+                        <a:t>Роман:</a:t>
+                      </a:r>
+                    </a:p>
+                    <a:p>
+                      <a:r>
+                        <a:rPr sz="1875" b="0">
+                          <a:solidFill>
+                            <a:srgbClr val="102A30"/>
+                          </a:solidFill>
+                          <a:latin typeface="Helvetica Neue"/>
+                          <a:ea typeface="Helvetica Neue"/>
+                          <a:cs typeface="Helvetica Neue"/>
+                        </a:rPr>
+                        <a:t>сверка результата</a:t>
+                      </a:r>
+                    </a:p>
+                  </a:txBody>
+                  <a:tcPr marL="91440" marR="91440" marT="45720" marB="45720">
+                    <a:solidFill>
+                      <a:srgbClr val="F7F6F1"/>
+                    </a:solidFill>
+                  </a:tcPr>
+                </a:tc>
+              </a:tr>
+            </a:tbl>
+          </a:graphicData>
+        </a:graphic>
+      </p:graphicFrame>
+    </p:spTree>
+    <p:extLst>
+      <p:ext uri="{BB962C8B-B14F-4D97-AF65-F5344CB8AC3E}">
+        <p14:creationId xmlns:p14="http://schemas.microsoft.com/office/powerpoint/2010/main" val="1993845445"/>
+      </p:ext>
+    </p:extLst>
+  </p:cSld>
+</p:sld>
+</file>
+
+<file path=ppt/slides/slide8.xml><?xml version="1.0" encoding="utf-8"?>
+<p:sld xmlns:p="http://schemas.openxmlformats.org/presentationml/2006/main">
+  <p:cSld>
+    <p:bg>
+      <p:bgPr>
+        <a:solidFill xmlns:a="http://schemas.openxmlformats.org/drawingml/2006/main">
+          <a:srgbClr val="F7F6F1"/>
+        </a:solidFill>
+      </p:bgPr>
+    </p:bg>
+    <p:spTree>
+      <p:nvGrpSpPr>
+        <p:cNvPr id="1" name=""/>
+        <p:cNvGrpSpPr/>
+        <p:nvPr/>
+      </p:nvGrpSpPr>
+      <p:grpSpPr>
+        <a:xfrm xmlns:a="http://schemas.openxmlformats.org/drawingml/2006/main"/>
+      </p:grpSpPr>
+      <p:sp>
+        <p:nvSpPr>
+          <p:cNvPr id="6" name="">
+            <a:extLst xmlns:a="http://schemas.openxmlformats.org/drawingml/2006/main">
+              <a:ext uri="{FF2B5EF4-FFF2-40B4-BE49-F238E27FC236}">
+                <a16:creationId xmlns:a16="http://schemas.microsoft.com/office/drawing/2014/main" id="{AF886ED6-BDFE-48A6-98B9-433AE990CBA9}"/>
+              </a:ext>
+            </a:extLst>
+          </p:cNvPr>
+          <p:cNvSpPr>
+            <a:spLocks xmlns:a="http://schemas.openxmlformats.org/drawingml/2006/main" noGrp="1"/>
+          </p:cNvSpPr>
+          <p:nvPr/>
+        </p:nvSpPr>
+        <p:spPr>
+          <a:xfrm xmlns:a="http://schemas.openxmlformats.org/drawingml/2006/main">
+            <a:off x="609600" y="304800"/>
+            <a:ext cx="10763250" cy="266700"/>
+          </a:xfrm>
+          <a:prstGeom xmlns:a="http://schemas.openxmlformats.org/drawingml/2006/main" prst="rect">
+            <a:avLst/>
+          </a:prstGeom>
+          <a:noFill xmlns:a="http://schemas.openxmlformats.org/drawingml/2006/main"/>
+          <a:ln xmlns:a="http://schemas.openxmlformats.org/drawingml/2006/main" w="0">
+            <a:noFill/>
+          </a:ln>
+        </p:spPr>
+        <p:txBody>
+          <a:bodyPr xmlns:a="http://schemas.openxmlformats.org/drawingml/2006/main">
+            <a:noAutofit/>
+          </a:bodyPr>
+          <a:lstStyle xmlns:a="http://schemas.openxmlformats.org/drawingml/2006/main"/>
+          <a:p xmlns:a="http://schemas.openxmlformats.org/drawingml/2006/main">
+            <a:pPr>
+              <a:buNone/>
+              <a:defRPr sz="1350" b="1">
+                <a:solidFill>
+                  <a:srgbClr val="26756C"/>
+                </a:solidFill>
+                <a:latin typeface="Helvetica Neue"/>
+                <a:ea typeface="Helvetica Neue"/>
+                <a:cs typeface="Helvetica Neue"/>
+              </a:defRPr>
+            </a:pPr>
+            <a:r>
+              <a:rPr sz="1350" b="1">
+                <a:solidFill>
+                  <a:srgbClr val="26756C"/>
+                </a:solidFill>
+                <a:latin typeface="Helvetica Neue"/>
+                <a:ea typeface="Helvetica Neue"/>
+                <a:cs typeface="Helvetica Neue"/>
+              </a:rPr>
+              <a:t>ПРИЛОЖЕНИЕ / ДЛЯ ВОПРОСОВ</a:t>
+            </a:r>
+          </a:p>
+        </p:txBody>
+      </p:sp>
+      <p:sp>
+        <p:nvSpPr>
+          <p:cNvPr id="2" name="">
+            <a:extLst xmlns:a="http://schemas.openxmlformats.org/drawingml/2006/main">
+              <a:ext uri="{FF2B5EF4-FFF2-40B4-BE49-F238E27FC236}">
+                <a16:creationId xmlns:a16="http://schemas.microsoft.com/office/drawing/2014/main" id="{E406CD5F-ECAB-4536-B31D-15A74C28D6D6}"/>
+              </a:ext>
+            </a:extLst>
+          </p:cNvPr>
+          <p:cNvSpPr>
+            <a:spLocks xmlns:a="http://schemas.openxmlformats.org/drawingml/2006/main" noGrp="1"/>
+          </p:cNvSpPr>
+          <p:nvPr/>
+        </p:nvSpPr>
+        <p:spPr>
+          <a:xfrm xmlns:a="http://schemas.openxmlformats.org/drawingml/2006/main">
+            <a:off x="609600" y="838200"/>
+            <a:ext cx="10972800" cy="990600"/>
+          </a:xfrm>
+          <a:prstGeom xmlns:a="http://schemas.openxmlformats.org/drawingml/2006/main" prst="rect">
+            <a:avLst/>
+          </a:prstGeom>
+          <a:noFill xmlns:a="http://schemas.openxmlformats.org/drawingml/2006/main"/>
+          <a:ln xmlns:a="http://schemas.openxmlformats.org/drawingml/2006/main" w="0">
+            <a:noFill/>
+          </a:ln>
+        </p:spPr>
+        <p:txBody>
+          <a:bodyPr xmlns:a="http://schemas.openxmlformats.org/drawingml/2006/main">
+            <a:noAutofit/>
+          </a:bodyPr>
+          <a:lstStyle xmlns:a="http://schemas.openxmlformats.org/drawingml/2006/main"/>
+          <a:p xmlns:a="http://schemas.openxmlformats.org/drawingml/2006/main">
+            <a:pPr>
+              <a:buNone/>
+              <a:defRPr sz="3300" b="1">
+                <a:solidFill>
+                  <a:srgbClr val="102A30"/>
+                </a:solidFill>
+                <a:latin typeface="Helvetica Neue"/>
+                <a:ea typeface="Helvetica Neue"/>
+                <a:cs typeface="Helvetica Neue"/>
+              </a:defRPr>
+            </a:pPr>
+            <a:r>
+              <a:rPr sz="3300" b="1">
+                <a:solidFill>
+                  <a:srgbClr val="102A30"/>
+                </a:solidFill>
+                <a:latin typeface="Helvetica Neue"/>
+                <a:ea typeface="Helvetica Neue"/>
+                <a:cs typeface="Helvetica Neue"/>
+              </a:rPr>
+              <a:t>Семь адаптированных правил SSDF</a:t>
+            </a:r>
+          </a:p>
+        </p:txBody>
+      </p:sp>
+      <p:sp>
+        <p:nvSpPr>
+          <p:cNvPr id="3" name="">
+            <a:extLst xmlns:a="http://schemas.openxmlformats.org/drawingml/2006/main">
+              <a:ext uri="{FF2B5EF4-FFF2-40B4-BE49-F238E27FC236}">
+                <a16:creationId xmlns:a16="http://schemas.microsoft.com/office/drawing/2014/main" id="{2247638A-5B28-4A13-BA18-C1210C16A40F}"/>
+              </a:ext>
+            </a:extLst>
+          </p:cNvPr>
+          <p:cNvSpPr>
+            <a:spLocks xmlns:a="http://schemas.openxmlformats.org/drawingml/2006/main" noGrp="1"/>
+          </p:cNvSpPr>
+          <p:nvPr/>
+        </p:nvSpPr>
+        <p:spPr>
+          <a:xfrm xmlns:a="http://schemas.openxmlformats.org/drawingml/2006/main">
+            <a:off x="609600" y="6372225"/>
+            <a:ext cx="10001250" cy="247650"/>
+          </a:xfrm>
+          <a:prstGeom xmlns:a="http://schemas.openxmlformats.org/drawingml/2006/main" prst="rect">
+            <a:avLst/>
+          </a:prstGeom>
+          <a:noFill xmlns:a="http://schemas.openxmlformats.org/drawingml/2006/main"/>
+          <a:ln xmlns:a="http://schemas.openxmlformats.org/drawingml/2006/main" w="0">
+            <a:noFill/>
+          </a:ln>
+        </p:spPr>
+        <p:txBody>
+          <a:bodyPr xmlns:a="http://schemas.openxmlformats.org/drawingml/2006/main">
+            <a:noAutofit/>
+          </a:bodyPr>
+          <a:lstStyle xmlns:a="http://schemas.openxmlformats.org/drawingml/2006/main"/>
+          <a:p xmlns:a="http://schemas.openxmlformats.org/drawingml/2006/main">
+            <a:pPr>
+              <a:buNone/>
+              <a:defRPr sz="1350" b="0">
+                <a:solidFill>
+                  <a:srgbClr val="59686B"/>
+                </a:solidFill>
+                <a:latin typeface="Helvetica Neue"/>
+                <a:ea typeface="Helvetica Neue"/>
+                <a:cs typeface="Helvetica Neue"/>
+              </a:defRPr>
+            </a:pPr>
+            <a:r>
+              <a:rPr sz="1350" b="0">
+                <a:solidFill>
+                  <a:srgbClr val="59686B"/>
+                </a:solidFill>
+                <a:latin typeface="Helvetica Neue"/>
+                <a:ea typeface="Helvetica Neue"/>
+                <a:cs typeface="Helvetica Neue"/>
+              </a:rPr>
+              <a:t>ЯвкаИБ / TaskFlow / ЭК1</a:t>
+            </a:r>
+          </a:p>
+        </p:txBody>
+      </p:sp>
+      <p:sp>
+        <p:nvSpPr>
+          <p:cNvPr id="4" name="">
+            <a:extLst xmlns:a="http://schemas.openxmlformats.org/drawingml/2006/main">
+              <a:ext uri="{FF2B5EF4-FFF2-40B4-BE49-F238E27FC236}">
+                <a16:creationId xmlns:a16="http://schemas.microsoft.com/office/drawing/2014/main" id="{8DC3F3C9-9753-422C-84F6-3AED8A53B3BF}"/>
+              </a:ext>
+            </a:extLst>
+          </p:cNvPr>
+          <p:cNvSpPr>
+            <a:spLocks xmlns:a="http://schemas.openxmlformats.org/drawingml/2006/main" noGrp="1"/>
+          </p:cNvSpPr>
+          <p:nvPr/>
+        </p:nvSpPr>
+        <p:spPr>
+          <a:xfrm xmlns:a="http://schemas.openxmlformats.org/drawingml/2006/main">
+            <a:off x="11029950" y="6324600"/>
+            <a:ext cx="619125" cy="333375"/>
+          </a:xfrm>
+          <a:prstGeom xmlns:a="http://schemas.openxmlformats.org/drawingml/2006/main" prst="rect">
+            <a:avLst/>
+          </a:prstGeom>
+          <a:noFill xmlns:a="http://schemas.openxmlformats.org/drawingml/2006/main"/>
+          <a:ln xmlns:a="http://schemas.openxmlformats.org/drawingml/2006/main" w="0">
+            <a:noFill/>
+          </a:ln>
+        </p:spPr>
+        <p:txBody>
+          <a:bodyPr xmlns:a="http://schemas.openxmlformats.org/drawingml/2006/main">
+            <a:noAutofit/>
+          </a:bodyPr>
+          <a:lstStyle xmlns:a="http://schemas.openxmlformats.org/drawingml/2006/main"/>
+          <a:p xmlns:a="http://schemas.openxmlformats.org/drawingml/2006/main">
+            <a:pPr>
+              <a:buNone/>
+              <a:defRPr sz="1800" b="1">
+                <a:solidFill>
+                  <a:srgbClr val="26756C"/>
+                </a:solidFill>
+                <a:latin typeface="Helvetica Neue"/>
+                <a:ea typeface="Helvetica Neue"/>
+                <a:cs typeface="Helvetica Neue"/>
+              </a:defRPr>
+            </a:pPr>
+            <a:r>
+              <a:rPr sz="1800" b="1">
+                <a:solidFill>
+                  <a:srgbClr val="26756C"/>
+                </a:solidFill>
+                <a:latin typeface="Helvetica Neue"/>
+                <a:ea typeface="Helvetica Neue"/>
+                <a:cs typeface="Helvetica Neue"/>
+              </a:rPr>
+              <a:t>08</a:t>
+            </a:r>
+          </a:p>
+        </p:txBody>
+      </p:sp>
+      <p:graphicFrame>
+        <p:nvGraphicFramePr>
+          <p:cNvPr id="12" name=""/>
+          <p:cNvGraphicFramePr/>
+          <p:nvPr/>
+        </p:nvGraphicFramePr>
+        <p:xfrm>
+          <a:off xmlns:a="http://schemas.openxmlformats.org/drawingml/2006/main" x="609600" y="1990725"/>
+          <a:ext xmlns:a="http://schemas.openxmlformats.org/drawingml/2006/main" cx="10972800" cy="4105275"/>
+        </p:xfrm>
+        <a:graphic xmlns:a="http://schemas.openxmlformats.org/drawingml/2006/main">
+          <a:graphicData uri="http://schemas.openxmlformats.org/drawingml/2006/table">
+            <a:tbl>
+              <a:tblPr/>
+              <a:tblGrid>
+                <a:gridCol w="3333750"/>
+                <a:gridCol w="7639050"/>
+              </a:tblGrid>
+              <a:tr h="513159">
+                <a:tc>
+                  <a:txBody>
+                    <a:bodyPr>
+                      <a:noAutofit/>
+                    </a:bodyPr>
+                    <a:lstStyle/>
+                    <a:p>
+                      <a:r>
+                        <a:rPr sz="1800" b="1">
+                          <a:solidFill>
+                            <a:srgbClr val="FFFFFF"/>
+                          </a:solidFill>
+                          <a:latin typeface="Helvetica Neue"/>
+                          <a:ea typeface="Helvetica Neue"/>
+                          <a:cs typeface="Helvetica Neue"/>
+                        </a:rPr>
+                        <a:t>Положение SSDF 1.1</a:t>
+                      </a:r>
+                    </a:p>
+                  </a:txBody>
+                  <a:tcPr marL="91440" marR="91440" marT="45720" marB="45720">
+                    <a:solidFill>
+                      <a:srgbClr val="102A30"/>
+                    </a:solidFill>
+                  </a:tcPr>
+                </a:tc>
+                <a:tc>
+                  <a:txBody>
+                    <a:bodyPr>
+                      <a:noAutofit/>
+                    </a:bodyPr>
+                    <a:lstStyle/>
+                    <a:p>
+                      <a:r>
+                        <a:rPr sz="1800" b="1">
+                          <a:solidFill>
+                            <a:srgbClr val="FFFFFF"/>
+                          </a:solidFill>
+                          <a:latin typeface="Helvetica Neue"/>
+                          <a:ea typeface="Helvetica Neue"/>
+                          <a:cs typeface="Helvetica Neue"/>
+                        </a:rPr>
+                        <a:t>Правило TaskFlow</a:t>
+                      </a:r>
+                    </a:p>
+                  </a:txBody>
+                  <a:tcPr marL="91440" marR="91440" marT="45720" marB="45720">
+                    <a:solidFill>
+                      <a:srgbClr val="102A30"/>
+                    </a:solidFill>
+                  </a:tcPr>
+                </a:tc>
+              </a:tr>
+              <a:tr h="513159">
+                <a:tc>
+                  <a:txBody>
+                    <a:bodyPr>
+                      <a:noAutofit/>
+                    </a:bodyPr>
+                    <a:lstStyle/>
+                    <a:p>
+                      <a:r>
+                        <a:rPr sz="1800" b="0">
+                          <a:solidFill>
+                            <a:srgbClr val="102A30"/>
+                          </a:solidFill>
+                          <a:latin typeface="Helvetica Neue"/>
+                          <a:ea typeface="Helvetica Neue"/>
+                          <a:cs typeface="Helvetica Neue"/>
+                        </a:rPr>
+                        <a:t>PO.1.2</a:t>
+                      </a:r>
+                    </a:p>
+                  </a:txBody>
+                  <a:tcPr marL="91440" marR="91440" marT="45720" marB="45720">
+                    <a:solidFill>
+                      <a:srgbClr val="FFFFFF"/>
+                    </a:solidFill>
+                  </a:tcPr>
+                </a:tc>
+                <a:tc>
+                  <a:txBody>
+                    <a:bodyPr>
+                      <a:noAutofit/>
+                    </a:bodyPr>
+                    <a:lstStyle/>
+                    <a:p>
+                      <a:r>
+                        <a:rPr sz="1800" b="0">
+                          <a:solidFill>
+                            <a:srgbClr val="102A30"/>
+                          </a:solidFill>
+                          <a:latin typeface="Helvetica Neue"/>
+                          <a:ea typeface="Helvetica Neue"/>
+                          <a:cs typeface="Helvetica Neue"/>
+                        </a:rPr>
+                        <a:t>Записываем права и запрещённые сценарии</a:t>
+                      </a:r>
+                    </a:p>
+                  </a:txBody>
+                  <a:tcPr marL="91440" marR="91440" marT="45720" marB="45720">
+                    <a:solidFill>
+                      <a:srgbClr val="FFFFFF"/>
+                    </a:solidFill>
+                  </a:tcPr>
+                </a:tc>
+              </a:tr>
+              <a:tr h="513159">
+                <a:tc>
+                  <a:txBody>
+                    <a:bodyPr>
+                      <a:noAutofit/>
+                    </a:bodyPr>
+                    <a:lstStyle/>
+                    <a:p>
+                      <a:r>
+                        <a:rPr sz="1800" b="0">
+                          <a:solidFill>
+                            <a:srgbClr val="102A30"/>
+                          </a:solidFill>
+                          <a:latin typeface="Helvetica Neue"/>
+                          <a:ea typeface="Helvetica Neue"/>
+                          <a:cs typeface="Helvetica Neue"/>
+                        </a:rPr>
+                        <a:t>PO.2.1</a:t>
+                      </a:r>
+                    </a:p>
+                  </a:txBody>
+                  <a:tcPr marL="91440" marR="91440" marT="45720" marB="45720">
+                    <a:solidFill>
+                      <a:srgbClr val="F7F6F1"/>
+                    </a:solidFill>
+                  </a:tcPr>
+                </a:tc>
+                <a:tc>
+                  <a:txBody>
+                    <a:bodyPr>
+                      <a:noAutofit/>
+                    </a:bodyPr>
+                    <a:lstStyle/>
+                    <a:p>
+                      <a:r>
+                        <a:rPr sz="1800" b="0">
+                          <a:solidFill>
+                            <a:srgbClr val="102A30"/>
+                          </a:solidFill>
+                          <a:latin typeface="Helvetica Neue"/>
+                          <a:ea typeface="Helvetica Neue"/>
+                          <a:cs typeface="Helvetica Neue"/>
+                        </a:rPr>
+                        <a:t>Назначаем автора и другого проверяющего</a:t>
+                      </a:r>
+                    </a:p>
+                  </a:txBody>
+                  <a:tcPr marL="91440" marR="91440" marT="45720" marB="45720">
+                    <a:solidFill>
+                      <a:srgbClr val="F7F6F1"/>
+                    </a:solidFill>
+                  </a:tcPr>
+                </a:tc>
+              </a:tr>
+              <a:tr h="513159">
+                <a:tc>
+                  <a:txBody>
+                    <a:bodyPr>
+                      <a:noAutofit/>
+                    </a:bodyPr>
+                    <a:lstStyle/>
+                    <a:p>
+                      <a:r>
+                        <a:rPr sz="1800" b="0">
+                          <a:solidFill>
+                            <a:srgbClr val="102A30"/>
+                          </a:solidFill>
+                          <a:latin typeface="Helvetica Neue"/>
+                          <a:ea typeface="Helvetica Neue"/>
+                          <a:cs typeface="Helvetica Neue"/>
+                        </a:rPr>
+                        <a:t>PS.1.1</a:t>
+                      </a:r>
+                    </a:p>
+                  </a:txBody>
+                  <a:tcPr marL="91440" marR="91440" marT="45720" marB="45720">
+                    <a:solidFill>
+                      <a:srgbClr val="FFFFFF"/>
+                    </a:solidFill>
+                  </a:tcPr>
+                </a:tc>
+                <a:tc>
+                  <a:txBody>
+                    <a:bodyPr>
+                      <a:noAutofit/>
+                    </a:bodyPr>
+                    <a:lstStyle/>
+                    <a:p>
+                      <a:r>
+                        <a:rPr sz="1800" b="0">
+                          <a:solidFill>
+                            <a:srgbClr val="102A30"/>
+                          </a:solidFill>
+                          <a:latin typeface="Helvetica Neue"/>
+                          <a:ea typeface="Helvetica Neue"/>
+                          <a:cs typeface="Helvetica Neue"/>
+                        </a:rPr>
+                        <a:t>Ограничиваем доступ к коду, защищаем секреты</a:t>
+                      </a:r>
+                    </a:p>
+                  </a:txBody>
+                  <a:tcPr marL="91440" marR="91440" marT="45720" marB="45720">
+                    <a:solidFill>
+                      <a:srgbClr val="FFFFFF"/>
+                    </a:solidFill>
+                  </a:tcPr>
+                </a:tc>
+              </a:tr>
+              <a:tr h="513159">
+                <a:tc>
+                  <a:txBody>
+                    <a:bodyPr>
+                      <a:noAutofit/>
+                    </a:bodyPr>
+                    <a:lstStyle/>
+                    <a:p>
+                      <a:r>
+                        <a:rPr sz="1800" b="0">
+                          <a:solidFill>
+                            <a:srgbClr val="102A30"/>
+                          </a:solidFill>
+                          <a:latin typeface="Helvetica Neue"/>
+                          <a:ea typeface="Helvetica Neue"/>
+                          <a:cs typeface="Helvetica Neue"/>
+                        </a:rPr>
+                        <a:t>PW.7.1–7.2</a:t>
+                      </a:r>
+                    </a:p>
+                  </a:txBody>
+                  <a:tcPr marL="91440" marR="91440" marT="45720" marB="45720">
+                    <a:solidFill>
+                      <a:srgbClr val="F7F6F1"/>
+                    </a:solidFill>
+                  </a:tcPr>
+                </a:tc>
+                <a:tc>
+                  <a:txBody>
+                    <a:bodyPr>
+                      <a:noAutofit/>
+                    </a:bodyPr>
+                    <a:lstStyle/>
+                    <a:p>
+                      <a:r>
+                        <a:rPr sz="1800" b="0">
+                          <a:solidFill>
+                            <a:srgbClr val="102A30"/>
+                          </a:solidFill>
+                          <a:latin typeface="Helvetica Neue"/>
+                          <a:ea typeface="Helvetica Neue"/>
+                          <a:cs typeface="Helvetica Neue"/>
+                        </a:rPr>
+                        <a:t>Партнёр читает значимый код</a:t>
+                      </a:r>
+                    </a:p>
+                  </a:txBody>
+                  <a:tcPr marL="91440" marR="91440" marT="45720" marB="45720">
+                    <a:solidFill>
+                      <a:srgbClr val="F7F6F1"/>
+                    </a:solidFill>
+                  </a:tcPr>
+                </a:tc>
+              </a:tr>
+              <a:tr h="513159">
+                <a:tc>
+                  <a:txBody>
+                    <a:bodyPr>
+                      <a:noAutofit/>
+                    </a:bodyPr>
+                    <a:lstStyle/>
+                    <a:p>
+                      <a:r>
+                        <a:rPr sz="1800" b="0">
+                          <a:solidFill>
+                            <a:srgbClr val="102A30"/>
+                          </a:solidFill>
+                          <a:latin typeface="Helvetica Neue"/>
+                          <a:ea typeface="Helvetica Neue"/>
+                          <a:cs typeface="Helvetica Neue"/>
+                        </a:rPr>
+                        <a:t>PW.8.1–8.2</a:t>
+                      </a:r>
+                    </a:p>
+                  </a:txBody>
+                  <a:tcPr marL="91440" marR="91440" marT="45720" marB="45720">
+                    <a:solidFill>
+                      <a:srgbClr val="FFFFFF"/>
+                    </a:solidFill>
+                  </a:tcPr>
+                </a:tc>
+                <a:tc>
+                  <a:txBody>
+                    <a:bodyPr>
+                      <a:noAutofit/>
+                    </a:bodyPr>
+                    <a:lstStyle/>
+                    <a:p>
+                      <a:r>
+                        <a:rPr sz="1800" b="0">
+                          <a:solidFill>
+                            <a:srgbClr val="102A30"/>
+                          </a:solidFill>
+                          <a:latin typeface="Helvetica Neue"/>
+                          <a:ea typeface="Helvetica Neue"/>
+                          <a:cs typeface="Helvetica Neue"/>
+                        </a:rPr>
+                        <a:t>Проверяем разрешённые и запрещённые действия</a:t>
+                      </a:r>
+                    </a:p>
+                  </a:txBody>
+                  <a:tcPr marL="91440" marR="91440" marT="45720" marB="45720">
+                    <a:solidFill>
+                      <a:srgbClr val="FFFFFF"/>
+                    </a:solidFill>
+                  </a:tcPr>
+                </a:tc>
+              </a:tr>
+              <a:tr h="513159">
+                <a:tc>
+                  <a:txBody>
+                    <a:bodyPr>
+                      <a:noAutofit/>
+                    </a:bodyPr>
+                    <a:lstStyle/>
+                    <a:p>
+                      <a:r>
+                        <a:rPr sz="1800" b="0">
+                          <a:solidFill>
+                            <a:srgbClr val="102A30"/>
+                          </a:solidFill>
+                          <a:latin typeface="Helvetica Neue"/>
+                          <a:ea typeface="Helvetica Neue"/>
+                          <a:cs typeface="Helvetica Neue"/>
+                        </a:rPr>
+                        <a:t>PS.3.1</a:t>
+                      </a:r>
+                    </a:p>
+                  </a:txBody>
+                  <a:tcPr marL="91440" marR="91440" marT="45720" marB="45720">
+                    <a:solidFill>
+                      <a:srgbClr val="F7F6F1"/>
+                    </a:solidFill>
+                  </a:tcPr>
+                </a:tc>
+                <a:tc>
+                  <a:txBody>
+                    <a:bodyPr>
+                      <a:noAutofit/>
+                    </a:bodyPr>
+                    <a:lstStyle/>
+                    <a:p>
+                      <a:r>
+                        <a:rPr sz="1800" b="0">
+                          <a:solidFill>
+                            <a:srgbClr val="102A30"/>
+                          </a:solidFill>
+                          <a:latin typeface="Helvetica Neue"/>
+                          <a:ea typeface="Helvetica Neue"/>
+                          <a:cs typeface="Helvetica Neue"/>
+                        </a:rPr>
+                        <a:t>Сохраняем выпуск, архив и данные о целостности</a:t>
+                      </a:r>
+                    </a:p>
+                  </a:txBody>
+                  <a:tcPr marL="91440" marR="91440" marT="45720" marB="45720">
+                    <a:solidFill>
+                      <a:srgbClr val="F7F6F1"/>
+                    </a:solidFill>
+                  </a:tcPr>
+                </a:tc>
+              </a:tr>
+              <a:tr h="513159">
+                <a:tc>
+                  <a:txBody>
+                    <a:bodyPr>
+                      <a:noAutofit/>
+                    </a:bodyPr>
+                    <a:lstStyle/>
+                    <a:p>
+                      <a:r>
+                        <a:rPr sz="1800" b="0">
+                          <a:solidFill>
+                            <a:srgbClr val="102A30"/>
+                          </a:solidFill>
+                          <a:latin typeface="Helvetica Neue"/>
+                          <a:ea typeface="Helvetica Neue"/>
+                          <a:cs typeface="Helvetica Neue"/>
+                        </a:rPr>
+                        <a:t>RV.2.1–2.2</a:t>
+                      </a:r>
+                    </a:p>
+                  </a:txBody>
+                  <a:tcPr marL="91440" marR="91440" marT="45720" marB="45720">
+                    <a:solidFill>
+                      <a:srgbClr val="FFFFFF"/>
+                    </a:solidFill>
+                  </a:tcPr>
+                </a:tc>
+                <a:tc>
+                  <a:txBody>
+                    <a:bodyPr>
+                      <a:noAutofit/>
+                    </a:bodyPr>
+                    <a:lstStyle/>
+                    <a:p>
+                      <a:r>
+                        <a:rPr sz="1800" b="0">
+                          <a:solidFill>
+                            <a:srgbClr val="102A30"/>
+                          </a:solidFill>
+                          <a:latin typeface="Helvetica Neue"/>
+                          <a:ea typeface="Helvetica Neue"/>
+                          <a:cs typeface="Helvetica Neue"/>
+                        </a:rPr>
+                        <a:t>Оцениваем риск проблемы и выбираем действие</a:t>
                       </a:r>
                     </a:p>
                   </a:txBody>
@@ -7839,7 +8193,7 @@
                 <a:ea typeface="Helvetica Neue"/>
                 <a:cs typeface="Helvetica Neue"/>
               </a:rPr>
-              <a:t>Как использовали ИИ</a:t>
+              <a:t>Использование генеративного ИИ</a:t>
             </a:r>
           </a:p>
         </p:txBody>
@@ -8071,7 +8425,7 @@
                 <a:ea typeface="Helvetica Neue"/>
                 <a:cs typeface="Helvetica Neue"/>
               </a:rPr>
-              <a:t>Помощь с текстом, кодом приложения, тестами и слайдами.</a:t>
+              <a:t>Автоматизация текста, кода MVP, тестов и оформления.</a:t>
             </a:r>
           </a:p>
           <a:p xmlns:a="http://schemas.openxmlformats.org/drawingml/2006/main">
@@ -8119,7 +8473,7 @@
                 <a:ea typeface="Helvetica Neue"/>
                 <a:cs typeface="Helvetica Neue"/>
               </a:rPr>
-              <a:t>Обложка: иллюстрация OpenAI.</a:t>
+              <a:t>Обложка презентации: иллюстрация OpenAI.</a:t>
             </a:r>
           </a:p>
         </p:txBody>
@@ -8235,7 +8589,7 @@
                 <a:ea typeface="Helvetica Neue"/>
                 <a:cs typeface="Helvetica Neue"/>
               </a:rPr>
-              <a:t>Участники выбирают решения и отвечают за них.</a:t>
+              <a:t>Участники выбирают и обосновывают проектные решения.</a:t>
             </a:r>
           </a:p>
           <a:p xmlns:a="http://schemas.openxmlformats.org/drawingml/2006/main">
@@ -8259,7 +8613,7 @@
                 <a:ea typeface="Helvetica Neue"/>
                 <a:cs typeface="Helvetica Neue"/>
               </a:rPr>
-              <a:t>Код проверяет партнёр, выпуск одобряют оба участника.</a:t>
+              <a:t>ИИ не заменяет проверку партнёром и решение о выпуске.</a:t>
             </a:r>
           </a:p>
         </p:txBody>
@@ -8317,7 +8671,7 @@
                 <a:ea typeface="Helvetica Neue"/>
                 <a:cs typeface="Helvetica Neue"/>
               </a:rPr>
-              <a:t>Данные: материалы курса, учебный код и вымышленные примеры.</a:t>
+              <a:t>Данные: материалы курса, учебные исходники и синтетические сценарии.</a:t>
             </a:r>
           </a:p>
         </p:txBody>
